--- a/protected-downloads/praesentation/M11.pptx
+++ b/protected-downloads/praesentation/M11.pptx
@@ -8,13 +8,13 @@
     <p:sldId id="256" r:id="rId7"/>
     <p:sldId id="257" r:id="rId8"/>
     <p:sldId id="258" r:id="rId9"/>
-    <p:sldId id="259" r:id="rId10"/>
-    <p:sldId id="260" r:id="rId11"/>
-    <p:sldId id="261" r:id="rId12"/>
-    <p:sldId id="262" r:id="rId13"/>
-    <p:sldId id="263" r:id="rId14"/>
-    <p:sldId id="264" r:id="rId15"/>
-    <p:sldId id="265" r:id="rId16"/>
+    <p:sldId id="259" r:id="rId11"/>
+    <p:sldId id="260" r:id="rId12"/>
+    <p:sldId id="261" r:id="rId13"/>
+    <p:sldId id="262" r:id="rId14"/>
+    <p:sldId id="263" r:id="rId15"/>
+    <p:sldId id="264" r:id="rId16"/>
+    <p:sldId id="265" r:id="rId17"/>
   </p:sldIdLst>
   <p:sldSz cx="12188952" cy="6858000" type="screen4x3"/>
   <p:notesSz cx="6858000" cy="9144000"/>
@@ -114,6 +114,846 @@
     </a:lvl9pPr>
   </p:defaultTextStyle>
 </p:presentation>
+</file>
+
+<file path=ppt/notesMasters/notesMaster1.xml><?xml version="1.0" encoding="utf-8"?>
+<p:notesMaster xmlns:a="http://schemas.openxmlformats.org/drawingml/2006/main" xmlns:p="http://schemas.openxmlformats.org/presentationml/2006/main" xmlns:r="http://schemas.openxmlformats.org/officeDocument/2006/relationships">
+  <p:cSld>
+    <p:bg>
+      <p:bgRef idx="1001">
+        <a:schemeClr val="bg1"/>
+      </p:bgRef>
+    </p:bg>
+    <p:spTree>
+      <p:nvGrpSpPr>
+        <p:cNvPr id="1" name=""/>
+        <p:cNvGrpSpPr/>
+        <p:nvPr/>
+      </p:nvGrpSpPr>
+      <p:grpSpPr>
+        <a:xfrm>
+          <a:off x="0" y="0"/>
+          <a:ext cx="0" cy="0"/>
+          <a:chOff x="0" y="0"/>
+          <a:chExt cx="0" cy="0"/>
+        </a:xfrm>
+      </p:grpSpPr>
+      <p:sp>
+        <p:nvSpPr>
+          <p:cNvPr id="2" name="Header Placeholder 1"/>
+          <p:cNvSpPr>
+            <a:spLocks noGrp="1"/>
+          </p:cNvSpPr>
+          <p:nvPr>
+            <p:ph type="hdr" sz="quarter"/>
+          </p:nvPr>
+        </p:nvSpPr>
+        <p:spPr>
+          <a:xfrm>
+            <a:off x="0" y="0"/>
+            <a:ext cx="2971800" cy="457200"/>
+          </a:xfrm>
+          <a:prstGeom prst="rect">
+            <a:avLst/>
+          </a:prstGeom>
+        </p:spPr>
+        <p:txBody>
+          <a:bodyPr vert="horz" lIns="91440" tIns="45720" rIns="91440" bIns="45720" rtlCol="0"/>
+          <a:lstStyle>
+            <a:lvl1pPr algn="l">
+              <a:defRPr sz="1200"/>
+            </a:lvl1pPr>
+          </a:lstStyle>
+          <a:p>
+            <a:endParaRPr lang="en-US"/>
+          </a:p>
+        </p:txBody>
+      </p:sp>
+      <p:sp>
+        <p:nvSpPr>
+          <p:cNvPr id="3" name="Date Placeholder 2"/>
+          <p:cNvSpPr>
+            <a:spLocks noGrp="1"/>
+          </p:cNvSpPr>
+          <p:nvPr>
+            <p:ph type="dt" idx="1"/>
+          </p:nvPr>
+        </p:nvSpPr>
+        <p:spPr>
+          <a:xfrm>
+            <a:off x="3884613" y="0"/>
+            <a:ext cx="2971800" cy="457200"/>
+          </a:xfrm>
+          <a:prstGeom prst="rect">
+            <a:avLst/>
+          </a:prstGeom>
+        </p:spPr>
+        <p:txBody>
+          <a:bodyPr vert="horz" lIns="91440" tIns="45720" rIns="91440" bIns="45720" rtlCol="0"/>
+          <a:lstStyle>
+            <a:lvl1pPr algn="r">
+              <a:defRPr sz="1200"/>
+            </a:lvl1pPr>
+          </a:lstStyle>
+          <a:p>
+            <a:fld id="{0F89C1C7-3DCD-1040-A9CF-14679D8B5DDD}" type="datetimeFigureOut">
+              <a:rPr lang="en-US" smtClean="0"/>
+              <a:t>10/17/16</a:t>
+            </a:fld>
+            <a:endParaRPr lang="en-US"/>
+          </a:p>
+        </p:txBody>
+      </p:sp>
+      <p:sp>
+        <p:nvSpPr>
+          <p:cNvPr id="4" name="Slide Image Placeholder 3"/>
+          <p:cNvSpPr>
+            <a:spLocks noGrp="1" noRot="1" noChangeAspect="1"/>
+          </p:cNvSpPr>
+          <p:nvPr>
+            <p:ph type="sldImg" idx="2"/>
+          </p:nvPr>
+        </p:nvSpPr>
+        <p:spPr>
+          <a:xfrm>
+            <a:off x="1143000" y="685800"/>
+            <a:ext cx="4572000" cy="3429000"/>
+          </a:xfrm>
+          <a:prstGeom prst="rect">
+            <a:avLst/>
+          </a:prstGeom>
+          <a:noFill/>
+          <a:ln w="12700">
+            <a:solidFill>
+              <a:prstClr val="black"/>
+            </a:solidFill>
+          </a:ln>
+        </p:spPr>
+        <p:txBody>
+          <a:bodyPr vert="horz" lIns="91440" tIns="45720" rIns="91440" bIns="45720" rtlCol="0" anchor="ctr"/>
+          <a:lstStyle/>
+          <a:p>
+            <a:endParaRPr lang="en-US"/>
+          </a:p>
+        </p:txBody>
+      </p:sp>
+      <p:sp>
+        <p:nvSpPr>
+          <p:cNvPr id="5" name="Notes Placeholder 4"/>
+          <p:cNvSpPr>
+            <a:spLocks noGrp="1"/>
+          </p:cNvSpPr>
+          <p:nvPr>
+            <p:ph type="body" sz="quarter" idx="3"/>
+          </p:nvPr>
+        </p:nvSpPr>
+        <p:spPr>
+          <a:xfrm>
+            <a:off x="685800" y="4343400"/>
+            <a:ext cx="5486400" cy="4114800"/>
+          </a:xfrm>
+          <a:prstGeom prst="rect">
+            <a:avLst/>
+          </a:prstGeom>
+        </p:spPr>
+        <p:txBody>
+          <a:bodyPr vert="horz" lIns="91440" tIns="45720" rIns="91440" bIns="45720" rtlCol="0"/>
+          <a:lstStyle/>
+          <a:p>
+            <a:pPr lvl="0"/>
+            <a:r>
+              <a:rPr lang="en-US" smtClean="0"/>
+              <a:t>Click to edit Master text styles</a:t>
+            </a:r>
+          </a:p>
+          <a:p>
+            <a:pPr lvl="1"/>
+            <a:r>
+              <a:rPr lang="en-US" smtClean="0"/>
+              <a:t>Second level</a:t>
+            </a:r>
+          </a:p>
+          <a:p>
+            <a:pPr lvl="2"/>
+            <a:r>
+              <a:rPr lang="en-US" smtClean="0"/>
+              <a:t>Third level</a:t>
+            </a:r>
+          </a:p>
+          <a:p>
+            <a:pPr lvl="3"/>
+            <a:r>
+              <a:rPr lang="en-US" smtClean="0"/>
+              <a:t>Fourth level</a:t>
+            </a:r>
+          </a:p>
+          <a:p>
+            <a:pPr lvl="4"/>
+            <a:r>
+              <a:rPr lang="en-US" smtClean="0"/>
+              <a:t>Fifth level</a:t>
+            </a:r>
+            <a:endParaRPr lang="en-US"/>
+          </a:p>
+        </p:txBody>
+      </p:sp>
+      <p:sp>
+        <p:nvSpPr>
+          <p:cNvPr id="6" name="Footer Placeholder 5"/>
+          <p:cNvSpPr>
+            <a:spLocks noGrp="1"/>
+          </p:cNvSpPr>
+          <p:nvPr>
+            <p:ph type="ftr" sz="quarter" idx="4"/>
+          </p:nvPr>
+        </p:nvSpPr>
+        <p:spPr>
+          <a:xfrm>
+            <a:off x="0" y="8685213"/>
+            <a:ext cx="2971800" cy="457200"/>
+          </a:xfrm>
+          <a:prstGeom prst="rect">
+            <a:avLst/>
+          </a:prstGeom>
+        </p:spPr>
+        <p:txBody>
+          <a:bodyPr vert="horz" lIns="91440" tIns="45720" rIns="91440" bIns="45720" rtlCol="0" anchor="b"/>
+          <a:lstStyle>
+            <a:lvl1pPr algn="l">
+              <a:defRPr sz="1200"/>
+            </a:lvl1pPr>
+          </a:lstStyle>
+          <a:p>
+            <a:endParaRPr lang="en-US"/>
+          </a:p>
+        </p:txBody>
+      </p:sp>
+      <p:sp>
+        <p:nvSpPr>
+          <p:cNvPr id="7" name="Slide Number Placeholder 6"/>
+          <p:cNvSpPr>
+            <a:spLocks noGrp="1"/>
+          </p:cNvSpPr>
+          <p:nvPr>
+            <p:ph type="sldNum" sz="quarter" idx="5"/>
+          </p:nvPr>
+        </p:nvSpPr>
+        <p:spPr>
+          <a:xfrm>
+            <a:off x="3884613" y="8685213"/>
+            <a:ext cx="2971800" cy="457200"/>
+          </a:xfrm>
+          <a:prstGeom prst="rect">
+            <a:avLst/>
+          </a:prstGeom>
+        </p:spPr>
+        <p:txBody>
+          <a:bodyPr vert="horz" lIns="91440" tIns="45720" rIns="91440" bIns="45720" rtlCol="0" anchor="b"/>
+          <a:lstStyle>
+            <a:lvl1pPr algn="r">
+              <a:defRPr sz="1200"/>
+            </a:lvl1pPr>
+          </a:lstStyle>
+          <a:p>
+            <a:fld id="{BB5E49A5-4136-284D-997B-48E1D791AD67}" type="slidenum">
+              <a:rPr lang="en-US" smtClean="0"/>
+              <a:t>‹#›</a:t>
+            </a:fld>
+            <a:endParaRPr lang="en-US"/>
+          </a:p>
+        </p:txBody>
+      </p:sp>
+    </p:spTree>
+    <p:extLst>
+      <p:ext uri="{BB962C8B-B14F-4D97-AF65-F5344CB8AC3E}">
+        <p14:creationId xmlns:p14="http://schemas.microsoft.com/office/powerpoint/2010/main" val="2623252185"/>
+      </p:ext>
+    </p:extLst>
+  </p:cSld>
+  <p:clrMap bg1="lt1" tx1="dk1" bg2="lt2" tx2="dk2" accent1="accent1" accent2="accent2" accent3="accent3" accent4="accent4" accent5="accent5" accent6="accent6" hlink="hlink" folHlink="folHlink"/>
+  <p:notesStyle>
+    <a:lvl1pPr marL="0" algn="l" defTabSz="457200" rtl="0" eaLnBrk="1" latinLnBrk="0" hangingPunct="1">
+      <a:defRPr sz="1200" kern="1200">
+        <a:solidFill>
+          <a:schemeClr val="tx1"/>
+        </a:solidFill>
+        <a:latin typeface="+mn-lt"/>
+        <a:ea typeface="+mn-ea"/>
+        <a:cs typeface="+mn-cs"/>
+      </a:defRPr>
+    </a:lvl1pPr>
+    <a:lvl2pPr marL="457200" algn="l" defTabSz="457200" rtl="0" eaLnBrk="1" latinLnBrk="0" hangingPunct="1">
+      <a:defRPr sz="1200" kern="1200">
+        <a:solidFill>
+          <a:schemeClr val="tx1"/>
+        </a:solidFill>
+        <a:latin typeface="+mn-lt"/>
+        <a:ea typeface="+mn-ea"/>
+        <a:cs typeface="+mn-cs"/>
+      </a:defRPr>
+    </a:lvl2pPr>
+    <a:lvl3pPr marL="914400" algn="l" defTabSz="457200" rtl="0" eaLnBrk="1" latinLnBrk="0" hangingPunct="1">
+      <a:defRPr sz="1200" kern="1200">
+        <a:solidFill>
+          <a:schemeClr val="tx1"/>
+        </a:solidFill>
+        <a:latin typeface="+mn-lt"/>
+        <a:ea typeface="+mn-ea"/>
+        <a:cs typeface="+mn-cs"/>
+      </a:defRPr>
+    </a:lvl3pPr>
+    <a:lvl4pPr marL="1371600" algn="l" defTabSz="457200" rtl="0" eaLnBrk="1" latinLnBrk="0" hangingPunct="1">
+      <a:defRPr sz="1200" kern="1200">
+        <a:solidFill>
+          <a:schemeClr val="tx1"/>
+        </a:solidFill>
+        <a:latin typeface="+mn-lt"/>
+        <a:ea typeface="+mn-ea"/>
+        <a:cs typeface="+mn-cs"/>
+      </a:defRPr>
+    </a:lvl4pPr>
+    <a:lvl5pPr marL="1828800" algn="l" defTabSz="457200" rtl="0" eaLnBrk="1" latinLnBrk="0" hangingPunct="1">
+      <a:defRPr sz="1200" kern="1200">
+        <a:solidFill>
+          <a:schemeClr val="tx1"/>
+        </a:solidFill>
+        <a:latin typeface="+mn-lt"/>
+        <a:ea typeface="+mn-ea"/>
+        <a:cs typeface="+mn-cs"/>
+      </a:defRPr>
+    </a:lvl5pPr>
+    <a:lvl6pPr marL="2286000" algn="l" defTabSz="457200" rtl="0" eaLnBrk="1" latinLnBrk="0" hangingPunct="1">
+      <a:defRPr sz="1200" kern="1200">
+        <a:solidFill>
+          <a:schemeClr val="tx1"/>
+        </a:solidFill>
+        <a:latin typeface="+mn-lt"/>
+        <a:ea typeface="+mn-ea"/>
+        <a:cs typeface="+mn-cs"/>
+      </a:defRPr>
+    </a:lvl6pPr>
+    <a:lvl7pPr marL="2743200" algn="l" defTabSz="457200" rtl="0" eaLnBrk="1" latinLnBrk="0" hangingPunct="1">
+      <a:defRPr sz="1200" kern="1200">
+        <a:solidFill>
+          <a:schemeClr val="tx1"/>
+        </a:solidFill>
+        <a:latin typeface="+mn-lt"/>
+        <a:ea typeface="+mn-ea"/>
+        <a:cs typeface="+mn-cs"/>
+      </a:defRPr>
+    </a:lvl7pPr>
+    <a:lvl8pPr marL="3200400" algn="l" defTabSz="457200" rtl="0" eaLnBrk="1" latinLnBrk="0" hangingPunct="1">
+      <a:defRPr sz="1200" kern="1200">
+        <a:solidFill>
+          <a:schemeClr val="tx1"/>
+        </a:solidFill>
+        <a:latin typeface="+mn-lt"/>
+        <a:ea typeface="+mn-ea"/>
+        <a:cs typeface="+mn-cs"/>
+      </a:defRPr>
+    </a:lvl8pPr>
+    <a:lvl9pPr marL="3657600" algn="l" defTabSz="457200" rtl="0" eaLnBrk="1" latinLnBrk="0" hangingPunct="1">
+      <a:defRPr sz="1200" kern="1200">
+        <a:solidFill>
+          <a:schemeClr val="tx1"/>
+        </a:solidFill>
+        <a:latin typeface="+mn-lt"/>
+        <a:ea typeface="+mn-ea"/>
+        <a:cs typeface="+mn-cs"/>
+      </a:defRPr>
+    </a:lvl9pPr>
+  </p:notesStyle>
+</p:notesMaster>
+</file>
+
+<file path=ppt/notesSlides/notesSlide1.xml><?xml version="1.0" encoding="utf-8"?>
+<p:notes xmlns:a="http://schemas.openxmlformats.org/drawingml/2006/main" xmlns:p="http://schemas.openxmlformats.org/presentationml/2006/main" xmlns:r="http://schemas.openxmlformats.org/officeDocument/2006/relationships">
+  <p:cSld>
+    <p:spTree>
+      <p:nvGrpSpPr>
+        <p:cNvPr id="1" name=""/>
+        <p:cNvGrpSpPr/>
+        <p:nvPr/>
+      </p:nvGrpSpPr>
+      <p:grpSpPr>
+        <a:xfrm>
+          <a:off x="0" y="0"/>
+          <a:ext cx="0" cy="0"/>
+          <a:chOff x="0" y="0"/>
+          <a:chExt cx="0" cy="0"/>
+        </a:xfrm>
+      </p:grpSpPr>
+      <p:sp>
+        <p:nvSpPr>
+          <p:cNvPr id="2" name="Slide Image Placeholder 1"/>
+          <p:cNvSpPr>
+            <a:spLocks noGrp="1"/>
+          </p:cNvSpPr>
+          <p:nvPr>
+            <p:ph type="sldImg" idx="2"/>
+          </p:nvPr>
+        </p:nvSpPr>
+        <p:spPr/>
+      </p:sp>
+      <p:sp>
+        <p:nvSpPr>
+          <p:cNvPr id="3" name="Notes Placeholder 2"/>
+          <p:cNvSpPr>
+            <a:spLocks noGrp="1"/>
+          </p:cNvSpPr>
+          <p:nvPr>
+            <p:ph type="body" idx="3" sz="quarter"/>
+          </p:nvPr>
+        </p:nvSpPr>
+        <p:spPr/>
+        <p:txBody>
+          <a:bodyPr/>
+          <a:lstStyle/>
+          <a:p>
+            <a:r>
+              <a:t>Siehe Trainerhandbuch (Sektion 3) für Moderationshinweise, Timing und erwartete Teilnehmerreaktionen.</a:t>
+            </a:r>
+          </a:p>
+        </p:txBody>
+      </p:sp>
+      <p:sp>
+        <p:nvSpPr>
+          <p:cNvPr id="4" name="Slide Number Placeholder 3"/>
+          <p:cNvSpPr>
+            <a:spLocks noGrp="1"/>
+          </p:cNvSpPr>
+          <p:nvPr>
+            <p:ph type="sldNum" idx="5" sz="quarter"/>
+          </p:nvPr>
+        </p:nvSpPr>
+        <p:spPr/>
+      </p:sp>
+    </p:spTree>
+  </p:cSld>
+  <p:clrMapOvr>
+    <a:masterClrMapping/>
+  </p:clrMapOvr>
+</p:notes>
+</file>
+
+<file path=ppt/notesSlides/notesSlide2.xml><?xml version="1.0" encoding="utf-8"?>
+<p:notes xmlns:a="http://schemas.openxmlformats.org/drawingml/2006/main" xmlns:p="http://schemas.openxmlformats.org/presentationml/2006/main" xmlns:r="http://schemas.openxmlformats.org/officeDocument/2006/relationships">
+  <p:cSld>
+    <p:spTree>
+      <p:nvGrpSpPr>
+        <p:cNvPr id="1" name=""/>
+        <p:cNvGrpSpPr/>
+        <p:nvPr/>
+      </p:nvGrpSpPr>
+      <p:grpSpPr>
+        <a:xfrm>
+          <a:off x="0" y="0"/>
+          <a:ext cx="0" cy="0"/>
+          <a:chOff x="0" y="0"/>
+          <a:chExt cx="0" cy="0"/>
+        </a:xfrm>
+      </p:grpSpPr>
+      <p:sp>
+        <p:nvSpPr>
+          <p:cNvPr id="2" name="Slide Image Placeholder 1"/>
+          <p:cNvSpPr>
+            <a:spLocks noGrp="1"/>
+          </p:cNvSpPr>
+          <p:nvPr>
+            <p:ph type="sldImg" idx="2"/>
+          </p:nvPr>
+        </p:nvSpPr>
+        <p:spPr/>
+      </p:sp>
+      <p:sp>
+        <p:nvSpPr>
+          <p:cNvPr id="3" name="Notes Placeholder 2"/>
+          <p:cNvSpPr>
+            <a:spLocks noGrp="1"/>
+          </p:cNvSpPr>
+          <p:nvPr>
+            <p:ph type="body" idx="3" sz="quarter"/>
+          </p:nvPr>
+        </p:nvSpPr>
+        <p:spPr/>
+        <p:txBody>
+          <a:bodyPr/>
+          <a:lstStyle/>
+          <a:p>
+            <a:r>
+              <a:t>Siehe Trainerhandbuch (Sektion 3) für Moderationshinweise, Timing und erwartete Teilnehmerreaktionen.</a:t>
+            </a:r>
+          </a:p>
+        </p:txBody>
+      </p:sp>
+      <p:sp>
+        <p:nvSpPr>
+          <p:cNvPr id="4" name="Slide Number Placeholder 3"/>
+          <p:cNvSpPr>
+            <a:spLocks noGrp="1"/>
+          </p:cNvSpPr>
+          <p:nvPr>
+            <p:ph type="sldNum" idx="5" sz="quarter"/>
+          </p:nvPr>
+        </p:nvSpPr>
+        <p:spPr/>
+      </p:sp>
+    </p:spTree>
+  </p:cSld>
+  <p:clrMapOvr>
+    <a:masterClrMapping/>
+  </p:clrMapOvr>
+</p:notes>
+</file>
+
+<file path=ppt/notesSlides/notesSlide3.xml><?xml version="1.0" encoding="utf-8"?>
+<p:notes xmlns:a="http://schemas.openxmlformats.org/drawingml/2006/main" xmlns:p="http://schemas.openxmlformats.org/presentationml/2006/main" xmlns:r="http://schemas.openxmlformats.org/officeDocument/2006/relationships">
+  <p:cSld>
+    <p:spTree>
+      <p:nvGrpSpPr>
+        <p:cNvPr id="1" name=""/>
+        <p:cNvGrpSpPr/>
+        <p:nvPr/>
+      </p:nvGrpSpPr>
+      <p:grpSpPr>
+        <a:xfrm>
+          <a:off x="0" y="0"/>
+          <a:ext cx="0" cy="0"/>
+          <a:chOff x="0" y="0"/>
+          <a:chExt cx="0" cy="0"/>
+        </a:xfrm>
+      </p:grpSpPr>
+      <p:sp>
+        <p:nvSpPr>
+          <p:cNvPr id="2" name="Slide Image Placeholder 1"/>
+          <p:cNvSpPr>
+            <a:spLocks noGrp="1"/>
+          </p:cNvSpPr>
+          <p:nvPr>
+            <p:ph type="sldImg" idx="2"/>
+          </p:nvPr>
+        </p:nvSpPr>
+        <p:spPr/>
+      </p:sp>
+      <p:sp>
+        <p:nvSpPr>
+          <p:cNvPr id="3" name="Notes Placeholder 2"/>
+          <p:cNvSpPr>
+            <a:spLocks noGrp="1"/>
+          </p:cNvSpPr>
+          <p:nvPr>
+            <p:ph type="body" idx="3" sz="quarter"/>
+          </p:nvPr>
+        </p:nvSpPr>
+        <p:spPr/>
+        <p:txBody>
+          <a:bodyPr/>
+          <a:lstStyle/>
+          <a:p>
+            <a:r>
+              <a:t>Siehe Trainerhandbuch (Sektion 3) für Moderationshinweise, Timing und erwartete Teilnehmerreaktionen.</a:t>
+            </a:r>
+          </a:p>
+        </p:txBody>
+      </p:sp>
+      <p:sp>
+        <p:nvSpPr>
+          <p:cNvPr id="4" name="Slide Number Placeholder 3"/>
+          <p:cNvSpPr>
+            <a:spLocks noGrp="1"/>
+          </p:cNvSpPr>
+          <p:nvPr>
+            <p:ph type="sldNum" idx="5" sz="quarter"/>
+          </p:nvPr>
+        </p:nvSpPr>
+        <p:spPr/>
+      </p:sp>
+    </p:spTree>
+  </p:cSld>
+  <p:clrMapOvr>
+    <a:masterClrMapping/>
+  </p:clrMapOvr>
+</p:notes>
+</file>
+
+<file path=ppt/notesSlides/notesSlide4.xml><?xml version="1.0" encoding="utf-8"?>
+<p:notes xmlns:a="http://schemas.openxmlformats.org/drawingml/2006/main" xmlns:p="http://schemas.openxmlformats.org/presentationml/2006/main" xmlns:r="http://schemas.openxmlformats.org/officeDocument/2006/relationships">
+  <p:cSld>
+    <p:spTree>
+      <p:nvGrpSpPr>
+        <p:cNvPr id="1" name=""/>
+        <p:cNvGrpSpPr/>
+        <p:nvPr/>
+      </p:nvGrpSpPr>
+      <p:grpSpPr>
+        <a:xfrm>
+          <a:off x="0" y="0"/>
+          <a:ext cx="0" cy="0"/>
+          <a:chOff x="0" y="0"/>
+          <a:chExt cx="0" cy="0"/>
+        </a:xfrm>
+      </p:grpSpPr>
+      <p:sp>
+        <p:nvSpPr>
+          <p:cNvPr id="2" name="Slide Image Placeholder 1"/>
+          <p:cNvSpPr>
+            <a:spLocks noGrp="1"/>
+          </p:cNvSpPr>
+          <p:nvPr>
+            <p:ph type="sldImg" idx="2"/>
+          </p:nvPr>
+        </p:nvSpPr>
+        <p:spPr/>
+      </p:sp>
+      <p:sp>
+        <p:nvSpPr>
+          <p:cNvPr id="3" name="Notes Placeholder 2"/>
+          <p:cNvSpPr>
+            <a:spLocks noGrp="1"/>
+          </p:cNvSpPr>
+          <p:nvPr>
+            <p:ph type="body" idx="3" sz="quarter"/>
+          </p:nvPr>
+        </p:nvSpPr>
+        <p:spPr/>
+        <p:txBody>
+          <a:bodyPr/>
+          <a:lstStyle/>
+          <a:p>
+            <a:r>
+              <a:t>Siehe Trainerhandbuch (Sektion 3) für Moderationshinweise, Timing und erwartete Teilnehmerreaktionen.</a:t>
+            </a:r>
+          </a:p>
+        </p:txBody>
+      </p:sp>
+      <p:sp>
+        <p:nvSpPr>
+          <p:cNvPr id="4" name="Slide Number Placeholder 3"/>
+          <p:cNvSpPr>
+            <a:spLocks noGrp="1"/>
+          </p:cNvSpPr>
+          <p:nvPr>
+            <p:ph type="sldNum" idx="5" sz="quarter"/>
+          </p:nvPr>
+        </p:nvSpPr>
+        <p:spPr/>
+      </p:sp>
+    </p:spTree>
+  </p:cSld>
+  <p:clrMapOvr>
+    <a:masterClrMapping/>
+  </p:clrMapOvr>
+</p:notes>
+</file>
+
+<file path=ppt/notesSlides/notesSlide5.xml><?xml version="1.0" encoding="utf-8"?>
+<p:notes xmlns:a="http://schemas.openxmlformats.org/drawingml/2006/main" xmlns:p="http://schemas.openxmlformats.org/presentationml/2006/main" xmlns:r="http://schemas.openxmlformats.org/officeDocument/2006/relationships">
+  <p:cSld>
+    <p:spTree>
+      <p:nvGrpSpPr>
+        <p:cNvPr id="1" name=""/>
+        <p:cNvGrpSpPr/>
+        <p:nvPr/>
+      </p:nvGrpSpPr>
+      <p:grpSpPr>
+        <a:xfrm>
+          <a:off x="0" y="0"/>
+          <a:ext cx="0" cy="0"/>
+          <a:chOff x="0" y="0"/>
+          <a:chExt cx="0" cy="0"/>
+        </a:xfrm>
+      </p:grpSpPr>
+      <p:sp>
+        <p:nvSpPr>
+          <p:cNvPr id="2" name="Slide Image Placeholder 1"/>
+          <p:cNvSpPr>
+            <a:spLocks noGrp="1"/>
+          </p:cNvSpPr>
+          <p:nvPr>
+            <p:ph type="sldImg" idx="2"/>
+          </p:nvPr>
+        </p:nvSpPr>
+        <p:spPr/>
+      </p:sp>
+      <p:sp>
+        <p:nvSpPr>
+          <p:cNvPr id="3" name="Notes Placeholder 2"/>
+          <p:cNvSpPr>
+            <a:spLocks noGrp="1"/>
+          </p:cNvSpPr>
+          <p:nvPr>
+            <p:ph type="body" idx="3" sz="quarter"/>
+          </p:nvPr>
+        </p:nvSpPr>
+        <p:spPr/>
+        <p:txBody>
+          <a:bodyPr/>
+          <a:lstStyle/>
+          <a:p>
+            <a:r>
+              <a:t>Auswertungshilfe (Musterlösungen – nur für Trainer/Seminarleitung)</a:t>
+            </a:r>
+          </a:p>
+        </p:txBody>
+      </p:sp>
+      <p:sp>
+        <p:nvSpPr>
+          <p:cNvPr id="4" name="Slide Number Placeholder 3"/>
+          <p:cNvSpPr>
+            <a:spLocks noGrp="1"/>
+          </p:cNvSpPr>
+          <p:nvPr>
+            <p:ph type="sldNum" idx="5" sz="quarter"/>
+          </p:nvPr>
+        </p:nvSpPr>
+        <p:spPr/>
+      </p:sp>
+    </p:spTree>
+  </p:cSld>
+  <p:clrMapOvr>
+    <a:masterClrMapping/>
+  </p:clrMapOvr>
+</p:notes>
+</file>
+
+<file path=ppt/notesSlides/notesSlide6.xml><?xml version="1.0" encoding="utf-8"?>
+<p:notes xmlns:a="http://schemas.openxmlformats.org/drawingml/2006/main" xmlns:p="http://schemas.openxmlformats.org/presentationml/2006/main" xmlns:r="http://schemas.openxmlformats.org/officeDocument/2006/relationships">
+  <p:cSld>
+    <p:spTree>
+      <p:nvGrpSpPr>
+        <p:cNvPr id="1" name=""/>
+        <p:cNvGrpSpPr/>
+        <p:nvPr/>
+      </p:nvGrpSpPr>
+      <p:grpSpPr>
+        <a:xfrm>
+          <a:off x="0" y="0"/>
+          <a:ext cx="0" cy="0"/>
+          <a:chOff x="0" y="0"/>
+          <a:chExt cx="0" cy="0"/>
+        </a:xfrm>
+      </p:grpSpPr>
+      <p:sp>
+        <p:nvSpPr>
+          <p:cNvPr id="2" name="Slide Image Placeholder 1"/>
+          <p:cNvSpPr>
+            <a:spLocks noGrp="1"/>
+          </p:cNvSpPr>
+          <p:nvPr>
+            <p:ph type="sldImg" idx="2"/>
+          </p:nvPr>
+        </p:nvSpPr>
+        <p:spPr/>
+      </p:sp>
+      <p:sp>
+        <p:nvSpPr>
+          <p:cNvPr id="3" name="Notes Placeholder 2"/>
+          <p:cNvSpPr>
+            <a:spLocks noGrp="1"/>
+          </p:cNvSpPr>
+          <p:nvPr>
+            <p:ph type="body" idx="3" sz="quarter"/>
+          </p:nvPr>
+        </p:nvSpPr>
+        <p:spPr/>
+        <p:txBody>
+          <a:bodyPr/>
+          <a:lstStyle/>
+          <a:p>
+            <a:r>
+              <a:t>Siehe Trainerhandbuch (Sektion 3) für Moderationshinweise, Timing und erwartete Teilnehmerreaktionen.</a:t>
+            </a:r>
+          </a:p>
+        </p:txBody>
+      </p:sp>
+      <p:sp>
+        <p:nvSpPr>
+          <p:cNvPr id="4" name="Slide Number Placeholder 3"/>
+          <p:cNvSpPr>
+            <a:spLocks noGrp="1"/>
+          </p:cNvSpPr>
+          <p:nvPr>
+            <p:ph type="sldNum" idx="5" sz="quarter"/>
+          </p:nvPr>
+        </p:nvSpPr>
+        <p:spPr/>
+      </p:sp>
+    </p:spTree>
+  </p:cSld>
+  <p:clrMapOvr>
+    <a:masterClrMapping/>
+  </p:clrMapOvr>
+</p:notes>
+</file>
+
+<file path=ppt/notesSlides/notesSlide7.xml><?xml version="1.0" encoding="utf-8"?>
+<p:notes xmlns:a="http://schemas.openxmlformats.org/drawingml/2006/main" xmlns:p="http://schemas.openxmlformats.org/presentationml/2006/main" xmlns:r="http://schemas.openxmlformats.org/officeDocument/2006/relationships">
+  <p:cSld>
+    <p:spTree>
+      <p:nvGrpSpPr>
+        <p:cNvPr id="1" name=""/>
+        <p:cNvGrpSpPr/>
+        <p:nvPr/>
+      </p:nvGrpSpPr>
+      <p:grpSpPr>
+        <a:xfrm>
+          <a:off x="0" y="0"/>
+          <a:ext cx="0" cy="0"/>
+          <a:chOff x="0" y="0"/>
+          <a:chExt cx="0" cy="0"/>
+        </a:xfrm>
+      </p:grpSpPr>
+      <p:sp>
+        <p:nvSpPr>
+          <p:cNvPr id="2" name="Slide Image Placeholder 1"/>
+          <p:cNvSpPr>
+            <a:spLocks noGrp="1"/>
+          </p:cNvSpPr>
+          <p:nvPr>
+            <p:ph type="sldImg" idx="2"/>
+          </p:nvPr>
+        </p:nvSpPr>
+        <p:spPr/>
+      </p:sp>
+      <p:sp>
+        <p:nvSpPr>
+          <p:cNvPr id="3" name="Notes Placeholder 2"/>
+          <p:cNvSpPr>
+            <a:spLocks noGrp="1"/>
+          </p:cNvSpPr>
+          <p:nvPr>
+            <p:ph type="body" idx="3" sz="quarter"/>
+          </p:nvPr>
+        </p:nvSpPr>
+        <p:spPr/>
+        <p:txBody>
+          <a:bodyPr/>
+          <a:lstStyle/>
+          <a:p>
+            <a:r>
+              <a:t>Siehe Trainerhandbuch (Sektion 3) für Moderationshinweise, Timing und erwartete Teilnehmerreaktionen.</a:t>
+            </a:r>
+          </a:p>
+        </p:txBody>
+      </p:sp>
+      <p:sp>
+        <p:nvSpPr>
+          <p:cNvPr id="4" name="Slide Number Placeholder 3"/>
+          <p:cNvSpPr>
+            <a:spLocks noGrp="1"/>
+          </p:cNvSpPr>
+          <p:nvPr>
+            <p:ph type="sldNum" idx="5" sz="quarter"/>
+          </p:nvPr>
+        </p:nvSpPr>
+        <p:spPr/>
+      </p:sp>
+    </p:spTree>
+  </p:cSld>
+  <p:clrMapOvr>
+    <a:masterClrMapping/>
+  </p:clrMapOvr>
+</p:notes>
 </file>
 
 <file path=ppt/slideLayouts/slideLayout1.xml><?xml version="1.0" encoding="utf-8"?>
@@ -3970,7 +4810,7 @@
                 </a:solidFill>
                 <a:latin typeface="Arial"/>
               </a:rPr>
-              <a:t>Berater (Name): ___________________________ Datum: _______________</a:t>
+              <a:t>Stärkster Moment im Gespräch:</a:t>
             </a:r>
           </a:p>
           <a:p>
@@ -3989,64 +4829,7 @@
                 </a:solidFill>
                 <a:latin typeface="Arial"/>
               </a:rPr>
-              <a:t>Stärkster Moment im Gespräch:</a:t>
-            </a:r>
-          </a:p>
-          <a:p>
-            <a:pPr>
-              <a:spcBef>
-                <a:spcPts val="400"/>
-              </a:spcBef>
-              <a:spcAft>
-                <a:spcPts val="200"/>
-              </a:spcAft>
-            </a:pPr>
-            <a:r>
-              <a:rPr sz="1200">
-                <a:solidFill>
-                  <a:srgbClr val="3D5466"/>
-                </a:solidFill>
-                <a:latin typeface="Arial"/>
-              </a:rPr>
-              <a:t>___________________________________________________________________________</a:t>
-            </a:r>
-          </a:p>
-          <a:p>
-            <a:pPr>
-              <a:spcBef>
-                <a:spcPts val="400"/>
-              </a:spcBef>
-              <a:spcAft>
-                <a:spcPts val="200"/>
-              </a:spcAft>
-            </a:pPr>
-            <a:r>
-              <a:rPr sz="1200">
-                <a:solidFill>
-                  <a:srgbClr val="3D5466"/>
-                </a:solidFill>
-                <a:latin typeface="Arial"/>
-              </a:rPr>
               <a:t>Eine konkrete Verbesserungsmöglichkeit:</a:t>
-            </a:r>
-          </a:p>
-          <a:p>
-            <a:pPr>
-              <a:spcBef>
-                <a:spcPts val="400"/>
-              </a:spcBef>
-              <a:spcAft>
-                <a:spcPts val="200"/>
-              </a:spcAft>
-            </a:pPr>
-            <a:r>
-              <a:rPr sz="1200">
-                <a:solidFill>
-                  <a:srgbClr val="3D5466"/>
-                </a:solidFill>
-                <a:latin typeface="Arial"/>
-              </a:rPr>
-              <a:t>___________________________________________________________________________</a:t>
             </a:r>
           </a:p>
           <a:p>
@@ -7106,13 +7889,13 @@
               </a:spcAft>
             </a:pPr>
             <a:r>
-              <a:rPr sz="1300">
+              <a:rPr sz="1200">
                 <a:solidFill>
                   <a:srgbClr val="3D5466"/>
                 </a:solidFill>
                 <a:latin typeface="Arial"/>
               </a:rPr>
-              <a:t>▸  „Die Banken geben einem ja momentan viele Angebote." → _______</a:t>
+              <a:t>## 4.4 Aktives Zuhören als Schlüsselkompetenz</a:t>
             </a:r>
           </a:p>
           <a:p>
@@ -7125,13 +7908,13 @@
               </a:spcAft>
             </a:pPr>
             <a:r>
-              <a:rPr sz="1300">
+              <a:rPr sz="1200">
                 <a:solidFill>
                   <a:srgbClr val="3D5466"/>
                 </a:solidFill>
                 <a:latin typeface="Arial"/>
               </a:rPr>
-              <a:t>▸  „Mein Sohn macht das irgendwann schon." → _______</a:t>
+              <a:t>Techniken des aktiven Zuhörens:</a:t>
             </a:r>
           </a:p>
           <a:p>
@@ -7150,7 +7933,7 @@
                 </a:solidFill>
                 <a:latin typeface="Arial"/>
               </a:rPr>
-              <a:t>▸  „Wir haben dieses Jahr weniger investiert als geplant." → _______</a:t>
+              <a:t>▸  Paraphrasieren: Den Kern des Gesagten in eigenen Worten wiedergeben. „Wenn ich Sie richtig verstehe, macht Ihnen weniger die Finanzierung Sorgen als die Frage, wer das Unternehmen in zehn Jahren führt?"</a:t>
             </a:r>
           </a:p>
           <a:p>
@@ -7169,7 +7952,7 @@
                 </a:solidFill>
                 <a:latin typeface="Arial"/>
               </a:rPr>
-              <a:t>▸  „Eigentlich läuft alles, aber die Mitarbeiter kosten immer mehr." → _______</a:t>
+              <a:t>▸  Verbalisieren: Wahrgenommenes Gefühl benennen (mit Vorsicht). „Ich habe das Gefühl, das Thema liegt Ihnen schon länger am Herzen."</a:t>
             </a:r>
           </a:p>
           <a:p>
@@ -7188,7 +7971,7 @@
                 </a:solidFill>
                 <a:latin typeface="Arial"/>
               </a:rPr>
-              <a:t>▸  „Ich muss mal schauen, wie sich das mit der Rente entwickelt." → _______</a:t>
+              <a:t>▸  Schweigen lassen: Pausen aushalten. Viele latente Bedarfe werden erst geäußert, wenn der Berater aufhört zu reden. Vier Sekunden Stille fühlen sich für einen unerfahrenen Berater wie eine Ewigkeit an – für den Kunden sind es vier Sekunden Denkzeit. Wer das Schweigen bricht, beraubt den Kunden dieser Denkzeit. Konkrete Hilfe: Nicken und Augenkontakt halten. Oder leise sagen: „Ich lasse Ihnen einen Moment." Nichts weiter. Rollenspielübung: Üben Sie bewusst, bis zu 6 Sekunden Stille auszuhalten, bevor Sie weitermachen – lassen Sie den Beobachter die Sekunden zählen.</a:t>
             </a:r>
           </a:p>
           <a:p>
@@ -7201,13 +7984,32 @@
               </a:spcAft>
             </a:pPr>
             <a:r>
-              <a:rPr sz="1200">
+              <a:rPr sz="1300">
                 <a:solidFill>
                   <a:srgbClr val="3D5466"/>
                 </a:solidFill>
                 <a:latin typeface="Arial"/>
               </a:rPr>
-              <a:t>## 4.4 Aktives Zuhören als Schlüsselkompetenz</a:t>
+              <a:t>▸  Offene Einladung: „Gibt es etwas, das wir heute noch ansprechen sollten, das wir noch nicht berührt haben?"</a:t>
+            </a:r>
+          </a:p>
+          <a:p>
+            <a:pPr>
+              <a:spcBef>
+                <a:spcPts val="600"/>
+              </a:spcBef>
+              <a:spcAft>
+                <a:spcPts val="200"/>
+              </a:spcAft>
+            </a:pPr>
+            <a:r>
+              <a:rPr sz="1200" i="1">
+                <a:solidFill>
+                  <a:srgbClr val="3D5466"/>
+                </a:solidFill>
+                <a:latin typeface="Arial"/>
+              </a:rPr>
+              <a:t>→  Eine der wichtigsten Fragen am Ende jedes Gesprächs: „Ist noch etwas, das ich wissen sollte?" Einfach. Direkt. Wirkungsvoll.</a:t>
             </a:r>
           </a:p>
           <a:p>
@@ -7226,7 +8028,7 @@
                 </a:solidFill>
                 <a:latin typeface="Arial"/>
               </a:rPr>
-              <a:t>Techniken des aktiven Zuhörens:</a:t>
+              <a:t>## 4.5 Praxiscase: Das Zinsgespräch, das keines ist</a:t>
             </a:r>
           </a:p>
           <a:p>
@@ -7239,13 +8041,13 @@
               </a:spcAft>
             </a:pPr>
             <a:r>
-              <a:rPr sz="1300">
+              <a:rPr sz="1200">
                 <a:solidFill>
                   <a:srgbClr val="3D5466"/>
                 </a:solidFill>
                 <a:latin typeface="Arial"/>
               </a:rPr>
-              <a:t>▸  Paraphrasieren: Den Kern des Gesagten in eigenen Worten wiedergeben. „Wenn ich Sie richtig verstehe, macht Ihnen weniger die Finanzierung Sorgen als die Frage, wer das Unternehmen in zehn Jahren führt?"</a:t>
+              <a:t>Ausgangssituation</a:t>
             </a:r>
           </a:p>
           <a:p>
@@ -7258,13 +8060,13 @@
               </a:spcAft>
             </a:pPr>
             <a:r>
-              <a:rPr sz="1300">
+              <a:rPr sz="1200">
                 <a:solidFill>
                   <a:srgbClr val="3D5466"/>
                 </a:solidFill>
                 <a:latin typeface="Arial"/>
               </a:rPr>
-              <a:t>▸  Verbalisieren: Wahrgenommenes Gefühl benennen (mit Vorsicht). „Ich habe das Gefühl, das Thema liegt Ihnen schon länger am Herzen."</a:t>
+              <a:t>Die zuständige Beraterin Lisa Kern bereitet sich auf ein Konditionengespräch vor.</a:t>
             </a:r>
           </a:p>
           <a:p>
@@ -7277,32 +8079,13 @@
               </a:spcAft>
             </a:pPr>
             <a:r>
-              <a:rPr sz="1300">
+              <a:rPr sz="1200">
                 <a:solidFill>
                   <a:srgbClr val="3D5466"/>
                 </a:solidFill>
                 <a:latin typeface="Arial"/>
               </a:rPr>
-              <a:t>▸  Schweigen lassen: Pausen aushalten. Viele latente Bedarfe werden erst geäußert, wenn der Berater aufhört zu reden. Vier Sekunden Stille fühlen sich für einen unerfahrenen Berater wie eine Ewigkeit an – für den Kunden sind es vier Sekunden Denkzeit. Wer das Schweigen bricht, beraubt den Kunden dieser Denkzeit. Konkrete Hilfe: Nicken und Augenkontakt halten. Oder leise sagen: „Ich lasse Ihnen einen Moment." Nichts weiter. Rollenspielübung: Üben Sie bewusst, bis zu 6 Sekunden Stille auszuhalten, bevor Sie weitermachen – lassen Sie den Beobachter die Sekunden zählen.</a:t>
-            </a:r>
-          </a:p>
-          <a:p>
-            <a:pPr>
-              <a:spcBef>
-                <a:spcPts val="400"/>
-              </a:spcBef>
-              <a:spcAft>
-                <a:spcPts val="200"/>
-              </a:spcAft>
-            </a:pPr>
-            <a:r>
-              <a:rPr sz="1300">
-                <a:solidFill>
-                  <a:srgbClr val="3D5466"/>
-                </a:solidFill>
-                <a:latin typeface="Arial"/>
-              </a:rPr>
-              <a:t>▸  Offene Einladung: „Gibt es etwas, das wir heute noch ansprechen sollten, das wir noch nicht berührt haben?"</a:t>
+              <a:t>Das Gespräch</a:t>
             </a:r>
           </a:p>
         </p:txBody>
@@ -7682,7 +8465,7 @@
                 </a:solidFill>
                 <a:latin typeface="Arial"/>
               </a:rPr>
-              <a:t>Mein nächstes Kundengespräch: ___________________________</a:t>
+              <a:t>Bereiten Sie für jede SPIN-Kategorie mindestens zwei Fragen vor, die zu diesem Kunden passen:</a:t>
             </a:r>
           </a:p>
           <a:p>
@@ -7701,45 +8484,7 @@
                 </a:solidFill>
                 <a:latin typeface="Arial"/>
               </a:rPr>
-              <a:t>Bereiten Sie für jede SPIN-Kategorie mindestens zwei Fragen vor, die zu diesem Kunden passen:</a:t>
-            </a:r>
-          </a:p>
-          <a:p>
-            <a:pPr>
-              <a:spcBef>
-                <a:spcPts val="400"/>
-              </a:spcBef>
-              <a:spcAft>
-                <a:spcPts val="200"/>
-              </a:spcAft>
-            </a:pPr>
-            <a:r>
-              <a:rPr sz="1200">
-                <a:solidFill>
-                  <a:srgbClr val="3D5466"/>
-                </a:solidFill>
-                <a:latin typeface="Arial"/>
-              </a:rPr>
               <a:t>Meine Hypothese: Welchen latenten Bedarf könnte dieser Kunde haben?</a:t>
-            </a:r>
-          </a:p>
-          <a:p>
-            <a:pPr>
-              <a:spcBef>
-                <a:spcPts val="400"/>
-              </a:spcBef>
-              <a:spcAft>
-                <a:spcPts val="200"/>
-              </a:spcAft>
-            </a:pPr>
-            <a:r>
-              <a:rPr sz="1200">
-                <a:solidFill>
-                  <a:srgbClr val="3D5466"/>
-                </a:solidFill>
-                <a:latin typeface="Arial"/>
-              </a:rPr>
-              <a:t>___________________________________________________________________________</a:t>
             </a:r>
           </a:p>
         </p:txBody>
@@ -8148,4 +8893,324 @@
   </a:objectDefaults>
   <a:extraClrSchemeLst/>
 </a:theme>
+</file>
+
+<file path=ppt/theme/theme2.xml><?xml version="1.0" encoding="utf-8"?>
+<a:theme xmlns:a="http://schemas.openxmlformats.org/drawingml/2006/main" name="Office Theme">
+  <a:themeElements>
+    <a:clrScheme name="Office">
+      <a:dk1>
+        <a:sysClr val="windowText" lastClr="000000"/>
+      </a:dk1>
+      <a:lt1>
+        <a:sysClr val="window" lastClr="FFFFFF"/>
+      </a:lt1>
+      <a:dk2>
+        <a:srgbClr val="1F497D"/>
+      </a:dk2>
+      <a:lt2>
+        <a:srgbClr val="EEECE1"/>
+      </a:lt2>
+      <a:accent1>
+        <a:srgbClr val="4F81BD"/>
+      </a:accent1>
+      <a:accent2>
+        <a:srgbClr val="C0504D"/>
+      </a:accent2>
+      <a:accent3>
+        <a:srgbClr val="9BBB59"/>
+      </a:accent3>
+      <a:accent4>
+        <a:srgbClr val="8064A2"/>
+      </a:accent4>
+      <a:accent5>
+        <a:srgbClr val="4BACC6"/>
+      </a:accent5>
+      <a:accent6>
+        <a:srgbClr val="F79646"/>
+      </a:accent6>
+      <a:hlink>
+        <a:srgbClr val="0000FF"/>
+      </a:hlink>
+      <a:folHlink>
+        <a:srgbClr val="800080"/>
+      </a:folHlink>
+    </a:clrScheme>
+    <a:fontScheme name="Office">
+      <a:majorFont>
+        <a:latin typeface="Calibri"/>
+        <a:ea typeface=""/>
+        <a:cs typeface=""/>
+        <a:font script="Jpan" typeface="ＭＳ Ｐゴシック"/>
+        <a:font script="Hang" typeface="맑은 고딕"/>
+        <a:font script="Hans" typeface="宋体"/>
+        <a:font script="Hant" typeface="新細明體"/>
+        <a:font script="Arab" typeface="Times New Roman"/>
+        <a:font script="Hebr" typeface="Times New Roman"/>
+        <a:font script="Thai" typeface="Angsana New"/>
+        <a:font script="Ethi" typeface="Nyala"/>
+        <a:font script="Beng" typeface="Vrinda"/>
+        <a:font script="Gujr" typeface="Shruti"/>
+        <a:font script="Khmr" typeface="MoolBoran"/>
+        <a:font script="Knda" typeface="Tunga"/>
+        <a:font script="Guru" typeface="Raavi"/>
+        <a:font script="Cans" typeface="Euphemia"/>
+        <a:font script="Cher" typeface="Plantagenet Cherokee"/>
+        <a:font script="Yiii" typeface="Microsoft Yi Baiti"/>
+        <a:font script="Tibt" typeface="Microsoft Himalaya"/>
+        <a:font script="Thaa" typeface="MV Boli"/>
+        <a:font script="Deva" typeface="Mangal"/>
+        <a:font script="Telu" typeface="Gautami"/>
+        <a:font script="Taml" typeface="Latha"/>
+        <a:font script="Syrc" typeface="Estrangelo Edessa"/>
+        <a:font script="Orya" typeface="Kalinga"/>
+        <a:font script="Mlym" typeface="Kartika"/>
+        <a:font script="Laoo" typeface="DokChampa"/>
+        <a:font script="Sinh" typeface="Iskoola Pota"/>
+        <a:font script="Mong" typeface="Mongolian Baiti"/>
+        <a:font script="Viet" typeface="Times New Roman"/>
+        <a:font script="Uigh" typeface="Microsoft Uighur"/>
+        <a:font script="Geor" typeface="Sylfaen"/>
+      </a:majorFont>
+      <a:minorFont>
+        <a:latin typeface="Calibri"/>
+        <a:ea typeface=""/>
+        <a:cs typeface=""/>
+        <a:font script="Jpan" typeface="ＭＳ Ｐゴシック"/>
+        <a:font script="Hang" typeface="맑은 고딕"/>
+        <a:font script="Hans" typeface="宋体"/>
+        <a:font script="Hant" typeface="新細明體"/>
+        <a:font script="Arab" typeface="Arial"/>
+        <a:font script="Hebr" typeface="Arial"/>
+        <a:font script="Thai" typeface="Cordia New"/>
+        <a:font script="Ethi" typeface="Nyala"/>
+        <a:font script="Beng" typeface="Vrinda"/>
+        <a:font script="Gujr" typeface="Shruti"/>
+        <a:font script="Khmr" typeface="DaunPenh"/>
+        <a:font script="Knda" typeface="Tunga"/>
+        <a:font script="Guru" typeface="Raavi"/>
+        <a:font script="Cans" typeface="Euphemia"/>
+        <a:font script="Cher" typeface="Plantagenet Cherokee"/>
+        <a:font script="Yiii" typeface="Microsoft Yi Baiti"/>
+        <a:font script="Tibt" typeface="Microsoft Himalaya"/>
+        <a:font script="Thaa" typeface="MV Boli"/>
+        <a:font script="Deva" typeface="Mangal"/>
+        <a:font script="Telu" typeface="Gautami"/>
+        <a:font script="Taml" typeface="Latha"/>
+        <a:font script="Syrc" typeface="Estrangelo Edessa"/>
+        <a:font script="Orya" typeface="Kalinga"/>
+        <a:font script="Mlym" typeface="Kartika"/>
+        <a:font script="Laoo" typeface="DokChampa"/>
+        <a:font script="Sinh" typeface="Iskoola Pota"/>
+        <a:font script="Mong" typeface="Mongolian Baiti"/>
+        <a:font script="Viet" typeface="Arial"/>
+        <a:font script="Uigh" typeface="Microsoft Uighur"/>
+        <a:font script="Geor" typeface="Sylfaen"/>
+      </a:minorFont>
+    </a:fontScheme>
+    <a:fmtScheme name="Office">
+      <a:fillStyleLst>
+        <a:solidFill>
+          <a:schemeClr val="phClr"/>
+        </a:solidFill>
+        <a:gradFill rotWithShape="1">
+          <a:gsLst>
+            <a:gs pos="0">
+              <a:schemeClr val="phClr">
+                <a:tint val="50000"/>
+                <a:satMod val="300000"/>
+              </a:schemeClr>
+            </a:gs>
+            <a:gs pos="35000">
+              <a:schemeClr val="phClr">
+                <a:tint val="37000"/>
+                <a:satMod val="300000"/>
+              </a:schemeClr>
+            </a:gs>
+            <a:gs pos="100000">
+              <a:schemeClr val="phClr">
+                <a:tint val="15000"/>
+                <a:satMod val="350000"/>
+              </a:schemeClr>
+            </a:gs>
+          </a:gsLst>
+          <a:lin ang="16200000" scaled="1"/>
+        </a:gradFill>
+        <a:gradFill rotWithShape="1">
+          <a:gsLst>
+            <a:gs pos="0">
+              <a:schemeClr val="phClr">
+                <a:tint val="100000"/>
+                <a:shade val="100000"/>
+                <a:satMod val="130000"/>
+              </a:schemeClr>
+            </a:gs>
+            <a:gs pos="100000">
+              <a:schemeClr val="phClr">
+                <a:tint val="50000"/>
+                <a:shade val="100000"/>
+                <a:satMod val="350000"/>
+              </a:schemeClr>
+            </a:gs>
+          </a:gsLst>
+          <a:lin ang="16200000" scaled="0"/>
+        </a:gradFill>
+      </a:fillStyleLst>
+      <a:lnStyleLst>
+        <a:ln w="9525" cap="flat" cmpd="sng" algn="ctr">
+          <a:solidFill>
+            <a:schemeClr val="phClr">
+              <a:shade val="95000"/>
+              <a:satMod val="105000"/>
+            </a:schemeClr>
+          </a:solidFill>
+          <a:prstDash val="solid"/>
+        </a:ln>
+        <a:ln w="25400" cap="flat" cmpd="sng" algn="ctr">
+          <a:solidFill>
+            <a:schemeClr val="phClr"/>
+          </a:solidFill>
+          <a:prstDash val="solid"/>
+        </a:ln>
+        <a:ln w="38100" cap="flat" cmpd="sng" algn="ctr">
+          <a:solidFill>
+            <a:schemeClr val="phClr"/>
+          </a:solidFill>
+          <a:prstDash val="solid"/>
+        </a:ln>
+      </a:lnStyleLst>
+      <a:effectStyleLst>
+        <a:effectStyle>
+          <a:effectLst>
+            <a:outerShdw blurRad="40000" dist="20000" dir="5400000" rotWithShape="0">
+              <a:srgbClr val="000000">
+                <a:alpha val="38000"/>
+              </a:srgbClr>
+            </a:outerShdw>
+          </a:effectLst>
+        </a:effectStyle>
+        <a:effectStyle>
+          <a:effectLst>
+            <a:outerShdw blurRad="40000" dist="23000" dir="5400000" rotWithShape="0">
+              <a:srgbClr val="000000">
+                <a:alpha val="35000"/>
+              </a:srgbClr>
+            </a:outerShdw>
+          </a:effectLst>
+        </a:effectStyle>
+        <a:effectStyle>
+          <a:effectLst>
+            <a:outerShdw blurRad="40000" dist="23000" dir="5400000" rotWithShape="0">
+              <a:srgbClr val="000000">
+                <a:alpha val="35000"/>
+              </a:srgbClr>
+            </a:outerShdw>
+          </a:effectLst>
+          <a:scene3d>
+            <a:camera prst="orthographicFront">
+              <a:rot lat="0" lon="0" rev="0"/>
+            </a:camera>
+            <a:lightRig rig="threePt" dir="t">
+              <a:rot lat="0" lon="0" rev="1200000"/>
+            </a:lightRig>
+          </a:scene3d>
+          <a:sp3d>
+            <a:bevelT w="63500" h="25400"/>
+          </a:sp3d>
+        </a:effectStyle>
+      </a:effectStyleLst>
+      <a:bgFillStyleLst>
+        <a:solidFill>
+          <a:schemeClr val="phClr"/>
+        </a:solidFill>
+        <a:gradFill rotWithShape="1">
+          <a:gsLst>
+            <a:gs pos="0">
+              <a:schemeClr val="phClr">
+                <a:tint val="40000"/>
+                <a:satMod val="350000"/>
+              </a:schemeClr>
+            </a:gs>
+            <a:gs pos="40000">
+              <a:schemeClr val="phClr">
+                <a:tint val="45000"/>
+                <a:shade val="99000"/>
+                <a:satMod val="350000"/>
+              </a:schemeClr>
+            </a:gs>
+            <a:gs pos="100000">
+              <a:schemeClr val="phClr">
+                <a:shade val="20000"/>
+                <a:satMod val="255000"/>
+              </a:schemeClr>
+            </a:gs>
+          </a:gsLst>
+          <a:path path="circle">
+            <a:fillToRect l="50000" t="-80000" r="50000" b="180000"/>
+          </a:path>
+        </a:gradFill>
+        <a:gradFill rotWithShape="1">
+          <a:gsLst>
+            <a:gs pos="0">
+              <a:schemeClr val="phClr">
+                <a:tint val="80000"/>
+                <a:satMod val="300000"/>
+              </a:schemeClr>
+            </a:gs>
+            <a:gs pos="100000">
+              <a:schemeClr val="phClr">
+                <a:shade val="30000"/>
+                <a:satMod val="200000"/>
+              </a:schemeClr>
+            </a:gs>
+          </a:gsLst>
+          <a:path path="circle">
+            <a:fillToRect l="50000" t="50000" r="50000" b="50000"/>
+          </a:path>
+        </a:gradFill>
+      </a:bgFillStyleLst>
+    </a:fmtScheme>
+  </a:themeElements>
+  <a:objectDefaults>
+    <a:spDef>
+      <a:spPr/>
+      <a:bodyPr/>
+      <a:lstStyle/>
+      <a:style>
+        <a:lnRef idx="1">
+          <a:schemeClr val="accent1"/>
+        </a:lnRef>
+        <a:fillRef idx="3">
+          <a:schemeClr val="accent1"/>
+        </a:fillRef>
+        <a:effectRef idx="2">
+          <a:schemeClr val="accent1"/>
+        </a:effectRef>
+        <a:fontRef idx="minor">
+          <a:schemeClr val="lt1"/>
+        </a:fontRef>
+      </a:style>
+    </a:spDef>
+    <a:lnDef>
+      <a:spPr/>
+      <a:bodyPr/>
+      <a:lstStyle/>
+      <a:style>
+        <a:lnRef idx="2">
+          <a:schemeClr val="accent1"/>
+        </a:lnRef>
+        <a:fillRef idx="0">
+          <a:schemeClr val="accent1"/>
+        </a:fillRef>
+        <a:effectRef idx="1">
+          <a:schemeClr val="accent1"/>
+        </a:effectRef>
+        <a:fontRef idx="minor">
+          <a:schemeClr val="tx1"/>
+        </a:fontRef>
+      </a:style>
+    </a:lnDef>
+  </a:objectDefaults>
+  <a:extraClrSchemeLst/>
+</a:theme>
 </file>
--- a/protected-downloads/praesentation/M11.pptx
+++ b/protected-downloads/praesentation/M11.pptx
@@ -4306,7 +4306,7 @@
                 </a:solidFill>
                 <a:latin typeface="Arial"/>
               </a:rPr>
-              <a:t>Sparring</a:t>
+              <a:t>Sparringspartner</a:t>
             </a:r>
           </a:p>
         </p:txBody>

--- a/protected-downloads/praesentation/M11.pptx
+++ b/protected-downloads/praesentation/M11.pptx
@@ -4830,25 +4830,6 @@
                 <a:latin typeface="Arial"/>
               </a:rPr>
               <a:t>Eine konkrete Verbesserungsmöglichkeit:</a:t>
-            </a:r>
-          </a:p>
-          <a:p>
-            <a:pPr>
-              <a:spcBef>
-                <a:spcPts val="400"/>
-              </a:spcBef>
-              <a:spcAft>
-                <a:spcPts val="200"/>
-              </a:spcAft>
-            </a:pPr>
-            <a:r>
-              <a:rPr sz="1200">
-                <a:solidFill>
-                  <a:srgbClr val="3D5466"/>
-                </a:solidFill>
-                <a:latin typeface="Arial"/>
-              </a:rPr>
-              <a:t># 5. PRAXISTRANSFER</a:t>
             </a:r>
           </a:p>
         </p:txBody>

--- a/protected-downloads/praesentation/M11.pptx
+++ b/protected-downloads/praesentation/M11.pptx
@@ -8,13 +8,14 @@
     <p:sldId id="256" r:id="rId7"/>
     <p:sldId id="257" r:id="rId8"/>
     <p:sldId id="258" r:id="rId9"/>
-    <p:sldId id="259" r:id="rId11"/>
+    <p:sldId id="259" r:id="rId10"/>
     <p:sldId id="260" r:id="rId12"/>
     <p:sldId id="261" r:id="rId13"/>
     <p:sldId id="262" r:id="rId14"/>
     <p:sldId id="263" r:id="rId15"/>
     <p:sldId id="264" r:id="rId16"/>
     <p:sldId id="265" r:id="rId17"/>
+    <p:sldId id="266" r:id="rId18"/>
   </p:sldIdLst>
   <p:sldSz cx="12188952" cy="6858000" type="screen4x3"/>
   <p:notesSz cx="6858000" cy="9144000"/>
@@ -4749,6 +4750,405 @@
                 </a:solidFill>
                 <a:latin typeface="Source Serif 4"/>
               </a:rPr>
+              <a:t>Arbeitsblatt A: SPIN-Fragen vorbereiten</a:t>
+            </a:r>
+          </a:p>
+        </p:txBody>
+      </p:sp>
+      <p:sp>
+        <p:nvSpPr>
+          <p:cNvPr id="8" name="TextBox 7"/>
+          <p:cNvSpPr txBox="1"/>
+          <p:nvPr/>
+        </p:nvSpPr>
+        <p:spPr>
+          <a:xfrm>
+            <a:off x="685800" y="1417320"/>
+            <a:ext cx="10817352" cy="5029200"/>
+          </a:xfrm>
+          <a:prstGeom prst="rect">
+            <a:avLst/>
+          </a:prstGeom>
+          <a:noFill/>
+        </p:spPr>
+        <p:txBody>
+          <a:bodyPr wrap="square">
+            <a:spAutoFit/>
+          </a:bodyPr>
+          <a:lstStyle/>
+          <a:p>
+            <a:pPr>
+              <a:spcBef>
+                <a:spcPts val="400"/>
+              </a:spcBef>
+              <a:spcAft>
+                <a:spcPts val="200"/>
+              </a:spcAft>
+            </a:pPr>
+            <a:r>
+              <a:rPr sz="1200">
+                <a:solidFill>
+                  <a:srgbClr val="3D5466"/>
+                </a:solidFill>
+                <a:latin typeface="Arial"/>
+              </a:rPr>
+              <a:t>Bereiten Sie für jede SPIN-Kategorie mindestens zwei Fragen vor, die zu diesem Kunden passen:</a:t>
+            </a:r>
+          </a:p>
+          <a:p>
+            <a:pPr>
+              <a:spcBef>
+                <a:spcPts val="400"/>
+              </a:spcBef>
+              <a:spcAft>
+                <a:spcPts val="200"/>
+              </a:spcAft>
+            </a:pPr>
+            <a:r>
+              <a:rPr sz="1200">
+                <a:solidFill>
+                  <a:srgbClr val="3D5466"/>
+                </a:solidFill>
+                <a:latin typeface="Arial"/>
+              </a:rPr>
+              <a:t>Meine Hypothese: Welchen latenten Bedarf könnte dieser Kunde haben?</a:t>
+            </a:r>
+          </a:p>
+        </p:txBody>
+      </p:sp>
+      <p:sp>
+        <p:nvSpPr>
+          <p:cNvPr id="9" name="Rectangle 8"/>
+          <p:cNvSpPr/>
+          <p:nvPr/>
+        </p:nvSpPr>
+        <p:spPr>
+          <a:xfrm>
+            <a:off x="0" y="6510528"/>
+            <a:ext cx="12188952" cy="347472"/>
+          </a:xfrm>
+          <a:prstGeom prst="rect">
+            <a:avLst/>
+          </a:prstGeom>
+          <a:solidFill>
+            <a:srgbClr val="0A1937"/>
+          </a:solidFill>
+          <a:ln>
+            <a:noFill/>
+          </a:ln>
+        </p:spPr>
+        <p:style>
+          <a:lnRef idx="1">
+            <a:schemeClr val="accent1"/>
+          </a:lnRef>
+          <a:fillRef idx="3">
+            <a:schemeClr val="accent1"/>
+          </a:fillRef>
+          <a:effectRef idx="2">
+            <a:schemeClr val="accent1"/>
+          </a:effectRef>
+          <a:fontRef idx="minor">
+            <a:schemeClr val="lt1"/>
+          </a:fontRef>
+        </p:style>
+        <p:txBody>
+          <a:bodyPr rtlCol="0" anchor="ctr"/>
+          <a:lstStyle/>
+          <a:p>
+            <a:pPr algn="ctr"/>
+          </a:p>
+        </p:txBody>
+      </p:sp>
+      <p:sp>
+        <p:nvSpPr>
+          <p:cNvPr id="10" name="TextBox 9"/>
+          <p:cNvSpPr txBox="1"/>
+          <p:nvPr/>
+        </p:nvSpPr>
+        <p:spPr>
+          <a:xfrm>
+            <a:off x="685800" y="6583680"/>
+            <a:ext cx="6490411" cy="256032"/>
+          </a:xfrm>
+          <a:prstGeom prst="rect">
+            <a:avLst/>
+          </a:prstGeom>
+          <a:noFill/>
+        </p:spPr>
+        <p:txBody>
+          <a:bodyPr wrap="none">
+            <a:spAutoFit/>
+          </a:bodyPr>
+          <a:lstStyle/>
+          <a:p>
+            <a:pPr algn="l"/>
+            <a:r>
+              <a:rPr sz="700">
+                <a:solidFill>
+                  <a:srgbClr val="A0B4D2"/>
+                </a:solidFill>
+                <a:latin typeface="JetBrains Mono"/>
+              </a:rPr>
+              <a:t>Benedikt Zoller Coaching  ·  FKB Campus  ·  M11</a:t>
+            </a:r>
+          </a:p>
+        </p:txBody>
+      </p:sp>
+    </p:spTree>
+  </p:cSld>
+  <p:clrMapOvr>
+    <a:masterClrMapping/>
+  </p:clrMapOvr>
+</p:sld>
+</file>
+
+<file path=ppt/slides/slide11.xml><?xml version="1.0" encoding="utf-8"?>
+<p:sld xmlns:a="http://schemas.openxmlformats.org/drawingml/2006/main" xmlns:p="http://schemas.openxmlformats.org/presentationml/2006/main" xmlns:r="http://schemas.openxmlformats.org/officeDocument/2006/relationships">
+  <p:cSld>
+    <p:spTree>
+      <p:nvGrpSpPr>
+        <p:cNvPr id="1" name=""/>
+        <p:cNvGrpSpPr/>
+        <p:nvPr/>
+      </p:nvGrpSpPr>
+      <p:grpSpPr/>
+      <p:sp>
+        <p:nvSpPr>
+          <p:cNvPr id="2" name="Rectangle 1"/>
+          <p:cNvSpPr/>
+          <p:nvPr/>
+        </p:nvSpPr>
+        <p:spPr>
+          <a:xfrm>
+            <a:off x="0" y="0"/>
+            <a:ext cx="12188952" cy="6858000"/>
+          </a:xfrm>
+          <a:prstGeom prst="rect">
+            <a:avLst/>
+          </a:prstGeom>
+          <a:solidFill>
+            <a:srgbClr val="EDEDF3"/>
+          </a:solidFill>
+          <a:ln>
+            <a:noFill/>
+          </a:ln>
+        </p:spPr>
+        <p:style>
+          <a:lnRef idx="1">
+            <a:schemeClr val="accent1"/>
+          </a:lnRef>
+          <a:fillRef idx="3">
+            <a:schemeClr val="accent1"/>
+          </a:fillRef>
+          <a:effectRef idx="2">
+            <a:schemeClr val="accent1"/>
+          </a:effectRef>
+          <a:fontRef idx="minor">
+            <a:schemeClr val="lt1"/>
+          </a:fontRef>
+        </p:style>
+        <p:txBody>
+          <a:bodyPr rtlCol="0" anchor="ctr"/>
+          <a:lstStyle/>
+          <a:p>
+            <a:pPr algn="ctr"/>
+          </a:p>
+        </p:txBody>
+      </p:sp>
+      <p:sp>
+        <p:nvSpPr>
+          <p:cNvPr id="3" name="Rectangle 2"/>
+          <p:cNvSpPr/>
+          <p:nvPr/>
+        </p:nvSpPr>
+        <p:spPr>
+          <a:xfrm>
+            <a:off x="0" y="0"/>
+            <a:ext cx="12188952" cy="50292"/>
+          </a:xfrm>
+          <a:prstGeom prst="rect">
+            <a:avLst/>
+          </a:prstGeom>
+          <a:solidFill>
+            <a:srgbClr val="1F2C56"/>
+          </a:solidFill>
+          <a:ln>
+            <a:noFill/>
+          </a:ln>
+        </p:spPr>
+        <p:style>
+          <a:lnRef idx="1">
+            <a:schemeClr val="accent1"/>
+          </a:lnRef>
+          <a:fillRef idx="3">
+            <a:schemeClr val="accent1"/>
+          </a:fillRef>
+          <a:effectRef idx="2">
+            <a:schemeClr val="accent1"/>
+          </a:effectRef>
+          <a:fontRef idx="minor">
+            <a:schemeClr val="lt1"/>
+          </a:fontRef>
+        </p:style>
+        <p:txBody>
+          <a:bodyPr rtlCol="0" anchor="ctr"/>
+          <a:lstStyle/>
+          <a:p>
+            <a:pPr algn="ctr"/>
+          </a:p>
+        </p:txBody>
+      </p:sp>
+      <p:sp>
+        <p:nvSpPr>
+          <p:cNvPr id="4" name="TextBox 3"/>
+          <p:cNvSpPr txBox="1"/>
+          <p:nvPr/>
+        </p:nvSpPr>
+        <p:spPr>
+          <a:xfrm>
+            <a:off x="685800" y="109728"/>
+            <a:ext cx="10817352" cy="228600"/>
+          </a:xfrm>
+          <a:prstGeom prst="rect">
+            <a:avLst/>
+          </a:prstGeom>
+          <a:noFill/>
+        </p:spPr>
+        <p:txBody>
+          <a:bodyPr wrap="none">
+            <a:spAutoFit/>
+          </a:bodyPr>
+          <a:lstStyle/>
+          <a:p>
+            <a:pPr algn="l"/>
+            <a:r>
+              <a:rPr sz="750">
+                <a:solidFill>
+                  <a:srgbClr val="78808C"/>
+                </a:solidFill>
+                <a:latin typeface="JetBrains Mono"/>
+              </a:rPr>
+              <a:t>M11  ·  INHALT</a:t>
+            </a:r>
+          </a:p>
+        </p:txBody>
+      </p:sp>
+      <p:sp>
+        <p:nvSpPr>
+          <p:cNvPr id="5" name="Rectangle 4"/>
+          <p:cNvSpPr/>
+          <p:nvPr/>
+        </p:nvSpPr>
+        <p:spPr>
+          <a:xfrm>
+            <a:off x="0" y="1234440"/>
+            <a:ext cx="12188952" cy="12700"/>
+          </a:xfrm>
+          <a:prstGeom prst="rect">
+            <a:avLst/>
+          </a:prstGeom>
+          <a:solidFill>
+            <a:srgbClr val="D8DFE4"/>
+          </a:solidFill>
+          <a:ln>
+            <a:noFill/>
+          </a:ln>
+        </p:spPr>
+        <p:style>
+          <a:lnRef idx="1">
+            <a:schemeClr val="accent1"/>
+          </a:lnRef>
+          <a:fillRef idx="3">
+            <a:schemeClr val="accent1"/>
+          </a:fillRef>
+          <a:effectRef idx="2">
+            <a:schemeClr val="accent1"/>
+          </a:effectRef>
+          <a:fontRef idx="minor">
+            <a:schemeClr val="lt1"/>
+          </a:fontRef>
+        </p:style>
+        <p:txBody>
+          <a:bodyPr rtlCol="0" anchor="ctr"/>
+          <a:lstStyle/>
+          <a:p>
+            <a:pPr algn="ctr"/>
+          </a:p>
+        </p:txBody>
+      </p:sp>
+      <p:sp>
+        <p:nvSpPr>
+          <p:cNvPr id="6" name="Rectangle 5"/>
+          <p:cNvSpPr/>
+          <p:nvPr/>
+        </p:nvSpPr>
+        <p:spPr>
+          <a:xfrm>
+            <a:off x="685800" y="502920"/>
+            <a:ext cx="36576" cy="658368"/>
+          </a:xfrm>
+          <a:prstGeom prst="rect">
+            <a:avLst/>
+          </a:prstGeom>
+          <a:solidFill>
+            <a:srgbClr val="D9C089"/>
+          </a:solidFill>
+          <a:ln>
+            <a:noFill/>
+          </a:ln>
+        </p:spPr>
+        <p:style>
+          <a:lnRef idx="1">
+            <a:schemeClr val="accent1"/>
+          </a:lnRef>
+          <a:fillRef idx="3">
+            <a:schemeClr val="accent1"/>
+          </a:fillRef>
+          <a:effectRef idx="2">
+            <a:schemeClr val="accent1"/>
+          </a:effectRef>
+          <a:fontRef idx="minor">
+            <a:schemeClr val="lt1"/>
+          </a:fontRef>
+        </p:style>
+        <p:txBody>
+          <a:bodyPr rtlCol="0" anchor="ctr"/>
+          <a:lstStyle/>
+          <a:p>
+            <a:pPr algn="ctr"/>
+          </a:p>
+        </p:txBody>
+      </p:sp>
+      <p:sp>
+        <p:nvSpPr>
+          <p:cNvPr id="7" name="TextBox 6"/>
+          <p:cNvSpPr txBox="1"/>
+          <p:nvPr/>
+        </p:nvSpPr>
+        <p:spPr>
+          <a:xfrm>
+            <a:off x="813816" y="502920"/>
+            <a:ext cx="10634472" cy="685800"/>
+          </a:xfrm>
+          <a:prstGeom prst="rect">
+            <a:avLst/>
+          </a:prstGeom>
+          <a:noFill/>
+        </p:spPr>
+        <p:txBody>
+          <a:bodyPr wrap="square">
+            <a:spAutoFit/>
+          </a:bodyPr>
+          <a:lstStyle/>
+          <a:p>
+            <a:pPr algn="l"/>
+            <a:r>
+              <a:rPr sz="2400" b="1" i="0">
+                <a:solidFill>
+                  <a:srgbClr val="1F2C56"/>
+                </a:solidFill>
+                <a:latin typeface="Source Serif 4"/>
+              </a:rPr>
               <a:t>Arbeitsblatt B: Beobachtungsbogen Rollenspiel</a:t>
             </a:r>
           </a:p>
@@ -5046,7 +5446,7 @@
                 </a:solidFill>
                 <a:latin typeface="JetBrains Mono"/>
               </a:rPr>
-              <a:t>LERNZIELE  ·  M11</a:t>
+              <a:t>ÜBERBLICK  ·  M11</a:t>
             </a:r>
           </a:p>
         </p:txBody>
@@ -5124,7 +5524,7 @@
                 </a:solidFill>
                 <a:latin typeface="Source Serif 4"/>
               </a:rPr>
-              <a:t>Was Sie heute mitnehmen</a:t>
+              <a:t>Worum geht es heute</a:t>
             </a:r>
           </a:p>
         </p:txBody>
@@ -5137,8 +5537,8 @@
         </p:nvSpPr>
         <p:spPr>
           <a:xfrm>
-            <a:off x="685800" y="1371600"/>
-            <a:ext cx="10817352" cy="5120640"/>
+            <a:off x="685800" y="1737360"/>
+            <a:ext cx="9720072" cy="4206240"/>
           </a:xfrm>
           <a:prstGeom prst="rect">
             <a:avLst/>
@@ -5152,97 +5552,50 @@
           <a:lstStyle/>
           <a:p>
             <a:pPr>
-              <a:spcBef>
-                <a:spcPts val="800"/>
-              </a:spcBef>
               <a:spcAft>
-                <a:spcPts val="200"/>
+                <a:spcPts val="1200"/>
               </a:spcAft>
             </a:pPr>
             <a:r>
-              <a:rPr sz="1400">
+              <a:rPr sz="1700">
                 <a:solidFill>
                   <a:srgbClr val="3D5466"/>
                 </a:solidFill>
                 <a:latin typeface="Arial"/>
               </a:rPr>
-              <a:t>▸  Explizite von latenten Bedarfen anhand konkreter Gesprächsbeispiele unterscheiden und Kundensignale systematisch zuordnen</a:t>
+              <a:t>Die wichtigsten Bedarfe spricht der Kunde nie von selbst an – sie liegen unter der Wasserlinie.</a:t>
             </a:r>
           </a:p>
           <a:p>
             <a:pPr>
-              <a:spcBef>
-                <a:spcPts val="800"/>
-              </a:spcBef>
               <a:spcAft>
-                <a:spcPts val="200"/>
+                <a:spcPts val="1200"/>
               </a:spcAft>
             </a:pPr>
             <a:r>
-              <a:rPr sz="1400">
+              <a:rPr sz="1700">
                 <a:solidFill>
                   <a:srgbClr val="3D5466"/>
                 </a:solidFill>
                 <a:latin typeface="Arial"/>
               </a:rPr>
-              <a:t>▸  Die SPIN-Fragetechnik in simulierten Kundengesprächen anwenden und implizite Problemformulierungen in explizite Bedarfsaussagen überführen</a:t>
+              <a:t>Mit Eisbergmodell und Videoanalyse trainieren Sie, verdeckte Signale in Kundenaussagen zu hören und behutsam nachzufassen.</a:t>
             </a:r>
           </a:p>
           <a:p>
             <a:pPr>
-              <a:spcBef>
-                <a:spcPts val="800"/>
-              </a:spcBef>
               <a:spcAft>
-                <a:spcPts val="200"/>
+                <a:spcPts val="1200"/>
               </a:spcAft>
             </a:pPr>
             <a:r>
-              <a:rPr sz="1400">
+              <a:rPr sz="1700">
                 <a:solidFill>
                   <a:srgbClr val="3D5466"/>
                 </a:solidFill>
                 <a:latin typeface="Arial"/>
               </a:rPr>
-              <a:t>▸  Gesprächsverläufe auf latente Signale (verbal, paraverbal, nonverbal) analysieren und den wahrscheinlichen Hintergrundbedarf benennen</a:t>
-            </a:r>
-          </a:p>
-          <a:p>
-            <a:pPr>
-              <a:spcBef>
-                <a:spcPts val="800"/>
-              </a:spcBef>
-              <a:spcAft>
-                <a:spcPts val="200"/>
-              </a:spcAft>
-            </a:pPr>
-            <a:r>
-              <a:rPr sz="1400">
-                <a:solidFill>
-                  <a:srgbClr val="3D5466"/>
-                </a:solidFill>
-                <a:latin typeface="Arial"/>
-              </a:rPr>
-              <a:t>▸  Die Qualität des eigenen Frageverhaltens in Rollenspielen bewerten und konkrete Verbesserungsschritte ableiten</a:t>
-            </a:r>
-          </a:p>
-          <a:p>
-            <a:pPr>
-              <a:spcBef>
-                <a:spcPts val="800"/>
-              </a:spcBef>
-              <a:spcAft>
-                <a:spcPts val="200"/>
-              </a:spcAft>
-            </a:pPr>
-            <a:r>
-              <a:rPr sz="1400">
-                <a:solidFill>
-                  <a:srgbClr val="3D5466"/>
-                </a:solidFill>
-                <a:latin typeface="Arial"/>
-              </a:rPr>
-              <a:t>▸  Situationsgerecht zwischen verschiedenen Fragetechniken wählen und die Wahl begründen</a:t>
+              <a:t>Danach erkennen Sie latente Bedarfe im Gespräch und machen daraus konkrete Beratungsanlässe.</a:t>
             </a:r>
           </a:p>
         </p:txBody>
@@ -5459,7 +5812,7 @@
                 </a:solidFill>
                 <a:latin typeface="JetBrains Mono"/>
               </a:rPr>
-              <a:t>M11  ·  INHALT</a:t>
+              <a:t>LERNZIELE  ·  M11</a:t>
             </a:r>
           </a:p>
         </p:txBody>
@@ -5509,57 +5862,14 @@
       </p:sp>
       <p:sp>
         <p:nvSpPr>
-          <p:cNvPr id="6" name="Rectangle 5"/>
-          <p:cNvSpPr/>
+          <p:cNvPr id="6" name="TextBox 5"/>
+          <p:cNvSpPr txBox="1"/>
           <p:nvPr/>
         </p:nvSpPr>
         <p:spPr>
           <a:xfrm>
             <a:off x="685800" y="502920"/>
-            <a:ext cx="36576" cy="658368"/>
-          </a:xfrm>
-          <a:prstGeom prst="rect">
-            <a:avLst/>
-          </a:prstGeom>
-          <a:solidFill>
-            <a:srgbClr val="D9C089"/>
-          </a:solidFill>
-          <a:ln>
-            <a:noFill/>
-          </a:ln>
-        </p:spPr>
-        <p:style>
-          <a:lnRef idx="1">
-            <a:schemeClr val="accent1"/>
-          </a:lnRef>
-          <a:fillRef idx="3">
-            <a:schemeClr val="accent1"/>
-          </a:fillRef>
-          <a:effectRef idx="2">
-            <a:schemeClr val="accent1"/>
-          </a:effectRef>
-          <a:fontRef idx="minor">
-            <a:schemeClr val="lt1"/>
-          </a:fontRef>
-        </p:style>
-        <p:txBody>
-          <a:bodyPr rtlCol="0" anchor="ctr"/>
-          <a:lstStyle/>
-          <a:p>
-            <a:pPr algn="ctr"/>
-          </a:p>
-        </p:txBody>
-      </p:sp>
-      <p:sp>
-        <p:nvSpPr>
-          <p:cNvPr id="7" name="TextBox 6"/>
-          <p:cNvSpPr txBox="1"/>
-          <p:nvPr/>
-        </p:nvSpPr>
-        <p:spPr>
-          <a:xfrm>
-            <a:off x="813816" y="502920"/>
-            <a:ext cx="10634472" cy="685800"/>
+            <a:ext cx="10817352" cy="658368"/>
           </a:xfrm>
           <a:prstGeom prst="rect">
             <a:avLst/>
@@ -5574,27 +5884,27 @@
           <a:p>
             <a:pPr algn="l"/>
             <a:r>
-              <a:rPr sz="2400" b="1" i="0">
+              <a:rPr sz="2600" b="1" i="0">
                 <a:solidFill>
                   <a:srgbClr val="1F2C56"/>
                 </a:solidFill>
                 <a:latin typeface="Source Serif 4"/>
               </a:rPr>
-              <a:t>Das Eisberg-Modell der Kundenbedürfnisse</a:t>
-            </a:r>
-          </a:p>
-        </p:txBody>
-      </p:sp>
-      <p:sp>
-        <p:nvSpPr>
-          <p:cNvPr id="8" name="TextBox 7"/>
+              <a:t>Was Sie heute mitnehmen</a:t>
+            </a:r>
+          </a:p>
+        </p:txBody>
+      </p:sp>
+      <p:sp>
+        <p:nvSpPr>
+          <p:cNvPr id="7" name="TextBox 6"/>
           <p:cNvSpPr txBox="1"/>
           <p:nvPr/>
         </p:nvSpPr>
         <p:spPr>
           <a:xfrm>
-            <a:off x="685800" y="1417320"/>
-            <a:ext cx="10817352" cy="5029200"/>
+            <a:off x="685800" y="1371600"/>
+            <a:ext cx="10817352" cy="5120640"/>
           </a:xfrm>
           <a:prstGeom prst="rect">
             <a:avLst/>
@@ -5609,46 +5919,103 @@
           <a:p>
             <a:pPr>
               <a:spcBef>
-                <a:spcPts val="400"/>
+                <a:spcPts val="800"/>
               </a:spcBef>
               <a:spcAft>
                 <a:spcPts val="200"/>
               </a:spcAft>
             </a:pPr>
             <a:r>
-              <a:rPr sz="1300">
+              <a:rPr sz="1400">
                 <a:solidFill>
                   <a:srgbClr val="3D5466"/>
                 </a:solidFill>
                 <a:latin typeface="Arial"/>
               </a:rPr>
-              <a:t>▸  Explizite Bedarfe: Der Kunde benennt klar, was er will. „Ich brauche eine Anschlussfinanzierung für meine Maschine." Explizite Bedarfe entstehen, wenn der Kunde seine Situation analysiert und eine Lösung definiert hat.</a:t>
+              <a:t>▸  Explizite von latenten Bedarfen anhand konkreter Gesprächsbeispiele unterscheiden und Kundensignale systematisch zuordnen</a:t>
             </a:r>
           </a:p>
           <a:p>
             <a:pPr>
               <a:spcBef>
-                <a:spcPts val="400"/>
+                <a:spcPts val="800"/>
               </a:spcBef>
               <a:spcAft>
                 <a:spcPts val="200"/>
               </a:spcAft>
             </a:pPr>
             <a:r>
-              <a:rPr sz="1300">
+              <a:rPr sz="1400">
                 <a:solidFill>
                   <a:srgbClr val="3D5466"/>
                 </a:solidFill>
                 <a:latin typeface="Arial"/>
               </a:rPr>
-              <a:t>▸  Implizite (latente) Bedarfe: Der Kunde beschreibt ein Problem, einen Schmerz oder eine Unzufriedenheit, ohne eine Lösung zu benennen. „Unsere Abschreibungen sind dieses Jahr sehr hoch." Oder: „Ich mache mir Sorgen wegen der Nachfolge." Latente Bedarfe sind die Grundlage – und oft der eigentliche Grund für das Gespräch.</a:t>
-            </a:r>
-          </a:p>
-        </p:txBody>
-      </p:sp>
-      <p:sp>
-        <p:nvSpPr>
-          <p:cNvPr id="9" name="Rectangle 8"/>
+              <a:t>▸  Die SPIN-Fragetechnik in simulierten Kundengesprächen anwenden und implizite Problemformulierungen in explizite Bedarfsaussagen überführen</a:t>
+            </a:r>
+          </a:p>
+          <a:p>
+            <a:pPr>
+              <a:spcBef>
+                <a:spcPts val="800"/>
+              </a:spcBef>
+              <a:spcAft>
+                <a:spcPts val="200"/>
+              </a:spcAft>
+            </a:pPr>
+            <a:r>
+              <a:rPr sz="1400">
+                <a:solidFill>
+                  <a:srgbClr val="3D5466"/>
+                </a:solidFill>
+                <a:latin typeface="Arial"/>
+              </a:rPr>
+              <a:t>▸  Gesprächsverläufe auf latente Signale (verbal, paraverbal, nonverbal) analysieren und den wahrscheinlichen Hintergrundbedarf benennen</a:t>
+            </a:r>
+          </a:p>
+          <a:p>
+            <a:pPr>
+              <a:spcBef>
+                <a:spcPts val="800"/>
+              </a:spcBef>
+              <a:spcAft>
+                <a:spcPts val="200"/>
+              </a:spcAft>
+            </a:pPr>
+            <a:r>
+              <a:rPr sz="1400">
+                <a:solidFill>
+                  <a:srgbClr val="3D5466"/>
+                </a:solidFill>
+                <a:latin typeface="Arial"/>
+              </a:rPr>
+              <a:t>▸  Die Qualität des eigenen Frageverhaltens in Rollenspielen bewerten und konkrete Verbesserungsschritte ableiten</a:t>
+            </a:r>
+          </a:p>
+          <a:p>
+            <a:pPr>
+              <a:spcBef>
+                <a:spcPts val="800"/>
+              </a:spcBef>
+              <a:spcAft>
+                <a:spcPts val="200"/>
+              </a:spcAft>
+            </a:pPr>
+            <a:r>
+              <a:rPr sz="1400">
+                <a:solidFill>
+                  <a:srgbClr val="3D5466"/>
+                </a:solidFill>
+                <a:latin typeface="Arial"/>
+              </a:rPr>
+              <a:t>▸  Situationsgerecht zwischen verschiedenen Fragetechniken wählen und die Wahl begründen</a:t>
+            </a:r>
+          </a:p>
+        </p:txBody>
+      </p:sp>
+      <p:sp>
+        <p:nvSpPr>
+          <p:cNvPr id="8" name="Rectangle 7"/>
           <p:cNvSpPr/>
           <p:nvPr/>
         </p:nvSpPr>
@@ -5691,7 +6058,7 @@
       </p:sp>
       <p:sp>
         <p:nvSpPr>
-          <p:cNvPr id="10" name="TextBox 9"/>
+          <p:cNvPr id="9" name="TextBox 8"/>
           <p:cNvSpPr txBox="1"/>
           <p:nvPr/>
         </p:nvSpPr>
@@ -5757,7 +6124,7 @@
             <a:avLst/>
           </a:prstGeom>
           <a:solidFill>
-            <a:srgbClr val="FFFFFF"/>
+            <a:srgbClr val="EDEDF3"/>
           </a:solidFill>
           <a:ln>
             <a:noFill/>
@@ -5858,43 +6225,51 @@
                 </a:solidFill>
                 <a:latin typeface="JetBrains Mono"/>
               </a:rPr>
-              <a:t>M11  ·  SCHAUBILD</a:t>
-            </a:r>
-          </a:p>
-        </p:txBody>
-      </p:sp>
-      <p:sp>
-        <p:nvSpPr>
-          <p:cNvPr id="5" name="TextBox 4"/>
-          <p:cNvSpPr txBox="1"/>
-          <p:nvPr/>
-        </p:nvSpPr>
-        <p:spPr>
-          <a:xfrm>
-            <a:off x="685800" y="502920"/>
-            <a:ext cx="10817352" cy="594360"/>
-          </a:xfrm>
-          <a:prstGeom prst="rect">
-            <a:avLst/>
-          </a:prstGeom>
-          <a:noFill/>
-        </p:spPr>
-        <p:txBody>
-          <a:bodyPr wrap="square">
-            <a:spAutoFit/>
-          </a:bodyPr>
-          <a:lstStyle/>
-          <a:p>
-            <a:pPr algn="l"/>
-            <a:r>
-              <a:rPr sz="2000" b="1" i="0">
-                <a:solidFill>
-                  <a:srgbClr val="1F2C56"/>
-                </a:solidFill>
-                <a:latin typeface="Source Serif 4"/>
-              </a:rPr>
-              <a:t>Eisberg-Modell latente Bedarfe</a:t>
-            </a:r>
+              <a:t>M11  ·  INHALT</a:t>
+            </a:r>
+          </a:p>
+        </p:txBody>
+      </p:sp>
+      <p:sp>
+        <p:nvSpPr>
+          <p:cNvPr id="5" name="Rectangle 4"/>
+          <p:cNvSpPr/>
+          <p:nvPr/>
+        </p:nvSpPr>
+        <p:spPr>
+          <a:xfrm>
+            <a:off x="0" y="1234440"/>
+            <a:ext cx="12188952" cy="12700"/>
+          </a:xfrm>
+          <a:prstGeom prst="rect">
+            <a:avLst/>
+          </a:prstGeom>
+          <a:solidFill>
+            <a:srgbClr val="D8DFE4"/>
+          </a:solidFill>
+          <a:ln>
+            <a:noFill/>
+          </a:ln>
+        </p:spPr>
+        <p:style>
+          <a:lnRef idx="1">
+            <a:schemeClr val="accent1"/>
+          </a:lnRef>
+          <a:fillRef idx="3">
+            <a:schemeClr val="accent1"/>
+          </a:fillRef>
+          <a:effectRef idx="2">
+            <a:schemeClr val="accent1"/>
+          </a:effectRef>
+          <a:fontRef idx="minor">
+            <a:schemeClr val="lt1"/>
+          </a:fontRef>
+        </p:style>
+        <p:txBody>
+          <a:bodyPr rtlCol="0" anchor="ctr"/>
+          <a:lstStyle/>
+          <a:p>
+            <a:pPr algn="ctr"/>
           </a:p>
         </p:txBody>
       </p:sp>
@@ -5906,8 +6281,8 @@
         </p:nvSpPr>
         <p:spPr>
           <a:xfrm>
-            <a:off x="685800" y="1143000"/>
-            <a:ext cx="10817352" cy="25400"/>
+            <a:off x="685800" y="502920"/>
+            <a:ext cx="36576" cy="658368"/>
           </a:xfrm>
           <a:prstGeom prst="rect">
             <a:avLst/>
@@ -5941,33 +6316,105 @@
           </a:p>
         </p:txBody>
       </p:sp>
-      <p:pic>
-        <p:nvPicPr>
-          <p:cNvPr id="7" name="Picture 6" descr="image.png"/>
-          <p:cNvPicPr>
-            <a:picLocks noChangeAspect="1"/>
-          </p:cNvPicPr>
-          <p:nvPr/>
-        </p:nvPicPr>
-        <p:blipFill>
-          <a:blip r:embed="rId2"/>
-          <a:stretch>
-            <a:fillRect/>
-          </a:stretch>
-        </p:blipFill>
-        <p:spPr>
-          <a:xfrm>
-            <a:off x="2554863" y="1325880"/>
-            <a:ext cx="7079225" cy="4937760"/>
-          </a:xfrm>
-          <a:prstGeom prst="rect">
-            <a:avLst/>
-          </a:prstGeom>
-        </p:spPr>
-      </p:pic>
-      <p:sp>
-        <p:nvSpPr>
-          <p:cNvPr id="8" name="Rectangle 7"/>
+      <p:sp>
+        <p:nvSpPr>
+          <p:cNvPr id="7" name="TextBox 6"/>
+          <p:cNvSpPr txBox="1"/>
+          <p:nvPr/>
+        </p:nvSpPr>
+        <p:spPr>
+          <a:xfrm>
+            <a:off x="813816" y="502920"/>
+            <a:ext cx="10634472" cy="685800"/>
+          </a:xfrm>
+          <a:prstGeom prst="rect">
+            <a:avLst/>
+          </a:prstGeom>
+          <a:noFill/>
+        </p:spPr>
+        <p:txBody>
+          <a:bodyPr wrap="square">
+            <a:spAutoFit/>
+          </a:bodyPr>
+          <a:lstStyle/>
+          <a:p>
+            <a:pPr algn="l"/>
+            <a:r>
+              <a:rPr sz="2400" b="1" i="0">
+                <a:solidFill>
+                  <a:srgbClr val="1F2C56"/>
+                </a:solidFill>
+                <a:latin typeface="Source Serif 4"/>
+              </a:rPr>
+              <a:t>Das Eisberg-Modell der Kundenbedürfnisse</a:t>
+            </a:r>
+          </a:p>
+        </p:txBody>
+      </p:sp>
+      <p:sp>
+        <p:nvSpPr>
+          <p:cNvPr id="8" name="TextBox 7"/>
+          <p:cNvSpPr txBox="1"/>
+          <p:nvPr/>
+        </p:nvSpPr>
+        <p:spPr>
+          <a:xfrm>
+            <a:off x="685800" y="1417320"/>
+            <a:ext cx="10817352" cy="5029200"/>
+          </a:xfrm>
+          <a:prstGeom prst="rect">
+            <a:avLst/>
+          </a:prstGeom>
+          <a:noFill/>
+        </p:spPr>
+        <p:txBody>
+          <a:bodyPr wrap="square">
+            <a:spAutoFit/>
+          </a:bodyPr>
+          <a:lstStyle/>
+          <a:p>
+            <a:pPr>
+              <a:spcBef>
+                <a:spcPts val="400"/>
+              </a:spcBef>
+              <a:spcAft>
+                <a:spcPts val="200"/>
+              </a:spcAft>
+            </a:pPr>
+            <a:r>
+              <a:rPr sz="1300">
+                <a:solidFill>
+                  <a:srgbClr val="3D5466"/>
+                </a:solidFill>
+                <a:latin typeface="Arial"/>
+              </a:rPr>
+              <a:t>▸  Explizite Bedarfe: Der Kunde benennt klar, was er will. „Ich brauche eine Anschlussfinanzierung für meine Maschine." Explizite Bedarfe entstehen, wenn der Kunde seine Situation analysiert und eine Lösung definiert hat.</a:t>
+            </a:r>
+          </a:p>
+          <a:p>
+            <a:pPr>
+              <a:spcBef>
+                <a:spcPts val="400"/>
+              </a:spcBef>
+              <a:spcAft>
+                <a:spcPts val="200"/>
+              </a:spcAft>
+            </a:pPr>
+            <a:r>
+              <a:rPr sz="1300">
+                <a:solidFill>
+                  <a:srgbClr val="3D5466"/>
+                </a:solidFill>
+                <a:latin typeface="Arial"/>
+              </a:rPr>
+              <a:t>▸  Implizite (latente) Bedarfe: Der Kunde beschreibt ein Problem, einen Schmerz oder eine Unzufriedenheit, ohne eine Lösung zu benennen. „Unsere Abschreibungen sind dieses Jahr sehr hoch." Oder: „Ich mache mir Sorgen wegen der Nachfolge." Latente Bedarfe sind die Grundlage – und oft der eigentliche Grund für das Gespräch.</a:t>
+            </a:r>
+          </a:p>
+        </p:txBody>
+      </p:sp>
+      <p:sp>
+        <p:nvSpPr>
+          <p:cNvPr id="9" name="Rectangle 8"/>
           <p:cNvSpPr/>
           <p:nvPr/>
         </p:nvSpPr>
@@ -6010,7 +6457,7 @@
       </p:sp>
       <p:sp>
         <p:nvSpPr>
-          <p:cNvPr id="9" name="TextBox 8"/>
+          <p:cNvPr id="10" name="TextBox 9"/>
           <p:cNvSpPr txBox="1"/>
           <p:nvPr/>
         </p:nvSpPr>
@@ -6039,41 +6486,6 @@
                 <a:latin typeface="JetBrains Mono"/>
               </a:rPr>
               <a:t>Benedikt Zoller Coaching  ·  FKB Campus  ·  M11</a:t>
-            </a:r>
-          </a:p>
-        </p:txBody>
-      </p:sp>
-      <p:sp>
-        <p:nvSpPr>
-          <p:cNvPr id="10" name="TextBox 9"/>
-          <p:cNvSpPr txBox="1"/>
-          <p:nvPr/>
-        </p:nvSpPr>
-        <p:spPr>
-          <a:xfrm>
-            <a:off x="7176211" y="6583680"/>
-            <a:ext cx="4326940" cy="256032"/>
-          </a:xfrm>
-          <a:prstGeom prst="rect">
-            <a:avLst/>
-          </a:prstGeom>
-          <a:noFill/>
-        </p:spPr>
-        <p:txBody>
-          <a:bodyPr wrap="none">
-            <a:spAutoFit/>
-          </a:bodyPr>
-          <a:lstStyle/>
-          <a:p>
-            <a:pPr algn="r"/>
-            <a:r>
-              <a:rPr sz="700">
-                <a:solidFill>
-                  <a:srgbClr val="A0B4D2"/>
-                </a:solidFill>
-                <a:latin typeface="JetBrains Mono"/>
-              </a:rPr>
-              <a:t>Schaubild</a:t>
             </a:r>
           </a:p>
         </p:txBody>
@@ -6111,7 +6523,7 @@
             <a:avLst/>
           </a:prstGeom>
           <a:solidFill>
-            <a:srgbClr val="EDEDF3"/>
+            <a:srgbClr val="FFFFFF"/>
           </a:solidFill>
           <a:ln>
             <a:noFill/>
@@ -6212,51 +6624,43 @@
                 </a:solidFill>
                 <a:latin typeface="JetBrains Mono"/>
               </a:rPr>
-              <a:t>M11  ·  INHALT</a:t>
-            </a:r>
-          </a:p>
-        </p:txBody>
-      </p:sp>
-      <p:sp>
-        <p:nvSpPr>
-          <p:cNvPr id="5" name="Rectangle 4"/>
-          <p:cNvSpPr/>
-          <p:nvPr/>
-        </p:nvSpPr>
-        <p:spPr>
-          <a:xfrm>
-            <a:off x="0" y="1234440"/>
-            <a:ext cx="12188952" cy="12700"/>
-          </a:xfrm>
-          <a:prstGeom prst="rect">
-            <a:avLst/>
-          </a:prstGeom>
-          <a:solidFill>
-            <a:srgbClr val="D8DFE4"/>
-          </a:solidFill>
-          <a:ln>
-            <a:noFill/>
-          </a:ln>
-        </p:spPr>
-        <p:style>
-          <a:lnRef idx="1">
-            <a:schemeClr val="accent1"/>
-          </a:lnRef>
-          <a:fillRef idx="3">
-            <a:schemeClr val="accent1"/>
-          </a:fillRef>
-          <a:effectRef idx="2">
-            <a:schemeClr val="accent1"/>
-          </a:effectRef>
-          <a:fontRef idx="minor">
-            <a:schemeClr val="lt1"/>
-          </a:fontRef>
-        </p:style>
-        <p:txBody>
-          <a:bodyPr rtlCol="0" anchor="ctr"/>
-          <a:lstStyle/>
-          <a:p>
-            <a:pPr algn="ctr"/>
+              <a:t>M11  ·  SCHAUBILD</a:t>
+            </a:r>
+          </a:p>
+        </p:txBody>
+      </p:sp>
+      <p:sp>
+        <p:nvSpPr>
+          <p:cNvPr id="5" name="TextBox 4"/>
+          <p:cNvSpPr txBox="1"/>
+          <p:nvPr/>
+        </p:nvSpPr>
+        <p:spPr>
+          <a:xfrm>
+            <a:off x="685800" y="502920"/>
+            <a:ext cx="10817352" cy="594360"/>
+          </a:xfrm>
+          <a:prstGeom prst="rect">
+            <a:avLst/>
+          </a:prstGeom>
+          <a:noFill/>
+        </p:spPr>
+        <p:txBody>
+          <a:bodyPr wrap="square">
+            <a:spAutoFit/>
+          </a:bodyPr>
+          <a:lstStyle/>
+          <a:p>
+            <a:pPr algn="l"/>
+            <a:r>
+              <a:rPr sz="2000" b="1" i="0">
+                <a:solidFill>
+                  <a:srgbClr val="1F2C56"/>
+                </a:solidFill>
+                <a:latin typeface="Source Serif 4"/>
+              </a:rPr>
+              <a:t>Eisberg-Modell latente Bedarfe</a:t>
+            </a:r>
           </a:p>
         </p:txBody>
       </p:sp>
@@ -6268,8 +6672,8 @@
         </p:nvSpPr>
         <p:spPr>
           <a:xfrm>
-            <a:off x="685800" y="502920"/>
-            <a:ext cx="36576" cy="658368"/>
+            <a:off x="685800" y="1143000"/>
+            <a:ext cx="10817352" cy="25400"/>
           </a:xfrm>
           <a:prstGeom prst="rect">
             <a:avLst/>
@@ -6303,181 +6707,33 @@
           </a:p>
         </p:txBody>
       </p:sp>
-      <p:sp>
-        <p:nvSpPr>
-          <p:cNvPr id="7" name="TextBox 6"/>
-          <p:cNvSpPr txBox="1"/>
-          <p:nvPr/>
-        </p:nvSpPr>
-        <p:spPr>
-          <a:xfrm>
-            <a:off x="813816" y="502920"/>
-            <a:ext cx="10634472" cy="685800"/>
-          </a:xfrm>
-          <a:prstGeom prst="rect">
-            <a:avLst/>
-          </a:prstGeom>
-          <a:noFill/>
-        </p:spPr>
-        <p:txBody>
-          <a:bodyPr wrap="square">
-            <a:spAutoFit/>
-          </a:bodyPr>
-          <a:lstStyle/>
-          <a:p>
-            <a:pPr algn="l"/>
-            <a:r>
-              <a:rPr sz="2400" b="1" i="0">
-                <a:solidFill>
-                  <a:srgbClr val="1F2C56"/>
-                </a:solidFill>
-                <a:latin typeface="Source Serif 4"/>
-              </a:rPr>
-              <a:t>Warum Kunden latente Bedarfe nicht artikulieren</a:t>
-            </a:r>
-          </a:p>
-        </p:txBody>
-      </p:sp>
-      <p:sp>
-        <p:nvSpPr>
-          <p:cNvPr id="8" name="TextBox 7"/>
-          <p:cNvSpPr txBox="1"/>
-          <p:nvPr/>
-        </p:nvSpPr>
-        <p:spPr>
-          <a:xfrm>
-            <a:off x="685800" y="1417320"/>
-            <a:ext cx="10817352" cy="5029200"/>
-          </a:xfrm>
-          <a:prstGeom prst="rect">
-            <a:avLst/>
-          </a:prstGeom>
-          <a:noFill/>
-        </p:spPr>
-        <p:txBody>
-          <a:bodyPr wrap="square">
-            <a:spAutoFit/>
-          </a:bodyPr>
-          <a:lstStyle/>
-          <a:p>
-            <a:pPr>
-              <a:spcBef>
-                <a:spcPts val="400"/>
-              </a:spcBef>
-              <a:spcAft>
-                <a:spcPts val="200"/>
-              </a:spcAft>
-            </a:pPr>
-            <a:r>
-              <a:rPr sz="1200">
-                <a:solidFill>
-                  <a:srgbClr val="3D5466"/>
-                </a:solidFill>
-                <a:latin typeface="Arial"/>
-              </a:rPr>
-              <a:t>Es gibt vier Hauptgründe, warum Kunden ihre eigentlichen Bedarfe nicht spontan nennen (praxisbasiert; vgl. Rackham, 1988 , S. 57–62):</a:t>
-            </a:r>
-          </a:p>
-          <a:p>
-            <a:pPr>
-              <a:spcBef>
-                <a:spcPts val="400"/>
-              </a:spcBef>
-              <a:spcAft>
-                <a:spcPts val="200"/>
-              </a:spcAft>
-            </a:pPr>
-            <a:r>
-              <a:rPr sz="1300">
-                <a:solidFill>
-                  <a:srgbClr val="3D5466"/>
-                </a:solidFill>
-                <a:latin typeface="Arial"/>
-              </a:rPr>
-              <a:t>▸  Unbewusstheit: Der Bedarf ist noch nicht als solcher erkannt. Der Kunde spürt das Problem, hat es aber nicht als lösungswürdig eingeordnet.</a:t>
-            </a:r>
-          </a:p>
-          <a:p>
-            <a:pPr>
-              <a:spcBef>
-                <a:spcPts val="400"/>
-              </a:spcBef>
-              <a:spcAft>
-                <a:spcPts val="200"/>
-              </a:spcAft>
-            </a:pPr>
-            <a:r>
-              <a:rPr sz="1300">
-                <a:solidFill>
-                  <a:srgbClr val="3D5466"/>
-                </a:solidFill>
-                <a:latin typeface="Arial"/>
-              </a:rPr>
-              <a:t>▸  Schambarriere: Sensitive Themen wie Nachfolge, Unternehmenskrise oder Privatsphäre werden nicht freiwillig angesprochen.</a:t>
-            </a:r>
-          </a:p>
-          <a:p>
-            <a:pPr>
-              <a:spcBef>
-                <a:spcPts val="400"/>
-              </a:spcBef>
-              <a:spcAft>
-                <a:spcPts val="200"/>
-              </a:spcAft>
-            </a:pPr>
-            <a:r>
-              <a:rPr sz="1300">
-                <a:solidFill>
-                  <a:srgbClr val="3D5466"/>
-                </a:solidFill>
-                <a:latin typeface="Arial"/>
-              </a:rPr>
-              <a:t>▸  Fehlende Sicherheit: Der Kunde weiß nicht, ob der Berater kompetent genug ist für das eigentliche Thema. Im Volksbankenalltag kommt ein verstärkender Faktor hinzu: Häufige Beraterwechsel. Wer innerhalb von sechs Jahren den vierten Berater bekommt, hat gelernt, sensible Themen wie Nachfolge oder Unternehmenskrise nicht mehr anzusprechen – das Vertrauen für diese Ebene muss jedes Mal neu aufgebaut werden. Praxistipp: Eigene Erfahrungen kurz einbringen öffnet schneller als jede Frage – „Ich habe das bei einem anderen Kunden ähnlich erlebt, wie er das gelöst hat, war interessant…" signalisiert Kompetenz und schafft Vertrautheit.</a:t>
-            </a:r>
-          </a:p>
-          <a:p>
-            <a:pPr>
-              <a:spcBef>
-                <a:spcPts val="400"/>
-              </a:spcBef>
-              <a:spcAft>
-                <a:spcPts val="200"/>
-              </a:spcAft>
-            </a:pPr>
-            <a:r>
-              <a:rPr sz="1300">
-                <a:solidFill>
-                  <a:srgbClr val="3D5466"/>
-                </a:solidFill>
-                <a:latin typeface="Arial"/>
-              </a:rPr>
-              <a:t>▸  Gewohnheit: Der Kunde ist es gewohnt, dass Bankgespräche Produktgespräche sind – er stellt sich selbst anders ein.</a:t>
-            </a:r>
-          </a:p>
-          <a:p>
-            <a:pPr>
-              <a:spcBef>
-                <a:spcPts val="400"/>
-              </a:spcBef>
-              <a:spcAft>
-                <a:spcPts val="200"/>
-              </a:spcAft>
-            </a:pPr>
-            <a:r>
-              <a:rPr sz="1200">
-                <a:solidFill>
-                  <a:srgbClr val="3D5466"/>
-                </a:solidFill>
-                <a:latin typeface="Arial"/>
-              </a:rPr>
-              <a:t>Der Berater, der latente Bedarfe erkennen will, muss aktiv dazu einladen: durch offene Haltung, gezielte Fragen und echtes Zuhören.</a:t>
-            </a:r>
-          </a:p>
-        </p:txBody>
-      </p:sp>
-      <p:sp>
-        <p:nvSpPr>
-          <p:cNvPr id="9" name="Rectangle 8"/>
+      <p:pic>
+        <p:nvPicPr>
+          <p:cNvPr id="7" name="Picture 6" descr="image.png"/>
+          <p:cNvPicPr>
+            <a:picLocks noChangeAspect="1"/>
+          </p:cNvPicPr>
+          <p:nvPr/>
+        </p:nvPicPr>
+        <p:blipFill>
+          <a:blip r:embed="rId2"/>
+          <a:stretch>
+            <a:fillRect/>
+          </a:stretch>
+        </p:blipFill>
+        <p:spPr>
+          <a:xfrm>
+            <a:off x="2554863" y="1325880"/>
+            <a:ext cx="7079225" cy="4937760"/>
+          </a:xfrm>
+          <a:prstGeom prst="rect">
+            <a:avLst/>
+          </a:prstGeom>
+        </p:spPr>
+      </p:pic>
+      <p:sp>
+        <p:nvSpPr>
+          <p:cNvPr id="8" name="Rectangle 7"/>
           <p:cNvSpPr/>
           <p:nvPr/>
         </p:nvSpPr>
@@ -6520,7 +6776,7 @@
       </p:sp>
       <p:sp>
         <p:nvSpPr>
-          <p:cNvPr id="10" name="TextBox 9"/>
+          <p:cNvPr id="9" name="TextBox 8"/>
           <p:cNvSpPr txBox="1"/>
           <p:nvPr/>
         </p:nvSpPr>
@@ -6549,6 +6805,41 @@
                 <a:latin typeface="JetBrains Mono"/>
               </a:rPr>
               <a:t>Benedikt Zoller Coaching  ·  FKB Campus  ·  M11</a:t>
+            </a:r>
+          </a:p>
+        </p:txBody>
+      </p:sp>
+      <p:sp>
+        <p:nvSpPr>
+          <p:cNvPr id="10" name="TextBox 9"/>
+          <p:cNvSpPr txBox="1"/>
+          <p:nvPr/>
+        </p:nvSpPr>
+        <p:spPr>
+          <a:xfrm>
+            <a:off x="7176211" y="6583680"/>
+            <a:ext cx="4326940" cy="256032"/>
+          </a:xfrm>
+          <a:prstGeom prst="rect">
+            <a:avLst/>
+          </a:prstGeom>
+          <a:noFill/>
+        </p:spPr>
+        <p:txBody>
+          <a:bodyPr wrap="none">
+            <a:spAutoFit/>
+          </a:bodyPr>
+          <a:lstStyle/>
+          <a:p>
+            <a:pPr algn="r"/>
+            <a:r>
+              <a:rPr sz="700">
+                <a:solidFill>
+                  <a:srgbClr val="A0B4D2"/>
+                </a:solidFill>
+                <a:latin typeface="JetBrains Mono"/>
+              </a:rPr>
+              <a:t>Schaubild</a:t>
             </a:r>
           </a:p>
         </p:txBody>
@@ -6808,7 +7099,7 @@
                 </a:solidFill>
                 <a:latin typeface="Source Serif 4"/>
               </a:rPr>
-              <a:t>Typische latente Bedarfsfelder im Firmenkunden-Alltag</a:t>
+              <a:t>Warum Kunden latente Bedarfe nicht artikulieren</a:t>
             </a:r>
           </a:p>
         </p:txBody>
@@ -6850,7 +7141,7 @@
                 </a:solidFill>
                 <a:latin typeface="Arial"/>
               </a:rPr>
-              <a:t>Ein Berater braucht ein inneres Radar: Worauf soll ich achten? Die folgende Übersicht zeigt die vier häufigsten Felder – mit typischen Kundensignalen und passendem Gesprächseinstieg:</a:t>
+              <a:t>Es gibt vier Hauptgründe, warum Kunden ihre eigentlichen Bedarfe nicht spontan nennen (praxisbasiert; vgl. Rackham, 1988 , S. 57–62):</a:t>
             </a:r>
           </a:p>
           <a:p>
@@ -6863,13 +7154,13 @@
               </a:spcAft>
             </a:pPr>
             <a:r>
-              <a:rPr sz="1200">
+              <a:rPr sz="1300">
                 <a:solidFill>
                   <a:srgbClr val="3D5466"/>
                 </a:solidFill>
                 <a:latin typeface="Arial"/>
               </a:rPr>
-              <a:t>## 4.2 SPIN – Das Fragetechnik-System für tiefe Bedarfe</a:t>
+              <a:t>▸  Unbewusstheit: Der Bedarf ist noch nicht als solcher erkannt. Der Kunde spürt das Problem, hat es aber nicht als lösungswürdig eingeordnet.</a:t>
             </a:r>
           </a:p>
           <a:p>
@@ -6882,13 +7173,70 @@
               </a:spcAft>
             </a:pPr>
             <a:r>
-              <a:rPr sz="1200">
+              <a:rPr sz="1300">
                 <a:solidFill>
                   <a:srgbClr val="3D5466"/>
                 </a:solidFill>
                 <a:latin typeface="Arial"/>
               </a:rPr>
-              <a:t>Rackham (1988) entwickelte das SPIN-Modell auf Basis empirischer Gesprächsanalysen. Die vier Fragetypen führen den Kunden von der Oberfläche in die Tiefe:</a:t>
+              <a:t>▸  Schambarriere: Sensitive Themen wie Nachfolge, Unternehmenskrise oder Privatsphäre werden nicht freiwillig angesprochen.</a:t>
+            </a:r>
+          </a:p>
+          <a:p>
+            <a:pPr>
+              <a:spcBef>
+                <a:spcPts val="400"/>
+              </a:spcBef>
+              <a:spcAft>
+                <a:spcPts val="200"/>
+              </a:spcAft>
+            </a:pPr>
+            <a:r>
+              <a:rPr sz="1300">
+                <a:solidFill>
+                  <a:srgbClr val="3D5466"/>
+                </a:solidFill>
+                <a:latin typeface="Arial"/>
+              </a:rPr>
+              <a:t>▸  Fehlende Sicherheit: Der Kunde weiß nicht, ob der Berater kompetent genug ist für das eigentliche Thema. Im Volksbankenalltag kommt ein verstärkender Faktor hinzu: Häufige Beraterwechsel. Wer innerhalb von sechs Jahren den vierten Berater bekommt, hat gelernt, sensible Themen wie Nachfolge oder Unternehmenskrise nicht mehr anzusprechen – das Vertrauen für diese Ebene muss jedes Mal neu aufgebaut werden. Praxistipp: Eigene Erfahrungen kurz einbringen öffnet schneller als jede Frage – „Ich habe das bei einem anderen Kunden ähnlich erlebt, wie er das gelöst hat, war interessant…" signalisiert Kompetenz und schafft Vertrautheit.</a:t>
+            </a:r>
+          </a:p>
+          <a:p>
+            <a:pPr>
+              <a:spcBef>
+                <a:spcPts val="400"/>
+              </a:spcBef>
+              <a:spcAft>
+                <a:spcPts val="200"/>
+              </a:spcAft>
+            </a:pPr>
+            <a:r>
+              <a:rPr sz="1300">
+                <a:solidFill>
+                  <a:srgbClr val="3D5466"/>
+                </a:solidFill>
+                <a:latin typeface="Arial"/>
+              </a:rPr>
+              <a:t>▸  Gewohnheit: Der Kunde ist es gewohnt, dass Bankgespräche Produktgespräche sind – er stellt sich selbst anders ein.</a:t>
+            </a:r>
+          </a:p>
+          <a:p>
+            <a:pPr>
+              <a:spcBef>
+                <a:spcPts val="400"/>
+              </a:spcBef>
+              <a:spcAft>
+                <a:spcPts val="200"/>
+              </a:spcAft>
+            </a:pPr>
+            <a:r>
+              <a:rPr sz="1200">
+                <a:solidFill>
+                  <a:srgbClr val="3D5466"/>
+                </a:solidFill>
+                <a:latin typeface="Arial"/>
+              </a:rPr>
+              <a:t>Der Berater, der latente Bedarfe erkennen will, muss aktiv dazu einladen: durch offene Haltung, gezielte Fragen und echtes Zuhören.</a:t>
             </a:r>
           </a:p>
         </p:txBody>
@@ -7226,7 +7574,7 @@
                 </a:solidFill>
                 <a:latin typeface="Source Serif 4"/>
               </a:rPr>
-              <a:t>Fragetechnik in der Praxis: Drei Tiefen-Ebenen</a:t>
+              <a:t>Typische latente Bedarfsfelder im Firmenkunden-Alltag</a:t>
             </a:r>
           </a:p>
         </p:txBody>
@@ -7268,7 +7616,7 @@
                 </a:solidFill>
                 <a:latin typeface="Arial"/>
               </a:rPr>
-              <a:t>Latente Bedarfe liegen oft unter zwei oder drei Gesprächsschichten. Eine einfache Orientierung:</a:t>
+              <a:t>Ein Berater braucht ein inneres Radar: Worauf soll ich achten? Die folgende Übersicht zeigt die vier häufigsten Felder – mit typischen Kundensignalen und passendem Gesprächseinstieg:</a:t>
             </a:r>
           </a:p>
           <a:p>
@@ -7287,26 +7635,7 @@
                 </a:solidFill>
                 <a:latin typeface="Arial"/>
               </a:rPr>
-              <a:t>Ebene 1 – Thema (Was ist das Gesprächsthema?)</a:t>
-            </a:r>
-          </a:p>
-          <a:p>
-            <a:pPr>
-              <a:spcBef>
-                <a:spcPts val="600"/>
-              </a:spcBef>
-              <a:spcAft>
-                <a:spcPts val="200"/>
-              </a:spcAft>
-            </a:pPr>
-            <a:r>
-              <a:rPr sz="1200" i="1">
-                <a:solidFill>
-                  <a:srgbClr val="3D5466"/>
-                </a:solidFill>
-                <a:latin typeface="Arial"/>
-              </a:rPr>
-              <a:t>→  „Wie läuft das Geschäft aktuell?"</a:t>
+              <a:t>## 4.2 SPIN – Das Fragetechnik-System für tiefe Bedarfe</a:t>
             </a:r>
           </a:p>
           <a:p>
@@ -7325,159 +7654,7 @@
                 </a:solidFill>
                 <a:latin typeface="Arial"/>
               </a:rPr>
-              <a:t>Ebene 2 – Problem (Wo drückt der Schuh?)</a:t>
-            </a:r>
-          </a:p>
-          <a:p>
-            <a:pPr>
-              <a:spcBef>
-                <a:spcPts val="600"/>
-              </a:spcBef>
-              <a:spcAft>
-                <a:spcPts val="200"/>
-              </a:spcAft>
-            </a:pPr>
-            <a:r>
-              <a:rPr sz="1200" i="1">
-                <a:solidFill>
-                  <a:srgbClr val="3D5466"/>
-                </a:solidFill>
-                <a:latin typeface="Arial"/>
-              </a:rPr>
-              <a:t>→  „Sie sagten, die Personalkosten steigen. Was steckt dahinter?"</a:t>
-            </a:r>
-          </a:p>
-          <a:p>
-            <a:pPr>
-              <a:spcBef>
-                <a:spcPts val="400"/>
-              </a:spcBef>
-              <a:spcAft>
-                <a:spcPts val="200"/>
-              </a:spcAft>
-            </a:pPr>
-            <a:r>
-              <a:rPr sz="1200">
-                <a:solidFill>
-                  <a:srgbClr val="3D5466"/>
-                </a:solidFill>
-                <a:latin typeface="Arial"/>
-              </a:rPr>
-              <a:t>Ebene 3 – Bedeutung (Was steht auf dem Spiel?)</a:t>
-            </a:r>
-          </a:p>
-          <a:p>
-            <a:pPr>
-              <a:spcBef>
-                <a:spcPts val="600"/>
-              </a:spcBef>
-              <a:spcAft>
-                <a:spcPts val="200"/>
-              </a:spcAft>
-            </a:pPr>
-            <a:r>
-              <a:rPr sz="1200" i="1">
-                <a:solidFill>
-                  <a:srgbClr val="3D5466"/>
-                </a:solidFill>
-                <a:latin typeface="Arial"/>
-              </a:rPr>
-              <a:t>→  „Wenn sich das fortsetzt: Was bedeutet das für Ihre Pläne für die nächsten fünf Jahre?"</a:t>
-            </a:r>
-          </a:p>
-          <a:p>
-            <a:pPr>
-              <a:spcBef>
-                <a:spcPts val="400"/>
-              </a:spcBef>
-              <a:spcAft>
-                <a:spcPts val="200"/>
-              </a:spcAft>
-            </a:pPr>
-            <a:r>
-              <a:rPr sz="1200">
-                <a:solidFill>
-                  <a:srgbClr val="3D5466"/>
-                </a:solidFill>
-                <a:latin typeface="Arial"/>
-              </a:rPr>
-              <a:t>Erst auf Ebene 3 wird der latente Bedarf sichtbar – und damit auch, welches Produkt oder welche Lösung wirklich passt.</a:t>
-            </a:r>
-          </a:p>
-          <a:p>
-            <a:pPr>
-              <a:spcBef>
-                <a:spcPts val="400"/>
-              </a:spcBef>
-              <a:spcAft>
-                <a:spcPts val="200"/>
-              </a:spcAft>
-            </a:pPr>
-            <a:r>
-              <a:rPr sz="1200">
-                <a:solidFill>
-                  <a:srgbClr val="3D5466"/>
-                </a:solidFill>
-                <a:latin typeface="Arial"/>
-              </a:rPr>
-              <a:t>## 4.3 Signale erkennen: Die vier Kanäle</a:t>
-            </a:r>
-          </a:p>
-          <a:p>
-            <a:pPr>
-              <a:spcBef>
-                <a:spcPts val="400"/>
-              </a:spcBef>
-              <a:spcAft>
-                <a:spcPts val="200"/>
-              </a:spcAft>
-            </a:pPr>
-            <a:r>
-              <a:rPr sz="1200">
-                <a:solidFill>
-                  <a:srgbClr val="3D5466"/>
-                </a:solidFill>
-                <a:latin typeface="Arial"/>
-              </a:rPr>
-              <a:t>Kunden kommunizieren latente Bedarfe auf vier Kanälen gleichzeitig (Watzlawick et al., 1967; Schulz von Thun, 1981). Wer nur den Sachkanal hört, verpasst 75 % der Information.</a:t>
-            </a:r>
-          </a:p>
-          <a:p>
-            <a:pPr>
-              <a:spcBef>
-                <a:spcPts val="400"/>
-              </a:spcBef>
-              <a:spcAft>
-                <a:spcPts val="200"/>
-              </a:spcAft>
-            </a:pPr>
-            <a:r>
-              <a:rPr sz="1200">
-                <a:solidFill>
-                  <a:srgbClr val="3D5466"/>
-                </a:solidFill>
-                <a:latin typeface="Arial"/>
-              </a:rPr>
-              <a:t>Paraverbale Signale: Pausen, Zögern, plötzlich leiser werden, Themenwechsel nach Nachfrage.</a:t>
-            </a:r>
-          </a:p>
-          <a:p>
-            <a:pPr>
-              <a:spcBef>
-                <a:spcPts val="400"/>
-              </a:spcBef>
-              <a:spcAft>
-                <a:spcPts val="200"/>
-              </a:spcAft>
-            </a:pPr>
-            <a:r>
-              <a:rPr sz="1200">
-                <a:solidFill>
-                  <a:srgbClr val="3D5466"/>
-                </a:solidFill>
-                <a:latin typeface="Arial"/>
-              </a:rPr>
-              <a:t>Nonverbale Signale: Abwenden, kurzes Lächeln das nicht bis zu den Augen geht, angespannte Körperhaltung beim bestimmten Thema.</a:t>
+              <a:t>Rackham (1988) entwickelte das SPIN-Modell auf Basis empirischer Gesprächsanalysen. Die vier Fragetypen führen den Kunden von der Oberfläche in die Tiefe:</a:t>
             </a:r>
           </a:p>
         </p:txBody>
@@ -7815,7 +7992,7 @@
                 </a:solidFill>
                 <a:latin typeface="Source Serif 4"/>
               </a:rPr>
-              <a:t>Übung im Plenum: „Was höre ich wirklich?"</a:t>
+              <a:t>Fragetechnik in der Praxis: Drei Tiefen-Ebenen</a:t>
             </a:r>
           </a:p>
         </p:txBody>
@@ -7857,7 +8034,7 @@
                 </a:solidFill>
                 <a:latin typeface="Arial"/>
               </a:rPr>
-              <a:t>Der Trainer liest fünf Kundenaussagen vor. Die Teilnehmenden notieren: (1) Sachinhalt, (2) vermuteter latenter Hintergrund. Anschließend Auswertung im Plenum.</a:t>
+              <a:t>Latente Bedarfe liegen oft unter zwei oder drei Gesprächsschichten. Eine einfache Orientierung:</a:t>
             </a:r>
           </a:p>
           <a:p>
@@ -7876,7 +8053,26 @@
                 </a:solidFill>
                 <a:latin typeface="Arial"/>
               </a:rPr>
-              <a:t>## 4.4 Aktives Zuhören als Schlüsselkompetenz</a:t>
+              <a:t>Ebene 1 – Thema (Was ist das Gesprächsthema?)</a:t>
+            </a:r>
+          </a:p>
+          <a:p>
+            <a:pPr>
+              <a:spcBef>
+                <a:spcPts val="600"/>
+              </a:spcBef>
+              <a:spcAft>
+                <a:spcPts val="200"/>
+              </a:spcAft>
+            </a:pPr>
+            <a:r>
+              <a:rPr sz="1200" i="1">
+                <a:solidFill>
+                  <a:srgbClr val="3D5466"/>
+                </a:solidFill>
+                <a:latin typeface="Arial"/>
+              </a:rPr>
+              <a:t>→  „Wie läuft das Geschäft aktuell?"</a:t>
             </a:r>
           </a:p>
           <a:p>
@@ -7895,7 +8091,26 @@
                 </a:solidFill>
                 <a:latin typeface="Arial"/>
               </a:rPr>
-              <a:t>Techniken des aktiven Zuhörens:</a:t>
+              <a:t>Ebene 2 – Problem (Wo drückt der Schuh?)</a:t>
+            </a:r>
+          </a:p>
+          <a:p>
+            <a:pPr>
+              <a:spcBef>
+                <a:spcPts val="600"/>
+              </a:spcBef>
+              <a:spcAft>
+                <a:spcPts val="200"/>
+              </a:spcAft>
+            </a:pPr>
+            <a:r>
+              <a:rPr sz="1200" i="1">
+                <a:solidFill>
+                  <a:srgbClr val="3D5466"/>
+                </a:solidFill>
+                <a:latin typeface="Arial"/>
+              </a:rPr>
+              <a:t>→  „Sie sagten, die Personalkosten steigen. Was steckt dahinter?"</a:t>
             </a:r>
           </a:p>
           <a:p>
@@ -7908,13 +8123,32 @@
               </a:spcAft>
             </a:pPr>
             <a:r>
-              <a:rPr sz="1300">
+              <a:rPr sz="1200">
                 <a:solidFill>
                   <a:srgbClr val="3D5466"/>
                 </a:solidFill>
                 <a:latin typeface="Arial"/>
               </a:rPr>
-              <a:t>▸  Paraphrasieren: Den Kern des Gesagten in eigenen Worten wiedergeben. „Wenn ich Sie richtig verstehe, macht Ihnen weniger die Finanzierung Sorgen als die Frage, wer das Unternehmen in zehn Jahren führt?"</a:t>
+              <a:t>Ebene 3 – Bedeutung (Was steht auf dem Spiel?)</a:t>
+            </a:r>
+          </a:p>
+          <a:p>
+            <a:pPr>
+              <a:spcBef>
+                <a:spcPts val="600"/>
+              </a:spcBef>
+              <a:spcAft>
+                <a:spcPts val="200"/>
+              </a:spcAft>
+            </a:pPr>
+            <a:r>
+              <a:rPr sz="1200" i="1">
+                <a:solidFill>
+                  <a:srgbClr val="3D5466"/>
+                </a:solidFill>
+                <a:latin typeface="Arial"/>
+              </a:rPr>
+              <a:t>→  „Wenn sich das fortsetzt: Was bedeutet das für Ihre Pläne für die nächsten fünf Jahre?"</a:t>
             </a:r>
           </a:p>
           <a:p>
@@ -7927,13 +8161,13 @@
               </a:spcAft>
             </a:pPr>
             <a:r>
-              <a:rPr sz="1300">
+              <a:rPr sz="1200">
                 <a:solidFill>
                   <a:srgbClr val="3D5466"/>
                 </a:solidFill>
                 <a:latin typeface="Arial"/>
               </a:rPr>
-              <a:t>▸  Verbalisieren: Wahrgenommenes Gefühl benennen (mit Vorsicht). „Ich habe das Gefühl, das Thema liegt Ihnen schon länger am Herzen."</a:t>
+              <a:t>Erst auf Ebene 3 wird der latente Bedarf sichtbar – und damit auch, welches Produkt oder welche Lösung wirklich passt.</a:t>
             </a:r>
           </a:p>
           <a:p>
@@ -7946,13 +8180,13 @@
               </a:spcAft>
             </a:pPr>
             <a:r>
-              <a:rPr sz="1300">
+              <a:rPr sz="1200">
                 <a:solidFill>
                   <a:srgbClr val="3D5466"/>
                 </a:solidFill>
                 <a:latin typeface="Arial"/>
               </a:rPr>
-              <a:t>▸  Schweigen lassen: Pausen aushalten. Viele latente Bedarfe werden erst geäußert, wenn der Berater aufhört zu reden. Vier Sekunden Stille fühlen sich für einen unerfahrenen Berater wie eine Ewigkeit an – für den Kunden sind es vier Sekunden Denkzeit. Wer das Schweigen bricht, beraubt den Kunden dieser Denkzeit. Konkrete Hilfe: Nicken und Augenkontakt halten. Oder leise sagen: „Ich lasse Ihnen einen Moment." Nichts weiter. Rollenspielübung: Üben Sie bewusst, bis zu 6 Sekunden Stille auszuhalten, bevor Sie weitermachen – lassen Sie den Beobachter die Sekunden zählen.</a:t>
+              <a:t>## 4.3 Signale erkennen: Die vier Kanäle</a:t>
             </a:r>
           </a:p>
           <a:p>
@@ -7965,32 +8199,13 @@
               </a:spcAft>
             </a:pPr>
             <a:r>
-              <a:rPr sz="1300">
+              <a:rPr sz="1200">
                 <a:solidFill>
                   <a:srgbClr val="3D5466"/>
                 </a:solidFill>
                 <a:latin typeface="Arial"/>
               </a:rPr>
-              <a:t>▸  Offene Einladung: „Gibt es etwas, das wir heute noch ansprechen sollten, das wir noch nicht berührt haben?"</a:t>
-            </a:r>
-          </a:p>
-          <a:p>
-            <a:pPr>
-              <a:spcBef>
-                <a:spcPts val="600"/>
-              </a:spcBef>
-              <a:spcAft>
-                <a:spcPts val="200"/>
-              </a:spcAft>
-            </a:pPr>
-            <a:r>
-              <a:rPr sz="1200" i="1">
-                <a:solidFill>
-                  <a:srgbClr val="3D5466"/>
-                </a:solidFill>
-                <a:latin typeface="Arial"/>
-              </a:rPr>
-              <a:t>→  Eine der wichtigsten Fragen am Ende jedes Gesprächs: „Ist noch etwas, das ich wissen sollte?" Einfach. Direkt. Wirkungsvoll.</a:t>
+              <a:t>Kunden kommunizieren latente Bedarfe auf vier Kanälen gleichzeitig (Watzlawick et al., 1967; Schulz von Thun, 1981). Wer nur den Sachkanal hört, verpasst 75 % der Information.</a:t>
             </a:r>
           </a:p>
           <a:p>
@@ -8009,7 +8224,7 @@
                 </a:solidFill>
                 <a:latin typeface="Arial"/>
               </a:rPr>
-              <a:t>## 4.5 Praxiscase: Das Zinsgespräch, das keines ist</a:t>
+              <a:t>Paraverbale Signale: Pausen, Zögern, plötzlich leiser werden, Themenwechsel nach Nachfrage.</a:t>
             </a:r>
           </a:p>
           <a:p>
@@ -8028,45 +8243,7 @@
                 </a:solidFill>
                 <a:latin typeface="Arial"/>
               </a:rPr>
-              <a:t>Ausgangssituation</a:t>
-            </a:r>
-          </a:p>
-          <a:p>
-            <a:pPr>
-              <a:spcBef>
-                <a:spcPts val="400"/>
-              </a:spcBef>
-              <a:spcAft>
-                <a:spcPts val="200"/>
-              </a:spcAft>
-            </a:pPr>
-            <a:r>
-              <a:rPr sz="1200">
-                <a:solidFill>
-                  <a:srgbClr val="3D5466"/>
-                </a:solidFill>
-                <a:latin typeface="Arial"/>
-              </a:rPr>
-              <a:t>Die zuständige Beraterin Lisa Kern bereitet sich auf ein Konditionengespräch vor.</a:t>
-            </a:r>
-          </a:p>
-          <a:p>
-            <a:pPr>
-              <a:spcBef>
-                <a:spcPts val="400"/>
-              </a:spcBef>
-              <a:spcAft>
-                <a:spcPts val="200"/>
-              </a:spcAft>
-            </a:pPr>
-            <a:r>
-              <a:rPr sz="1200">
-                <a:solidFill>
-                  <a:srgbClr val="3D5466"/>
-                </a:solidFill>
-                <a:latin typeface="Arial"/>
-              </a:rPr>
-              <a:t>Das Gespräch</a:t>
+              <a:t>Nonverbale Signale: Abwenden, kurzes Lächeln das nicht bis zu den Augen geht, angespannte Körperhaltung beim bestimmten Thema.</a:t>
             </a:r>
           </a:p>
         </p:txBody>
@@ -8404,7 +8581,7 @@
                 </a:solidFill>
                 <a:latin typeface="Source Serif 4"/>
               </a:rPr>
-              <a:t>Arbeitsblatt A: SPIN-Fragen vorbereiten</a:t>
+              <a:t>Übung im Plenum: „Was höre ich wirklich?"</a:t>
             </a:r>
           </a:p>
         </p:txBody>
@@ -8446,7 +8623,7 @@
                 </a:solidFill>
                 <a:latin typeface="Arial"/>
               </a:rPr>
-              <a:t>Bereiten Sie für jede SPIN-Kategorie mindestens zwei Fragen vor, die zu diesem Kunden passen:</a:t>
+              <a:t>Der Trainer liest fünf Kundenaussagen vor. Die Teilnehmenden notieren: (1) Sachinhalt, (2) vermuteter latenter Hintergrund. Anschließend Auswertung im Plenum.</a:t>
             </a:r>
           </a:p>
           <a:p>
@@ -8465,7 +8642,197 @@
                 </a:solidFill>
                 <a:latin typeface="Arial"/>
               </a:rPr>
-              <a:t>Meine Hypothese: Welchen latenten Bedarf könnte dieser Kunde haben?</a:t>
+              <a:t>## 4.4 Aktives Zuhören als Schlüsselkompetenz</a:t>
+            </a:r>
+          </a:p>
+          <a:p>
+            <a:pPr>
+              <a:spcBef>
+                <a:spcPts val="400"/>
+              </a:spcBef>
+              <a:spcAft>
+                <a:spcPts val="200"/>
+              </a:spcAft>
+            </a:pPr>
+            <a:r>
+              <a:rPr sz="1200">
+                <a:solidFill>
+                  <a:srgbClr val="3D5466"/>
+                </a:solidFill>
+                <a:latin typeface="Arial"/>
+              </a:rPr>
+              <a:t>Techniken des aktiven Zuhörens:</a:t>
+            </a:r>
+          </a:p>
+          <a:p>
+            <a:pPr>
+              <a:spcBef>
+                <a:spcPts val="400"/>
+              </a:spcBef>
+              <a:spcAft>
+                <a:spcPts val="200"/>
+              </a:spcAft>
+            </a:pPr>
+            <a:r>
+              <a:rPr sz="1300">
+                <a:solidFill>
+                  <a:srgbClr val="3D5466"/>
+                </a:solidFill>
+                <a:latin typeface="Arial"/>
+              </a:rPr>
+              <a:t>▸  Paraphrasieren: Den Kern des Gesagten in eigenen Worten wiedergeben. „Wenn ich Sie richtig verstehe, macht Ihnen weniger die Finanzierung Sorgen als die Frage, wer das Unternehmen in zehn Jahren führt?"</a:t>
+            </a:r>
+          </a:p>
+          <a:p>
+            <a:pPr>
+              <a:spcBef>
+                <a:spcPts val="400"/>
+              </a:spcBef>
+              <a:spcAft>
+                <a:spcPts val="200"/>
+              </a:spcAft>
+            </a:pPr>
+            <a:r>
+              <a:rPr sz="1300">
+                <a:solidFill>
+                  <a:srgbClr val="3D5466"/>
+                </a:solidFill>
+                <a:latin typeface="Arial"/>
+              </a:rPr>
+              <a:t>▸  Verbalisieren: Wahrgenommenes Gefühl benennen (mit Vorsicht). „Ich habe das Gefühl, das Thema liegt Ihnen schon länger am Herzen."</a:t>
+            </a:r>
+          </a:p>
+          <a:p>
+            <a:pPr>
+              <a:spcBef>
+                <a:spcPts val="400"/>
+              </a:spcBef>
+              <a:spcAft>
+                <a:spcPts val="200"/>
+              </a:spcAft>
+            </a:pPr>
+            <a:r>
+              <a:rPr sz="1300">
+                <a:solidFill>
+                  <a:srgbClr val="3D5466"/>
+                </a:solidFill>
+                <a:latin typeface="Arial"/>
+              </a:rPr>
+              <a:t>▸  Schweigen lassen: Pausen aushalten. Viele latente Bedarfe werden erst geäußert, wenn der Berater aufhört zu reden. Vier Sekunden Stille fühlen sich für einen unerfahrenen Berater wie eine Ewigkeit an – für den Kunden sind es vier Sekunden Denkzeit. Wer das Schweigen bricht, beraubt den Kunden dieser Denkzeit. Konkrete Hilfe: Nicken und Augenkontakt halten. Oder leise sagen: „Ich lasse Ihnen einen Moment." Nichts weiter. Rollenspielübung: Üben Sie bewusst, bis zu 6 Sekunden Stille auszuhalten, bevor Sie weitermachen – lassen Sie den Beobachter die Sekunden zählen.</a:t>
+            </a:r>
+          </a:p>
+          <a:p>
+            <a:pPr>
+              <a:spcBef>
+                <a:spcPts val="400"/>
+              </a:spcBef>
+              <a:spcAft>
+                <a:spcPts val="200"/>
+              </a:spcAft>
+            </a:pPr>
+            <a:r>
+              <a:rPr sz="1300">
+                <a:solidFill>
+                  <a:srgbClr val="3D5466"/>
+                </a:solidFill>
+                <a:latin typeface="Arial"/>
+              </a:rPr>
+              <a:t>▸  Offene Einladung: „Gibt es etwas, das wir heute noch ansprechen sollten, das wir noch nicht berührt haben?"</a:t>
+            </a:r>
+          </a:p>
+          <a:p>
+            <a:pPr>
+              <a:spcBef>
+                <a:spcPts val="600"/>
+              </a:spcBef>
+              <a:spcAft>
+                <a:spcPts val="200"/>
+              </a:spcAft>
+            </a:pPr>
+            <a:r>
+              <a:rPr sz="1200" i="1">
+                <a:solidFill>
+                  <a:srgbClr val="3D5466"/>
+                </a:solidFill>
+                <a:latin typeface="Arial"/>
+              </a:rPr>
+              <a:t>→  Eine der wichtigsten Fragen am Ende jedes Gesprächs: „Ist noch etwas, das ich wissen sollte?" Einfach. Direkt. Wirkungsvoll.</a:t>
+            </a:r>
+          </a:p>
+          <a:p>
+            <a:pPr>
+              <a:spcBef>
+                <a:spcPts val="400"/>
+              </a:spcBef>
+              <a:spcAft>
+                <a:spcPts val="200"/>
+              </a:spcAft>
+            </a:pPr>
+            <a:r>
+              <a:rPr sz="1200">
+                <a:solidFill>
+                  <a:srgbClr val="3D5466"/>
+                </a:solidFill>
+                <a:latin typeface="Arial"/>
+              </a:rPr>
+              <a:t>## 4.5 Praxiscase: Das Zinsgespräch, das keines ist</a:t>
+            </a:r>
+          </a:p>
+          <a:p>
+            <a:pPr>
+              <a:spcBef>
+                <a:spcPts val="400"/>
+              </a:spcBef>
+              <a:spcAft>
+                <a:spcPts val="200"/>
+              </a:spcAft>
+            </a:pPr>
+            <a:r>
+              <a:rPr sz="1200">
+                <a:solidFill>
+                  <a:srgbClr val="3D5466"/>
+                </a:solidFill>
+                <a:latin typeface="Arial"/>
+              </a:rPr>
+              <a:t>Ausgangssituation</a:t>
+            </a:r>
+          </a:p>
+          <a:p>
+            <a:pPr>
+              <a:spcBef>
+                <a:spcPts val="400"/>
+              </a:spcBef>
+              <a:spcAft>
+                <a:spcPts val="200"/>
+              </a:spcAft>
+            </a:pPr>
+            <a:r>
+              <a:rPr sz="1200">
+                <a:solidFill>
+                  <a:srgbClr val="3D5466"/>
+                </a:solidFill>
+                <a:latin typeface="Arial"/>
+              </a:rPr>
+              <a:t>Die zuständige Beraterin Lisa Kern bereitet sich auf ein Konditionengespräch vor.</a:t>
+            </a:r>
+          </a:p>
+          <a:p>
+            <a:pPr>
+              <a:spcBef>
+                <a:spcPts val="400"/>
+              </a:spcBef>
+              <a:spcAft>
+                <a:spcPts val="200"/>
+              </a:spcAft>
+            </a:pPr>
+            <a:r>
+              <a:rPr sz="1200">
+                <a:solidFill>
+                  <a:srgbClr val="3D5466"/>
+                </a:solidFill>
+                <a:latin typeface="Arial"/>
+              </a:rPr>
+              <a:t>Das Gespräch</a:t>
             </a:r>
           </a:p>
         </p:txBody>

--- a/protected-downloads/praesentation/M11.pptx
+++ b/protected-downloads/praesentation/M11.pptx
@@ -16,6 +16,9 @@
     <p:sldId id="264" r:id="rId16"/>
     <p:sldId id="265" r:id="rId17"/>
     <p:sldId id="266" r:id="rId18"/>
+    <p:sldId id="267" r:id="rId19"/>
+    <p:sldId id="268" r:id="rId20"/>
+    <p:sldId id="269" r:id="rId21"/>
   </p:sldIdLst>
   <p:sldSz cx="12188952" cy="6858000" type="screen4x3"/>
   <p:notesSz cx="6858000" cy="9144000"/>
@@ -512,7 +515,7 @@
           <a:lstStyle/>
           <a:p>
             <a:r>
-              <a:t>Siehe Trainerhandbuch (Sektion 3) für Moderationshinweise, Timing und erwartete Teilnehmerreaktionen.</a:t>
+              <a:t>Agenda aus dem Ablaufplan (Sektion 3.1). Timing und Pausen siehe Trainerhandbuch.</a:t>
             </a:r>
           </a:p>
         </p:txBody>
@@ -792,7 +795,7 @@
           <a:lstStyle/>
           <a:p>
             <a:r>
-              <a:t>Auswertungshilfe (Musterlösungen – nur für Trainer/Seminarleitung)</a:t>
+              <a:t>Siehe Trainerhandbuch (Sektion 3) für Moderationshinweise, Timing und erwartete Teilnehmerreaktionen.</a:t>
             </a:r>
           </a:p>
         </p:txBody>
@@ -862,7 +865,7 @@
           <a:lstStyle/>
           <a:p>
             <a:r>
-              <a:t>Siehe Trainerhandbuch (Sektion 3) für Moderationshinweise, Timing und erwartete Teilnehmerreaktionen.</a:t>
+              <a:t>Auswertungshilfe (Musterlösungen – nur für Trainer/Seminarleitung)</a:t>
             </a:r>
           </a:p>
         </p:txBody>
@@ -888,6 +891,76 @@
 </file>
 
 <file path=ppt/notesSlides/notesSlide7.xml><?xml version="1.0" encoding="utf-8"?>
+<p:notes xmlns:a="http://schemas.openxmlformats.org/drawingml/2006/main" xmlns:p="http://schemas.openxmlformats.org/presentationml/2006/main" xmlns:r="http://schemas.openxmlformats.org/officeDocument/2006/relationships">
+  <p:cSld>
+    <p:spTree>
+      <p:nvGrpSpPr>
+        <p:cNvPr id="1" name=""/>
+        <p:cNvGrpSpPr/>
+        <p:nvPr/>
+      </p:nvGrpSpPr>
+      <p:grpSpPr>
+        <a:xfrm>
+          <a:off x="0" y="0"/>
+          <a:ext cx="0" cy="0"/>
+          <a:chOff x="0" y="0"/>
+          <a:chExt cx="0" cy="0"/>
+        </a:xfrm>
+      </p:grpSpPr>
+      <p:sp>
+        <p:nvSpPr>
+          <p:cNvPr id="2" name="Slide Image Placeholder 1"/>
+          <p:cNvSpPr>
+            <a:spLocks noGrp="1"/>
+          </p:cNvSpPr>
+          <p:nvPr>
+            <p:ph type="sldImg" idx="2"/>
+          </p:nvPr>
+        </p:nvSpPr>
+        <p:spPr/>
+      </p:sp>
+      <p:sp>
+        <p:nvSpPr>
+          <p:cNvPr id="3" name="Notes Placeholder 2"/>
+          <p:cNvSpPr>
+            <a:spLocks noGrp="1"/>
+          </p:cNvSpPr>
+          <p:nvPr>
+            <p:ph type="body" idx="3" sz="quarter"/>
+          </p:nvPr>
+        </p:nvSpPr>
+        <p:spPr/>
+        <p:txBody>
+          <a:bodyPr/>
+          <a:lstStyle/>
+          <a:p>
+            <a:r>
+              <a:t>Siehe Trainerhandbuch (Sektion 3) für Moderationshinweise, Timing und erwartete Teilnehmerreaktionen.</a:t>
+            </a:r>
+          </a:p>
+        </p:txBody>
+      </p:sp>
+      <p:sp>
+        <p:nvSpPr>
+          <p:cNvPr id="4" name="Slide Number Placeholder 3"/>
+          <p:cNvSpPr>
+            <a:spLocks noGrp="1"/>
+          </p:cNvSpPr>
+          <p:nvPr>
+            <p:ph type="sldNum" idx="5" sz="quarter"/>
+          </p:nvPr>
+        </p:nvSpPr>
+        <p:spPr/>
+      </p:sp>
+    </p:spTree>
+  </p:cSld>
+  <p:clrMapOvr>
+    <a:masterClrMapping/>
+  </p:clrMapOvr>
+</p:notes>
+</file>
+
+<file path=ppt/notesSlides/notesSlide8.xml><?xml version="1.0" encoding="utf-8"?>
 <p:notes xmlns:a="http://schemas.openxmlformats.org/drawingml/2006/main" xmlns:p="http://schemas.openxmlformats.org/presentationml/2006/main" xmlns:r="http://schemas.openxmlformats.org/officeDocument/2006/relationships">
   <p:cSld>
     <p:spTree>
@@ -4750,7 +4823,7 @@
                 </a:solidFill>
                 <a:latin typeface="Source Serif 4"/>
               </a:rPr>
-              <a:t>Arbeitsblatt A: SPIN-Fragen vorbereiten</a:t>
+              <a:t>Übung im Plenum: „Was höre ich wirklich?"</a:t>
             </a:r>
           </a:p>
         </p:txBody>
@@ -4786,13 +4859,13 @@
               </a:spcAft>
             </a:pPr>
             <a:r>
-              <a:rPr sz="1200">
+              <a:rPr sz="1300">
                 <a:solidFill>
                   <a:srgbClr val="3D5466"/>
                 </a:solidFill>
                 <a:latin typeface="Arial"/>
               </a:rPr>
-              <a:t>Bereiten Sie für jede SPIN-Kategorie mindestens zwei Fragen vor, die zu diesem Kunden passen:</a:t>
+              <a:t>▸  Der Trainer liest fünf Kundenaussagen vor. Die Teilnehmenden notieren: (1) Sachinhalt, (2) vermuteter latenter Hintergrund. Anschließend Auswertung im Plenum.</a:t>
             </a:r>
           </a:p>
           <a:p>
@@ -4805,13 +4878,203 @@
               </a:spcAft>
             </a:pPr>
             <a:r>
-              <a:rPr sz="1200">
+              <a:rPr sz="1300">
                 <a:solidFill>
                   <a:srgbClr val="3D5466"/>
                 </a:solidFill>
                 <a:latin typeface="Arial"/>
               </a:rPr>
-              <a:t>Meine Hypothese: Welchen latenten Bedarf könnte dieser Kunde haben?</a:t>
+              <a:t>▸  ## 4.4 Aktives Zuhören als Schlüsselkompetenz</a:t>
+            </a:r>
+          </a:p>
+          <a:p>
+            <a:pPr>
+              <a:spcBef>
+                <a:spcPts val="400"/>
+              </a:spcBef>
+              <a:spcAft>
+                <a:spcPts val="200"/>
+              </a:spcAft>
+            </a:pPr>
+            <a:r>
+              <a:rPr sz="1300">
+                <a:solidFill>
+                  <a:srgbClr val="3D5466"/>
+                </a:solidFill>
+                <a:latin typeface="Arial"/>
+              </a:rPr>
+              <a:t>▸  Techniken des aktiven Zuhörens:</a:t>
+            </a:r>
+          </a:p>
+          <a:p>
+            <a:pPr>
+              <a:spcBef>
+                <a:spcPts val="400"/>
+              </a:spcBef>
+              <a:spcAft>
+                <a:spcPts val="200"/>
+              </a:spcAft>
+            </a:pPr>
+            <a:r>
+              <a:rPr sz="1300">
+                <a:solidFill>
+                  <a:srgbClr val="3D5466"/>
+                </a:solidFill>
+                <a:latin typeface="Arial"/>
+              </a:rPr>
+              <a:t>▸  Paraphrasieren: Den Kern des Gesagten in eigenen Worten wiedergeben. „Wenn ich Sie richtig verstehe, macht Ihnen weniger die Finanzierung Sorgen als die Frage, wer das Unternehmen in zehn Jahren führt?"</a:t>
+            </a:r>
+          </a:p>
+          <a:p>
+            <a:pPr>
+              <a:spcBef>
+                <a:spcPts val="400"/>
+              </a:spcBef>
+              <a:spcAft>
+                <a:spcPts val="200"/>
+              </a:spcAft>
+            </a:pPr>
+            <a:r>
+              <a:rPr sz="1300">
+                <a:solidFill>
+                  <a:srgbClr val="3D5466"/>
+                </a:solidFill>
+                <a:latin typeface="Arial"/>
+              </a:rPr>
+              <a:t>▸  Verbalisieren: Wahrgenommenes Gefühl benennen (mit Vorsicht). „Ich habe das Gefühl, das Thema liegt Ihnen schon länger am Herzen."</a:t>
+            </a:r>
+          </a:p>
+          <a:p>
+            <a:pPr>
+              <a:spcBef>
+                <a:spcPts val="400"/>
+              </a:spcBef>
+              <a:spcAft>
+                <a:spcPts val="200"/>
+              </a:spcAft>
+            </a:pPr>
+            <a:r>
+              <a:rPr sz="1300">
+                <a:solidFill>
+                  <a:srgbClr val="3D5466"/>
+                </a:solidFill>
+                <a:latin typeface="Arial"/>
+              </a:rPr>
+              <a:t>▸  Schweigen lassen: Pausen aushalten. Viele latente Bedarfe werden erst geäußert, wenn der Berater aufhört zu reden. Vier Sekunden Stille fühlen sich für einen unerfahrenen Berater wie eine Ewigkeit an – für den Kunden sind es vier Sekunden Denkzeit. Wer das Schweigen bricht, beraubt den Kunden dieser Denkzeit. Konkrete Hilfe: Nicken und Augenkontakt halten. Oder leise sagen: „Ich lasse Ihnen einen Moment." Nichts weiter. Rollenspielübung: Üben Sie bewusst, bis zu 6 Sekunden Stille auszuhalten, bevor Sie weitermachen – lassen Sie den Beobachter die Sekunden zählen.</a:t>
+            </a:r>
+          </a:p>
+          <a:p>
+            <a:pPr>
+              <a:spcBef>
+                <a:spcPts val="400"/>
+              </a:spcBef>
+              <a:spcAft>
+                <a:spcPts val="200"/>
+              </a:spcAft>
+            </a:pPr>
+            <a:r>
+              <a:rPr sz="1300">
+                <a:solidFill>
+                  <a:srgbClr val="3D5466"/>
+                </a:solidFill>
+                <a:latin typeface="Arial"/>
+              </a:rPr>
+              <a:t>▸  Offene Einladung: „Gibt es etwas, das wir heute noch ansprechen sollten, das wir noch nicht berührt haben?"</a:t>
+            </a:r>
+          </a:p>
+          <a:p>
+            <a:pPr>
+              <a:spcBef>
+                <a:spcPts val="600"/>
+              </a:spcBef>
+              <a:spcAft>
+                <a:spcPts val="200"/>
+              </a:spcAft>
+            </a:pPr>
+            <a:r>
+              <a:rPr sz="1200" i="1">
+                <a:solidFill>
+                  <a:srgbClr val="3D5466"/>
+                </a:solidFill>
+                <a:latin typeface="Arial"/>
+              </a:rPr>
+              <a:t>→  Eine der wichtigsten Fragen am Ende jedes Gesprächs: „Ist noch etwas, das ich wissen sollte?" Einfach. Direkt. Wirkungsvoll.</a:t>
+            </a:r>
+          </a:p>
+          <a:p>
+            <a:pPr>
+              <a:spcBef>
+                <a:spcPts val="400"/>
+              </a:spcBef>
+              <a:spcAft>
+                <a:spcPts val="200"/>
+              </a:spcAft>
+            </a:pPr>
+            <a:r>
+              <a:rPr sz="1300">
+                <a:solidFill>
+                  <a:srgbClr val="3D5466"/>
+                </a:solidFill>
+                <a:latin typeface="Arial"/>
+              </a:rPr>
+              <a:t>▸  ## 4.5 Praxiscase: Das Zinsgespräch, das keines ist</a:t>
+            </a:r>
+          </a:p>
+          <a:p>
+            <a:pPr>
+              <a:spcBef>
+                <a:spcPts val="400"/>
+              </a:spcBef>
+              <a:spcAft>
+                <a:spcPts val="200"/>
+              </a:spcAft>
+            </a:pPr>
+            <a:r>
+              <a:rPr sz="1300">
+                <a:solidFill>
+                  <a:srgbClr val="3D5466"/>
+                </a:solidFill>
+                <a:latin typeface="Arial"/>
+              </a:rPr>
+              <a:t>▸  Ausgangssituation</a:t>
+            </a:r>
+          </a:p>
+          <a:p>
+            <a:pPr>
+              <a:spcBef>
+                <a:spcPts val="400"/>
+              </a:spcBef>
+              <a:spcAft>
+                <a:spcPts val="200"/>
+              </a:spcAft>
+            </a:pPr>
+            <a:r>
+              <a:rPr sz="1300">
+                <a:solidFill>
+                  <a:srgbClr val="3D5466"/>
+                </a:solidFill>
+                <a:latin typeface="Arial"/>
+              </a:rPr>
+              <a:t>▸  Die zuständige Beraterin Lisa Kern bereitet sich auf ein Konditionengespräch vor.</a:t>
+            </a:r>
+          </a:p>
+          <a:p>
+            <a:pPr>
+              <a:spcBef>
+                <a:spcPts val="400"/>
+              </a:spcBef>
+              <a:spcAft>
+                <a:spcPts val="200"/>
+              </a:spcAft>
+            </a:pPr>
+            <a:r>
+              <a:rPr sz="1300">
+                <a:solidFill>
+                  <a:srgbClr val="3D5466"/>
+                </a:solidFill>
+                <a:latin typeface="Arial"/>
+              </a:rPr>
+              <a:t>▸  Das Gespräch</a:t>
             </a:r>
           </a:p>
         </p:txBody>
@@ -5149,7 +5412,7 @@
                 </a:solidFill>
                 <a:latin typeface="Source Serif 4"/>
               </a:rPr>
-              <a:t>Arbeitsblatt B: Beobachtungsbogen Rollenspiel</a:t>
+              <a:t>Arbeitsblatt A: SPIN-Fragen vorbereiten</a:t>
             </a:r>
           </a:p>
         </p:txBody>
@@ -5185,13 +5448,13 @@
               </a:spcAft>
             </a:pPr>
             <a:r>
-              <a:rPr sz="1200">
+              <a:rPr sz="1300">
                 <a:solidFill>
                   <a:srgbClr val="3D5466"/>
                 </a:solidFill>
                 <a:latin typeface="Arial"/>
               </a:rPr>
-              <a:t>(Wird vom Beobachter ausgefüllt – nicht vom Spielenden)</a:t>
+              <a:t>▸  Bereiten Sie für jede SPIN-Kategorie mindestens zwei Fragen vor, die zu diesem Kunden passen:</a:t>
             </a:r>
           </a:p>
           <a:p>
@@ -5204,15 +5467,945 @@
               </a:spcAft>
             </a:pPr>
             <a:r>
-              <a:rPr sz="1200">
+              <a:rPr sz="1300">
                 <a:solidFill>
                   <a:srgbClr val="3D5466"/>
                 </a:solidFill>
                 <a:latin typeface="Arial"/>
               </a:rPr>
-              <a:t>Stärkster Moment im Gespräch:</a:t>
-            </a:r>
-          </a:p>
+              <a:t>▸  Meine Hypothese: Welchen latenten Bedarf könnte dieser Kunde haben?</a:t>
+            </a:r>
+          </a:p>
+        </p:txBody>
+      </p:sp>
+      <p:sp>
+        <p:nvSpPr>
+          <p:cNvPr id="9" name="Rectangle 8"/>
+          <p:cNvSpPr/>
+          <p:nvPr/>
+        </p:nvSpPr>
+        <p:spPr>
+          <a:xfrm>
+            <a:off x="0" y="6510528"/>
+            <a:ext cx="12188952" cy="347472"/>
+          </a:xfrm>
+          <a:prstGeom prst="rect">
+            <a:avLst/>
+          </a:prstGeom>
+          <a:solidFill>
+            <a:srgbClr val="0A1937"/>
+          </a:solidFill>
+          <a:ln>
+            <a:noFill/>
+          </a:ln>
+        </p:spPr>
+        <p:style>
+          <a:lnRef idx="1">
+            <a:schemeClr val="accent1"/>
+          </a:lnRef>
+          <a:fillRef idx="3">
+            <a:schemeClr val="accent1"/>
+          </a:fillRef>
+          <a:effectRef idx="2">
+            <a:schemeClr val="accent1"/>
+          </a:effectRef>
+          <a:fontRef idx="minor">
+            <a:schemeClr val="lt1"/>
+          </a:fontRef>
+        </p:style>
+        <p:txBody>
+          <a:bodyPr rtlCol="0" anchor="ctr"/>
+          <a:lstStyle/>
+          <a:p>
+            <a:pPr algn="ctr"/>
+          </a:p>
+        </p:txBody>
+      </p:sp>
+      <p:sp>
+        <p:nvSpPr>
+          <p:cNvPr id="10" name="TextBox 9"/>
+          <p:cNvSpPr txBox="1"/>
+          <p:nvPr/>
+        </p:nvSpPr>
+        <p:spPr>
+          <a:xfrm>
+            <a:off x="685800" y="6583680"/>
+            <a:ext cx="6490411" cy="256032"/>
+          </a:xfrm>
+          <a:prstGeom prst="rect">
+            <a:avLst/>
+          </a:prstGeom>
+          <a:noFill/>
+        </p:spPr>
+        <p:txBody>
+          <a:bodyPr wrap="none">
+            <a:spAutoFit/>
+          </a:bodyPr>
+          <a:lstStyle/>
+          <a:p>
+            <a:pPr algn="l"/>
+            <a:r>
+              <a:rPr sz="700">
+                <a:solidFill>
+                  <a:srgbClr val="A0B4D2"/>
+                </a:solidFill>
+                <a:latin typeface="JetBrains Mono"/>
+              </a:rPr>
+              <a:t>Benedikt Zoller Coaching  ·  FKB Campus  ·  M11</a:t>
+            </a:r>
+          </a:p>
+        </p:txBody>
+      </p:sp>
+    </p:spTree>
+  </p:cSld>
+  <p:clrMapOvr>
+    <a:masterClrMapping/>
+  </p:clrMapOvr>
+</p:sld>
+</file>
+
+<file path=ppt/slides/slide12.xml><?xml version="1.0" encoding="utf-8"?>
+<p:sld xmlns:a="http://schemas.openxmlformats.org/drawingml/2006/main" xmlns:p="http://schemas.openxmlformats.org/presentationml/2006/main" xmlns:r="http://schemas.openxmlformats.org/officeDocument/2006/relationships">
+  <p:cSld>
+    <p:spTree>
+      <p:nvGrpSpPr>
+        <p:cNvPr id="1" name=""/>
+        <p:cNvGrpSpPr/>
+        <p:nvPr/>
+      </p:nvGrpSpPr>
+      <p:grpSpPr/>
+      <p:sp>
+        <p:nvSpPr>
+          <p:cNvPr id="2" name="Rectangle 1"/>
+          <p:cNvSpPr/>
+          <p:nvPr/>
+        </p:nvSpPr>
+        <p:spPr>
+          <a:xfrm>
+            <a:off x="0" y="0"/>
+            <a:ext cx="12188952" cy="6858000"/>
+          </a:xfrm>
+          <a:prstGeom prst="rect">
+            <a:avLst/>
+          </a:prstGeom>
+          <a:solidFill>
+            <a:srgbClr val="FFFFFF"/>
+          </a:solidFill>
+          <a:ln>
+            <a:noFill/>
+          </a:ln>
+        </p:spPr>
+        <p:style>
+          <a:lnRef idx="1">
+            <a:schemeClr val="accent1"/>
+          </a:lnRef>
+          <a:fillRef idx="3">
+            <a:schemeClr val="accent1"/>
+          </a:fillRef>
+          <a:effectRef idx="2">
+            <a:schemeClr val="accent1"/>
+          </a:effectRef>
+          <a:fontRef idx="minor">
+            <a:schemeClr val="lt1"/>
+          </a:fontRef>
+        </p:style>
+        <p:txBody>
+          <a:bodyPr rtlCol="0" anchor="ctr"/>
+          <a:lstStyle/>
+          <a:p>
+            <a:pPr algn="ctr"/>
+          </a:p>
+        </p:txBody>
+      </p:sp>
+      <p:sp>
+        <p:nvSpPr>
+          <p:cNvPr id="3" name="Rectangle 2"/>
+          <p:cNvSpPr/>
+          <p:nvPr/>
+        </p:nvSpPr>
+        <p:spPr>
+          <a:xfrm>
+            <a:off x="0" y="0"/>
+            <a:ext cx="12188952" cy="50292"/>
+          </a:xfrm>
+          <a:prstGeom prst="rect">
+            <a:avLst/>
+          </a:prstGeom>
+          <a:solidFill>
+            <a:srgbClr val="1F2C56"/>
+          </a:solidFill>
+          <a:ln>
+            <a:noFill/>
+          </a:ln>
+        </p:spPr>
+        <p:style>
+          <a:lnRef idx="1">
+            <a:schemeClr val="accent1"/>
+          </a:lnRef>
+          <a:fillRef idx="3">
+            <a:schemeClr val="accent1"/>
+          </a:fillRef>
+          <a:effectRef idx="2">
+            <a:schemeClr val="accent1"/>
+          </a:effectRef>
+          <a:fontRef idx="minor">
+            <a:schemeClr val="lt1"/>
+          </a:fontRef>
+        </p:style>
+        <p:txBody>
+          <a:bodyPr rtlCol="0" anchor="ctr"/>
+          <a:lstStyle/>
+          <a:p>
+            <a:pPr algn="ctr"/>
+          </a:p>
+        </p:txBody>
+      </p:sp>
+      <p:sp>
+        <p:nvSpPr>
+          <p:cNvPr id="4" name="TextBox 3"/>
+          <p:cNvSpPr txBox="1"/>
+          <p:nvPr/>
+        </p:nvSpPr>
+        <p:spPr>
+          <a:xfrm>
+            <a:off x="685800" y="109728"/>
+            <a:ext cx="10817352" cy="228600"/>
+          </a:xfrm>
+          <a:prstGeom prst="rect">
+            <a:avLst/>
+          </a:prstGeom>
+          <a:noFill/>
+        </p:spPr>
+        <p:txBody>
+          <a:bodyPr wrap="none">
+            <a:spAutoFit/>
+          </a:bodyPr>
+          <a:lstStyle/>
+          <a:p>
+            <a:pPr algn="l"/>
+            <a:r>
+              <a:rPr sz="750">
+                <a:solidFill>
+                  <a:srgbClr val="78808C"/>
+                </a:solidFill>
+                <a:latin typeface="JetBrains Mono"/>
+              </a:rPr>
+              <a:t>M11  ·  ÜBERSICHT</a:t>
+            </a:r>
+          </a:p>
+        </p:txBody>
+      </p:sp>
+      <p:sp>
+        <p:nvSpPr>
+          <p:cNvPr id="5" name="TextBox 4"/>
+          <p:cNvSpPr txBox="1"/>
+          <p:nvPr/>
+        </p:nvSpPr>
+        <p:spPr>
+          <a:xfrm>
+            <a:off x="685800" y="502920"/>
+            <a:ext cx="10817352" cy="594360"/>
+          </a:xfrm>
+          <a:prstGeom prst="rect">
+            <a:avLst/>
+          </a:prstGeom>
+          <a:noFill/>
+        </p:spPr>
+        <p:txBody>
+          <a:bodyPr wrap="square">
+            <a:spAutoFit/>
+          </a:bodyPr>
+          <a:lstStyle/>
+          <a:p>
+            <a:pPr algn="l"/>
+            <a:r>
+              <a:rPr sz="2000" b="1" i="0">
+                <a:solidFill>
+                  <a:srgbClr val="1F2C56"/>
+                </a:solidFill>
+                <a:latin typeface="Source Serif 4"/>
+              </a:rPr>
+              <a:t>Arbeitsblatt A: SPIN-Fragen vorbereiten</a:t>
+            </a:r>
+          </a:p>
+        </p:txBody>
+      </p:sp>
+      <p:sp>
+        <p:nvSpPr>
+          <p:cNvPr id="6" name="Rectangle 5"/>
+          <p:cNvSpPr/>
+          <p:nvPr/>
+        </p:nvSpPr>
+        <p:spPr>
+          <a:xfrm>
+            <a:off x="685800" y="1143000"/>
+            <a:ext cx="10817352" cy="25400"/>
+          </a:xfrm>
+          <a:prstGeom prst="rect">
+            <a:avLst/>
+          </a:prstGeom>
+          <a:solidFill>
+            <a:srgbClr val="D9C089"/>
+          </a:solidFill>
+          <a:ln>
+            <a:noFill/>
+          </a:ln>
+        </p:spPr>
+        <p:style>
+          <a:lnRef idx="1">
+            <a:schemeClr val="accent1"/>
+          </a:lnRef>
+          <a:fillRef idx="3">
+            <a:schemeClr val="accent1"/>
+          </a:fillRef>
+          <a:effectRef idx="2">
+            <a:schemeClr val="accent1"/>
+          </a:effectRef>
+          <a:fontRef idx="minor">
+            <a:schemeClr val="lt1"/>
+          </a:fontRef>
+        </p:style>
+        <p:txBody>
+          <a:bodyPr rtlCol="0" anchor="ctr"/>
+          <a:lstStyle/>
+          <a:p>
+            <a:pPr algn="ctr"/>
+          </a:p>
+        </p:txBody>
+      </p:sp>
+      <p:graphicFrame>
+        <p:nvGraphicFramePr>
+          <p:cNvPr id="7" name="Table 6"/>
+          <p:cNvGraphicFramePr>
+            <a:graphicFrameLocks noGrp="1"/>
+          </p:cNvGraphicFramePr>
+          <p:nvPr/>
+        </p:nvGraphicFramePr>
+        <p:xfrm>
+          <a:off x="685800" y="1417320"/>
+          <a:ext cx="10817352" cy="1920240"/>
+        </p:xfrm>
+        <a:graphic>
+          <a:graphicData uri="http://schemas.openxmlformats.org/drawingml/2006/table">
+            <a:tbl>
+              <a:tblPr firstRow="1" bandRow="1">
+                <a:tableStyleId>{5C22544A-7EE6-4342-B048-85BDC9FD1C3A}</a:tableStyleId>
+              </a:tblPr>
+              <a:tblGrid>
+                <a:gridCol w="3605784"/>
+                <a:gridCol w="3605784"/>
+                <a:gridCol w="3605784"/>
+              </a:tblGrid>
+              <a:tr h="384048">
+                <a:tc>
+                  <a:txBody>
+                    <a:bodyPr/>
+                    <a:lstStyle/>
+                    <a:p>
+                      <a:r>
+                        <a:rPr sz="1100" b="1">
+                          <a:solidFill>
+                            <a:srgbClr val="FFFFFF"/>
+                          </a:solidFill>
+                          <a:latin typeface="Arial"/>
+                        </a:rPr>
+                        <a:t>Fragetyp</a:t>
+                      </a:r>
+                    </a:p>
+                  </a:txBody>
+                  <a:tcPr>
+                    <a:solidFill>
+                      <a:srgbClr val="1F2C56"/>
+                    </a:solidFill>
+                  </a:tcPr>
+                </a:tc>
+                <a:tc>
+                  <a:txBody>
+                    <a:bodyPr/>
+                    <a:lstStyle/>
+                    <a:p>
+                      <a:r>
+                        <a:rPr sz="1100" b="1">
+                          <a:solidFill>
+                            <a:srgbClr val="FFFFFF"/>
+                          </a:solidFill>
+                          <a:latin typeface="Arial"/>
+                        </a:rPr>
+                        <a:t>Meine Frage 1</a:t>
+                      </a:r>
+                    </a:p>
+                  </a:txBody>
+                  <a:tcPr>
+                    <a:solidFill>
+                      <a:srgbClr val="1F2C56"/>
+                    </a:solidFill>
+                  </a:tcPr>
+                </a:tc>
+                <a:tc>
+                  <a:txBody>
+                    <a:bodyPr/>
+                    <a:lstStyle/>
+                    <a:p>
+                      <a:r>
+                        <a:rPr sz="1100" b="1">
+                          <a:solidFill>
+                            <a:srgbClr val="FFFFFF"/>
+                          </a:solidFill>
+                          <a:latin typeface="Arial"/>
+                        </a:rPr>
+                        <a:t>Meine Frage 2</a:t>
+                      </a:r>
+                    </a:p>
+                  </a:txBody>
+                  <a:tcPr>
+                    <a:solidFill>
+                      <a:srgbClr val="1F2C56"/>
+                    </a:solidFill>
+                  </a:tcPr>
+                </a:tc>
+              </a:tr>
+              <a:tr h="384048">
+                <a:tc>
+                  <a:txBody>
+                    <a:bodyPr/>
+                    <a:lstStyle/>
+                    <a:p>
+                      <a:r>
+                        <a:rPr sz="1050">
+                          <a:solidFill>
+                            <a:srgbClr val="3D5466"/>
+                          </a:solidFill>
+                          <a:latin typeface="Arial"/>
+                        </a:rPr>
+                        <a:t>Situationsfrage</a:t>
+                      </a:r>
+                    </a:p>
+                  </a:txBody>
+                  <a:tcPr/>
+                </a:tc>
+                <a:tc>
+                  <a:txBody>
+                    <a:bodyPr/>
+                    <a:lstStyle/>
+                    <a:p/>
+                  </a:txBody>
+                  <a:tcPr/>
+                </a:tc>
+                <a:tc>
+                  <a:txBody>
+                    <a:bodyPr/>
+                    <a:lstStyle/>
+                    <a:p/>
+                  </a:txBody>
+                  <a:tcPr/>
+                </a:tc>
+              </a:tr>
+              <a:tr h="384048">
+                <a:tc>
+                  <a:txBody>
+                    <a:bodyPr/>
+                    <a:lstStyle/>
+                    <a:p>
+                      <a:r>
+                        <a:rPr sz="1050">
+                          <a:solidFill>
+                            <a:srgbClr val="3D5466"/>
+                          </a:solidFill>
+                          <a:latin typeface="Arial"/>
+                        </a:rPr>
+                        <a:t>Problemfrage</a:t>
+                      </a:r>
+                    </a:p>
+                  </a:txBody>
+                  <a:tcPr/>
+                </a:tc>
+                <a:tc>
+                  <a:txBody>
+                    <a:bodyPr/>
+                    <a:lstStyle/>
+                    <a:p/>
+                  </a:txBody>
+                  <a:tcPr/>
+                </a:tc>
+                <a:tc>
+                  <a:txBody>
+                    <a:bodyPr/>
+                    <a:lstStyle/>
+                    <a:p/>
+                  </a:txBody>
+                  <a:tcPr/>
+                </a:tc>
+              </a:tr>
+              <a:tr h="384048">
+                <a:tc>
+                  <a:txBody>
+                    <a:bodyPr/>
+                    <a:lstStyle/>
+                    <a:p>
+                      <a:r>
+                        <a:rPr sz="1050">
+                          <a:solidFill>
+                            <a:srgbClr val="3D5466"/>
+                          </a:solidFill>
+                          <a:latin typeface="Arial"/>
+                        </a:rPr>
+                        <a:t>Implikationsfrage</a:t>
+                      </a:r>
+                    </a:p>
+                  </a:txBody>
+                  <a:tcPr/>
+                </a:tc>
+                <a:tc>
+                  <a:txBody>
+                    <a:bodyPr/>
+                    <a:lstStyle/>
+                    <a:p/>
+                  </a:txBody>
+                  <a:tcPr/>
+                </a:tc>
+                <a:tc>
+                  <a:txBody>
+                    <a:bodyPr/>
+                    <a:lstStyle/>
+                    <a:p/>
+                  </a:txBody>
+                  <a:tcPr/>
+                </a:tc>
+              </a:tr>
+              <a:tr h="384048">
+                <a:tc>
+                  <a:txBody>
+                    <a:bodyPr/>
+                    <a:lstStyle/>
+                    <a:p>
+                      <a:r>
+                        <a:rPr sz="1050">
+                          <a:solidFill>
+                            <a:srgbClr val="3D5466"/>
+                          </a:solidFill>
+                          <a:latin typeface="Arial"/>
+                        </a:rPr>
+                        <a:t>Nutzenfrage</a:t>
+                      </a:r>
+                    </a:p>
+                  </a:txBody>
+                  <a:tcPr/>
+                </a:tc>
+                <a:tc>
+                  <a:txBody>
+                    <a:bodyPr/>
+                    <a:lstStyle/>
+                    <a:p/>
+                  </a:txBody>
+                  <a:tcPr/>
+                </a:tc>
+                <a:tc>
+                  <a:txBody>
+                    <a:bodyPr/>
+                    <a:lstStyle/>
+                    <a:p/>
+                  </a:txBody>
+                  <a:tcPr/>
+                </a:tc>
+              </a:tr>
+            </a:tbl>
+          </a:graphicData>
+        </a:graphic>
+      </p:graphicFrame>
+      <p:sp>
+        <p:nvSpPr>
+          <p:cNvPr id="8" name="Rectangle 7"/>
+          <p:cNvSpPr/>
+          <p:nvPr/>
+        </p:nvSpPr>
+        <p:spPr>
+          <a:xfrm>
+            <a:off x="0" y="6510528"/>
+            <a:ext cx="12188952" cy="347472"/>
+          </a:xfrm>
+          <a:prstGeom prst="rect">
+            <a:avLst/>
+          </a:prstGeom>
+          <a:solidFill>
+            <a:srgbClr val="0A1937"/>
+          </a:solidFill>
+          <a:ln>
+            <a:noFill/>
+          </a:ln>
+        </p:spPr>
+        <p:style>
+          <a:lnRef idx="1">
+            <a:schemeClr val="accent1"/>
+          </a:lnRef>
+          <a:fillRef idx="3">
+            <a:schemeClr val="accent1"/>
+          </a:fillRef>
+          <a:effectRef idx="2">
+            <a:schemeClr val="accent1"/>
+          </a:effectRef>
+          <a:fontRef idx="minor">
+            <a:schemeClr val="lt1"/>
+          </a:fontRef>
+        </p:style>
+        <p:txBody>
+          <a:bodyPr rtlCol="0" anchor="ctr"/>
+          <a:lstStyle/>
+          <a:p>
+            <a:pPr algn="ctr"/>
+          </a:p>
+        </p:txBody>
+      </p:sp>
+      <p:sp>
+        <p:nvSpPr>
+          <p:cNvPr id="9" name="TextBox 8"/>
+          <p:cNvSpPr txBox="1"/>
+          <p:nvPr/>
+        </p:nvSpPr>
+        <p:spPr>
+          <a:xfrm>
+            <a:off x="685800" y="6583680"/>
+            <a:ext cx="6490411" cy="256032"/>
+          </a:xfrm>
+          <a:prstGeom prst="rect">
+            <a:avLst/>
+          </a:prstGeom>
+          <a:noFill/>
+        </p:spPr>
+        <p:txBody>
+          <a:bodyPr wrap="none">
+            <a:spAutoFit/>
+          </a:bodyPr>
+          <a:lstStyle/>
+          <a:p>
+            <a:pPr algn="l"/>
+            <a:r>
+              <a:rPr sz="700">
+                <a:solidFill>
+                  <a:srgbClr val="A0B4D2"/>
+                </a:solidFill>
+                <a:latin typeface="JetBrains Mono"/>
+              </a:rPr>
+              <a:t>Benedikt Zoller Coaching  ·  FKB Campus  ·  M11</a:t>
+            </a:r>
+          </a:p>
+        </p:txBody>
+      </p:sp>
+      <p:sp>
+        <p:nvSpPr>
+          <p:cNvPr id="10" name="TextBox 9"/>
+          <p:cNvSpPr txBox="1"/>
+          <p:nvPr/>
+        </p:nvSpPr>
+        <p:spPr>
+          <a:xfrm>
+            <a:off x="7176211" y="6583680"/>
+            <a:ext cx="4326940" cy="256032"/>
+          </a:xfrm>
+          <a:prstGeom prst="rect">
+            <a:avLst/>
+          </a:prstGeom>
+          <a:noFill/>
+        </p:spPr>
+        <p:txBody>
+          <a:bodyPr wrap="none">
+            <a:spAutoFit/>
+          </a:bodyPr>
+          <a:lstStyle/>
+          <a:p>
+            <a:pPr algn="r"/>
+            <a:r>
+              <a:rPr sz="700">
+                <a:solidFill>
+                  <a:srgbClr val="A0B4D2"/>
+                </a:solidFill>
+                <a:latin typeface="JetBrains Mono"/>
+              </a:rPr>
+              <a:t>Übersicht</a:t>
+            </a:r>
+          </a:p>
+        </p:txBody>
+      </p:sp>
+    </p:spTree>
+  </p:cSld>
+  <p:clrMapOvr>
+    <a:masterClrMapping/>
+  </p:clrMapOvr>
+</p:sld>
+</file>
+
+<file path=ppt/slides/slide13.xml><?xml version="1.0" encoding="utf-8"?>
+<p:sld xmlns:a="http://schemas.openxmlformats.org/drawingml/2006/main" xmlns:p="http://schemas.openxmlformats.org/presentationml/2006/main" xmlns:r="http://schemas.openxmlformats.org/officeDocument/2006/relationships">
+  <p:cSld>
+    <p:spTree>
+      <p:nvGrpSpPr>
+        <p:cNvPr id="1" name=""/>
+        <p:cNvGrpSpPr/>
+        <p:nvPr/>
+      </p:nvGrpSpPr>
+      <p:grpSpPr/>
+      <p:sp>
+        <p:nvSpPr>
+          <p:cNvPr id="2" name="Rectangle 1"/>
+          <p:cNvSpPr/>
+          <p:nvPr/>
+        </p:nvSpPr>
+        <p:spPr>
+          <a:xfrm>
+            <a:off x="0" y="0"/>
+            <a:ext cx="12188952" cy="6858000"/>
+          </a:xfrm>
+          <a:prstGeom prst="rect">
+            <a:avLst/>
+          </a:prstGeom>
+          <a:solidFill>
+            <a:srgbClr val="EDEDF3"/>
+          </a:solidFill>
+          <a:ln>
+            <a:noFill/>
+          </a:ln>
+        </p:spPr>
+        <p:style>
+          <a:lnRef idx="1">
+            <a:schemeClr val="accent1"/>
+          </a:lnRef>
+          <a:fillRef idx="3">
+            <a:schemeClr val="accent1"/>
+          </a:fillRef>
+          <a:effectRef idx="2">
+            <a:schemeClr val="accent1"/>
+          </a:effectRef>
+          <a:fontRef idx="minor">
+            <a:schemeClr val="lt1"/>
+          </a:fontRef>
+        </p:style>
+        <p:txBody>
+          <a:bodyPr rtlCol="0" anchor="ctr"/>
+          <a:lstStyle/>
+          <a:p>
+            <a:pPr algn="ctr"/>
+          </a:p>
+        </p:txBody>
+      </p:sp>
+      <p:sp>
+        <p:nvSpPr>
+          <p:cNvPr id="3" name="Rectangle 2"/>
+          <p:cNvSpPr/>
+          <p:nvPr/>
+        </p:nvSpPr>
+        <p:spPr>
+          <a:xfrm>
+            <a:off x="0" y="0"/>
+            <a:ext cx="12188952" cy="50292"/>
+          </a:xfrm>
+          <a:prstGeom prst="rect">
+            <a:avLst/>
+          </a:prstGeom>
+          <a:solidFill>
+            <a:srgbClr val="1F2C56"/>
+          </a:solidFill>
+          <a:ln>
+            <a:noFill/>
+          </a:ln>
+        </p:spPr>
+        <p:style>
+          <a:lnRef idx="1">
+            <a:schemeClr val="accent1"/>
+          </a:lnRef>
+          <a:fillRef idx="3">
+            <a:schemeClr val="accent1"/>
+          </a:fillRef>
+          <a:effectRef idx="2">
+            <a:schemeClr val="accent1"/>
+          </a:effectRef>
+          <a:fontRef idx="minor">
+            <a:schemeClr val="lt1"/>
+          </a:fontRef>
+        </p:style>
+        <p:txBody>
+          <a:bodyPr rtlCol="0" anchor="ctr"/>
+          <a:lstStyle/>
+          <a:p>
+            <a:pPr algn="ctr"/>
+          </a:p>
+        </p:txBody>
+      </p:sp>
+      <p:sp>
+        <p:nvSpPr>
+          <p:cNvPr id="4" name="TextBox 3"/>
+          <p:cNvSpPr txBox="1"/>
+          <p:nvPr/>
+        </p:nvSpPr>
+        <p:spPr>
+          <a:xfrm>
+            <a:off x="685800" y="109728"/>
+            <a:ext cx="10817352" cy="228600"/>
+          </a:xfrm>
+          <a:prstGeom prst="rect">
+            <a:avLst/>
+          </a:prstGeom>
+          <a:noFill/>
+        </p:spPr>
+        <p:txBody>
+          <a:bodyPr wrap="none">
+            <a:spAutoFit/>
+          </a:bodyPr>
+          <a:lstStyle/>
+          <a:p>
+            <a:pPr algn="l"/>
+            <a:r>
+              <a:rPr sz="750">
+                <a:solidFill>
+                  <a:srgbClr val="78808C"/>
+                </a:solidFill>
+                <a:latin typeface="JetBrains Mono"/>
+              </a:rPr>
+              <a:t>M11  ·  INHALT</a:t>
+            </a:r>
+          </a:p>
+        </p:txBody>
+      </p:sp>
+      <p:sp>
+        <p:nvSpPr>
+          <p:cNvPr id="5" name="Rectangle 4"/>
+          <p:cNvSpPr/>
+          <p:nvPr/>
+        </p:nvSpPr>
+        <p:spPr>
+          <a:xfrm>
+            <a:off x="0" y="1234440"/>
+            <a:ext cx="12188952" cy="12700"/>
+          </a:xfrm>
+          <a:prstGeom prst="rect">
+            <a:avLst/>
+          </a:prstGeom>
+          <a:solidFill>
+            <a:srgbClr val="D8DFE4"/>
+          </a:solidFill>
+          <a:ln>
+            <a:noFill/>
+          </a:ln>
+        </p:spPr>
+        <p:style>
+          <a:lnRef idx="1">
+            <a:schemeClr val="accent1"/>
+          </a:lnRef>
+          <a:fillRef idx="3">
+            <a:schemeClr val="accent1"/>
+          </a:fillRef>
+          <a:effectRef idx="2">
+            <a:schemeClr val="accent1"/>
+          </a:effectRef>
+          <a:fontRef idx="minor">
+            <a:schemeClr val="lt1"/>
+          </a:fontRef>
+        </p:style>
+        <p:txBody>
+          <a:bodyPr rtlCol="0" anchor="ctr"/>
+          <a:lstStyle/>
+          <a:p>
+            <a:pPr algn="ctr"/>
+          </a:p>
+        </p:txBody>
+      </p:sp>
+      <p:sp>
+        <p:nvSpPr>
+          <p:cNvPr id="6" name="Rectangle 5"/>
+          <p:cNvSpPr/>
+          <p:nvPr/>
+        </p:nvSpPr>
+        <p:spPr>
+          <a:xfrm>
+            <a:off x="685800" y="502920"/>
+            <a:ext cx="36576" cy="658368"/>
+          </a:xfrm>
+          <a:prstGeom prst="rect">
+            <a:avLst/>
+          </a:prstGeom>
+          <a:solidFill>
+            <a:srgbClr val="D9C089"/>
+          </a:solidFill>
+          <a:ln>
+            <a:noFill/>
+          </a:ln>
+        </p:spPr>
+        <p:style>
+          <a:lnRef idx="1">
+            <a:schemeClr val="accent1"/>
+          </a:lnRef>
+          <a:fillRef idx="3">
+            <a:schemeClr val="accent1"/>
+          </a:fillRef>
+          <a:effectRef idx="2">
+            <a:schemeClr val="accent1"/>
+          </a:effectRef>
+          <a:fontRef idx="minor">
+            <a:schemeClr val="lt1"/>
+          </a:fontRef>
+        </p:style>
+        <p:txBody>
+          <a:bodyPr rtlCol="0" anchor="ctr"/>
+          <a:lstStyle/>
+          <a:p>
+            <a:pPr algn="ctr"/>
+          </a:p>
+        </p:txBody>
+      </p:sp>
+      <p:sp>
+        <p:nvSpPr>
+          <p:cNvPr id="7" name="TextBox 6"/>
+          <p:cNvSpPr txBox="1"/>
+          <p:nvPr/>
+        </p:nvSpPr>
+        <p:spPr>
+          <a:xfrm>
+            <a:off x="813816" y="502920"/>
+            <a:ext cx="10634472" cy="685800"/>
+          </a:xfrm>
+          <a:prstGeom prst="rect">
+            <a:avLst/>
+          </a:prstGeom>
+          <a:noFill/>
+        </p:spPr>
+        <p:txBody>
+          <a:bodyPr wrap="square">
+            <a:spAutoFit/>
+          </a:bodyPr>
+          <a:lstStyle/>
+          <a:p>
+            <a:pPr algn="l"/>
+            <a:r>
+              <a:rPr sz="2400" b="1" i="0">
+                <a:solidFill>
+                  <a:srgbClr val="1F2C56"/>
+                </a:solidFill>
+                <a:latin typeface="Source Serif 4"/>
+              </a:rPr>
+              <a:t>Arbeitsblatt B: Beobachtungsbogen Rollenspiel</a:t>
+            </a:r>
+          </a:p>
+        </p:txBody>
+      </p:sp>
+      <p:sp>
+        <p:nvSpPr>
+          <p:cNvPr id="8" name="TextBox 7"/>
+          <p:cNvSpPr txBox="1"/>
+          <p:nvPr/>
+        </p:nvSpPr>
+        <p:spPr>
+          <a:xfrm>
+            <a:off x="685800" y="1417320"/>
+            <a:ext cx="10817352" cy="5029200"/>
+          </a:xfrm>
+          <a:prstGeom prst="rect">
+            <a:avLst/>
+          </a:prstGeom>
+          <a:noFill/>
+        </p:spPr>
+        <p:txBody>
+          <a:bodyPr wrap="square">
+            <a:spAutoFit/>
+          </a:bodyPr>
+          <a:lstStyle/>
           <a:p>
             <a:pPr>
               <a:spcBef>
@@ -5223,13 +6416,51 @@
               </a:spcAft>
             </a:pPr>
             <a:r>
-              <a:rPr sz="1200">
+              <a:rPr sz="1300">
                 <a:solidFill>
                   <a:srgbClr val="3D5466"/>
                 </a:solidFill>
                 <a:latin typeface="Arial"/>
               </a:rPr>
-              <a:t>Eine konkrete Verbesserungsmöglichkeit:</a:t>
+              <a:t>▸  (Wird vom Beobachter ausgefüllt – nicht vom Spielenden)</a:t>
+            </a:r>
+          </a:p>
+          <a:p>
+            <a:pPr>
+              <a:spcBef>
+                <a:spcPts val="400"/>
+              </a:spcBef>
+              <a:spcAft>
+                <a:spcPts val="200"/>
+              </a:spcAft>
+            </a:pPr>
+            <a:r>
+              <a:rPr sz="1300">
+                <a:solidFill>
+                  <a:srgbClr val="3D5466"/>
+                </a:solidFill>
+                <a:latin typeface="Arial"/>
+              </a:rPr>
+              <a:t>▸  Stärkster Moment im Gespräch:</a:t>
+            </a:r>
+          </a:p>
+          <a:p>
+            <a:pPr>
+              <a:spcBef>
+                <a:spcPts val="400"/>
+              </a:spcBef>
+              <a:spcAft>
+                <a:spcPts val="200"/>
+              </a:spcAft>
+            </a:pPr>
+            <a:r>
+              <a:rPr sz="1300">
+                <a:solidFill>
+                  <a:srgbClr val="3D5466"/>
+                </a:solidFill>
+                <a:latin typeface="Arial"/>
+              </a:rPr>
+              <a:t>▸  Eine konkrete Verbesserungsmöglichkeit:</a:t>
             </a:r>
           </a:p>
         </p:txBody>
@@ -5308,6 +6539,1121 @@
                 <a:latin typeface="JetBrains Mono"/>
               </a:rPr>
               <a:t>Benedikt Zoller Coaching  ·  FKB Campus  ·  M11</a:t>
+            </a:r>
+          </a:p>
+        </p:txBody>
+      </p:sp>
+    </p:spTree>
+  </p:cSld>
+  <p:clrMapOvr>
+    <a:masterClrMapping/>
+  </p:clrMapOvr>
+</p:sld>
+</file>
+
+<file path=ppt/slides/slide14.xml><?xml version="1.0" encoding="utf-8"?>
+<p:sld xmlns:a="http://schemas.openxmlformats.org/drawingml/2006/main" xmlns:p="http://schemas.openxmlformats.org/presentationml/2006/main" xmlns:r="http://schemas.openxmlformats.org/officeDocument/2006/relationships">
+  <p:cSld>
+    <p:spTree>
+      <p:nvGrpSpPr>
+        <p:cNvPr id="1" name=""/>
+        <p:cNvGrpSpPr/>
+        <p:nvPr/>
+      </p:nvGrpSpPr>
+      <p:grpSpPr/>
+      <p:sp>
+        <p:nvSpPr>
+          <p:cNvPr id="2" name="Rectangle 1"/>
+          <p:cNvSpPr/>
+          <p:nvPr/>
+        </p:nvSpPr>
+        <p:spPr>
+          <a:xfrm>
+            <a:off x="0" y="0"/>
+            <a:ext cx="12188952" cy="6858000"/>
+          </a:xfrm>
+          <a:prstGeom prst="rect">
+            <a:avLst/>
+          </a:prstGeom>
+          <a:solidFill>
+            <a:srgbClr val="FFFFFF"/>
+          </a:solidFill>
+          <a:ln>
+            <a:noFill/>
+          </a:ln>
+        </p:spPr>
+        <p:style>
+          <a:lnRef idx="1">
+            <a:schemeClr val="accent1"/>
+          </a:lnRef>
+          <a:fillRef idx="3">
+            <a:schemeClr val="accent1"/>
+          </a:fillRef>
+          <a:effectRef idx="2">
+            <a:schemeClr val="accent1"/>
+          </a:effectRef>
+          <a:fontRef idx="minor">
+            <a:schemeClr val="lt1"/>
+          </a:fontRef>
+        </p:style>
+        <p:txBody>
+          <a:bodyPr rtlCol="0" anchor="ctr"/>
+          <a:lstStyle/>
+          <a:p>
+            <a:pPr algn="ctr"/>
+          </a:p>
+        </p:txBody>
+      </p:sp>
+      <p:sp>
+        <p:nvSpPr>
+          <p:cNvPr id="3" name="Rectangle 2"/>
+          <p:cNvSpPr/>
+          <p:nvPr/>
+        </p:nvSpPr>
+        <p:spPr>
+          <a:xfrm>
+            <a:off x="0" y="0"/>
+            <a:ext cx="12188952" cy="50292"/>
+          </a:xfrm>
+          <a:prstGeom prst="rect">
+            <a:avLst/>
+          </a:prstGeom>
+          <a:solidFill>
+            <a:srgbClr val="1F2C56"/>
+          </a:solidFill>
+          <a:ln>
+            <a:noFill/>
+          </a:ln>
+        </p:spPr>
+        <p:style>
+          <a:lnRef idx="1">
+            <a:schemeClr val="accent1"/>
+          </a:lnRef>
+          <a:fillRef idx="3">
+            <a:schemeClr val="accent1"/>
+          </a:fillRef>
+          <a:effectRef idx="2">
+            <a:schemeClr val="accent1"/>
+          </a:effectRef>
+          <a:fontRef idx="minor">
+            <a:schemeClr val="lt1"/>
+          </a:fontRef>
+        </p:style>
+        <p:txBody>
+          <a:bodyPr rtlCol="0" anchor="ctr"/>
+          <a:lstStyle/>
+          <a:p>
+            <a:pPr algn="ctr"/>
+          </a:p>
+        </p:txBody>
+      </p:sp>
+      <p:sp>
+        <p:nvSpPr>
+          <p:cNvPr id="4" name="TextBox 3"/>
+          <p:cNvSpPr txBox="1"/>
+          <p:nvPr/>
+        </p:nvSpPr>
+        <p:spPr>
+          <a:xfrm>
+            <a:off x="685800" y="109728"/>
+            <a:ext cx="10817352" cy="228600"/>
+          </a:xfrm>
+          <a:prstGeom prst="rect">
+            <a:avLst/>
+          </a:prstGeom>
+          <a:noFill/>
+        </p:spPr>
+        <p:txBody>
+          <a:bodyPr wrap="none">
+            <a:spAutoFit/>
+          </a:bodyPr>
+          <a:lstStyle/>
+          <a:p>
+            <a:pPr algn="l"/>
+            <a:r>
+              <a:rPr sz="750">
+                <a:solidFill>
+                  <a:srgbClr val="78808C"/>
+                </a:solidFill>
+                <a:latin typeface="JetBrains Mono"/>
+              </a:rPr>
+              <a:t>M11  ·  ÜBERSICHT</a:t>
+            </a:r>
+          </a:p>
+        </p:txBody>
+      </p:sp>
+      <p:sp>
+        <p:nvSpPr>
+          <p:cNvPr id="5" name="TextBox 4"/>
+          <p:cNvSpPr txBox="1"/>
+          <p:nvPr/>
+        </p:nvSpPr>
+        <p:spPr>
+          <a:xfrm>
+            <a:off x="685800" y="502920"/>
+            <a:ext cx="10817352" cy="594360"/>
+          </a:xfrm>
+          <a:prstGeom prst="rect">
+            <a:avLst/>
+          </a:prstGeom>
+          <a:noFill/>
+        </p:spPr>
+        <p:txBody>
+          <a:bodyPr wrap="square">
+            <a:spAutoFit/>
+          </a:bodyPr>
+          <a:lstStyle/>
+          <a:p>
+            <a:pPr algn="l"/>
+            <a:r>
+              <a:rPr sz="2000" b="1" i="0">
+                <a:solidFill>
+                  <a:srgbClr val="1F2C56"/>
+                </a:solidFill>
+                <a:latin typeface="Source Serif 4"/>
+              </a:rPr>
+              <a:t>Arbeitsblatt B: Beobachtungsbogen Rollenspiel</a:t>
+            </a:r>
+          </a:p>
+        </p:txBody>
+      </p:sp>
+      <p:sp>
+        <p:nvSpPr>
+          <p:cNvPr id="6" name="Rectangle 5"/>
+          <p:cNvSpPr/>
+          <p:nvPr/>
+        </p:nvSpPr>
+        <p:spPr>
+          <a:xfrm>
+            <a:off x="685800" y="1143000"/>
+            <a:ext cx="10817352" cy="25400"/>
+          </a:xfrm>
+          <a:prstGeom prst="rect">
+            <a:avLst/>
+          </a:prstGeom>
+          <a:solidFill>
+            <a:srgbClr val="D9C089"/>
+          </a:solidFill>
+          <a:ln>
+            <a:noFill/>
+          </a:ln>
+        </p:spPr>
+        <p:style>
+          <a:lnRef idx="1">
+            <a:schemeClr val="accent1"/>
+          </a:lnRef>
+          <a:fillRef idx="3">
+            <a:schemeClr val="accent1"/>
+          </a:fillRef>
+          <a:effectRef idx="2">
+            <a:schemeClr val="accent1"/>
+          </a:effectRef>
+          <a:fontRef idx="minor">
+            <a:schemeClr val="lt1"/>
+          </a:fontRef>
+        </p:style>
+        <p:txBody>
+          <a:bodyPr rtlCol="0" anchor="ctr"/>
+          <a:lstStyle/>
+          <a:p>
+            <a:pPr algn="ctr"/>
+          </a:p>
+        </p:txBody>
+      </p:sp>
+      <p:graphicFrame>
+        <p:nvGraphicFramePr>
+          <p:cNvPr id="7" name="Table 6"/>
+          <p:cNvGraphicFramePr>
+            <a:graphicFrameLocks noGrp="1"/>
+          </p:cNvGraphicFramePr>
+          <p:nvPr/>
+        </p:nvGraphicFramePr>
+        <p:xfrm>
+          <a:off x="685800" y="1417320"/>
+          <a:ext cx="10817352" cy="3072384"/>
+        </p:xfrm>
+        <a:graphic>
+          <a:graphicData uri="http://schemas.openxmlformats.org/drawingml/2006/table">
+            <a:tbl>
+              <a:tblPr firstRow="1" bandRow="1">
+                <a:tableStyleId>{5C22544A-7EE6-4342-B048-85BDC9FD1C3A}</a:tableStyleId>
+              </a:tblPr>
+              <a:tblGrid>
+                <a:gridCol w="2163470"/>
+                <a:gridCol w="2163470"/>
+                <a:gridCol w="2163470"/>
+                <a:gridCol w="2163470"/>
+                <a:gridCol w="2163472"/>
+              </a:tblGrid>
+              <a:tr h="384048">
+                <a:tc>
+                  <a:txBody>
+                    <a:bodyPr/>
+                    <a:lstStyle/>
+                    <a:p>
+                      <a:r>
+                        <a:rPr sz="1100" b="1">
+                          <a:solidFill>
+                            <a:srgbClr val="FFFFFF"/>
+                          </a:solidFill>
+                          <a:latin typeface="Arial"/>
+                        </a:rPr>
+                        <a:t>Beobachtungskriterium</a:t>
+                      </a:r>
+                    </a:p>
+                  </a:txBody>
+                  <a:tcPr>
+                    <a:solidFill>
+                      <a:srgbClr val="1F2C56"/>
+                    </a:solidFill>
+                  </a:tcPr>
+                </a:tc>
+                <a:tc>
+                  <a:txBody>
+                    <a:bodyPr/>
+                    <a:lstStyle/>
+                    <a:p>
+                      <a:r>
+                        <a:rPr sz="1100" b="1">
+                          <a:solidFill>
+                            <a:srgbClr val="FFFFFF"/>
+                          </a:solidFill>
+                          <a:latin typeface="Arial"/>
+                        </a:rPr>
+                        <a:t>Sehr gut (3)</a:t>
+                      </a:r>
+                    </a:p>
+                  </a:txBody>
+                  <a:tcPr>
+                    <a:solidFill>
+                      <a:srgbClr val="1F2C56"/>
+                    </a:solidFill>
+                  </a:tcPr>
+                </a:tc>
+                <a:tc>
+                  <a:txBody>
+                    <a:bodyPr/>
+                    <a:lstStyle/>
+                    <a:p>
+                      <a:r>
+                        <a:rPr sz="1100" b="1">
+                          <a:solidFill>
+                            <a:srgbClr val="FFFFFF"/>
+                          </a:solidFill>
+                          <a:latin typeface="Arial"/>
+                        </a:rPr>
+                        <a:t>Gut (2)</a:t>
+                      </a:r>
+                    </a:p>
+                  </a:txBody>
+                  <a:tcPr>
+                    <a:solidFill>
+                      <a:srgbClr val="1F2C56"/>
+                    </a:solidFill>
+                  </a:tcPr>
+                </a:tc>
+                <a:tc>
+                  <a:txBody>
+                    <a:bodyPr/>
+                    <a:lstStyle/>
+                    <a:p>
+                      <a:r>
+                        <a:rPr sz="1100" b="1">
+                          <a:solidFill>
+                            <a:srgbClr val="FFFFFF"/>
+                          </a:solidFill>
+                          <a:latin typeface="Arial"/>
+                        </a:rPr>
+                        <a:t>Ausbaufähig (1)</a:t>
+                      </a:r>
+                    </a:p>
+                  </a:txBody>
+                  <a:tcPr>
+                    <a:solidFill>
+                      <a:srgbClr val="1F2C56"/>
+                    </a:solidFill>
+                  </a:tcPr>
+                </a:tc>
+                <a:tc>
+                  <a:txBody>
+                    <a:bodyPr/>
+                    <a:lstStyle/>
+                    <a:p>
+                      <a:r>
+                        <a:rPr sz="1100" b="1">
+                          <a:solidFill>
+                            <a:srgbClr val="FFFFFF"/>
+                          </a:solidFill>
+                          <a:latin typeface="Arial"/>
+                        </a:rPr>
+                        <a:t>Nicht beobachtet</a:t>
+                      </a:r>
+                    </a:p>
+                  </a:txBody>
+                  <a:tcPr>
+                    <a:solidFill>
+                      <a:srgbClr val="1F2C56"/>
+                    </a:solidFill>
+                  </a:tcPr>
+                </a:tc>
+              </a:tr>
+              <a:tr h="384048">
+                <a:tc>
+                  <a:txBody>
+                    <a:bodyPr/>
+                    <a:lstStyle/>
+                    <a:p>
+                      <a:r>
+                        <a:rPr sz="1050">
+                          <a:solidFill>
+                            <a:srgbClr val="3D5466"/>
+                          </a:solidFill>
+                          <a:latin typeface="Arial"/>
+                        </a:rPr>
+                        <a:t>Offene Einstiegsfragen gestellt</a:t>
+                      </a:r>
+                    </a:p>
+                  </a:txBody>
+                  <a:tcPr/>
+                </a:tc>
+                <a:tc>
+                  <a:txBody>
+                    <a:bodyPr/>
+                    <a:lstStyle/>
+                    <a:p>
+                      <a:r>
+                        <a:rPr sz="1050">
+                          <a:solidFill>
+                            <a:srgbClr val="3D5466"/>
+                          </a:solidFill>
+                          <a:latin typeface="Arial"/>
+                        </a:rPr>
+                        <a:t>☐</a:t>
+                      </a:r>
+                    </a:p>
+                  </a:txBody>
+                  <a:tcPr/>
+                </a:tc>
+                <a:tc>
+                  <a:txBody>
+                    <a:bodyPr/>
+                    <a:lstStyle/>
+                    <a:p>
+                      <a:r>
+                        <a:rPr sz="1050">
+                          <a:solidFill>
+                            <a:srgbClr val="3D5466"/>
+                          </a:solidFill>
+                          <a:latin typeface="Arial"/>
+                        </a:rPr>
+                        <a:t>☐</a:t>
+                      </a:r>
+                    </a:p>
+                  </a:txBody>
+                  <a:tcPr/>
+                </a:tc>
+                <a:tc>
+                  <a:txBody>
+                    <a:bodyPr/>
+                    <a:lstStyle/>
+                    <a:p>
+                      <a:r>
+                        <a:rPr sz="1050">
+                          <a:solidFill>
+                            <a:srgbClr val="3D5466"/>
+                          </a:solidFill>
+                          <a:latin typeface="Arial"/>
+                        </a:rPr>
+                        <a:t>☐</a:t>
+                      </a:r>
+                    </a:p>
+                  </a:txBody>
+                  <a:tcPr/>
+                </a:tc>
+                <a:tc>
+                  <a:txBody>
+                    <a:bodyPr/>
+                    <a:lstStyle/>
+                    <a:p>
+                      <a:r>
+                        <a:rPr sz="1050">
+                          <a:solidFill>
+                            <a:srgbClr val="3D5466"/>
+                          </a:solidFill>
+                          <a:latin typeface="Arial"/>
+                        </a:rPr>
+                        <a:t>☐</a:t>
+                      </a:r>
+                    </a:p>
+                  </a:txBody>
+                  <a:tcPr/>
+                </a:tc>
+              </a:tr>
+              <a:tr h="384048">
+                <a:tc>
+                  <a:txBody>
+                    <a:bodyPr/>
+                    <a:lstStyle/>
+                    <a:p>
+                      <a:r>
+                        <a:rPr sz="1050">
+                          <a:solidFill>
+                            <a:srgbClr val="3D5466"/>
+                          </a:solidFill>
+                          <a:latin typeface="Arial"/>
+                        </a:rPr>
+                        <a:t>Problemfragen aktiv eingesetzt</a:t>
+                      </a:r>
+                    </a:p>
+                  </a:txBody>
+                  <a:tcPr/>
+                </a:tc>
+                <a:tc>
+                  <a:txBody>
+                    <a:bodyPr/>
+                    <a:lstStyle/>
+                    <a:p>
+                      <a:r>
+                        <a:rPr sz="1050">
+                          <a:solidFill>
+                            <a:srgbClr val="3D5466"/>
+                          </a:solidFill>
+                          <a:latin typeface="Arial"/>
+                        </a:rPr>
+                        <a:t>☐</a:t>
+                      </a:r>
+                    </a:p>
+                  </a:txBody>
+                  <a:tcPr/>
+                </a:tc>
+                <a:tc>
+                  <a:txBody>
+                    <a:bodyPr/>
+                    <a:lstStyle/>
+                    <a:p>
+                      <a:r>
+                        <a:rPr sz="1050">
+                          <a:solidFill>
+                            <a:srgbClr val="3D5466"/>
+                          </a:solidFill>
+                          <a:latin typeface="Arial"/>
+                        </a:rPr>
+                        <a:t>☐</a:t>
+                      </a:r>
+                    </a:p>
+                  </a:txBody>
+                  <a:tcPr/>
+                </a:tc>
+                <a:tc>
+                  <a:txBody>
+                    <a:bodyPr/>
+                    <a:lstStyle/>
+                    <a:p>
+                      <a:r>
+                        <a:rPr sz="1050">
+                          <a:solidFill>
+                            <a:srgbClr val="3D5466"/>
+                          </a:solidFill>
+                          <a:latin typeface="Arial"/>
+                        </a:rPr>
+                        <a:t>☐</a:t>
+                      </a:r>
+                    </a:p>
+                  </a:txBody>
+                  <a:tcPr/>
+                </a:tc>
+                <a:tc>
+                  <a:txBody>
+                    <a:bodyPr/>
+                    <a:lstStyle/>
+                    <a:p>
+                      <a:r>
+                        <a:rPr sz="1050">
+                          <a:solidFill>
+                            <a:srgbClr val="3D5466"/>
+                          </a:solidFill>
+                          <a:latin typeface="Arial"/>
+                        </a:rPr>
+                        <a:t>☐</a:t>
+                      </a:r>
+                    </a:p>
+                  </a:txBody>
+                  <a:tcPr/>
+                </a:tc>
+              </a:tr>
+              <a:tr h="384048">
+                <a:tc>
+                  <a:txBody>
+                    <a:bodyPr/>
+                    <a:lstStyle/>
+                    <a:p>
+                      <a:r>
+                        <a:rPr sz="1050">
+                          <a:solidFill>
+                            <a:srgbClr val="3D5466"/>
+                          </a:solidFill>
+                          <a:latin typeface="Arial"/>
+                        </a:rPr>
+                        <a:t>Implikationsfragen verwendet</a:t>
+                      </a:r>
+                    </a:p>
+                  </a:txBody>
+                  <a:tcPr/>
+                </a:tc>
+                <a:tc>
+                  <a:txBody>
+                    <a:bodyPr/>
+                    <a:lstStyle/>
+                    <a:p>
+                      <a:r>
+                        <a:rPr sz="1050">
+                          <a:solidFill>
+                            <a:srgbClr val="3D5466"/>
+                          </a:solidFill>
+                          <a:latin typeface="Arial"/>
+                        </a:rPr>
+                        <a:t>☐</a:t>
+                      </a:r>
+                    </a:p>
+                  </a:txBody>
+                  <a:tcPr/>
+                </a:tc>
+                <a:tc>
+                  <a:txBody>
+                    <a:bodyPr/>
+                    <a:lstStyle/>
+                    <a:p>
+                      <a:r>
+                        <a:rPr sz="1050">
+                          <a:solidFill>
+                            <a:srgbClr val="3D5466"/>
+                          </a:solidFill>
+                          <a:latin typeface="Arial"/>
+                        </a:rPr>
+                        <a:t>☐</a:t>
+                      </a:r>
+                    </a:p>
+                  </a:txBody>
+                  <a:tcPr/>
+                </a:tc>
+                <a:tc>
+                  <a:txBody>
+                    <a:bodyPr/>
+                    <a:lstStyle/>
+                    <a:p>
+                      <a:r>
+                        <a:rPr sz="1050">
+                          <a:solidFill>
+                            <a:srgbClr val="3D5466"/>
+                          </a:solidFill>
+                          <a:latin typeface="Arial"/>
+                        </a:rPr>
+                        <a:t>☐</a:t>
+                      </a:r>
+                    </a:p>
+                  </a:txBody>
+                  <a:tcPr/>
+                </a:tc>
+                <a:tc>
+                  <a:txBody>
+                    <a:bodyPr/>
+                    <a:lstStyle/>
+                    <a:p>
+                      <a:r>
+                        <a:rPr sz="1050">
+                          <a:solidFill>
+                            <a:srgbClr val="3D5466"/>
+                          </a:solidFill>
+                          <a:latin typeface="Arial"/>
+                        </a:rPr>
+                        <a:t>☐</a:t>
+                      </a:r>
+                    </a:p>
+                  </a:txBody>
+                  <a:tcPr/>
+                </a:tc>
+              </a:tr>
+              <a:tr h="384048">
+                <a:tc>
+                  <a:txBody>
+                    <a:bodyPr/>
+                    <a:lstStyle/>
+                    <a:p>
+                      <a:r>
+                        <a:rPr sz="1050">
+                          <a:solidFill>
+                            <a:srgbClr val="3D5466"/>
+                          </a:solidFill>
+                          <a:latin typeface="Arial"/>
+                        </a:rPr>
+                        <a:t>Latente Signale aufgegriffen</a:t>
+                      </a:r>
+                    </a:p>
+                  </a:txBody>
+                  <a:tcPr/>
+                </a:tc>
+                <a:tc>
+                  <a:txBody>
+                    <a:bodyPr/>
+                    <a:lstStyle/>
+                    <a:p>
+                      <a:r>
+                        <a:rPr sz="1050">
+                          <a:solidFill>
+                            <a:srgbClr val="3D5466"/>
+                          </a:solidFill>
+                          <a:latin typeface="Arial"/>
+                        </a:rPr>
+                        <a:t>☐</a:t>
+                      </a:r>
+                    </a:p>
+                  </a:txBody>
+                  <a:tcPr/>
+                </a:tc>
+                <a:tc>
+                  <a:txBody>
+                    <a:bodyPr/>
+                    <a:lstStyle/>
+                    <a:p>
+                      <a:r>
+                        <a:rPr sz="1050">
+                          <a:solidFill>
+                            <a:srgbClr val="3D5466"/>
+                          </a:solidFill>
+                          <a:latin typeface="Arial"/>
+                        </a:rPr>
+                        <a:t>☐</a:t>
+                      </a:r>
+                    </a:p>
+                  </a:txBody>
+                  <a:tcPr/>
+                </a:tc>
+                <a:tc>
+                  <a:txBody>
+                    <a:bodyPr/>
+                    <a:lstStyle/>
+                    <a:p>
+                      <a:r>
+                        <a:rPr sz="1050">
+                          <a:solidFill>
+                            <a:srgbClr val="3D5466"/>
+                          </a:solidFill>
+                          <a:latin typeface="Arial"/>
+                        </a:rPr>
+                        <a:t>☐</a:t>
+                      </a:r>
+                    </a:p>
+                  </a:txBody>
+                  <a:tcPr/>
+                </a:tc>
+                <a:tc>
+                  <a:txBody>
+                    <a:bodyPr/>
+                    <a:lstStyle/>
+                    <a:p>
+                      <a:r>
+                        <a:rPr sz="1050">
+                          <a:solidFill>
+                            <a:srgbClr val="3D5466"/>
+                          </a:solidFill>
+                          <a:latin typeface="Arial"/>
+                        </a:rPr>
+                        <a:t>☐</a:t>
+                      </a:r>
+                    </a:p>
+                  </a:txBody>
+                  <a:tcPr/>
+                </a:tc>
+              </a:tr>
+              <a:tr h="384048">
+                <a:tc>
+                  <a:txBody>
+                    <a:bodyPr/>
+                    <a:lstStyle/>
+                    <a:p>
+                      <a:r>
+                        <a:rPr sz="1050">
+                          <a:solidFill>
+                            <a:srgbClr val="3D5466"/>
+                          </a:solidFill>
+                          <a:latin typeface="Arial"/>
+                        </a:rPr>
+                        <a:t>Schweigen ausgehalten</a:t>
+                      </a:r>
+                    </a:p>
+                  </a:txBody>
+                  <a:tcPr/>
+                </a:tc>
+                <a:tc>
+                  <a:txBody>
+                    <a:bodyPr/>
+                    <a:lstStyle/>
+                    <a:p>
+                      <a:r>
+                        <a:rPr sz="1050">
+                          <a:solidFill>
+                            <a:srgbClr val="3D5466"/>
+                          </a:solidFill>
+                          <a:latin typeface="Arial"/>
+                        </a:rPr>
+                        <a:t>☐</a:t>
+                      </a:r>
+                    </a:p>
+                  </a:txBody>
+                  <a:tcPr/>
+                </a:tc>
+                <a:tc>
+                  <a:txBody>
+                    <a:bodyPr/>
+                    <a:lstStyle/>
+                    <a:p>
+                      <a:r>
+                        <a:rPr sz="1050">
+                          <a:solidFill>
+                            <a:srgbClr val="3D5466"/>
+                          </a:solidFill>
+                          <a:latin typeface="Arial"/>
+                        </a:rPr>
+                        <a:t>☐</a:t>
+                      </a:r>
+                    </a:p>
+                  </a:txBody>
+                  <a:tcPr/>
+                </a:tc>
+                <a:tc>
+                  <a:txBody>
+                    <a:bodyPr/>
+                    <a:lstStyle/>
+                    <a:p>
+                      <a:r>
+                        <a:rPr sz="1050">
+                          <a:solidFill>
+                            <a:srgbClr val="3D5466"/>
+                          </a:solidFill>
+                          <a:latin typeface="Arial"/>
+                        </a:rPr>
+                        <a:t>☐</a:t>
+                      </a:r>
+                    </a:p>
+                  </a:txBody>
+                  <a:tcPr/>
+                </a:tc>
+                <a:tc>
+                  <a:txBody>
+                    <a:bodyPr/>
+                    <a:lstStyle/>
+                    <a:p>
+                      <a:r>
+                        <a:rPr sz="1050">
+                          <a:solidFill>
+                            <a:srgbClr val="3D5466"/>
+                          </a:solidFill>
+                          <a:latin typeface="Arial"/>
+                        </a:rPr>
+                        <a:t>☐</a:t>
+                      </a:r>
+                    </a:p>
+                  </a:txBody>
+                  <a:tcPr/>
+                </a:tc>
+              </a:tr>
+              <a:tr h="384048">
+                <a:tc>
+                  <a:txBody>
+                    <a:bodyPr/>
+                    <a:lstStyle/>
+                    <a:p>
+                      <a:r>
+                        <a:rPr sz="1050">
+                          <a:solidFill>
+                            <a:srgbClr val="3D5466"/>
+                          </a:solidFill>
+                          <a:latin typeface="Arial"/>
+                        </a:rPr>
+                        <a:t>Paraphrase/Zusammenfassung eingesetzt</a:t>
+                      </a:r>
+                    </a:p>
+                  </a:txBody>
+                  <a:tcPr/>
+                </a:tc>
+                <a:tc>
+                  <a:txBody>
+                    <a:bodyPr/>
+                    <a:lstStyle/>
+                    <a:p>
+                      <a:r>
+                        <a:rPr sz="1050">
+                          <a:solidFill>
+                            <a:srgbClr val="3D5466"/>
+                          </a:solidFill>
+                          <a:latin typeface="Arial"/>
+                        </a:rPr>
+                        <a:t>☐</a:t>
+                      </a:r>
+                    </a:p>
+                  </a:txBody>
+                  <a:tcPr/>
+                </a:tc>
+                <a:tc>
+                  <a:txBody>
+                    <a:bodyPr/>
+                    <a:lstStyle/>
+                    <a:p>
+                      <a:r>
+                        <a:rPr sz="1050">
+                          <a:solidFill>
+                            <a:srgbClr val="3D5466"/>
+                          </a:solidFill>
+                          <a:latin typeface="Arial"/>
+                        </a:rPr>
+                        <a:t>☐</a:t>
+                      </a:r>
+                    </a:p>
+                  </a:txBody>
+                  <a:tcPr/>
+                </a:tc>
+                <a:tc>
+                  <a:txBody>
+                    <a:bodyPr/>
+                    <a:lstStyle/>
+                    <a:p>
+                      <a:r>
+                        <a:rPr sz="1050">
+                          <a:solidFill>
+                            <a:srgbClr val="3D5466"/>
+                          </a:solidFill>
+                          <a:latin typeface="Arial"/>
+                        </a:rPr>
+                        <a:t>☐</a:t>
+                      </a:r>
+                    </a:p>
+                  </a:txBody>
+                  <a:tcPr/>
+                </a:tc>
+                <a:tc>
+                  <a:txBody>
+                    <a:bodyPr/>
+                    <a:lstStyle/>
+                    <a:p>
+                      <a:r>
+                        <a:rPr sz="1050">
+                          <a:solidFill>
+                            <a:srgbClr val="3D5466"/>
+                          </a:solidFill>
+                          <a:latin typeface="Arial"/>
+                        </a:rPr>
+                        <a:t>☐</a:t>
+                      </a:r>
+                    </a:p>
+                  </a:txBody>
+                  <a:tcPr/>
+                </a:tc>
+              </a:tr>
+              <a:tr h="384048">
+                <a:tc>
+                  <a:txBody>
+                    <a:bodyPr/>
+                    <a:lstStyle/>
+                    <a:p>
+                      <a:r>
+                        <a:rPr sz="1050">
+                          <a:solidFill>
+                            <a:srgbClr val="3D5466"/>
+                          </a:solidFill>
+                          <a:latin typeface="Arial"/>
+                        </a:rPr>
+                        <a:t>Zu früh zu Produkten gewechselt (neg.)</a:t>
+                      </a:r>
+                    </a:p>
+                  </a:txBody>
+                  <a:tcPr/>
+                </a:tc>
+                <a:tc>
+                  <a:txBody>
+                    <a:bodyPr/>
+                    <a:lstStyle/>
+                    <a:p>
+                      <a:r>
+                        <a:rPr sz="1050">
+                          <a:solidFill>
+                            <a:srgbClr val="3D5466"/>
+                          </a:solidFill>
+                          <a:latin typeface="Arial"/>
+                        </a:rPr>
+                        <a:t>☐</a:t>
+                      </a:r>
+                    </a:p>
+                  </a:txBody>
+                  <a:tcPr/>
+                </a:tc>
+                <a:tc>
+                  <a:txBody>
+                    <a:bodyPr/>
+                    <a:lstStyle/>
+                    <a:p>
+                      <a:r>
+                        <a:rPr sz="1050">
+                          <a:solidFill>
+                            <a:srgbClr val="3D5466"/>
+                          </a:solidFill>
+                          <a:latin typeface="Arial"/>
+                        </a:rPr>
+                        <a:t>☐</a:t>
+                      </a:r>
+                    </a:p>
+                  </a:txBody>
+                  <a:tcPr/>
+                </a:tc>
+                <a:tc>
+                  <a:txBody>
+                    <a:bodyPr/>
+                    <a:lstStyle/>
+                    <a:p>
+                      <a:r>
+                        <a:rPr sz="1050">
+                          <a:solidFill>
+                            <a:srgbClr val="3D5466"/>
+                          </a:solidFill>
+                          <a:latin typeface="Arial"/>
+                        </a:rPr>
+                        <a:t>☐</a:t>
+                      </a:r>
+                    </a:p>
+                  </a:txBody>
+                  <a:tcPr/>
+                </a:tc>
+                <a:tc>
+                  <a:txBody>
+                    <a:bodyPr/>
+                    <a:lstStyle/>
+                    <a:p>
+                      <a:r>
+                        <a:rPr sz="1050">
+                          <a:solidFill>
+                            <a:srgbClr val="3D5466"/>
+                          </a:solidFill>
+                          <a:latin typeface="Arial"/>
+                        </a:rPr>
+                        <a:t>☐</a:t>
+                      </a:r>
+                    </a:p>
+                  </a:txBody>
+                  <a:tcPr/>
+                </a:tc>
+              </a:tr>
+            </a:tbl>
+          </a:graphicData>
+        </a:graphic>
+      </p:graphicFrame>
+      <p:sp>
+        <p:nvSpPr>
+          <p:cNvPr id="8" name="Rectangle 7"/>
+          <p:cNvSpPr/>
+          <p:nvPr/>
+        </p:nvSpPr>
+        <p:spPr>
+          <a:xfrm>
+            <a:off x="0" y="6510528"/>
+            <a:ext cx="12188952" cy="347472"/>
+          </a:xfrm>
+          <a:prstGeom prst="rect">
+            <a:avLst/>
+          </a:prstGeom>
+          <a:solidFill>
+            <a:srgbClr val="0A1937"/>
+          </a:solidFill>
+          <a:ln>
+            <a:noFill/>
+          </a:ln>
+        </p:spPr>
+        <p:style>
+          <a:lnRef idx="1">
+            <a:schemeClr val="accent1"/>
+          </a:lnRef>
+          <a:fillRef idx="3">
+            <a:schemeClr val="accent1"/>
+          </a:fillRef>
+          <a:effectRef idx="2">
+            <a:schemeClr val="accent1"/>
+          </a:effectRef>
+          <a:fontRef idx="minor">
+            <a:schemeClr val="lt1"/>
+          </a:fontRef>
+        </p:style>
+        <p:txBody>
+          <a:bodyPr rtlCol="0" anchor="ctr"/>
+          <a:lstStyle/>
+          <a:p>
+            <a:pPr algn="ctr"/>
+          </a:p>
+        </p:txBody>
+      </p:sp>
+      <p:sp>
+        <p:nvSpPr>
+          <p:cNvPr id="9" name="TextBox 8"/>
+          <p:cNvSpPr txBox="1"/>
+          <p:nvPr/>
+        </p:nvSpPr>
+        <p:spPr>
+          <a:xfrm>
+            <a:off x="685800" y="6583680"/>
+            <a:ext cx="6490411" cy="256032"/>
+          </a:xfrm>
+          <a:prstGeom prst="rect">
+            <a:avLst/>
+          </a:prstGeom>
+          <a:noFill/>
+        </p:spPr>
+        <p:txBody>
+          <a:bodyPr wrap="none">
+            <a:spAutoFit/>
+          </a:bodyPr>
+          <a:lstStyle/>
+          <a:p>
+            <a:pPr algn="l"/>
+            <a:r>
+              <a:rPr sz="700">
+                <a:solidFill>
+                  <a:srgbClr val="A0B4D2"/>
+                </a:solidFill>
+                <a:latin typeface="JetBrains Mono"/>
+              </a:rPr>
+              <a:t>Benedikt Zoller Coaching  ·  FKB Campus  ·  M11</a:t>
+            </a:r>
+          </a:p>
+        </p:txBody>
+      </p:sp>
+      <p:sp>
+        <p:nvSpPr>
+          <p:cNvPr id="10" name="TextBox 9"/>
+          <p:cNvSpPr txBox="1"/>
+          <p:nvPr/>
+        </p:nvSpPr>
+        <p:spPr>
+          <a:xfrm>
+            <a:off x="7176211" y="6583680"/>
+            <a:ext cx="4326940" cy="256032"/>
+          </a:xfrm>
+          <a:prstGeom prst="rect">
+            <a:avLst/>
+          </a:prstGeom>
+          <a:noFill/>
+        </p:spPr>
+        <p:txBody>
+          <a:bodyPr wrap="none">
+            <a:spAutoFit/>
+          </a:bodyPr>
+          <a:lstStyle/>
+          <a:p>
+            <a:pPr algn="r"/>
+            <a:r>
+              <a:rPr sz="700">
+                <a:solidFill>
+                  <a:srgbClr val="A0B4D2"/>
+                </a:solidFill>
+                <a:latin typeface="JetBrains Mono"/>
+              </a:rPr>
+              <a:t>Übersicht</a:t>
             </a:r>
           </a:p>
         </p:txBody>
@@ -6225,7 +8571,7 @@
                 </a:solidFill>
                 <a:latin typeface="JetBrains Mono"/>
               </a:rPr>
-              <a:t>M11  ·  INHALT</a:t>
+              <a:t>AGENDA  ·  M11</a:t>
             </a:r>
           </a:p>
         </p:txBody>
@@ -6275,57 +8621,14 @@
       </p:sp>
       <p:sp>
         <p:nvSpPr>
-          <p:cNvPr id="6" name="Rectangle 5"/>
-          <p:cNvSpPr/>
+          <p:cNvPr id="6" name="TextBox 5"/>
+          <p:cNvSpPr txBox="1"/>
           <p:nvPr/>
         </p:nvSpPr>
         <p:spPr>
           <a:xfrm>
             <a:off x="685800" y="502920"/>
-            <a:ext cx="36576" cy="658368"/>
-          </a:xfrm>
-          <a:prstGeom prst="rect">
-            <a:avLst/>
-          </a:prstGeom>
-          <a:solidFill>
-            <a:srgbClr val="D9C089"/>
-          </a:solidFill>
-          <a:ln>
-            <a:noFill/>
-          </a:ln>
-        </p:spPr>
-        <p:style>
-          <a:lnRef idx="1">
-            <a:schemeClr val="accent1"/>
-          </a:lnRef>
-          <a:fillRef idx="3">
-            <a:schemeClr val="accent1"/>
-          </a:fillRef>
-          <a:effectRef idx="2">
-            <a:schemeClr val="accent1"/>
-          </a:effectRef>
-          <a:fontRef idx="minor">
-            <a:schemeClr val="lt1"/>
-          </a:fontRef>
-        </p:style>
-        <p:txBody>
-          <a:bodyPr rtlCol="0" anchor="ctr"/>
-          <a:lstStyle/>
-          <a:p>
-            <a:pPr algn="ctr"/>
-          </a:p>
-        </p:txBody>
-      </p:sp>
-      <p:sp>
-        <p:nvSpPr>
-          <p:cNvPr id="7" name="TextBox 6"/>
-          <p:cNvSpPr txBox="1"/>
-          <p:nvPr/>
-        </p:nvSpPr>
-        <p:spPr>
-          <a:xfrm>
-            <a:off x="813816" y="502920"/>
-            <a:ext cx="10634472" cy="685800"/>
+            <a:ext cx="10817352" cy="658368"/>
           </a:xfrm>
           <a:prstGeom prst="rect">
             <a:avLst/>
@@ -6340,27 +8643,27 @@
           <a:p>
             <a:pPr algn="l"/>
             <a:r>
-              <a:rPr sz="2400" b="1" i="0">
+              <a:rPr sz="2600" b="1" i="0">
                 <a:solidFill>
                   <a:srgbClr val="1F2C56"/>
                 </a:solidFill>
                 <a:latin typeface="Source Serif 4"/>
               </a:rPr>
-              <a:t>Das Eisberg-Modell der Kundenbedürfnisse</a:t>
-            </a:r>
-          </a:p>
-        </p:txBody>
-      </p:sp>
-      <p:sp>
-        <p:nvSpPr>
-          <p:cNvPr id="8" name="TextBox 7"/>
+              <a:t>So läuft das Modul</a:t>
+            </a:r>
+          </a:p>
+        </p:txBody>
+      </p:sp>
+      <p:sp>
+        <p:nvSpPr>
+          <p:cNvPr id="7" name="TextBox 6"/>
           <p:cNvSpPr txBox="1"/>
           <p:nvPr/>
         </p:nvSpPr>
         <p:spPr>
           <a:xfrm>
-            <a:off x="685800" y="1417320"/>
-            <a:ext cx="10817352" cy="5029200"/>
+            <a:off x="685800" y="1463040"/>
+            <a:ext cx="10817352" cy="4937760"/>
           </a:xfrm>
           <a:prstGeom prst="rect">
             <a:avLst/>
@@ -6375,46 +8678,267 @@
           <a:p>
             <a:pPr>
               <a:spcBef>
-                <a:spcPts val="400"/>
+                <a:spcPts val="700"/>
               </a:spcBef>
               <a:spcAft>
-                <a:spcPts val="200"/>
+                <a:spcPts val="100"/>
               </a:spcAft>
             </a:pPr>
             <a:r>
-              <a:rPr sz="1300">
+              <a:rPr sz="1200">
+                <a:solidFill>
+                  <a:srgbClr val="78808C"/>
+                </a:solidFill>
+                <a:latin typeface="Consolas"/>
+              </a:rPr>
+              <a:t>0–5 min     </a:t>
+            </a:r>
+            <a:r>
+              <a:rPr sz="1500" b="1">
                 <a:solidFill>
                   <a:srgbClr val="3D5466"/>
                 </a:solidFill>
                 <a:latin typeface="Arial"/>
               </a:rPr>
-              <a:t>▸  Explizite Bedarfe: Der Kunde benennt klar, was er will. „Ich brauche eine Anschlussfinanzierung für meine Maschine." Explizite Bedarfe entstehen, wenn der Kunde seine Situation analysiert und eine Lösung definiert hat.</a:t>
+              <a:t>  Warm-up &amp; Zielklärung</a:t>
+            </a:r>
+            <a:r>
+              <a:rPr sz="1200">
+                <a:solidFill>
+                  <a:srgbClr val="78808C"/>
+                </a:solidFill>
+                <a:latin typeface="Arial"/>
+              </a:rPr>
+              <a:t>  ·  Plenum, offene Frage</a:t>
             </a:r>
           </a:p>
           <a:p>
             <a:pPr>
               <a:spcBef>
-                <a:spcPts val="400"/>
+                <a:spcPts val="700"/>
               </a:spcBef>
               <a:spcAft>
-                <a:spcPts val="200"/>
+                <a:spcPts val="100"/>
               </a:spcAft>
             </a:pPr>
             <a:r>
-              <a:rPr sz="1300">
+              <a:rPr sz="1200">
+                <a:solidFill>
+                  <a:srgbClr val="78808C"/>
+                </a:solidFill>
+                <a:latin typeface="Consolas"/>
+              </a:rPr>
+              <a:t>5–20 min    </a:t>
+            </a:r>
+            <a:r>
+              <a:rPr sz="1500" b="1">
                 <a:solidFill>
                   <a:srgbClr val="3D5466"/>
                 </a:solidFill>
                 <a:latin typeface="Arial"/>
               </a:rPr>
-              <a:t>▸  Implizite (latente) Bedarfe: Der Kunde beschreibt ein Problem, einen Schmerz oder eine Unzufriedenheit, ohne eine Lösung zu benennen. „Unsere Abschreibungen sind dieses Jahr sehr hoch." Oder: „Ich mache mir Sorgen wegen der Nachfolge." Latente Bedarfe sind die Grundlage – und oft der eigentliche Grund für das Gespräch.</a:t>
-            </a:r>
-          </a:p>
-        </p:txBody>
-      </p:sp>
-      <p:sp>
-        <p:nvSpPr>
-          <p:cNvPr id="9" name="Rectangle 8"/>
+              <a:t>  Theorie-Input: Latente Bedarfe &amp; SPIN</a:t>
+            </a:r>
+            <a:r>
+              <a:rPr sz="1200">
+                <a:solidFill>
+                  <a:srgbClr val="78808C"/>
+                </a:solidFill>
+                <a:latin typeface="Arial"/>
+              </a:rPr>
+              <a:t>  ·  Kurzinput + Flipchart</a:t>
+            </a:r>
+          </a:p>
+          <a:p>
+            <a:pPr>
+              <a:spcBef>
+                <a:spcPts val="700"/>
+              </a:spcBef>
+              <a:spcAft>
+                <a:spcPts val="100"/>
+              </a:spcAft>
+            </a:pPr>
+            <a:r>
+              <a:rPr sz="1200">
+                <a:solidFill>
+                  <a:srgbClr val="78808C"/>
+                </a:solidFill>
+                <a:latin typeface="Consolas"/>
+              </a:rPr>
+              <a:t>20–30 min   </a:t>
+            </a:r>
+            <a:r>
+              <a:rPr sz="1500" b="1">
+                <a:solidFill>
+                  <a:srgbClr val="3D5466"/>
+                </a:solidFill>
+                <a:latin typeface="Arial"/>
+              </a:rPr>
+              <a:t>  Übung: „Was höre ich wirklich?"</a:t>
+            </a:r>
+            <a:r>
+              <a:rPr sz="1200">
+                <a:solidFill>
+                  <a:srgbClr val="78808C"/>
+                </a:solidFill>
+                <a:latin typeface="Arial"/>
+              </a:rPr>
+              <a:t>  ·  Plenum-Übung</a:t>
+            </a:r>
+          </a:p>
+          <a:p>
+            <a:pPr>
+              <a:spcBef>
+                <a:spcPts val="700"/>
+              </a:spcBef>
+              <a:spcAft>
+                <a:spcPts val="100"/>
+              </a:spcAft>
+            </a:pPr>
+            <a:r>
+              <a:rPr sz="1200">
+                <a:solidFill>
+                  <a:srgbClr val="78808C"/>
+                </a:solidFill>
+                <a:latin typeface="Consolas"/>
+              </a:rPr>
+              <a:t>30–40 min   </a:t>
+            </a:r>
+            <a:r>
+              <a:rPr sz="1500" b="1">
+                <a:solidFill>
+                  <a:srgbClr val="3D5466"/>
+                </a:solidFill>
+                <a:latin typeface="Arial"/>
+              </a:rPr>
+              <a:t>  Rollenspiel-Vorbereitung</a:t>
+            </a:r>
+            <a:r>
+              <a:rPr sz="1200">
+                <a:solidFill>
+                  <a:srgbClr val="78808C"/>
+                </a:solidFill>
+                <a:latin typeface="Arial"/>
+              </a:rPr>
+              <a:t>  ·  Tandems/Dreiergruppen</a:t>
+            </a:r>
+          </a:p>
+          <a:p>
+            <a:pPr>
+              <a:spcBef>
+                <a:spcPts val="700"/>
+              </a:spcBef>
+              <a:spcAft>
+                <a:spcPts val="100"/>
+              </a:spcAft>
+            </a:pPr>
+            <a:r>
+              <a:rPr sz="1200">
+                <a:solidFill>
+                  <a:srgbClr val="78808C"/>
+                </a:solidFill>
+                <a:latin typeface="Consolas"/>
+              </a:rPr>
+              <a:t>40–75 min   </a:t>
+            </a:r>
+            <a:r>
+              <a:rPr sz="1500" b="1">
+                <a:solidFill>
+                  <a:srgbClr val="3D5466"/>
+                </a:solidFill>
+                <a:latin typeface="Arial"/>
+              </a:rPr>
+              <a:t>  Rollenspiele</a:t>
+            </a:r>
+            <a:r>
+              <a:rPr sz="1200">
+                <a:solidFill>
+                  <a:srgbClr val="78808C"/>
+                </a:solidFill>
+                <a:latin typeface="Arial"/>
+              </a:rPr>
+              <a:t>  ·  Dreiergruppen (rotierend)</a:t>
+            </a:r>
+          </a:p>
+          <a:p>
+            <a:pPr>
+              <a:spcBef>
+                <a:spcPts val="700"/>
+              </a:spcBef>
+              <a:spcAft>
+                <a:spcPts val="100"/>
+              </a:spcAft>
+            </a:pPr>
+            <a:r>
+              <a:rPr sz="1200">
+                <a:solidFill>
+                  <a:srgbClr val="78808C"/>
+                </a:solidFill>
+                <a:latin typeface="Consolas"/>
+              </a:rPr>
+              <a:t>75–85 min   </a:t>
+            </a:r>
+            <a:r>
+              <a:rPr sz="1500" b="1">
+                <a:solidFill>
+                  <a:srgbClr val="3D5466"/>
+                </a:solidFill>
+                <a:latin typeface="Arial"/>
+              </a:rPr>
+              <a:t>  Gruppenreflexion</a:t>
+            </a:r>
+            <a:r>
+              <a:rPr sz="1200">
+                <a:solidFill>
+                  <a:srgbClr val="78808C"/>
+                </a:solidFill>
+                <a:latin typeface="Arial"/>
+              </a:rPr>
+              <a:t>  ·  Plenum</a:t>
+            </a:r>
+          </a:p>
+          <a:p>
+            <a:pPr>
+              <a:spcBef>
+                <a:spcPts val="700"/>
+              </a:spcBef>
+              <a:spcAft>
+                <a:spcPts val="100"/>
+              </a:spcAft>
+            </a:pPr>
+            <a:r>
+              <a:rPr sz="1200">
+                <a:solidFill>
+                  <a:srgbClr val="78808C"/>
+                </a:solidFill>
+                <a:latin typeface="Consolas"/>
+              </a:rPr>
+              <a:t>85–90 min   </a:t>
+            </a:r>
+            <a:r>
+              <a:rPr sz="1500" b="1">
+                <a:solidFill>
+                  <a:srgbClr val="3D5466"/>
+                </a:solidFill>
+                <a:latin typeface="Arial"/>
+              </a:rPr>
+              <a:t>  Transfer &amp; Abschluss</a:t>
+            </a:r>
+            <a:r>
+              <a:rPr sz="1200">
+                <a:solidFill>
+                  <a:srgbClr val="78808C"/>
+                </a:solidFill>
+                <a:latin typeface="Arial"/>
+              </a:rPr>
+              <a:t>  ·  Einzelarbeit</a:t>
+            </a:r>
+          </a:p>
+        </p:txBody>
+      </p:sp>
+      <p:sp>
+        <p:nvSpPr>
+          <p:cNvPr id="8" name="Rectangle 7"/>
           <p:cNvSpPr/>
           <p:nvPr/>
         </p:nvSpPr>
@@ -6457,7 +8981,7 @@
       </p:sp>
       <p:sp>
         <p:nvSpPr>
-          <p:cNvPr id="10" name="TextBox 9"/>
+          <p:cNvPr id="9" name="TextBox 8"/>
           <p:cNvSpPr txBox="1"/>
           <p:nvPr/>
         </p:nvSpPr>
@@ -6523,7 +9047,7 @@
             <a:avLst/>
           </a:prstGeom>
           <a:solidFill>
-            <a:srgbClr val="FFFFFF"/>
+            <a:srgbClr val="EDEDF3"/>
           </a:solidFill>
           <a:ln>
             <a:noFill/>
@@ -6624,43 +9148,51 @@
                 </a:solidFill>
                 <a:latin typeface="JetBrains Mono"/>
               </a:rPr>
-              <a:t>M11  ·  SCHAUBILD</a:t>
-            </a:r>
-          </a:p>
-        </p:txBody>
-      </p:sp>
-      <p:sp>
-        <p:nvSpPr>
-          <p:cNvPr id="5" name="TextBox 4"/>
-          <p:cNvSpPr txBox="1"/>
-          <p:nvPr/>
-        </p:nvSpPr>
-        <p:spPr>
-          <a:xfrm>
-            <a:off x="685800" y="502920"/>
-            <a:ext cx="10817352" cy="594360"/>
-          </a:xfrm>
-          <a:prstGeom prst="rect">
-            <a:avLst/>
-          </a:prstGeom>
-          <a:noFill/>
-        </p:spPr>
-        <p:txBody>
-          <a:bodyPr wrap="square">
-            <a:spAutoFit/>
-          </a:bodyPr>
-          <a:lstStyle/>
-          <a:p>
-            <a:pPr algn="l"/>
-            <a:r>
-              <a:rPr sz="2000" b="1" i="0">
-                <a:solidFill>
-                  <a:srgbClr val="1F2C56"/>
-                </a:solidFill>
-                <a:latin typeface="Source Serif 4"/>
-              </a:rPr>
-              <a:t>Eisberg-Modell latente Bedarfe</a:t>
-            </a:r>
+              <a:t>M11  ·  INHALT</a:t>
+            </a:r>
+          </a:p>
+        </p:txBody>
+      </p:sp>
+      <p:sp>
+        <p:nvSpPr>
+          <p:cNvPr id="5" name="Rectangle 4"/>
+          <p:cNvSpPr/>
+          <p:nvPr/>
+        </p:nvSpPr>
+        <p:spPr>
+          <a:xfrm>
+            <a:off x="0" y="1234440"/>
+            <a:ext cx="12188952" cy="12700"/>
+          </a:xfrm>
+          <a:prstGeom prst="rect">
+            <a:avLst/>
+          </a:prstGeom>
+          <a:solidFill>
+            <a:srgbClr val="D8DFE4"/>
+          </a:solidFill>
+          <a:ln>
+            <a:noFill/>
+          </a:ln>
+        </p:spPr>
+        <p:style>
+          <a:lnRef idx="1">
+            <a:schemeClr val="accent1"/>
+          </a:lnRef>
+          <a:fillRef idx="3">
+            <a:schemeClr val="accent1"/>
+          </a:fillRef>
+          <a:effectRef idx="2">
+            <a:schemeClr val="accent1"/>
+          </a:effectRef>
+          <a:fontRef idx="minor">
+            <a:schemeClr val="lt1"/>
+          </a:fontRef>
+        </p:style>
+        <p:txBody>
+          <a:bodyPr rtlCol="0" anchor="ctr"/>
+          <a:lstStyle/>
+          <a:p>
+            <a:pPr algn="ctr"/>
           </a:p>
         </p:txBody>
       </p:sp>
@@ -6672,8 +9204,8 @@
         </p:nvSpPr>
         <p:spPr>
           <a:xfrm>
-            <a:off x="685800" y="1143000"/>
-            <a:ext cx="10817352" cy="25400"/>
+            <a:off x="685800" y="502920"/>
+            <a:ext cx="36576" cy="658368"/>
           </a:xfrm>
           <a:prstGeom prst="rect">
             <a:avLst/>
@@ -6707,33 +9239,105 @@
           </a:p>
         </p:txBody>
       </p:sp>
-      <p:pic>
-        <p:nvPicPr>
-          <p:cNvPr id="7" name="Picture 6" descr="image.png"/>
-          <p:cNvPicPr>
-            <a:picLocks noChangeAspect="1"/>
-          </p:cNvPicPr>
-          <p:nvPr/>
-        </p:nvPicPr>
-        <p:blipFill>
-          <a:blip r:embed="rId2"/>
-          <a:stretch>
-            <a:fillRect/>
-          </a:stretch>
-        </p:blipFill>
-        <p:spPr>
-          <a:xfrm>
-            <a:off x="2554863" y="1325880"/>
-            <a:ext cx="7079225" cy="4937760"/>
-          </a:xfrm>
-          <a:prstGeom prst="rect">
-            <a:avLst/>
-          </a:prstGeom>
-        </p:spPr>
-      </p:pic>
-      <p:sp>
-        <p:nvSpPr>
-          <p:cNvPr id="8" name="Rectangle 7"/>
+      <p:sp>
+        <p:nvSpPr>
+          <p:cNvPr id="7" name="TextBox 6"/>
+          <p:cNvSpPr txBox="1"/>
+          <p:nvPr/>
+        </p:nvSpPr>
+        <p:spPr>
+          <a:xfrm>
+            <a:off x="813816" y="502920"/>
+            <a:ext cx="10634472" cy="685800"/>
+          </a:xfrm>
+          <a:prstGeom prst="rect">
+            <a:avLst/>
+          </a:prstGeom>
+          <a:noFill/>
+        </p:spPr>
+        <p:txBody>
+          <a:bodyPr wrap="square">
+            <a:spAutoFit/>
+          </a:bodyPr>
+          <a:lstStyle/>
+          <a:p>
+            <a:pPr algn="l"/>
+            <a:r>
+              <a:rPr sz="2400" b="1" i="0">
+                <a:solidFill>
+                  <a:srgbClr val="1F2C56"/>
+                </a:solidFill>
+                <a:latin typeface="Source Serif 4"/>
+              </a:rPr>
+              <a:t>Das Eisberg-Modell der Kundenbedürfnisse</a:t>
+            </a:r>
+          </a:p>
+        </p:txBody>
+      </p:sp>
+      <p:sp>
+        <p:nvSpPr>
+          <p:cNvPr id="8" name="TextBox 7"/>
+          <p:cNvSpPr txBox="1"/>
+          <p:nvPr/>
+        </p:nvSpPr>
+        <p:spPr>
+          <a:xfrm>
+            <a:off x="685800" y="1417320"/>
+            <a:ext cx="10817352" cy="5029200"/>
+          </a:xfrm>
+          <a:prstGeom prst="rect">
+            <a:avLst/>
+          </a:prstGeom>
+          <a:noFill/>
+        </p:spPr>
+        <p:txBody>
+          <a:bodyPr wrap="square">
+            <a:spAutoFit/>
+          </a:bodyPr>
+          <a:lstStyle/>
+          <a:p>
+            <a:pPr>
+              <a:spcBef>
+                <a:spcPts val="400"/>
+              </a:spcBef>
+              <a:spcAft>
+                <a:spcPts val="200"/>
+              </a:spcAft>
+            </a:pPr>
+            <a:r>
+              <a:rPr sz="1300">
+                <a:solidFill>
+                  <a:srgbClr val="3D5466"/>
+                </a:solidFill>
+                <a:latin typeface="Arial"/>
+              </a:rPr>
+              <a:t>▸  Explizite Bedarfe: Der Kunde benennt klar, was er will. „Ich brauche eine Anschlussfinanzierung für meine Maschine." Explizite Bedarfe entstehen, wenn der Kunde seine Situation analysiert und eine Lösung definiert hat.</a:t>
+            </a:r>
+          </a:p>
+          <a:p>
+            <a:pPr>
+              <a:spcBef>
+                <a:spcPts val="400"/>
+              </a:spcBef>
+              <a:spcAft>
+                <a:spcPts val="200"/>
+              </a:spcAft>
+            </a:pPr>
+            <a:r>
+              <a:rPr sz="1300">
+                <a:solidFill>
+                  <a:srgbClr val="3D5466"/>
+                </a:solidFill>
+                <a:latin typeface="Arial"/>
+              </a:rPr>
+              <a:t>▸  Implizite (latente) Bedarfe: Der Kunde beschreibt ein Problem, einen Schmerz oder eine Unzufriedenheit, ohne eine Lösung zu benennen. „Unsere Abschreibungen sind dieses Jahr sehr hoch." Oder: „Ich mache mir Sorgen wegen der Nachfolge." Latente Bedarfe sind die Grundlage – und oft der eigentliche Grund für das Gespräch.</a:t>
+            </a:r>
+          </a:p>
+        </p:txBody>
+      </p:sp>
+      <p:sp>
+        <p:nvSpPr>
+          <p:cNvPr id="9" name="Rectangle 8"/>
           <p:cNvSpPr/>
           <p:nvPr/>
         </p:nvSpPr>
@@ -6776,7 +9380,7 @@
       </p:sp>
       <p:sp>
         <p:nvSpPr>
-          <p:cNvPr id="9" name="TextBox 8"/>
+          <p:cNvPr id="10" name="TextBox 9"/>
           <p:cNvSpPr txBox="1"/>
           <p:nvPr/>
         </p:nvSpPr>
@@ -6805,41 +9409,6 @@
                 <a:latin typeface="JetBrains Mono"/>
               </a:rPr>
               <a:t>Benedikt Zoller Coaching  ·  FKB Campus  ·  M11</a:t>
-            </a:r>
-          </a:p>
-        </p:txBody>
-      </p:sp>
-      <p:sp>
-        <p:nvSpPr>
-          <p:cNvPr id="10" name="TextBox 9"/>
-          <p:cNvSpPr txBox="1"/>
-          <p:nvPr/>
-        </p:nvSpPr>
-        <p:spPr>
-          <a:xfrm>
-            <a:off x="7176211" y="6583680"/>
-            <a:ext cx="4326940" cy="256032"/>
-          </a:xfrm>
-          <a:prstGeom prst="rect">
-            <a:avLst/>
-          </a:prstGeom>
-          <a:noFill/>
-        </p:spPr>
-        <p:txBody>
-          <a:bodyPr wrap="none">
-            <a:spAutoFit/>
-          </a:bodyPr>
-          <a:lstStyle/>
-          <a:p>
-            <a:pPr algn="r"/>
-            <a:r>
-              <a:rPr sz="700">
-                <a:solidFill>
-                  <a:srgbClr val="A0B4D2"/>
-                </a:solidFill>
-                <a:latin typeface="JetBrains Mono"/>
-              </a:rPr>
-              <a:t>Schaubild</a:t>
             </a:r>
           </a:p>
         </p:txBody>
@@ -6877,7 +9446,7 @@
             <a:avLst/>
           </a:prstGeom>
           <a:solidFill>
-            <a:srgbClr val="EDEDF3"/>
+            <a:srgbClr val="FFFFFF"/>
           </a:solidFill>
           <a:ln>
             <a:noFill/>
@@ -6978,51 +9547,43 @@
                 </a:solidFill>
                 <a:latin typeface="JetBrains Mono"/>
               </a:rPr>
-              <a:t>M11  ·  INHALT</a:t>
-            </a:r>
-          </a:p>
-        </p:txBody>
-      </p:sp>
-      <p:sp>
-        <p:nvSpPr>
-          <p:cNvPr id="5" name="Rectangle 4"/>
-          <p:cNvSpPr/>
-          <p:nvPr/>
-        </p:nvSpPr>
-        <p:spPr>
-          <a:xfrm>
-            <a:off x="0" y="1234440"/>
-            <a:ext cx="12188952" cy="12700"/>
-          </a:xfrm>
-          <a:prstGeom prst="rect">
-            <a:avLst/>
-          </a:prstGeom>
-          <a:solidFill>
-            <a:srgbClr val="D8DFE4"/>
-          </a:solidFill>
-          <a:ln>
-            <a:noFill/>
-          </a:ln>
-        </p:spPr>
-        <p:style>
-          <a:lnRef idx="1">
-            <a:schemeClr val="accent1"/>
-          </a:lnRef>
-          <a:fillRef idx="3">
-            <a:schemeClr val="accent1"/>
-          </a:fillRef>
-          <a:effectRef idx="2">
-            <a:schemeClr val="accent1"/>
-          </a:effectRef>
-          <a:fontRef idx="minor">
-            <a:schemeClr val="lt1"/>
-          </a:fontRef>
-        </p:style>
-        <p:txBody>
-          <a:bodyPr rtlCol="0" anchor="ctr"/>
-          <a:lstStyle/>
-          <a:p>
-            <a:pPr algn="ctr"/>
+              <a:t>M11  ·  SCHAUBILD</a:t>
+            </a:r>
+          </a:p>
+        </p:txBody>
+      </p:sp>
+      <p:sp>
+        <p:nvSpPr>
+          <p:cNvPr id="5" name="TextBox 4"/>
+          <p:cNvSpPr txBox="1"/>
+          <p:nvPr/>
+        </p:nvSpPr>
+        <p:spPr>
+          <a:xfrm>
+            <a:off x="685800" y="502920"/>
+            <a:ext cx="10817352" cy="594360"/>
+          </a:xfrm>
+          <a:prstGeom prst="rect">
+            <a:avLst/>
+          </a:prstGeom>
+          <a:noFill/>
+        </p:spPr>
+        <p:txBody>
+          <a:bodyPr wrap="square">
+            <a:spAutoFit/>
+          </a:bodyPr>
+          <a:lstStyle/>
+          <a:p>
+            <a:pPr algn="l"/>
+            <a:r>
+              <a:rPr sz="2000" b="1" i="0">
+                <a:solidFill>
+                  <a:srgbClr val="1F2C56"/>
+                </a:solidFill>
+                <a:latin typeface="Source Serif 4"/>
+              </a:rPr>
+              <a:t>Eisberg-Modell latente Bedarfe</a:t>
+            </a:r>
           </a:p>
         </p:txBody>
       </p:sp>
@@ -7034,8 +9595,8 @@
         </p:nvSpPr>
         <p:spPr>
           <a:xfrm>
-            <a:off x="685800" y="502920"/>
-            <a:ext cx="36576" cy="658368"/>
+            <a:off x="685800" y="1143000"/>
+            <a:ext cx="10817352" cy="25400"/>
           </a:xfrm>
           <a:prstGeom prst="rect">
             <a:avLst/>
@@ -7069,181 +9630,33 @@
           </a:p>
         </p:txBody>
       </p:sp>
-      <p:sp>
-        <p:nvSpPr>
-          <p:cNvPr id="7" name="TextBox 6"/>
-          <p:cNvSpPr txBox="1"/>
-          <p:nvPr/>
-        </p:nvSpPr>
-        <p:spPr>
-          <a:xfrm>
-            <a:off x="813816" y="502920"/>
-            <a:ext cx="10634472" cy="685800"/>
-          </a:xfrm>
-          <a:prstGeom prst="rect">
-            <a:avLst/>
-          </a:prstGeom>
-          <a:noFill/>
-        </p:spPr>
-        <p:txBody>
-          <a:bodyPr wrap="square">
-            <a:spAutoFit/>
-          </a:bodyPr>
-          <a:lstStyle/>
-          <a:p>
-            <a:pPr algn="l"/>
-            <a:r>
-              <a:rPr sz="2400" b="1" i="0">
-                <a:solidFill>
-                  <a:srgbClr val="1F2C56"/>
-                </a:solidFill>
-                <a:latin typeface="Source Serif 4"/>
-              </a:rPr>
-              <a:t>Warum Kunden latente Bedarfe nicht artikulieren</a:t>
-            </a:r>
-          </a:p>
-        </p:txBody>
-      </p:sp>
-      <p:sp>
-        <p:nvSpPr>
-          <p:cNvPr id="8" name="TextBox 7"/>
-          <p:cNvSpPr txBox="1"/>
-          <p:nvPr/>
-        </p:nvSpPr>
-        <p:spPr>
-          <a:xfrm>
-            <a:off x="685800" y="1417320"/>
-            <a:ext cx="10817352" cy="5029200"/>
-          </a:xfrm>
-          <a:prstGeom prst="rect">
-            <a:avLst/>
-          </a:prstGeom>
-          <a:noFill/>
-        </p:spPr>
-        <p:txBody>
-          <a:bodyPr wrap="square">
-            <a:spAutoFit/>
-          </a:bodyPr>
-          <a:lstStyle/>
-          <a:p>
-            <a:pPr>
-              <a:spcBef>
-                <a:spcPts val="400"/>
-              </a:spcBef>
-              <a:spcAft>
-                <a:spcPts val="200"/>
-              </a:spcAft>
-            </a:pPr>
-            <a:r>
-              <a:rPr sz="1200">
-                <a:solidFill>
-                  <a:srgbClr val="3D5466"/>
-                </a:solidFill>
-                <a:latin typeface="Arial"/>
-              </a:rPr>
-              <a:t>Es gibt vier Hauptgründe, warum Kunden ihre eigentlichen Bedarfe nicht spontan nennen (praxisbasiert; vgl. Rackham, 1988 , S. 57–62):</a:t>
-            </a:r>
-          </a:p>
-          <a:p>
-            <a:pPr>
-              <a:spcBef>
-                <a:spcPts val="400"/>
-              </a:spcBef>
-              <a:spcAft>
-                <a:spcPts val="200"/>
-              </a:spcAft>
-            </a:pPr>
-            <a:r>
-              <a:rPr sz="1300">
-                <a:solidFill>
-                  <a:srgbClr val="3D5466"/>
-                </a:solidFill>
-                <a:latin typeface="Arial"/>
-              </a:rPr>
-              <a:t>▸  Unbewusstheit: Der Bedarf ist noch nicht als solcher erkannt. Der Kunde spürt das Problem, hat es aber nicht als lösungswürdig eingeordnet.</a:t>
-            </a:r>
-          </a:p>
-          <a:p>
-            <a:pPr>
-              <a:spcBef>
-                <a:spcPts val="400"/>
-              </a:spcBef>
-              <a:spcAft>
-                <a:spcPts val="200"/>
-              </a:spcAft>
-            </a:pPr>
-            <a:r>
-              <a:rPr sz="1300">
-                <a:solidFill>
-                  <a:srgbClr val="3D5466"/>
-                </a:solidFill>
-                <a:latin typeface="Arial"/>
-              </a:rPr>
-              <a:t>▸  Schambarriere: Sensitive Themen wie Nachfolge, Unternehmenskrise oder Privatsphäre werden nicht freiwillig angesprochen.</a:t>
-            </a:r>
-          </a:p>
-          <a:p>
-            <a:pPr>
-              <a:spcBef>
-                <a:spcPts val="400"/>
-              </a:spcBef>
-              <a:spcAft>
-                <a:spcPts val="200"/>
-              </a:spcAft>
-            </a:pPr>
-            <a:r>
-              <a:rPr sz="1300">
-                <a:solidFill>
-                  <a:srgbClr val="3D5466"/>
-                </a:solidFill>
-                <a:latin typeface="Arial"/>
-              </a:rPr>
-              <a:t>▸  Fehlende Sicherheit: Der Kunde weiß nicht, ob der Berater kompetent genug ist für das eigentliche Thema. Im Volksbankenalltag kommt ein verstärkender Faktor hinzu: Häufige Beraterwechsel. Wer innerhalb von sechs Jahren den vierten Berater bekommt, hat gelernt, sensible Themen wie Nachfolge oder Unternehmenskrise nicht mehr anzusprechen – das Vertrauen für diese Ebene muss jedes Mal neu aufgebaut werden. Praxistipp: Eigene Erfahrungen kurz einbringen öffnet schneller als jede Frage – „Ich habe das bei einem anderen Kunden ähnlich erlebt, wie er das gelöst hat, war interessant…" signalisiert Kompetenz und schafft Vertrautheit.</a:t>
-            </a:r>
-          </a:p>
-          <a:p>
-            <a:pPr>
-              <a:spcBef>
-                <a:spcPts val="400"/>
-              </a:spcBef>
-              <a:spcAft>
-                <a:spcPts val="200"/>
-              </a:spcAft>
-            </a:pPr>
-            <a:r>
-              <a:rPr sz="1300">
-                <a:solidFill>
-                  <a:srgbClr val="3D5466"/>
-                </a:solidFill>
-                <a:latin typeface="Arial"/>
-              </a:rPr>
-              <a:t>▸  Gewohnheit: Der Kunde ist es gewohnt, dass Bankgespräche Produktgespräche sind – er stellt sich selbst anders ein.</a:t>
-            </a:r>
-          </a:p>
-          <a:p>
-            <a:pPr>
-              <a:spcBef>
-                <a:spcPts val="400"/>
-              </a:spcBef>
-              <a:spcAft>
-                <a:spcPts val="200"/>
-              </a:spcAft>
-            </a:pPr>
-            <a:r>
-              <a:rPr sz="1200">
-                <a:solidFill>
-                  <a:srgbClr val="3D5466"/>
-                </a:solidFill>
-                <a:latin typeface="Arial"/>
-              </a:rPr>
-              <a:t>Der Berater, der latente Bedarfe erkennen will, muss aktiv dazu einladen: durch offene Haltung, gezielte Fragen und echtes Zuhören.</a:t>
-            </a:r>
-          </a:p>
-        </p:txBody>
-      </p:sp>
-      <p:sp>
-        <p:nvSpPr>
-          <p:cNvPr id="9" name="Rectangle 8"/>
+      <p:pic>
+        <p:nvPicPr>
+          <p:cNvPr id="7" name="Picture 6" descr="image.png"/>
+          <p:cNvPicPr>
+            <a:picLocks noChangeAspect="1"/>
+          </p:cNvPicPr>
+          <p:nvPr/>
+        </p:nvPicPr>
+        <p:blipFill>
+          <a:blip r:embed="rId2"/>
+          <a:stretch>
+            <a:fillRect/>
+          </a:stretch>
+        </p:blipFill>
+        <p:spPr>
+          <a:xfrm>
+            <a:off x="2554863" y="1325880"/>
+            <a:ext cx="7079225" cy="4937760"/>
+          </a:xfrm>
+          <a:prstGeom prst="rect">
+            <a:avLst/>
+          </a:prstGeom>
+        </p:spPr>
+      </p:pic>
+      <p:sp>
+        <p:nvSpPr>
+          <p:cNvPr id="8" name="Rectangle 7"/>
           <p:cNvSpPr/>
           <p:nvPr/>
         </p:nvSpPr>
@@ -7286,7 +9699,7 @@
       </p:sp>
       <p:sp>
         <p:nvSpPr>
-          <p:cNvPr id="10" name="TextBox 9"/>
+          <p:cNvPr id="9" name="TextBox 8"/>
           <p:cNvSpPr txBox="1"/>
           <p:nvPr/>
         </p:nvSpPr>
@@ -7315,6 +9728,41 @@
                 <a:latin typeface="JetBrains Mono"/>
               </a:rPr>
               <a:t>Benedikt Zoller Coaching  ·  FKB Campus  ·  M11</a:t>
+            </a:r>
+          </a:p>
+        </p:txBody>
+      </p:sp>
+      <p:sp>
+        <p:nvSpPr>
+          <p:cNvPr id="10" name="TextBox 9"/>
+          <p:cNvSpPr txBox="1"/>
+          <p:nvPr/>
+        </p:nvSpPr>
+        <p:spPr>
+          <a:xfrm>
+            <a:off x="7176211" y="6583680"/>
+            <a:ext cx="4326940" cy="256032"/>
+          </a:xfrm>
+          <a:prstGeom prst="rect">
+            <a:avLst/>
+          </a:prstGeom>
+          <a:noFill/>
+        </p:spPr>
+        <p:txBody>
+          <a:bodyPr wrap="none">
+            <a:spAutoFit/>
+          </a:bodyPr>
+          <a:lstStyle/>
+          <a:p>
+            <a:pPr algn="r"/>
+            <a:r>
+              <a:rPr sz="700">
+                <a:solidFill>
+                  <a:srgbClr val="A0B4D2"/>
+                </a:solidFill>
+                <a:latin typeface="JetBrains Mono"/>
+              </a:rPr>
+              <a:t>Schaubild</a:t>
             </a:r>
           </a:p>
         </p:txBody>
@@ -7574,7 +10022,7 @@
                 </a:solidFill>
                 <a:latin typeface="Source Serif 4"/>
               </a:rPr>
-              <a:t>Typische latente Bedarfsfelder im Firmenkunden-Alltag</a:t>
+              <a:t>Warum Kunden latente Bedarfe nicht artikulieren</a:t>
             </a:r>
           </a:p>
         </p:txBody>
@@ -7610,13 +10058,13 @@
               </a:spcAft>
             </a:pPr>
             <a:r>
-              <a:rPr sz="1200">
+              <a:rPr sz="1300">
                 <a:solidFill>
                   <a:srgbClr val="3D5466"/>
                 </a:solidFill>
                 <a:latin typeface="Arial"/>
               </a:rPr>
-              <a:t>Ein Berater braucht ein inneres Radar: Worauf soll ich achten? Die folgende Übersicht zeigt die vier häufigsten Felder – mit typischen Kundensignalen und passendem Gesprächseinstieg:</a:t>
+              <a:t>▸  Es gibt vier Hauptgründe, warum Kunden ihre eigentlichen Bedarfe nicht spontan nennen (praxisbasiert; vgl. Rackham, 1988 , S. 57–62):</a:t>
             </a:r>
           </a:p>
           <a:p>
@@ -7629,13 +10077,13 @@
               </a:spcAft>
             </a:pPr>
             <a:r>
-              <a:rPr sz="1200">
+              <a:rPr sz="1300">
                 <a:solidFill>
                   <a:srgbClr val="3D5466"/>
                 </a:solidFill>
                 <a:latin typeface="Arial"/>
               </a:rPr>
-              <a:t>## 4.2 SPIN – Das Fragetechnik-System für tiefe Bedarfe</a:t>
+              <a:t>▸  Unbewusstheit: Der Bedarf ist noch nicht als solcher erkannt. Der Kunde spürt das Problem, hat es aber nicht als lösungswürdig eingeordnet.</a:t>
             </a:r>
           </a:p>
           <a:p>
@@ -7648,13 +10096,70 @@
               </a:spcAft>
             </a:pPr>
             <a:r>
-              <a:rPr sz="1200">
+              <a:rPr sz="1300">
                 <a:solidFill>
                   <a:srgbClr val="3D5466"/>
                 </a:solidFill>
                 <a:latin typeface="Arial"/>
               </a:rPr>
-              <a:t>Rackham (1988) entwickelte das SPIN-Modell auf Basis empirischer Gesprächsanalysen. Die vier Fragetypen führen den Kunden von der Oberfläche in die Tiefe:</a:t>
+              <a:t>▸  Schambarriere: Sensitive Themen wie Nachfolge, Unternehmenskrise oder Privatsphäre werden nicht freiwillig angesprochen.</a:t>
+            </a:r>
+          </a:p>
+          <a:p>
+            <a:pPr>
+              <a:spcBef>
+                <a:spcPts val="400"/>
+              </a:spcBef>
+              <a:spcAft>
+                <a:spcPts val="200"/>
+              </a:spcAft>
+            </a:pPr>
+            <a:r>
+              <a:rPr sz="1300">
+                <a:solidFill>
+                  <a:srgbClr val="3D5466"/>
+                </a:solidFill>
+                <a:latin typeface="Arial"/>
+              </a:rPr>
+              <a:t>▸  Fehlende Sicherheit: Der Kunde weiß nicht, ob der Berater kompetent genug ist für das eigentliche Thema. Im Volksbankenalltag kommt ein verstärkender Faktor hinzu: Häufige Beraterwechsel. Wer innerhalb von sechs Jahren den vierten Berater bekommt, hat gelernt, sensible Themen wie Nachfolge oder Unternehmenskrise nicht mehr anzusprechen – das Vertrauen für diese Ebene muss jedes Mal neu aufgebaut werden. Praxistipp: Eigene Erfahrungen kurz einbringen öffnet schneller als jede Frage – „Ich habe das bei einem anderen Kunden ähnlich erlebt, wie er das gelöst hat, war interessant…" signalisiert Kompetenz und schafft Vertrautheit.</a:t>
+            </a:r>
+          </a:p>
+          <a:p>
+            <a:pPr>
+              <a:spcBef>
+                <a:spcPts val="400"/>
+              </a:spcBef>
+              <a:spcAft>
+                <a:spcPts val="200"/>
+              </a:spcAft>
+            </a:pPr>
+            <a:r>
+              <a:rPr sz="1300">
+                <a:solidFill>
+                  <a:srgbClr val="3D5466"/>
+                </a:solidFill>
+                <a:latin typeface="Arial"/>
+              </a:rPr>
+              <a:t>▸  Gewohnheit: Der Kunde ist es gewohnt, dass Bankgespräche Produktgespräche sind – er stellt sich selbst anders ein.</a:t>
+            </a:r>
+          </a:p>
+          <a:p>
+            <a:pPr>
+              <a:spcBef>
+                <a:spcPts val="400"/>
+              </a:spcBef>
+              <a:spcAft>
+                <a:spcPts val="200"/>
+              </a:spcAft>
+            </a:pPr>
+            <a:r>
+              <a:rPr sz="1300">
+                <a:solidFill>
+                  <a:srgbClr val="3D5466"/>
+                </a:solidFill>
+                <a:latin typeface="Arial"/>
+              </a:rPr>
+              <a:t>▸  Der Berater, der latente Bedarfe erkennen will, muss aktiv dazu einladen: durch offene Haltung, gezielte Fragen und echtes Zuhören.</a:t>
             </a:r>
           </a:p>
         </p:txBody>
@@ -7992,7 +10497,7 @@
                 </a:solidFill>
                 <a:latin typeface="Source Serif 4"/>
               </a:rPr>
-              <a:t>Fragetechnik in der Praxis: Drei Tiefen-Ebenen</a:t>
+              <a:t>Typische latente Bedarfsfelder im Firmenkunden-Alltag</a:t>
             </a:r>
           </a:p>
         </p:txBody>
@@ -8028,13 +10533,13 @@
               </a:spcAft>
             </a:pPr>
             <a:r>
-              <a:rPr sz="1200">
+              <a:rPr sz="1300">
                 <a:solidFill>
                   <a:srgbClr val="3D5466"/>
                 </a:solidFill>
                 <a:latin typeface="Arial"/>
               </a:rPr>
-              <a:t>Latente Bedarfe liegen oft unter zwei oder drei Gesprächsschichten. Eine einfache Orientierung:</a:t>
+              <a:t>▸  Ein Berater braucht ein inneres Radar: Worauf soll ich achten? Die folgende Übersicht zeigt die vier häufigsten Felder – mit typischen Kundensignalen und passendem Gesprächseinstieg:</a:t>
             </a:r>
           </a:p>
           <a:p>
@@ -8047,32 +10552,13 @@
               </a:spcAft>
             </a:pPr>
             <a:r>
-              <a:rPr sz="1200">
+              <a:rPr sz="1300">
                 <a:solidFill>
                   <a:srgbClr val="3D5466"/>
                 </a:solidFill>
                 <a:latin typeface="Arial"/>
               </a:rPr>
-              <a:t>Ebene 1 – Thema (Was ist das Gesprächsthema?)</a:t>
-            </a:r>
-          </a:p>
-          <a:p>
-            <a:pPr>
-              <a:spcBef>
-                <a:spcPts val="600"/>
-              </a:spcBef>
-              <a:spcAft>
-                <a:spcPts val="200"/>
-              </a:spcAft>
-            </a:pPr>
-            <a:r>
-              <a:rPr sz="1200" i="1">
-                <a:solidFill>
-                  <a:srgbClr val="3D5466"/>
-                </a:solidFill>
-                <a:latin typeface="Arial"/>
-              </a:rPr>
-              <a:t>→  „Wie läuft das Geschäft aktuell?"</a:t>
+              <a:t>▸  ## 4.2 SPIN – Das Fragetechnik-System für tiefe Bedarfe</a:t>
             </a:r>
           </a:p>
           <a:p>
@@ -8085,165 +10571,13 @@
               </a:spcAft>
             </a:pPr>
             <a:r>
-              <a:rPr sz="1200">
+              <a:rPr sz="1300">
                 <a:solidFill>
                   <a:srgbClr val="3D5466"/>
                 </a:solidFill>
                 <a:latin typeface="Arial"/>
               </a:rPr>
-              <a:t>Ebene 2 – Problem (Wo drückt der Schuh?)</a:t>
-            </a:r>
-          </a:p>
-          <a:p>
-            <a:pPr>
-              <a:spcBef>
-                <a:spcPts val="600"/>
-              </a:spcBef>
-              <a:spcAft>
-                <a:spcPts val="200"/>
-              </a:spcAft>
-            </a:pPr>
-            <a:r>
-              <a:rPr sz="1200" i="1">
-                <a:solidFill>
-                  <a:srgbClr val="3D5466"/>
-                </a:solidFill>
-                <a:latin typeface="Arial"/>
-              </a:rPr>
-              <a:t>→  „Sie sagten, die Personalkosten steigen. Was steckt dahinter?"</a:t>
-            </a:r>
-          </a:p>
-          <a:p>
-            <a:pPr>
-              <a:spcBef>
-                <a:spcPts val="400"/>
-              </a:spcBef>
-              <a:spcAft>
-                <a:spcPts val="200"/>
-              </a:spcAft>
-            </a:pPr>
-            <a:r>
-              <a:rPr sz="1200">
-                <a:solidFill>
-                  <a:srgbClr val="3D5466"/>
-                </a:solidFill>
-                <a:latin typeface="Arial"/>
-              </a:rPr>
-              <a:t>Ebene 3 – Bedeutung (Was steht auf dem Spiel?)</a:t>
-            </a:r>
-          </a:p>
-          <a:p>
-            <a:pPr>
-              <a:spcBef>
-                <a:spcPts val="600"/>
-              </a:spcBef>
-              <a:spcAft>
-                <a:spcPts val="200"/>
-              </a:spcAft>
-            </a:pPr>
-            <a:r>
-              <a:rPr sz="1200" i="1">
-                <a:solidFill>
-                  <a:srgbClr val="3D5466"/>
-                </a:solidFill>
-                <a:latin typeface="Arial"/>
-              </a:rPr>
-              <a:t>→  „Wenn sich das fortsetzt: Was bedeutet das für Ihre Pläne für die nächsten fünf Jahre?"</a:t>
-            </a:r>
-          </a:p>
-          <a:p>
-            <a:pPr>
-              <a:spcBef>
-                <a:spcPts val="400"/>
-              </a:spcBef>
-              <a:spcAft>
-                <a:spcPts val="200"/>
-              </a:spcAft>
-            </a:pPr>
-            <a:r>
-              <a:rPr sz="1200">
-                <a:solidFill>
-                  <a:srgbClr val="3D5466"/>
-                </a:solidFill>
-                <a:latin typeface="Arial"/>
-              </a:rPr>
-              <a:t>Erst auf Ebene 3 wird der latente Bedarf sichtbar – und damit auch, welches Produkt oder welche Lösung wirklich passt.</a:t>
-            </a:r>
-          </a:p>
-          <a:p>
-            <a:pPr>
-              <a:spcBef>
-                <a:spcPts val="400"/>
-              </a:spcBef>
-              <a:spcAft>
-                <a:spcPts val="200"/>
-              </a:spcAft>
-            </a:pPr>
-            <a:r>
-              <a:rPr sz="1200">
-                <a:solidFill>
-                  <a:srgbClr val="3D5466"/>
-                </a:solidFill>
-                <a:latin typeface="Arial"/>
-              </a:rPr>
-              <a:t>## 4.3 Signale erkennen: Die vier Kanäle</a:t>
-            </a:r>
-          </a:p>
-          <a:p>
-            <a:pPr>
-              <a:spcBef>
-                <a:spcPts val="400"/>
-              </a:spcBef>
-              <a:spcAft>
-                <a:spcPts val="200"/>
-              </a:spcAft>
-            </a:pPr>
-            <a:r>
-              <a:rPr sz="1200">
-                <a:solidFill>
-                  <a:srgbClr val="3D5466"/>
-                </a:solidFill>
-                <a:latin typeface="Arial"/>
-              </a:rPr>
-              <a:t>Kunden kommunizieren latente Bedarfe auf vier Kanälen gleichzeitig (Watzlawick et al., 1967; Schulz von Thun, 1981). Wer nur den Sachkanal hört, verpasst 75 % der Information.</a:t>
-            </a:r>
-          </a:p>
-          <a:p>
-            <a:pPr>
-              <a:spcBef>
-                <a:spcPts val="400"/>
-              </a:spcBef>
-              <a:spcAft>
-                <a:spcPts val="200"/>
-              </a:spcAft>
-            </a:pPr>
-            <a:r>
-              <a:rPr sz="1200">
-                <a:solidFill>
-                  <a:srgbClr val="3D5466"/>
-                </a:solidFill>
-                <a:latin typeface="Arial"/>
-              </a:rPr>
-              <a:t>Paraverbale Signale: Pausen, Zögern, plötzlich leiser werden, Themenwechsel nach Nachfrage.</a:t>
-            </a:r>
-          </a:p>
-          <a:p>
-            <a:pPr>
-              <a:spcBef>
-                <a:spcPts val="400"/>
-              </a:spcBef>
-              <a:spcAft>
-                <a:spcPts val="200"/>
-              </a:spcAft>
-            </a:pPr>
-            <a:r>
-              <a:rPr sz="1200">
-                <a:solidFill>
-                  <a:srgbClr val="3D5466"/>
-                </a:solidFill>
-                <a:latin typeface="Arial"/>
-              </a:rPr>
-              <a:t>Nonverbale Signale: Abwenden, kurzes Lächeln das nicht bis zu den Augen geht, angespannte Körperhaltung beim bestimmten Thema.</a:t>
+              <a:t>▸  Rackham (1988) entwickelte das SPIN-Modell auf Basis empirischer Gesprächsanalysen. Die vier Fragetypen führen den Kunden von der Oberfläche in die Tiefe:</a:t>
             </a:r>
           </a:p>
         </p:txBody>
@@ -8581,7 +10915,7 @@
                 </a:solidFill>
                 <a:latin typeface="Source Serif 4"/>
               </a:rPr>
-              <a:t>Übung im Plenum: „Was höre ich wirklich?"</a:t>
+              <a:t>Fragetechnik in der Praxis: Drei Tiefen-Ebenen</a:t>
             </a:r>
           </a:p>
         </p:txBody>
@@ -8617,13 +10951,13 @@
               </a:spcAft>
             </a:pPr>
             <a:r>
-              <a:rPr sz="1200">
+              <a:rPr sz="1300">
                 <a:solidFill>
                   <a:srgbClr val="3D5466"/>
                 </a:solidFill>
                 <a:latin typeface="Arial"/>
               </a:rPr>
-              <a:t>Der Trainer liest fünf Kundenaussagen vor. Die Teilnehmenden notieren: (1) Sachinhalt, (2) vermuteter latenter Hintergrund. Anschließend Auswertung im Plenum.</a:t>
+              <a:t>▸  Latente Bedarfe liegen oft unter zwei oder drei Gesprächsschichten. Eine einfache Orientierung:</a:t>
             </a:r>
           </a:p>
           <a:p>
@@ -8636,13 +10970,32 @@
               </a:spcAft>
             </a:pPr>
             <a:r>
-              <a:rPr sz="1200">
+              <a:rPr sz="1300">
                 <a:solidFill>
                   <a:srgbClr val="3D5466"/>
                 </a:solidFill>
                 <a:latin typeface="Arial"/>
               </a:rPr>
-              <a:t>## 4.4 Aktives Zuhören als Schlüsselkompetenz</a:t>
+              <a:t>▸  Ebene 1 – Thema (Was ist das Gesprächsthema?)</a:t>
+            </a:r>
+          </a:p>
+          <a:p>
+            <a:pPr>
+              <a:spcBef>
+                <a:spcPts val="600"/>
+              </a:spcBef>
+              <a:spcAft>
+                <a:spcPts val="200"/>
+              </a:spcAft>
+            </a:pPr>
+            <a:r>
+              <a:rPr sz="1200" i="1">
+                <a:solidFill>
+                  <a:srgbClr val="3D5466"/>
+                </a:solidFill>
+                <a:latin typeface="Arial"/>
+              </a:rPr>
+              <a:t>→  „Wie läuft das Geschäft aktuell?"</a:t>
             </a:r>
           </a:p>
           <a:p>
@@ -8655,13 +11008,32 @@
               </a:spcAft>
             </a:pPr>
             <a:r>
-              <a:rPr sz="1200">
+              <a:rPr sz="1300">
                 <a:solidFill>
                   <a:srgbClr val="3D5466"/>
                 </a:solidFill>
                 <a:latin typeface="Arial"/>
               </a:rPr>
-              <a:t>Techniken des aktiven Zuhörens:</a:t>
+              <a:t>▸  Ebene 2 – Problem (Wo drückt der Schuh?)</a:t>
+            </a:r>
+          </a:p>
+          <a:p>
+            <a:pPr>
+              <a:spcBef>
+                <a:spcPts val="600"/>
+              </a:spcBef>
+              <a:spcAft>
+                <a:spcPts val="200"/>
+              </a:spcAft>
+            </a:pPr>
+            <a:r>
+              <a:rPr sz="1200" i="1">
+                <a:solidFill>
+                  <a:srgbClr val="3D5466"/>
+                </a:solidFill>
+                <a:latin typeface="Arial"/>
+              </a:rPr>
+              <a:t>→  „Sie sagten, die Personalkosten steigen. Was steckt dahinter?"</a:t>
             </a:r>
           </a:p>
           <a:p>
@@ -8680,7 +11052,26 @@
                 </a:solidFill>
                 <a:latin typeface="Arial"/>
               </a:rPr>
-              <a:t>▸  Paraphrasieren: Den Kern des Gesagten in eigenen Worten wiedergeben. „Wenn ich Sie richtig verstehe, macht Ihnen weniger die Finanzierung Sorgen als die Frage, wer das Unternehmen in zehn Jahren führt?"</a:t>
+              <a:t>▸  Ebene 3 – Bedeutung (Was steht auf dem Spiel?)</a:t>
+            </a:r>
+          </a:p>
+          <a:p>
+            <a:pPr>
+              <a:spcBef>
+                <a:spcPts val="600"/>
+              </a:spcBef>
+              <a:spcAft>
+                <a:spcPts val="200"/>
+              </a:spcAft>
+            </a:pPr>
+            <a:r>
+              <a:rPr sz="1200" i="1">
+                <a:solidFill>
+                  <a:srgbClr val="3D5466"/>
+                </a:solidFill>
+                <a:latin typeface="Arial"/>
+              </a:rPr>
+              <a:t>→  „Wenn sich das fortsetzt: Was bedeutet das für Ihre Pläne für die nächsten fünf Jahre?"</a:t>
             </a:r>
           </a:p>
           <a:p>
@@ -8699,7 +11090,7 @@
                 </a:solidFill>
                 <a:latin typeface="Arial"/>
               </a:rPr>
-              <a:t>▸  Verbalisieren: Wahrgenommenes Gefühl benennen (mit Vorsicht). „Ich habe das Gefühl, das Thema liegt Ihnen schon länger am Herzen."</a:t>
+              <a:t>▸  Erst auf Ebene 3 wird der latente Bedarf sichtbar – und damit auch, welches Produkt oder welche Lösung wirklich passt.</a:t>
             </a:r>
           </a:p>
           <a:p>
@@ -8718,7 +11109,7 @@
                 </a:solidFill>
                 <a:latin typeface="Arial"/>
               </a:rPr>
-              <a:t>▸  Schweigen lassen: Pausen aushalten. Viele latente Bedarfe werden erst geäußert, wenn der Berater aufhört zu reden. Vier Sekunden Stille fühlen sich für einen unerfahrenen Berater wie eine Ewigkeit an – für den Kunden sind es vier Sekunden Denkzeit. Wer das Schweigen bricht, beraubt den Kunden dieser Denkzeit. Konkrete Hilfe: Nicken und Augenkontakt halten. Oder leise sagen: „Ich lasse Ihnen einen Moment." Nichts weiter. Rollenspielübung: Üben Sie bewusst, bis zu 6 Sekunden Stille auszuhalten, bevor Sie weitermachen – lassen Sie den Beobachter die Sekunden zählen.</a:t>
+              <a:t>▸  ## 4.3 Signale erkennen: Die vier Kanäle</a:t>
             </a:r>
           </a:p>
           <a:p>
@@ -8737,26 +11128,7 @@
                 </a:solidFill>
                 <a:latin typeface="Arial"/>
               </a:rPr>
-              <a:t>▸  Offene Einladung: „Gibt es etwas, das wir heute noch ansprechen sollten, das wir noch nicht berührt haben?"</a:t>
-            </a:r>
-          </a:p>
-          <a:p>
-            <a:pPr>
-              <a:spcBef>
-                <a:spcPts val="600"/>
-              </a:spcBef>
-              <a:spcAft>
-                <a:spcPts val="200"/>
-              </a:spcAft>
-            </a:pPr>
-            <a:r>
-              <a:rPr sz="1200" i="1">
-                <a:solidFill>
-                  <a:srgbClr val="3D5466"/>
-                </a:solidFill>
-                <a:latin typeface="Arial"/>
-              </a:rPr>
-              <a:t>→  Eine der wichtigsten Fragen am Ende jedes Gesprächs: „Ist noch etwas, das ich wissen sollte?" Einfach. Direkt. Wirkungsvoll.</a:t>
+              <a:t>▸  Kunden kommunizieren latente Bedarfe auf vier Kanälen gleichzeitig (Watzlawick et al., 1967; Schulz von Thun, 1981). Wer nur den Sachkanal hört, verpasst 75 % der Information.</a:t>
             </a:r>
           </a:p>
           <a:p>
@@ -8769,13 +11141,13 @@
               </a:spcAft>
             </a:pPr>
             <a:r>
-              <a:rPr sz="1200">
+              <a:rPr sz="1300">
                 <a:solidFill>
                   <a:srgbClr val="3D5466"/>
                 </a:solidFill>
                 <a:latin typeface="Arial"/>
               </a:rPr>
-              <a:t>## 4.5 Praxiscase: Das Zinsgespräch, das keines ist</a:t>
+              <a:t>▸  Paraverbale Signale: Pausen, Zögern, plötzlich leiser werden, Themenwechsel nach Nachfrage.</a:t>
             </a:r>
           </a:p>
           <a:p>
@@ -8788,51 +11160,13 @@
               </a:spcAft>
             </a:pPr>
             <a:r>
-              <a:rPr sz="1200">
+              <a:rPr sz="1300">
                 <a:solidFill>
                   <a:srgbClr val="3D5466"/>
                 </a:solidFill>
                 <a:latin typeface="Arial"/>
               </a:rPr>
-              <a:t>Ausgangssituation</a:t>
-            </a:r>
-          </a:p>
-          <a:p>
-            <a:pPr>
-              <a:spcBef>
-                <a:spcPts val="400"/>
-              </a:spcBef>
-              <a:spcAft>
-                <a:spcPts val="200"/>
-              </a:spcAft>
-            </a:pPr>
-            <a:r>
-              <a:rPr sz="1200">
-                <a:solidFill>
-                  <a:srgbClr val="3D5466"/>
-                </a:solidFill>
-                <a:latin typeface="Arial"/>
-              </a:rPr>
-              <a:t>Die zuständige Beraterin Lisa Kern bereitet sich auf ein Konditionengespräch vor.</a:t>
-            </a:r>
-          </a:p>
-          <a:p>
-            <a:pPr>
-              <a:spcBef>
-                <a:spcPts val="400"/>
-              </a:spcBef>
-              <a:spcAft>
-                <a:spcPts val="200"/>
-              </a:spcAft>
-            </a:pPr>
-            <a:r>
-              <a:rPr sz="1200">
-                <a:solidFill>
-                  <a:srgbClr val="3D5466"/>
-                </a:solidFill>
-                <a:latin typeface="Arial"/>
-              </a:rPr>
-              <a:t>Das Gespräch</a:t>
+              <a:t>▸  Nonverbale Signale: Abwenden, kurzes Lächeln das nicht bis zu den Augen geht, angespannte Körperhaltung beim bestimmten Thema.</a:t>
             </a:r>
           </a:p>
         </p:txBody>

--- a/protected-downloads/praesentation/M11.pptx
+++ b/protected-downloads/praesentation/M11.pptx
@@ -4528,7 +4528,7 @@
                 </a:solidFill>
                 <a:latin typeface="JetBrains Mono"/>
               </a:rPr>
-              <a:t>Benedikt Zoller Coaching  ·  FKB Campus  ·  2026</a:t>
+              <a:t>FKB Campus  ·  2026</a:t>
             </a:r>
           </a:p>
         </p:txBody>
@@ -5152,7 +5152,7 @@
                 </a:solidFill>
                 <a:latin typeface="JetBrains Mono"/>
               </a:rPr>
-              <a:t>Benedikt Zoller Coaching  ·  FKB Campus  ·  M11</a:t>
+              <a:t>FKB Campus  ·  M11</a:t>
             </a:r>
           </a:p>
         </p:txBody>
@@ -5551,7 +5551,7 @@
                 </a:solidFill>
                 <a:latin typeface="JetBrains Mono"/>
               </a:rPr>
-              <a:t>Benedikt Zoller Coaching  ·  FKB Campus  ·  M11</a:t>
+              <a:t>FKB Campus  ·  M11</a:t>
             </a:r>
           </a:p>
         </p:txBody>
@@ -6085,7 +6085,7 @@
                 </a:solidFill>
                 <a:latin typeface="JetBrains Mono"/>
               </a:rPr>
-              <a:t>Benedikt Zoller Coaching  ·  FKB Campus  ·  M11</a:t>
+              <a:t>FKB Campus  ·  M11</a:t>
             </a:r>
           </a:p>
         </p:txBody>
@@ -6538,7 +6538,7 @@
                 </a:solidFill>
                 <a:latin typeface="JetBrains Mono"/>
               </a:rPr>
-              <a:t>Benedikt Zoller Coaching  ·  FKB Campus  ·  M11</a:t>
+              <a:t>FKB Campus  ·  M11</a:t>
             </a:r>
           </a:p>
         </p:txBody>
@@ -7618,7 +7618,7 @@
                 </a:solidFill>
                 <a:latin typeface="JetBrains Mono"/>
               </a:rPr>
-              <a:t>Benedikt Zoller Coaching  ·  FKB Campus  ·  M11</a:t>
+              <a:t>FKB Campus  ·  M11</a:t>
             </a:r>
           </a:p>
         </p:txBody>
@@ -8019,7 +8019,7 @@
                 </a:solidFill>
                 <a:latin typeface="JetBrains Mono"/>
               </a:rPr>
-              <a:t>Benedikt Zoller Coaching  ·  FKB Campus  ·  M11</a:t>
+              <a:t>FKB Campus  ·  M11</a:t>
             </a:r>
           </a:p>
         </p:txBody>
@@ -8432,7 +8432,7 @@
                 </a:solidFill>
                 <a:latin typeface="JetBrains Mono"/>
               </a:rPr>
-              <a:t>Benedikt Zoller Coaching  ·  FKB Campus  ·  M11</a:t>
+              <a:t>FKB Campus  ·  M11</a:t>
             </a:r>
           </a:p>
         </p:txBody>
@@ -9009,7 +9009,7 @@
                 </a:solidFill>
                 <a:latin typeface="JetBrains Mono"/>
               </a:rPr>
-              <a:t>Benedikt Zoller Coaching  ·  FKB Campus  ·  M11</a:t>
+              <a:t>FKB Campus  ·  M11</a:t>
             </a:r>
           </a:p>
         </p:txBody>
@@ -9408,7 +9408,7 @@
                 </a:solidFill>
                 <a:latin typeface="JetBrains Mono"/>
               </a:rPr>
-              <a:t>Benedikt Zoller Coaching  ·  FKB Campus  ·  M11</a:t>
+              <a:t>FKB Campus  ·  M11</a:t>
             </a:r>
           </a:p>
         </p:txBody>
@@ -9727,7 +9727,7 @@
                 </a:solidFill>
                 <a:latin typeface="JetBrains Mono"/>
               </a:rPr>
-              <a:t>Benedikt Zoller Coaching  ·  FKB Campus  ·  M11</a:t>
+              <a:t>FKB Campus  ·  M11</a:t>
             </a:r>
           </a:p>
         </p:txBody>
@@ -10237,7 +10237,7 @@
                 </a:solidFill>
                 <a:latin typeface="JetBrains Mono"/>
               </a:rPr>
-              <a:t>Benedikt Zoller Coaching  ·  FKB Campus  ·  M11</a:t>
+              <a:t>FKB Campus  ·  M11</a:t>
             </a:r>
           </a:p>
         </p:txBody>
@@ -10655,7 +10655,7 @@
                 </a:solidFill>
                 <a:latin typeface="JetBrains Mono"/>
               </a:rPr>
-              <a:t>Benedikt Zoller Coaching  ·  FKB Campus  ·  M11</a:t>
+              <a:t>FKB Campus  ·  M11</a:t>
             </a:r>
           </a:p>
         </p:txBody>
@@ -11244,7 +11244,7 @@
                 </a:solidFill>
                 <a:latin typeface="JetBrains Mono"/>
               </a:rPr>
-              <a:t>Benedikt Zoller Coaching  ·  FKB Campus  ·  M11</a:t>
+              <a:t>FKB Campus  ·  M11</a:t>
             </a:r>
           </a:p>
         </p:txBody>

--- a/protected-downloads/praesentation/M11.pptx
+++ b/protected-downloads/praesentation/M11.pptx
@@ -8802,7 +8802,7 @@
                 </a:solidFill>
                 <a:latin typeface="Consolas"/>
               </a:rPr>
-              <a:t>30–40 min   </a:t>
+              <a:t>30–38 min   </a:t>
             </a:r>
             <a:r>
               <a:rPr sz="1500" b="1">
@@ -8839,7 +8839,7 @@
                 </a:solidFill>
                 <a:latin typeface="Consolas"/>
               </a:rPr>
-              <a:t>40–75 min   </a:t>
+              <a:t>38–78 min   </a:t>
             </a:r>
             <a:r>
               <a:rPr sz="1500" b="1">
@@ -8876,7 +8876,7 @@
                 </a:solidFill>
                 <a:latin typeface="Consolas"/>
               </a:rPr>
-              <a:t>75–85 min   </a:t>
+              <a:t>78–88 min   </a:t>
             </a:r>
             <a:r>
               <a:rPr sz="1500" b="1">
@@ -8913,7 +8913,7 @@
                 </a:solidFill>
                 <a:latin typeface="Consolas"/>
               </a:rPr>
-              <a:t>85–90 min   </a:t>
+              <a:t>88–95 min   </a:t>
             </a:r>
             <a:r>
               <a:rPr sz="1500" b="1">
@@ -8931,7 +8931,7 @@
                 </a:solidFill>
                 <a:latin typeface="Arial"/>
               </a:rPr>
-              <a:t>  ·  Einzelarbeit</a:t>
+              <a:t>  ·  Trainer-Demo + Einzelarbeit</a:t>
             </a:r>
           </a:p>
         </p:txBody>

--- a/protected-downloads/praesentation/M11.pptx
+++ b/protected-downloads/praesentation/M11.pptx
@@ -4450,7 +4450,7 @@
                 </a:solidFill>
                 <a:latin typeface="Arial"/>
               </a:rPr>
-              <a:t>v0.2</a:t>
+              <a:t>v1.0</a:t>
             </a:r>
           </a:p>
         </p:txBody>

--- a/protected-downloads/praesentation/M11.pptx
+++ b/protected-downloads/praesentation/M11.pptx
@@ -866,6 +866,11 @@
           <a:p>
             <a:r>
               <a:t>Auswertungshilfe (Musterlösungen – nur für Trainer/Seminarleitung)</a:t>
+            </a:r>
+          </a:p>
+          <a:p>
+            <a:r>
+              <a:t>Moderation (HB Sec 3): Fünf Aussagen aus Sec 4.3 vorlesen (oder auf Karten austeilen). TN notieren in 30 Sekunden Sachinhalt und vermuteten latenten Hintergrund. Auswertung im Plenum: Welche Aussage war am schwierigsten? Warum? Trainer-Hinweis: Aussage Nr. 1 („Die Banken geben einem ja momentan viele Angebote") hat das höchste Überraschungspotenzial – viele Berater hören zuerst nur einen allgemeinen Kommentar, nicht das Wechselsignal. Diese Aussage zum Schluss besprechen, um den Lerneffekt zu maximieren. Trainer-Hinweis Scaffolding: Bei Teilnehmenden ohne Vorerfahrung die erste Aussage gemeinsam im Plenum anhand der drei Leitfragen aus Sec 4.3 durcharbeiten (Was hat der Kunde gesagt? Welches Gefühl/welche Erfahrung steckt dahinter? Worum bittet er implizit?), bevor die übrigen fünf Aussagen in Einzelarbeit bearbeitet werden. Ohne diesen Schritt bleibt das Erkennen des latenten Hintergrunds bei unbekannten Aussagen für Einsteiger Glückssache.</a:t>
             </a:r>
           </a:p>
         </p:txBody>
@@ -5412,7 +5417,7 @@
                 </a:solidFill>
                 <a:latin typeface="Source Serif 4"/>
               </a:rPr>
-              <a:t>Arbeitsblatt A: SPIN-Fragen vorbereiten</a:t>
+              <a:t>AB-1: SPIN-Fragen vorbereiten</a:t>
             </a:r>
           </a:p>
         </p:txBody>
@@ -5725,7 +5730,7 @@
                 </a:solidFill>
                 <a:latin typeface="Source Serif 4"/>
               </a:rPr>
-              <a:t>Arbeitsblatt A: SPIN-Fragen vorbereiten</a:t>
+              <a:t>AB-1: SPIN-Fragen vorbereiten</a:t>
             </a:r>
           </a:p>
         </p:txBody>
@@ -6380,7 +6385,7 @@
                 </a:solidFill>
                 <a:latin typeface="Source Serif 4"/>
               </a:rPr>
-              <a:t>Arbeitsblatt B: Beobachtungsbogen Rollenspiel</a:t>
+              <a:t>AB-2: Beobachtungsbogen Rollenspiel</a:t>
             </a:r>
           </a:p>
         </p:txBody>
@@ -6712,7 +6717,7 @@
                 </a:solidFill>
                 <a:latin typeface="Source Serif 4"/>
               </a:rPr>
-              <a:t>Arbeitsblatt B: Beobachtungsbogen Rollenspiel</a:t>
+              <a:t>AB-2: Beobachtungsbogen Rollenspiel</a:t>
             </a:r>
           </a:p>
         </p:txBody>

--- a/protected-downloads/praesentation/M11.pptx
+++ b/protected-downloads/praesentation/M11.pptx
@@ -4130,7 +4130,7 @@
                 <a:solidFill>
                   <a:srgbClr val="C8D2E6"/>
                 </a:solidFill>
-                <a:latin typeface="JetBrains Mono"/>
+                <a:latin typeface="Consolas"/>
               </a:rPr>
               <a:t>FKB CAMPUS  ·  FIRMENKUNDENAKADEMIE  ·  M11</a:t>
             </a:r>
@@ -4165,7 +4165,7 @@
                 <a:solidFill>
                   <a:srgbClr val="FFFFFF"/>
                 </a:solidFill>
-                <a:latin typeface="Source Serif 4"/>
+                <a:latin typeface="Arial"/>
               </a:rPr>
               <a:t>Latente Bedarfe erkennen</a:t>
             </a:r>
@@ -4200,7 +4200,7 @@
                 <a:solidFill>
                   <a:srgbClr val="BECDE6"/>
                 </a:solidFill>
-                <a:latin typeface="Source Serif 4"/>
+                <a:latin typeface="Arial"/>
               </a:rPr>
               <a:t>Implizite Kundenbedürfnisse durch SPIN-Fragetechnik und aktives Zuhören aufdecken</a:t>
             </a:r>
@@ -4278,7 +4278,7 @@
                 <a:solidFill>
                   <a:srgbClr val="A0B4D2"/>
                 </a:solidFill>
-                <a:latin typeface="JetBrains Mono"/>
+                <a:latin typeface="Consolas"/>
               </a:rPr>
               <a:t>KOMPETENZFELD</a:t>
             </a:r>
@@ -4348,7 +4348,7 @@
                 <a:solidFill>
                   <a:srgbClr val="A0B4D2"/>
                 </a:solidFill>
-                <a:latin typeface="JetBrains Mono"/>
+                <a:latin typeface="Consolas"/>
               </a:rPr>
               <a:t>KOMPETENZSTUFE</a:t>
             </a:r>
@@ -4418,7 +4418,7 @@
                 <a:solidFill>
                   <a:srgbClr val="A0B4D2"/>
                 </a:solidFill>
-                <a:latin typeface="JetBrains Mono"/>
+                <a:latin typeface="Consolas"/>
               </a:rPr>
               <a:t>VERSION</a:t>
             </a:r>
@@ -4531,7 +4531,7 @@
                 <a:solidFill>
                   <a:srgbClr val="96A5BE"/>
                 </a:solidFill>
-                <a:latin typeface="JetBrains Mono"/>
+                <a:latin typeface="Consolas"/>
               </a:rPr>
               <a:t>FKB Campus  ·  2026</a:t>
             </a:r>
@@ -4566,7 +4566,7 @@
                 <a:solidFill>
                   <a:srgbClr val="96A5BE"/>
                 </a:solidFill>
-                <a:latin typeface="JetBrains Mono"/>
+                <a:latin typeface="Consolas"/>
               </a:rPr>
               <a:t>Trainer-Präsentation</a:t>
             </a:r>
@@ -4705,7 +4705,7 @@
                 <a:solidFill>
                   <a:srgbClr val="78808C"/>
                 </a:solidFill>
-                <a:latin typeface="JetBrains Mono"/>
+                <a:latin typeface="Consolas"/>
               </a:rPr>
               <a:t>M11  ·  INHALT</a:t>
             </a:r>
@@ -4826,7 +4826,7 @@
                 <a:solidFill>
                   <a:srgbClr val="1F2C56"/>
                 </a:solidFill>
-                <a:latin typeface="Source Serif 4"/>
+                <a:latin typeface="Arial"/>
               </a:rPr>
               <a:t>Übung im Plenum: „Was höre ich wirklich?"</a:t>
             </a:r>
@@ -4842,7 +4842,7 @@
         <p:spPr>
           <a:xfrm>
             <a:off x="685800" y="1417320"/>
-            <a:ext cx="10817352" cy="5029200"/>
+            <a:ext cx="10817352" cy="4892040"/>
           </a:xfrm>
           <a:prstGeom prst="rect">
             <a:avLst/>
@@ -4855,7 +4855,7 @@
           </a:bodyPr>
           <a:lstStyle/>
           <a:p>
-            <a:pPr>
+            <a:pPr marL="190500" indent="-190500">
               <a:spcBef>
                 <a:spcPts val="400"/>
               </a:spcBef>
@@ -4874,7 +4874,7 @@
             </a:r>
           </a:p>
           <a:p>
-            <a:pPr>
+            <a:pPr marL="190500" indent="-190500">
               <a:spcBef>
                 <a:spcPts val="400"/>
               </a:spcBef>
@@ -4893,7 +4893,7 @@
             </a:r>
           </a:p>
           <a:p>
-            <a:pPr>
+            <a:pPr marL="190500" indent="-190500">
               <a:spcBef>
                 <a:spcPts val="400"/>
               </a:spcBef>
@@ -4912,7 +4912,7 @@
             </a:r>
           </a:p>
           <a:p>
-            <a:pPr>
+            <a:pPr marL="190500" indent="-190500">
               <a:spcBef>
                 <a:spcPts val="400"/>
               </a:spcBef>
@@ -4931,7 +4931,7 @@
             </a:r>
           </a:p>
           <a:p>
-            <a:pPr>
+            <a:pPr marL="190500" indent="-190500">
               <a:spcBef>
                 <a:spcPts val="400"/>
               </a:spcBef>
@@ -4950,7 +4950,7 @@
             </a:r>
           </a:p>
           <a:p>
-            <a:pPr>
+            <a:pPr marL="190500" indent="-190500">
               <a:spcBef>
                 <a:spcPts val="400"/>
               </a:spcBef>
@@ -4969,7 +4969,7 @@
             </a:r>
           </a:p>
           <a:p>
-            <a:pPr>
+            <a:pPr marL="190500" indent="-190500">
               <a:spcBef>
                 <a:spcPts val="400"/>
               </a:spcBef>
@@ -4988,7 +4988,7 @@
             </a:r>
           </a:p>
           <a:p>
-            <a:pPr>
+            <a:pPr marL="177800" indent="-177800">
               <a:spcBef>
                 <a:spcPts val="600"/>
               </a:spcBef>
@@ -5007,7 +5007,7 @@
             </a:r>
           </a:p>
           <a:p>
-            <a:pPr>
+            <a:pPr marL="190500" indent="-190500">
               <a:spcBef>
                 <a:spcPts val="400"/>
               </a:spcBef>
@@ -5026,7 +5026,7 @@
             </a:r>
           </a:p>
           <a:p>
-            <a:pPr>
+            <a:pPr marL="190500" indent="-190500">
               <a:spcBef>
                 <a:spcPts val="400"/>
               </a:spcBef>
@@ -5045,7 +5045,7 @@
             </a:r>
           </a:p>
           <a:p>
-            <a:pPr>
+            <a:pPr marL="190500" indent="-190500">
               <a:spcBef>
                 <a:spcPts val="400"/>
               </a:spcBef>
@@ -5064,7 +5064,7 @@
             </a:r>
           </a:p>
           <a:p>
-            <a:pPr>
+            <a:pPr marL="190500" indent="-190500">
               <a:spcBef>
                 <a:spcPts val="400"/>
               </a:spcBef>
@@ -5155,7 +5155,7 @@
                 <a:solidFill>
                   <a:srgbClr val="A0B4D2"/>
                 </a:solidFill>
-                <a:latin typeface="JetBrains Mono"/>
+                <a:latin typeface="Consolas"/>
               </a:rPr>
               <a:t>FKB Campus  ·  M11</a:t>
             </a:r>
@@ -5294,7 +5294,7 @@
                 <a:solidFill>
                   <a:srgbClr val="78808C"/>
                 </a:solidFill>
-                <a:latin typeface="JetBrains Mono"/>
+                <a:latin typeface="Consolas"/>
               </a:rPr>
               <a:t>M11  ·  INHALT</a:t>
             </a:r>
@@ -5415,7 +5415,7 @@
                 <a:solidFill>
                   <a:srgbClr val="1F2C56"/>
                 </a:solidFill>
-                <a:latin typeface="Source Serif 4"/>
+                <a:latin typeface="Arial"/>
               </a:rPr>
               <a:t>AB-1: SPIN-Fragen vorbereiten</a:t>
             </a:r>
@@ -5431,7 +5431,7 @@
         <p:spPr>
           <a:xfrm>
             <a:off x="685800" y="1417320"/>
-            <a:ext cx="10817352" cy="5029200"/>
+            <a:ext cx="10817352" cy="4892040"/>
           </a:xfrm>
           <a:prstGeom prst="rect">
             <a:avLst/>
@@ -5439,12 +5439,12 @@
           <a:noFill/>
         </p:spPr>
         <p:txBody>
-          <a:bodyPr wrap="square">
+          <a:bodyPr wrap="square" anchor="ctr">
             <a:spAutoFit/>
           </a:bodyPr>
           <a:lstStyle/>
           <a:p>
-            <a:pPr>
+            <a:pPr marL="190500" indent="-190500">
               <a:spcBef>
                 <a:spcPts val="400"/>
               </a:spcBef>
@@ -5463,7 +5463,7 @@
             </a:r>
           </a:p>
           <a:p>
-            <a:pPr>
+            <a:pPr marL="190500" indent="-190500">
               <a:spcBef>
                 <a:spcPts val="400"/>
               </a:spcBef>
@@ -5554,7 +5554,7 @@
                 <a:solidFill>
                   <a:srgbClr val="A0B4D2"/>
                 </a:solidFill>
-                <a:latin typeface="JetBrains Mono"/>
+                <a:latin typeface="Consolas"/>
               </a:rPr>
               <a:t>FKB Campus  ·  M11</a:t>
             </a:r>
@@ -5693,7 +5693,7 @@
                 <a:solidFill>
                   <a:srgbClr val="78808C"/>
                 </a:solidFill>
-                <a:latin typeface="JetBrains Mono"/>
+                <a:latin typeface="Consolas"/>
               </a:rPr>
               <a:t>M11  ·  ÜBERSICHT</a:t>
             </a:r>
@@ -5728,7 +5728,7 @@
                 <a:solidFill>
                   <a:srgbClr val="1F2C56"/>
                 </a:solidFill>
-                <a:latin typeface="Source Serif 4"/>
+                <a:latin typeface="Arial"/>
               </a:rPr>
               <a:t>AB-1: SPIN-Fragen vorbereiten</a:t>
             </a:r>
@@ -6088,7 +6088,7 @@
                 <a:solidFill>
                   <a:srgbClr val="A0B4D2"/>
                 </a:solidFill>
-                <a:latin typeface="JetBrains Mono"/>
+                <a:latin typeface="Consolas"/>
               </a:rPr>
               <a:t>FKB Campus  ·  M11</a:t>
             </a:r>
@@ -6123,7 +6123,7 @@
                 <a:solidFill>
                   <a:srgbClr val="A0B4D2"/>
                 </a:solidFill>
-                <a:latin typeface="JetBrains Mono"/>
+                <a:latin typeface="Consolas"/>
               </a:rPr>
               <a:t>Übersicht</a:t>
             </a:r>
@@ -6262,7 +6262,7 @@
                 <a:solidFill>
                   <a:srgbClr val="78808C"/>
                 </a:solidFill>
-                <a:latin typeface="JetBrains Mono"/>
+                <a:latin typeface="Consolas"/>
               </a:rPr>
               <a:t>M11  ·  INHALT</a:t>
             </a:r>
@@ -6383,7 +6383,7 @@
                 <a:solidFill>
                   <a:srgbClr val="1F2C56"/>
                 </a:solidFill>
-                <a:latin typeface="Source Serif 4"/>
+                <a:latin typeface="Arial"/>
               </a:rPr>
               <a:t>AB-2: Beobachtungsbogen Rollenspiel</a:t>
             </a:r>
@@ -6399,7 +6399,7 @@
         <p:spPr>
           <a:xfrm>
             <a:off x="685800" y="1417320"/>
-            <a:ext cx="10817352" cy="5029200"/>
+            <a:ext cx="10817352" cy="4892040"/>
           </a:xfrm>
           <a:prstGeom prst="rect">
             <a:avLst/>
@@ -6407,12 +6407,12 @@
           <a:noFill/>
         </p:spPr>
         <p:txBody>
-          <a:bodyPr wrap="square">
+          <a:bodyPr wrap="square" anchor="ctr">
             <a:spAutoFit/>
           </a:bodyPr>
           <a:lstStyle/>
           <a:p>
-            <a:pPr>
+            <a:pPr marL="190500" indent="-190500">
               <a:spcBef>
                 <a:spcPts val="400"/>
               </a:spcBef>
@@ -6431,7 +6431,7 @@
             </a:r>
           </a:p>
           <a:p>
-            <a:pPr>
+            <a:pPr marL="190500" indent="-190500">
               <a:spcBef>
                 <a:spcPts val="400"/>
               </a:spcBef>
@@ -6450,7 +6450,7 @@
             </a:r>
           </a:p>
           <a:p>
-            <a:pPr>
+            <a:pPr marL="190500" indent="-190500">
               <a:spcBef>
                 <a:spcPts val="400"/>
               </a:spcBef>
@@ -6541,7 +6541,7 @@
                 <a:solidFill>
                   <a:srgbClr val="A0B4D2"/>
                 </a:solidFill>
-                <a:latin typeface="JetBrains Mono"/>
+                <a:latin typeface="Consolas"/>
               </a:rPr>
               <a:t>FKB Campus  ·  M11</a:t>
             </a:r>
@@ -6680,7 +6680,7 @@
                 <a:solidFill>
                   <a:srgbClr val="78808C"/>
                 </a:solidFill>
-                <a:latin typeface="JetBrains Mono"/>
+                <a:latin typeface="Consolas"/>
               </a:rPr>
               <a:t>M11  ·  ÜBERSICHT</a:t>
             </a:r>
@@ -6715,7 +6715,7 @@
                 <a:solidFill>
                   <a:srgbClr val="1F2C56"/>
                 </a:solidFill>
-                <a:latin typeface="Source Serif 4"/>
+                <a:latin typeface="Arial"/>
               </a:rPr>
               <a:t>AB-2: Beobachtungsbogen Rollenspiel</a:t>
             </a:r>
@@ -7621,7 +7621,7 @@
                 <a:solidFill>
                   <a:srgbClr val="A0B4D2"/>
                 </a:solidFill>
-                <a:latin typeface="JetBrains Mono"/>
+                <a:latin typeface="Consolas"/>
               </a:rPr>
               <a:t>FKB Campus  ·  M11</a:t>
             </a:r>
@@ -7656,7 +7656,7 @@
                 <a:solidFill>
                   <a:srgbClr val="A0B4D2"/>
                 </a:solidFill>
-                <a:latin typeface="JetBrains Mono"/>
+                <a:latin typeface="Consolas"/>
               </a:rPr>
               <a:t>Übersicht</a:t>
             </a:r>
@@ -7795,7 +7795,7 @@
                 <a:solidFill>
                   <a:srgbClr val="78808C"/>
                 </a:solidFill>
-                <a:latin typeface="JetBrains Mono"/>
+                <a:latin typeface="Consolas"/>
               </a:rPr>
               <a:t>ÜBERBLICK  ·  M11</a:t>
             </a:r>
@@ -7873,7 +7873,7 @@
                 <a:solidFill>
                   <a:srgbClr val="1F2C56"/>
                 </a:solidFill>
-                <a:latin typeface="Source Serif 4"/>
+                <a:latin typeface="Arial"/>
               </a:rPr>
               <a:t>Worum geht es heute</a:t>
             </a:r>
@@ -8022,7 +8022,7 @@
                 <a:solidFill>
                   <a:srgbClr val="A0B4D2"/>
                 </a:solidFill>
-                <a:latin typeface="JetBrains Mono"/>
+                <a:latin typeface="Consolas"/>
               </a:rPr>
               <a:t>FKB Campus  ·  M11</a:t>
             </a:r>
@@ -8161,7 +8161,7 @@
                 <a:solidFill>
                   <a:srgbClr val="78808C"/>
                 </a:solidFill>
-                <a:latin typeface="JetBrains Mono"/>
+                <a:latin typeface="Consolas"/>
               </a:rPr>
               <a:t>LERNZIELE  ·  M11</a:t>
             </a:r>
@@ -8239,7 +8239,7 @@
                 <a:solidFill>
                   <a:srgbClr val="1F2C56"/>
                 </a:solidFill>
-                <a:latin typeface="Source Serif 4"/>
+                <a:latin typeface="Arial"/>
               </a:rPr>
               <a:t>Was Sie heute mitnehmen</a:t>
             </a:r>
@@ -8435,7 +8435,7 @@
                 <a:solidFill>
                   <a:srgbClr val="A0B4D2"/>
                 </a:solidFill>
-                <a:latin typeface="JetBrains Mono"/>
+                <a:latin typeface="Consolas"/>
               </a:rPr>
               <a:t>FKB Campus  ·  M11</a:t>
             </a:r>
@@ -8574,7 +8574,7 @@
                 <a:solidFill>
                   <a:srgbClr val="78808C"/>
                 </a:solidFill>
-                <a:latin typeface="JetBrains Mono"/>
+                <a:latin typeface="Consolas"/>
               </a:rPr>
               <a:t>AGENDA  ·  M11</a:t>
             </a:r>
@@ -8652,7 +8652,7 @@
                 <a:solidFill>
                   <a:srgbClr val="1F2C56"/>
                 </a:solidFill>
-                <a:latin typeface="Source Serif 4"/>
+                <a:latin typeface="Arial"/>
               </a:rPr>
               <a:t>So läuft das Modul</a:t>
             </a:r>
@@ -9012,7 +9012,7 @@
                 <a:solidFill>
                   <a:srgbClr val="A0B4D2"/>
                 </a:solidFill>
-                <a:latin typeface="JetBrains Mono"/>
+                <a:latin typeface="Consolas"/>
               </a:rPr>
               <a:t>FKB Campus  ·  M11</a:t>
             </a:r>
@@ -9151,7 +9151,7 @@
                 <a:solidFill>
                   <a:srgbClr val="78808C"/>
                 </a:solidFill>
-                <a:latin typeface="JetBrains Mono"/>
+                <a:latin typeface="Consolas"/>
               </a:rPr>
               <a:t>M11  ·  INHALT</a:t>
             </a:r>
@@ -9272,7 +9272,7 @@
                 <a:solidFill>
                   <a:srgbClr val="1F2C56"/>
                 </a:solidFill>
-                <a:latin typeface="Source Serif 4"/>
+                <a:latin typeface="Arial"/>
               </a:rPr>
               <a:t>Das Eisberg-Modell der Kundenbedürfnisse</a:t>
             </a:r>
@@ -9288,7 +9288,7 @@
         <p:spPr>
           <a:xfrm>
             <a:off x="685800" y="1417320"/>
-            <a:ext cx="10817352" cy="5029200"/>
+            <a:ext cx="10817352" cy="4892040"/>
           </a:xfrm>
           <a:prstGeom prst="rect">
             <a:avLst/>
@@ -9296,12 +9296,12 @@
           <a:noFill/>
         </p:spPr>
         <p:txBody>
-          <a:bodyPr wrap="square">
+          <a:bodyPr wrap="square" anchor="ctr">
             <a:spAutoFit/>
           </a:bodyPr>
           <a:lstStyle/>
           <a:p>
-            <a:pPr>
+            <a:pPr marL="190500" indent="-190500">
               <a:spcBef>
                 <a:spcPts val="400"/>
               </a:spcBef>
@@ -9320,7 +9320,7 @@
             </a:r>
           </a:p>
           <a:p>
-            <a:pPr>
+            <a:pPr marL="190500" indent="-190500">
               <a:spcBef>
                 <a:spcPts val="400"/>
               </a:spcBef>
@@ -9411,7 +9411,7 @@
                 <a:solidFill>
                   <a:srgbClr val="A0B4D2"/>
                 </a:solidFill>
-                <a:latin typeface="JetBrains Mono"/>
+                <a:latin typeface="Consolas"/>
               </a:rPr>
               <a:t>FKB Campus  ·  M11</a:t>
             </a:r>
@@ -9550,7 +9550,7 @@
                 <a:solidFill>
                   <a:srgbClr val="78808C"/>
                 </a:solidFill>
-                <a:latin typeface="JetBrains Mono"/>
+                <a:latin typeface="Consolas"/>
               </a:rPr>
               <a:t>M11  ·  SCHAUBILD</a:t>
             </a:r>
@@ -9585,7 +9585,7 @@
                 <a:solidFill>
                   <a:srgbClr val="1F2C56"/>
                 </a:solidFill>
-                <a:latin typeface="Source Serif 4"/>
+                <a:latin typeface="Arial"/>
               </a:rPr>
               <a:t>Eisberg-Modell latente Bedarfe</a:t>
             </a:r>
@@ -9730,7 +9730,7 @@
                 <a:solidFill>
                   <a:srgbClr val="A0B4D2"/>
                 </a:solidFill>
-                <a:latin typeface="JetBrains Mono"/>
+                <a:latin typeface="Consolas"/>
               </a:rPr>
               <a:t>FKB Campus  ·  M11</a:t>
             </a:r>
@@ -9765,7 +9765,7 @@
                 <a:solidFill>
                   <a:srgbClr val="A0B4D2"/>
                 </a:solidFill>
-                <a:latin typeface="JetBrains Mono"/>
+                <a:latin typeface="Consolas"/>
               </a:rPr>
               <a:t>Schaubild</a:t>
             </a:r>
@@ -9904,7 +9904,7 @@
                 <a:solidFill>
                   <a:srgbClr val="78808C"/>
                 </a:solidFill>
-                <a:latin typeface="JetBrains Mono"/>
+                <a:latin typeface="Consolas"/>
               </a:rPr>
               <a:t>M11  ·  INHALT</a:t>
             </a:r>
@@ -10025,7 +10025,7 @@
                 <a:solidFill>
                   <a:srgbClr val="1F2C56"/>
                 </a:solidFill>
-                <a:latin typeface="Source Serif 4"/>
+                <a:latin typeface="Arial"/>
               </a:rPr>
               <a:t>Warum Kunden latente Bedarfe nicht artikulieren</a:t>
             </a:r>
@@ -10041,7 +10041,7 @@
         <p:spPr>
           <a:xfrm>
             <a:off x="685800" y="1417320"/>
-            <a:ext cx="10817352" cy="5029200"/>
+            <a:ext cx="10817352" cy="4892040"/>
           </a:xfrm>
           <a:prstGeom prst="rect">
             <a:avLst/>
@@ -10054,7 +10054,7 @@
           </a:bodyPr>
           <a:lstStyle/>
           <a:p>
-            <a:pPr>
+            <a:pPr marL="190500" indent="-190500">
               <a:spcBef>
                 <a:spcPts val="400"/>
               </a:spcBef>
@@ -10073,7 +10073,7 @@
             </a:r>
           </a:p>
           <a:p>
-            <a:pPr>
+            <a:pPr marL="190500" indent="-190500">
               <a:spcBef>
                 <a:spcPts val="400"/>
               </a:spcBef>
@@ -10092,7 +10092,7 @@
             </a:r>
           </a:p>
           <a:p>
-            <a:pPr>
+            <a:pPr marL="190500" indent="-190500">
               <a:spcBef>
                 <a:spcPts val="400"/>
               </a:spcBef>
@@ -10111,7 +10111,7 @@
             </a:r>
           </a:p>
           <a:p>
-            <a:pPr>
+            <a:pPr marL="190500" indent="-190500">
               <a:spcBef>
                 <a:spcPts val="400"/>
               </a:spcBef>
@@ -10130,7 +10130,7 @@
             </a:r>
           </a:p>
           <a:p>
-            <a:pPr>
+            <a:pPr marL="190500" indent="-190500">
               <a:spcBef>
                 <a:spcPts val="400"/>
               </a:spcBef>
@@ -10149,7 +10149,7 @@
             </a:r>
           </a:p>
           <a:p>
-            <a:pPr>
+            <a:pPr marL="190500" indent="-190500">
               <a:spcBef>
                 <a:spcPts val="400"/>
               </a:spcBef>
@@ -10240,7 +10240,7 @@
                 <a:solidFill>
                   <a:srgbClr val="A0B4D2"/>
                 </a:solidFill>
-                <a:latin typeface="JetBrains Mono"/>
+                <a:latin typeface="Consolas"/>
               </a:rPr>
               <a:t>FKB Campus  ·  M11</a:t>
             </a:r>
@@ -10379,7 +10379,7 @@
                 <a:solidFill>
                   <a:srgbClr val="78808C"/>
                 </a:solidFill>
-                <a:latin typeface="JetBrains Mono"/>
+                <a:latin typeface="Consolas"/>
               </a:rPr>
               <a:t>M11  ·  INHALT</a:t>
             </a:r>
@@ -10500,7 +10500,7 @@
                 <a:solidFill>
                   <a:srgbClr val="1F2C56"/>
                 </a:solidFill>
-                <a:latin typeface="Source Serif 4"/>
+                <a:latin typeface="Arial"/>
               </a:rPr>
               <a:t>Typische latente Bedarfsfelder im Firmenkunden-Alltag</a:t>
             </a:r>
@@ -10516,7 +10516,7 @@
         <p:spPr>
           <a:xfrm>
             <a:off x="685800" y="1417320"/>
-            <a:ext cx="10817352" cy="5029200"/>
+            <a:ext cx="10817352" cy="4892040"/>
           </a:xfrm>
           <a:prstGeom prst="rect">
             <a:avLst/>
@@ -10524,12 +10524,12 @@
           <a:noFill/>
         </p:spPr>
         <p:txBody>
-          <a:bodyPr wrap="square">
+          <a:bodyPr wrap="square" anchor="ctr">
             <a:spAutoFit/>
           </a:bodyPr>
           <a:lstStyle/>
           <a:p>
-            <a:pPr>
+            <a:pPr marL="190500" indent="-190500">
               <a:spcBef>
                 <a:spcPts val="400"/>
               </a:spcBef>
@@ -10548,7 +10548,7 @@
             </a:r>
           </a:p>
           <a:p>
-            <a:pPr>
+            <a:pPr marL="190500" indent="-190500">
               <a:spcBef>
                 <a:spcPts val="400"/>
               </a:spcBef>
@@ -10567,7 +10567,7 @@
             </a:r>
           </a:p>
           <a:p>
-            <a:pPr>
+            <a:pPr marL="190500" indent="-190500">
               <a:spcBef>
                 <a:spcPts val="400"/>
               </a:spcBef>
@@ -10658,7 +10658,7 @@
                 <a:solidFill>
                   <a:srgbClr val="A0B4D2"/>
                 </a:solidFill>
-                <a:latin typeface="JetBrains Mono"/>
+                <a:latin typeface="Consolas"/>
               </a:rPr>
               <a:t>FKB Campus  ·  M11</a:t>
             </a:r>
@@ -10797,7 +10797,7 @@
                 <a:solidFill>
                   <a:srgbClr val="78808C"/>
                 </a:solidFill>
-                <a:latin typeface="JetBrains Mono"/>
+                <a:latin typeface="Consolas"/>
               </a:rPr>
               <a:t>M11  ·  INHALT</a:t>
             </a:r>
@@ -10918,7 +10918,7 @@
                 <a:solidFill>
                   <a:srgbClr val="1F2C56"/>
                 </a:solidFill>
-                <a:latin typeface="Source Serif 4"/>
+                <a:latin typeface="Arial"/>
               </a:rPr>
               <a:t>Fragetechnik in der Praxis: Drei Tiefen-Ebenen</a:t>
             </a:r>
@@ -10934,7 +10934,7 @@
         <p:spPr>
           <a:xfrm>
             <a:off x="685800" y="1417320"/>
-            <a:ext cx="10817352" cy="5029200"/>
+            <a:ext cx="10817352" cy="4892040"/>
           </a:xfrm>
           <a:prstGeom prst="rect">
             <a:avLst/>
@@ -10947,7 +10947,7 @@
           </a:bodyPr>
           <a:lstStyle/>
           <a:p>
-            <a:pPr>
+            <a:pPr marL="190500" indent="-190500">
               <a:spcBef>
                 <a:spcPts val="400"/>
               </a:spcBef>
@@ -10966,7 +10966,7 @@
             </a:r>
           </a:p>
           <a:p>
-            <a:pPr>
+            <a:pPr marL="190500" indent="-190500">
               <a:spcBef>
                 <a:spcPts val="400"/>
               </a:spcBef>
@@ -10985,7 +10985,7 @@
             </a:r>
           </a:p>
           <a:p>
-            <a:pPr>
+            <a:pPr marL="177800" indent="-177800">
               <a:spcBef>
                 <a:spcPts val="600"/>
               </a:spcBef>
@@ -11004,7 +11004,7 @@
             </a:r>
           </a:p>
           <a:p>
-            <a:pPr>
+            <a:pPr marL="190500" indent="-190500">
               <a:spcBef>
                 <a:spcPts val="400"/>
               </a:spcBef>
@@ -11023,7 +11023,7 @@
             </a:r>
           </a:p>
           <a:p>
-            <a:pPr>
+            <a:pPr marL="177800" indent="-177800">
               <a:spcBef>
                 <a:spcPts val="600"/>
               </a:spcBef>
@@ -11042,7 +11042,7 @@
             </a:r>
           </a:p>
           <a:p>
-            <a:pPr>
+            <a:pPr marL="190500" indent="-190500">
               <a:spcBef>
                 <a:spcPts val="400"/>
               </a:spcBef>
@@ -11061,7 +11061,7 @@
             </a:r>
           </a:p>
           <a:p>
-            <a:pPr>
+            <a:pPr marL="177800" indent="-177800">
               <a:spcBef>
                 <a:spcPts val="600"/>
               </a:spcBef>
@@ -11080,7 +11080,7 @@
             </a:r>
           </a:p>
           <a:p>
-            <a:pPr>
+            <a:pPr marL="190500" indent="-190500">
               <a:spcBef>
                 <a:spcPts val="400"/>
               </a:spcBef>
@@ -11099,7 +11099,7 @@
             </a:r>
           </a:p>
           <a:p>
-            <a:pPr>
+            <a:pPr marL="190500" indent="-190500">
               <a:spcBef>
                 <a:spcPts val="400"/>
               </a:spcBef>
@@ -11118,7 +11118,7 @@
             </a:r>
           </a:p>
           <a:p>
-            <a:pPr>
+            <a:pPr marL="190500" indent="-190500">
               <a:spcBef>
                 <a:spcPts val="400"/>
               </a:spcBef>
@@ -11137,7 +11137,7 @@
             </a:r>
           </a:p>
           <a:p>
-            <a:pPr>
+            <a:pPr marL="190500" indent="-190500">
               <a:spcBef>
                 <a:spcPts val="400"/>
               </a:spcBef>
@@ -11156,7 +11156,7 @@
             </a:r>
           </a:p>
           <a:p>
-            <a:pPr>
+            <a:pPr marL="190500" indent="-190500">
               <a:spcBef>
                 <a:spcPts val="400"/>
               </a:spcBef>
@@ -11247,7 +11247,7 @@
                 <a:solidFill>
                   <a:srgbClr val="A0B4D2"/>
                 </a:solidFill>
-                <a:latin typeface="JetBrains Mono"/>
+                <a:latin typeface="Consolas"/>
               </a:rPr>
               <a:t>FKB Campus  ·  M11</a:t>
             </a:r>

--- a/protected-downloads/praesentation/M11.pptx
+++ b/protected-downloads/praesentation/M11.pptx
@@ -17,8 +17,6 @@
     <p:sldId id="265" r:id="rId17"/>
     <p:sldId id="266" r:id="rId18"/>
     <p:sldId id="267" r:id="rId19"/>
-    <p:sldId id="268" r:id="rId20"/>
-    <p:sldId id="269" r:id="rId21"/>
   </p:sldIdLst>
   <p:sldSz cx="12188952" cy="6858000" type="screen4x3"/>
   <p:notesSz cx="6858000" cy="9144000"/>
@@ -585,7 +583,7 @@
           <a:lstStyle/>
           <a:p>
             <a:r>
-              <a:t>Siehe Trainerhandbuch (Sektion 3) für Moderationshinweise, Timing und erwartete Teilnehmerreaktionen.</a:t>
+              <a:t>Einstieg: „Wann hat ein Kunde etwas gefragt – und in Wirklichkeit etwas ganz anderes gemeint?"</a:t>
             </a:r>
           </a:p>
         </p:txBody>
@@ -655,7 +653,7 @@
           <a:lstStyle/>
           <a:p>
             <a:r>
-              <a:t>Siehe Trainerhandbuch (Sektion 3) für Moderationshinweise, Timing und erwartete Teilnehmerreaktionen.</a:t>
+              <a:t>Kunden artikulieren latente Bedarfe nicht – aus Unsicherheit, Gewohnheit oder weil sie sie selbst nicht benennen können.</a:t>
             </a:r>
           </a:p>
         </p:txBody>
@@ -725,7 +723,7 @@
           <a:lstStyle/>
           <a:p>
             <a:r>
-              <a:t>Siehe Trainerhandbuch (Sektion 3) für Moderationshinweise, Timing und erwartete Teilnehmerreaktionen.</a:t>
+              <a:t>Aktives Zuhören ist die Schlüsselkompetenz: „Was höre ich wirklich?" – die Übung im Plenum trainiert genau das.</a:t>
             </a:r>
           </a:p>
         </p:txBody>
@@ -795,7 +793,7 @@
           <a:lstStyle/>
           <a:p>
             <a:r>
-              <a:t>Siehe Trainerhandbuch (Sektion 3) für Moderationshinweise, Timing und erwartete Teilnehmerreaktionen.</a:t>
+              <a:t>Der Fall: der Kunde fragt nach dem Zins – dahinter steht eine Sorge (Liquidität, Wachstum, Nachfolge). Wer nur den Zins bearbeitet, verliert die Beratungschance.</a:t>
             </a:r>
           </a:p>
         </p:txBody>
@@ -865,12 +863,7 @@
           <a:lstStyle/>
           <a:p>
             <a:r>
-              <a:t>Auswertungshilfe (Musterlösungen – nur für Trainer/Seminarleitung)</a:t>
-            </a:r>
-          </a:p>
-          <a:p>
-            <a:r>
-              <a:t>Moderation (HB Sec 3): Fünf Aussagen aus Sec 4.3 vorlesen (oder auf Karten austeilen). TN notieren in 30 Sekunden Sachinhalt und vermuteten latenten Hintergrund. Auswertung im Plenum: Welche Aussage war am schwierigsten? Warum? Trainer-Hinweis: Aussage Nr. 1 („Die Banken geben einem ja momentan viele Angebote") hat das höchste Überraschungspotenzial – viele Berater hören zuerst nur einen allgemeinen Kommentar, nicht das Wechselsignal. Diese Aussage zum Schluss besprechen, um den Lerneffekt zu maximieren. Trainer-Hinweis Scaffolding: Bei Teilnehmenden ohne Vorerfahrung die erste Aussage gemeinsam im Plenum anhand der drei Leitfragen aus Sec 4.3 durcharbeiten (Was hat der Kunde gesagt? Welches Gefühl/welche Erfahrung steckt dahinter? Worum bittet er implizit?), bevor die übrigen fünf Aussagen in Einzelarbeit bearbeitet werden. Ohne diesen Schritt bleibt das Erkennen des latenten Hintergrunds bei unbekannten Aussagen für Einsteiger Glückssache.</a:t>
+              <a:t>Überleitung zum Selbstcheck.</a:t>
             </a:r>
           </a:p>
         </p:txBody>
@@ -940,77 +933,7 @@
           <a:lstStyle/>
           <a:p>
             <a:r>
-              <a:t>Siehe Trainerhandbuch (Sektion 3) für Moderationshinweise, Timing und erwartete Teilnehmerreaktionen.</a:t>
-            </a:r>
-          </a:p>
-        </p:txBody>
-      </p:sp>
-      <p:sp>
-        <p:nvSpPr>
-          <p:cNvPr id="4" name="Slide Number Placeholder 3"/>
-          <p:cNvSpPr>
-            <a:spLocks noGrp="1"/>
-          </p:cNvSpPr>
-          <p:nvPr>
-            <p:ph type="sldNum" idx="5" sz="quarter"/>
-          </p:nvPr>
-        </p:nvSpPr>
-        <p:spPr/>
-      </p:sp>
-    </p:spTree>
-  </p:cSld>
-  <p:clrMapOvr>
-    <a:masterClrMapping/>
-  </p:clrMapOvr>
-</p:notes>
-</file>
-
-<file path=ppt/notesSlides/notesSlide8.xml><?xml version="1.0" encoding="utf-8"?>
-<p:notes xmlns:a="http://schemas.openxmlformats.org/drawingml/2006/main" xmlns:p="http://schemas.openxmlformats.org/presentationml/2006/main" xmlns:r="http://schemas.openxmlformats.org/officeDocument/2006/relationships">
-  <p:cSld>
-    <p:spTree>
-      <p:nvGrpSpPr>
-        <p:cNvPr id="1" name=""/>
-        <p:cNvGrpSpPr/>
-        <p:nvPr/>
-      </p:nvGrpSpPr>
-      <p:grpSpPr>
-        <a:xfrm>
-          <a:off x="0" y="0"/>
-          <a:ext cx="0" cy="0"/>
-          <a:chOff x="0" y="0"/>
-          <a:chExt cx="0" cy="0"/>
-        </a:xfrm>
-      </p:grpSpPr>
-      <p:sp>
-        <p:nvSpPr>
-          <p:cNvPr id="2" name="Slide Image Placeholder 1"/>
-          <p:cNvSpPr>
-            <a:spLocks noGrp="1"/>
-          </p:cNvSpPr>
-          <p:nvPr>
-            <p:ph type="sldImg" idx="2"/>
-          </p:nvPr>
-        </p:nvSpPr>
-        <p:spPr/>
-      </p:sp>
-      <p:sp>
-        <p:nvSpPr>
-          <p:cNvPr id="3" name="Notes Placeholder 2"/>
-          <p:cNvSpPr>
-            <a:spLocks noGrp="1"/>
-          </p:cNvSpPr>
-          <p:nvPr>
-            <p:ph type="body" idx="3" sz="quarter"/>
-          </p:nvPr>
-        </p:nvSpPr>
-        <p:spPr/>
-        <p:txBody>
-          <a:bodyPr/>
-          <a:lstStyle/>
-          <a:p>
-            <a:r>
-              <a:t>Siehe Trainerhandbuch (Sektion 3) für Moderationshinweise, Timing und erwartete Teilnehmerreaktionen.</a:t>
+              <a:t>Selbstcheck nach 4 Wochen als Transferanker.</a:t>
             </a:r>
           </a:p>
         </p:txBody>
@@ -4707,7 +4630,7 @@
                 </a:solidFill>
                 <a:latin typeface="Consolas"/>
               </a:rPr>
-              <a:t>M11  ·  INHALT</a:t>
+              <a:t>M11  ·  ARBEITSBLATT</a:t>
             </a:r>
           </a:p>
         </p:txBody>
@@ -4828,7 +4751,7 @@
                 </a:solidFill>
                 <a:latin typeface="Arial"/>
               </a:rPr>
-              <a:t>Übung im Plenum: „Was höre ich wirklich?"</a:t>
+              <a:t>Das Zinsgespräch, das keines ist – bearbeiten</a:t>
             </a:r>
           </a:p>
         </p:txBody>
@@ -4841,8 +4764,8 @@
         </p:nvSpPr>
         <p:spPr>
           <a:xfrm>
-            <a:off x="685800" y="1417320"/>
-            <a:ext cx="10817352" cy="4892040"/>
+            <a:off x="685800" y="1554480"/>
+            <a:ext cx="10817352" cy="3840480"/>
           </a:xfrm>
           <a:prstGeom prst="rect">
             <a:avLst/>
@@ -4864,13 +4787,13 @@
               </a:spcAft>
             </a:pPr>
             <a:r>
-              <a:rPr sz="1300">
+              <a:rPr sz="1400">
                 <a:solidFill>
                   <a:srgbClr val="3D5466"/>
                 </a:solidFill>
                 <a:latin typeface="Arial"/>
               </a:rPr>
-              <a:t>▸  Der Trainer liest fünf Kundenaussagen vor. Die Teilnehmenden notieren: (1) Sachinhalt, (2) vermuteter latenter Hintergrund. Anschließend Auswertung im Plenum.</a:t>
+              <a:t>▸  Bereiten Sie SPIN-Fragen für den Fall vor (AB-1).</a:t>
             </a:r>
           </a:p>
           <a:p>
@@ -4883,13 +4806,13 @@
               </a:spcAft>
             </a:pPr>
             <a:r>
-              <a:rPr sz="1300">
+              <a:rPr sz="1400">
                 <a:solidFill>
                   <a:srgbClr val="3D5466"/>
                 </a:solidFill>
                 <a:latin typeface="Arial"/>
               </a:rPr>
-              <a:t>▸  ## 4.4 Aktives Zuhören als Schlüsselkompetenz</a:t>
+              <a:t>▸  Decken Sie im Rollenspiel den latenten Bedarf hinter der Zinsfrage auf.</a:t>
             </a:r>
           </a:p>
           <a:p>
@@ -4902,191 +4825,98 @@
               </a:spcAft>
             </a:pPr>
             <a:r>
-              <a:rPr sz="1300">
+              <a:rPr sz="1400">
                 <a:solidFill>
                   <a:srgbClr val="3D5466"/>
                 </a:solidFill>
                 <a:latin typeface="Arial"/>
               </a:rPr>
-              <a:t>▸  Techniken des aktiven Zuhörens:</a:t>
-            </a:r>
-          </a:p>
-          <a:p>
-            <a:pPr marL="190500" indent="-190500">
-              <a:spcBef>
-                <a:spcPts val="400"/>
-              </a:spcBef>
-              <a:spcAft>
-                <a:spcPts val="200"/>
-              </a:spcAft>
-            </a:pPr>
-            <a:r>
-              <a:rPr sz="1300">
-                <a:solidFill>
-                  <a:srgbClr val="3D5466"/>
+              <a:t>▸  Nutzen Sie den Beobachtungsbogen für strukturiertes Feedback (AB-2).</a:t>
+            </a:r>
+          </a:p>
+        </p:txBody>
+      </p:sp>
+      <p:sp>
+        <p:nvSpPr>
+          <p:cNvPr id="9" name="Rectangle 8"/>
+          <p:cNvSpPr/>
+          <p:nvPr/>
+        </p:nvSpPr>
+        <p:spPr>
+          <a:xfrm>
+            <a:off x="685800" y="5486400"/>
+            <a:ext cx="10817352" cy="640080"/>
+          </a:xfrm>
+          <a:prstGeom prst="rect">
+            <a:avLst/>
+          </a:prstGeom>
+          <a:solidFill>
+            <a:srgbClr val="1F2C56"/>
+          </a:solidFill>
+          <a:ln>
+            <a:noFill/>
+          </a:ln>
+        </p:spPr>
+        <p:style>
+          <a:lnRef idx="1">
+            <a:schemeClr val="accent1"/>
+          </a:lnRef>
+          <a:fillRef idx="3">
+            <a:schemeClr val="accent1"/>
+          </a:fillRef>
+          <a:effectRef idx="2">
+            <a:schemeClr val="accent1"/>
+          </a:effectRef>
+          <a:fontRef idx="minor">
+            <a:schemeClr val="lt1"/>
+          </a:fontRef>
+        </p:style>
+        <p:txBody>
+          <a:bodyPr rtlCol="0" anchor="ctr"/>
+          <a:lstStyle/>
+          <a:p>
+            <a:pPr algn="ctr"/>
+          </a:p>
+        </p:txBody>
+      </p:sp>
+      <p:sp>
+        <p:nvSpPr>
+          <p:cNvPr id="10" name="TextBox 9"/>
+          <p:cNvSpPr txBox="1"/>
+          <p:nvPr/>
+        </p:nvSpPr>
+        <p:spPr>
+          <a:xfrm>
+            <a:off x="868680" y="5596128"/>
+            <a:ext cx="10451592" cy="457200"/>
+          </a:xfrm>
+          <a:prstGeom prst="rect">
+            <a:avLst/>
+          </a:prstGeom>
+          <a:noFill/>
+        </p:spPr>
+        <p:txBody>
+          <a:bodyPr wrap="square">
+            <a:spAutoFit/>
+          </a:bodyPr>
+          <a:lstStyle/>
+          <a:p>
+            <a:pPr algn="l"/>
+            <a:r>
+              <a:rPr sz="1300" b="1" i="0">
+                <a:solidFill>
+                  <a:srgbClr val="FFFFFF"/>
                 </a:solidFill>
                 <a:latin typeface="Arial"/>
               </a:rPr>
-              <a:t>▸  Paraphrasieren: Den Kern des Gesagten in eigenen Worten wiedergeben. „Wenn ich Sie richtig verstehe, macht Ihnen weniger die Finanzierung Sorgen als die Frage, wer das Unternehmen in zehn Jahren führt?"</a:t>
-            </a:r>
-          </a:p>
-          <a:p>
-            <a:pPr marL="190500" indent="-190500">
-              <a:spcBef>
-                <a:spcPts val="400"/>
-              </a:spcBef>
-              <a:spcAft>
-                <a:spcPts val="200"/>
-              </a:spcAft>
-            </a:pPr>
-            <a:r>
-              <a:rPr sz="1300">
-                <a:solidFill>
-                  <a:srgbClr val="3D5466"/>
-                </a:solidFill>
-                <a:latin typeface="Arial"/>
-              </a:rPr>
-              <a:t>▸  Verbalisieren: Wahrgenommenes Gefühl benennen (mit Vorsicht). „Ich habe das Gefühl, das Thema liegt Ihnen schon länger am Herzen."</a:t>
-            </a:r>
-          </a:p>
-          <a:p>
-            <a:pPr marL="190500" indent="-190500">
-              <a:spcBef>
-                <a:spcPts val="400"/>
-              </a:spcBef>
-              <a:spcAft>
-                <a:spcPts val="200"/>
-              </a:spcAft>
-            </a:pPr>
-            <a:r>
-              <a:rPr sz="1300">
-                <a:solidFill>
-                  <a:srgbClr val="3D5466"/>
-                </a:solidFill>
-                <a:latin typeface="Arial"/>
-              </a:rPr>
-              <a:t>▸  Schweigen lassen: Pausen aushalten. Viele latente Bedarfe werden erst geäußert, wenn der Berater aufhört zu reden. Vier Sekunden Stille fühlen sich für einen unerfahrenen Berater wie eine Ewigkeit an – für den Kunden sind es vier Sekunden Denkzeit. Wer das Schweigen bricht, beraubt den Kunden dieser Denkzeit. Konkrete Hilfe: Nicken und Augenkontakt halten. Oder leise sagen: „Ich lasse Ihnen einen Moment." Nichts weiter. Rollenspielübung: Üben Sie bewusst, bis zu 6 Sekunden Stille auszuhalten, bevor Sie weitermachen – lassen Sie den Beobachter die Sekunden zählen.</a:t>
-            </a:r>
-          </a:p>
-          <a:p>
-            <a:pPr marL="190500" indent="-190500">
-              <a:spcBef>
-                <a:spcPts val="400"/>
-              </a:spcBef>
-              <a:spcAft>
-                <a:spcPts val="200"/>
-              </a:spcAft>
-            </a:pPr>
-            <a:r>
-              <a:rPr sz="1300">
-                <a:solidFill>
-                  <a:srgbClr val="3D5466"/>
-                </a:solidFill>
-                <a:latin typeface="Arial"/>
-              </a:rPr>
-              <a:t>▸  Offene Einladung: „Gibt es etwas, das wir heute noch ansprechen sollten, das wir noch nicht berührt haben?"</a:t>
-            </a:r>
-          </a:p>
-          <a:p>
-            <a:pPr marL="177800" indent="-177800">
-              <a:spcBef>
-                <a:spcPts val="600"/>
-              </a:spcBef>
-              <a:spcAft>
-                <a:spcPts val="200"/>
-              </a:spcAft>
-            </a:pPr>
-            <a:r>
-              <a:rPr sz="1200" i="1">
-                <a:solidFill>
-                  <a:srgbClr val="3D5466"/>
-                </a:solidFill>
-                <a:latin typeface="Arial"/>
-              </a:rPr>
-              <a:t>→  Eine der wichtigsten Fragen am Ende jedes Gesprächs: „Ist noch etwas, das ich wissen sollte?" Einfach. Direkt. Wirkungsvoll.</a:t>
-            </a:r>
-          </a:p>
-          <a:p>
-            <a:pPr marL="190500" indent="-190500">
-              <a:spcBef>
-                <a:spcPts val="400"/>
-              </a:spcBef>
-              <a:spcAft>
-                <a:spcPts val="200"/>
-              </a:spcAft>
-            </a:pPr>
-            <a:r>
-              <a:rPr sz="1300">
-                <a:solidFill>
-                  <a:srgbClr val="3D5466"/>
-                </a:solidFill>
-                <a:latin typeface="Arial"/>
-              </a:rPr>
-              <a:t>▸  ## 4.5 Praxiscase: Das Zinsgespräch, das keines ist</a:t>
-            </a:r>
-          </a:p>
-          <a:p>
-            <a:pPr marL="190500" indent="-190500">
-              <a:spcBef>
-                <a:spcPts val="400"/>
-              </a:spcBef>
-              <a:spcAft>
-                <a:spcPts val="200"/>
-              </a:spcAft>
-            </a:pPr>
-            <a:r>
-              <a:rPr sz="1300">
-                <a:solidFill>
-                  <a:srgbClr val="3D5466"/>
-                </a:solidFill>
-                <a:latin typeface="Arial"/>
-              </a:rPr>
-              <a:t>▸  Ausgangssituation</a:t>
-            </a:r>
-          </a:p>
-          <a:p>
-            <a:pPr marL="190500" indent="-190500">
-              <a:spcBef>
-                <a:spcPts val="400"/>
-              </a:spcBef>
-              <a:spcAft>
-                <a:spcPts val="200"/>
-              </a:spcAft>
-            </a:pPr>
-            <a:r>
-              <a:rPr sz="1300">
-                <a:solidFill>
-                  <a:srgbClr val="3D5466"/>
-                </a:solidFill>
-                <a:latin typeface="Arial"/>
-              </a:rPr>
-              <a:t>▸  Die zuständige Beraterin Lisa Kern bereitet sich auf ein Konditionengespräch vor.</a:t>
-            </a:r>
-          </a:p>
-          <a:p>
-            <a:pPr marL="190500" indent="-190500">
-              <a:spcBef>
-                <a:spcPts val="400"/>
-              </a:spcBef>
-              <a:spcAft>
-                <a:spcPts val="200"/>
-              </a:spcAft>
-            </a:pPr>
-            <a:r>
-              <a:rPr sz="1300">
-                <a:solidFill>
-                  <a:srgbClr val="3D5466"/>
-                </a:solidFill>
-                <a:latin typeface="Arial"/>
-              </a:rPr>
-              <a:t>▸  Das Gespräch</a:t>
-            </a:r>
-          </a:p>
-        </p:txBody>
-      </p:sp>
-      <p:sp>
-        <p:nvSpPr>
-          <p:cNvPr id="9" name="Rectangle 8"/>
+              <a:t>→  Bearbeitung im Teilnehmer-Workbook (Arbeitsblatt mit Ausfüllfeldern)</a:t>
+            </a:r>
+          </a:p>
+        </p:txBody>
+      </p:sp>
+      <p:sp>
+        <p:nvSpPr>
+          <p:cNvPr id="11" name="Rectangle 10"/>
           <p:cNvSpPr/>
           <p:nvPr/>
         </p:nvSpPr>
@@ -5129,7 +4959,7 @@
       </p:sp>
       <p:sp>
         <p:nvSpPr>
-          <p:cNvPr id="10" name="TextBox 9"/>
+          <p:cNvPr id="12" name="TextBox 11"/>
           <p:cNvSpPr txBox="1"/>
           <p:nvPr/>
         </p:nvSpPr>
@@ -5417,7 +5247,7 @@
                 </a:solidFill>
                 <a:latin typeface="Arial"/>
               </a:rPr>
-              <a:t>AB-1: SPIN-Fragen vorbereiten</a:t>
+              <a:t>Prinzip dieses Moduls</a:t>
             </a:r>
           </a:p>
         </p:txBody>
@@ -5443,6 +5273,25 @@
             <a:spAutoFit/>
           </a:bodyPr>
           <a:lstStyle/>
+          <a:p>
+            <a:pPr marL="177800" indent="-177800">
+              <a:spcBef>
+                <a:spcPts val="600"/>
+              </a:spcBef>
+              <a:spcAft>
+                <a:spcPts val="200"/>
+              </a:spcAft>
+            </a:pPr>
+            <a:r>
+              <a:rPr sz="1200" i="1">
+                <a:solidFill>
+                  <a:srgbClr val="3D5466"/>
+                </a:solidFill>
+                <a:latin typeface="Arial"/>
+              </a:rPr>
+              <a:t>→  Der wichtigste Bedarf ist der, den der Kunde noch nicht ausgesprochen hat.</a:t>
+            </a:r>
+          </a:p>
           <a:p>
             <a:pPr marL="190500" indent="-190500">
               <a:spcBef>
@@ -5459,26 +5308,7 @@
                 </a:solidFill>
                 <a:latin typeface="Arial"/>
               </a:rPr>
-              <a:t>▸  Bereiten Sie für jede SPIN-Kategorie mindestens zwei Fragen vor, die zu diesem Kunden passen:</a:t>
-            </a:r>
-          </a:p>
-          <a:p>
-            <a:pPr marL="190500" indent="-190500">
-              <a:spcBef>
-                <a:spcPts val="400"/>
-              </a:spcBef>
-              <a:spcAft>
-                <a:spcPts val="200"/>
-              </a:spcAft>
-            </a:pPr>
-            <a:r>
-              <a:rPr sz="1300">
-                <a:solidFill>
-                  <a:srgbClr val="3D5466"/>
-                </a:solidFill>
-                <a:latin typeface="Arial"/>
-              </a:rPr>
-              <a:t>▸  Meine Hypothese: Welchen latenten Bedarf könnte dieser Kunde haben?</a:t>
+              <a:t>▸  Explizite Wünsche bearbeitet jeder; latente Bedarfe mit SPIN-Fragen zu heben, unterscheidet den Berater vom Sachbearbeiter.</a:t>
             </a:r>
           </a:p>
         </p:txBody>
@@ -5594,7 +5424,7 @@
             <a:avLst/>
           </a:prstGeom>
           <a:solidFill>
-            <a:srgbClr val="FFFFFF"/>
+            <a:srgbClr val="EDEDF3"/>
           </a:solidFill>
           <a:ln>
             <a:noFill/>
@@ -5695,43 +5525,51 @@
                 </a:solidFill>
                 <a:latin typeface="Consolas"/>
               </a:rPr>
-              <a:t>M11  ·  ÜBERSICHT</a:t>
-            </a:r>
-          </a:p>
-        </p:txBody>
-      </p:sp>
-      <p:sp>
-        <p:nvSpPr>
-          <p:cNvPr id="5" name="TextBox 4"/>
-          <p:cNvSpPr txBox="1"/>
-          <p:nvPr/>
-        </p:nvSpPr>
-        <p:spPr>
-          <a:xfrm>
-            <a:off x="685800" y="502920"/>
-            <a:ext cx="10817352" cy="594360"/>
-          </a:xfrm>
-          <a:prstGeom prst="rect">
-            <a:avLst/>
-          </a:prstGeom>
-          <a:noFill/>
-        </p:spPr>
-        <p:txBody>
-          <a:bodyPr wrap="square">
-            <a:spAutoFit/>
-          </a:bodyPr>
-          <a:lstStyle/>
-          <a:p>
-            <a:pPr algn="l"/>
-            <a:r>
-              <a:rPr sz="2000" b="1" i="0">
-                <a:solidFill>
-                  <a:srgbClr val="1F2C56"/>
-                </a:solidFill>
-                <a:latin typeface="Arial"/>
-              </a:rPr>
-              <a:t>AB-1: SPIN-Fragen vorbereiten</a:t>
-            </a:r>
+              <a:t>M11  ·  INHALT</a:t>
+            </a:r>
+          </a:p>
+        </p:txBody>
+      </p:sp>
+      <p:sp>
+        <p:nvSpPr>
+          <p:cNvPr id="5" name="Rectangle 4"/>
+          <p:cNvSpPr/>
+          <p:nvPr/>
+        </p:nvSpPr>
+        <p:spPr>
+          <a:xfrm>
+            <a:off x="0" y="1234440"/>
+            <a:ext cx="12188952" cy="12700"/>
+          </a:xfrm>
+          <a:prstGeom prst="rect">
+            <a:avLst/>
+          </a:prstGeom>
+          <a:solidFill>
+            <a:srgbClr val="D8DFE4"/>
+          </a:solidFill>
+          <a:ln>
+            <a:noFill/>
+          </a:ln>
+        </p:spPr>
+        <p:style>
+          <a:lnRef idx="1">
+            <a:schemeClr val="accent1"/>
+          </a:lnRef>
+          <a:fillRef idx="3">
+            <a:schemeClr val="accent1"/>
+          </a:fillRef>
+          <a:effectRef idx="2">
+            <a:schemeClr val="accent1"/>
+          </a:effectRef>
+          <a:fontRef idx="minor">
+            <a:schemeClr val="lt1"/>
+          </a:fontRef>
+        </p:style>
+        <p:txBody>
+          <a:bodyPr rtlCol="0" anchor="ctr"/>
+          <a:lstStyle/>
+          <a:p>
+            <a:pPr algn="ctr"/>
           </a:p>
         </p:txBody>
       </p:sp>
@@ -5743,8 +5581,8 @@
         </p:nvSpPr>
         <p:spPr>
           <a:xfrm>
-            <a:off x="685800" y="1143000"/>
-            <a:ext cx="10817352" cy="25400"/>
+            <a:off x="685800" y="502920"/>
+            <a:ext cx="36576" cy="658368"/>
           </a:xfrm>
           <a:prstGeom prst="rect">
             <a:avLst/>
@@ -5778,583 +5616,6 @@
           </a:p>
         </p:txBody>
       </p:sp>
-      <p:graphicFrame>
-        <p:nvGraphicFramePr>
-          <p:cNvPr id="7" name="Table 6"/>
-          <p:cNvGraphicFramePr>
-            <a:graphicFrameLocks noGrp="1"/>
-          </p:cNvGraphicFramePr>
-          <p:nvPr/>
-        </p:nvGraphicFramePr>
-        <p:xfrm>
-          <a:off x="685800" y="1417320"/>
-          <a:ext cx="10817352" cy="1920240"/>
-        </p:xfrm>
-        <a:graphic>
-          <a:graphicData uri="http://schemas.openxmlformats.org/drawingml/2006/table">
-            <a:tbl>
-              <a:tblPr firstRow="1" bandRow="1">
-                <a:tableStyleId>{5C22544A-7EE6-4342-B048-85BDC9FD1C3A}</a:tableStyleId>
-              </a:tblPr>
-              <a:tblGrid>
-                <a:gridCol w="3605784"/>
-                <a:gridCol w="3605784"/>
-                <a:gridCol w="3605784"/>
-              </a:tblGrid>
-              <a:tr h="384048">
-                <a:tc>
-                  <a:txBody>
-                    <a:bodyPr/>
-                    <a:lstStyle/>
-                    <a:p>
-                      <a:r>
-                        <a:rPr sz="1100" b="1">
-                          <a:solidFill>
-                            <a:srgbClr val="FFFFFF"/>
-                          </a:solidFill>
-                          <a:latin typeface="Arial"/>
-                        </a:rPr>
-                        <a:t>Fragetyp</a:t>
-                      </a:r>
-                    </a:p>
-                  </a:txBody>
-                  <a:tcPr>
-                    <a:solidFill>
-                      <a:srgbClr val="1F2C56"/>
-                    </a:solidFill>
-                  </a:tcPr>
-                </a:tc>
-                <a:tc>
-                  <a:txBody>
-                    <a:bodyPr/>
-                    <a:lstStyle/>
-                    <a:p>
-                      <a:r>
-                        <a:rPr sz="1100" b="1">
-                          <a:solidFill>
-                            <a:srgbClr val="FFFFFF"/>
-                          </a:solidFill>
-                          <a:latin typeface="Arial"/>
-                        </a:rPr>
-                        <a:t>Meine Frage 1</a:t>
-                      </a:r>
-                    </a:p>
-                  </a:txBody>
-                  <a:tcPr>
-                    <a:solidFill>
-                      <a:srgbClr val="1F2C56"/>
-                    </a:solidFill>
-                  </a:tcPr>
-                </a:tc>
-                <a:tc>
-                  <a:txBody>
-                    <a:bodyPr/>
-                    <a:lstStyle/>
-                    <a:p>
-                      <a:r>
-                        <a:rPr sz="1100" b="1">
-                          <a:solidFill>
-                            <a:srgbClr val="FFFFFF"/>
-                          </a:solidFill>
-                          <a:latin typeface="Arial"/>
-                        </a:rPr>
-                        <a:t>Meine Frage 2</a:t>
-                      </a:r>
-                    </a:p>
-                  </a:txBody>
-                  <a:tcPr>
-                    <a:solidFill>
-                      <a:srgbClr val="1F2C56"/>
-                    </a:solidFill>
-                  </a:tcPr>
-                </a:tc>
-              </a:tr>
-              <a:tr h="384048">
-                <a:tc>
-                  <a:txBody>
-                    <a:bodyPr/>
-                    <a:lstStyle/>
-                    <a:p>
-                      <a:r>
-                        <a:rPr sz="1050">
-                          <a:solidFill>
-                            <a:srgbClr val="3D5466"/>
-                          </a:solidFill>
-                          <a:latin typeface="Arial"/>
-                        </a:rPr>
-                        <a:t>Situationsfrage</a:t>
-                      </a:r>
-                    </a:p>
-                  </a:txBody>
-                  <a:tcPr/>
-                </a:tc>
-                <a:tc>
-                  <a:txBody>
-                    <a:bodyPr/>
-                    <a:lstStyle/>
-                    <a:p/>
-                  </a:txBody>
-                  <a:tcPr/>
-                </a:tc>
-                <a:tc>
-                  <a:txBody>
-                    <a:bodyPr/>
-                    <a:lstStyle/>
-                    <a:p/>
-                  </a:txBody>
-                  <a:tcPr/>
-                </a:tc>
-              </a:tr>
-              <a:tr h="384048">
-                <a:tc>
-                  <a:txBody>
-                    <a:bodyPr/>
-                    <a:lstStyle/>
-                    <a:p>
-                      <a:r>
-                        <a:rPr sz="1050">
-                          <a:solidFill>
-                            <a:srgbClr val="3D5466"/>
-                          </a:solidFill>
-                          <a:latin typeface="Arial"/>
-                        </a:rPr>
-                        <a:t>Problemfrage</a:t>
-                      </a:r>
-                    </a:p>
-                  </a:txBody>
-                  <a:tcPr/>
-                </a:tc>
-                <a:tc>
-                  <a:txBody>
-                    <a:bodyPr/>
-                    <a:lstStyle/>
-                    <a:p/>
-                  </a:txBody>
-                  <a:tcPr/>
-                </a:tc>
-                <a:tc>
-                  <a:txBody>
-                    <a:bodyPr/>
-                    <a:lstStyle/>
-                    <a:p/>
-                  </a:txBody>
-                  <a:tcPr/>
-                </a:tc>
-              </a:tr>
-              <a:tr h="384048">
-                <a:tc>
-                  <a:txBody>
-                    <a:bodyPr/>
-                    <a:lstStyle/>
-                    <a:p>
-                      <a:r>
-                        <a:rPr sz="1050">
-                          <a:solidFill>
-                            <a:srgbClr val="3D5466"/>
-                          </a:solidFill>
-                          <a:latin typeface="Arial"/>
-                        </a:rPr>
-                        <a:t>Implikationsfrage</a:t>
-                      </a:r>
-                    </a:p>
-                  </a:txBody>
-                  <a:tcPr/>
-                </a:tc>
-                <a:tc>
-                  <a:txBody>
-                    <a:bodyPr/>
-                    <a:lstStyle/>
-                    <a:p/>
-                  </a:txBody>
-                  <a:tcPr/>
-                </a:tc>
-                <a:tc>
-                  <a:txBody>
-                    <a:bodyPr/>
-                    <a:lstStyle/>
-                    <a:p/>
-                  </a:txBody>
-                  <a:tcPr/>
-                </a:tc>
-              </a:tr>
-              <a:tr h="384048">
-                <a:tc>
-                  <a:txBody>
-                    <a:bodyPr/>
-                    <a:lstStyle/>
-                    <a:p>
-                      <a:r>
-                        <a:rPr sz="1050">
-                          <a:solidFill>
-                            <a:srgbClr val="3D5466"/>
-                          </a:solidFill>
-                          <a:latin typeface="Arial"/>
-                        </a:rPr>
-                        <a:t>Nutzenfrage</a:t>
-                      </a:r>
-                    </a:p>
-                  </a:txBody>
-                  <a:tcPr/>
-                </a:tc>
-                <a:tc>
-                  <a:txBody>
-                    <a:bodyPr/>
-                    <a:lstStyle/>
-                    <a:p/>
-                  </a:txBody>
-                  <a:tcPr/>
-                </a:tc>
-                <a:tc>
-                  <a:txBody>
-                    <a:bodyPr/>
-                    <a:lstStyle/>
-                    <a:p/>
-                  </a:txBody>
-                  <a:tcPr/>
-                </a:tc>
-              </a:tr>
-            </a:tbl>
-          </a:graphicData>
-        </a:graphic>
-      </p:graphicFrame>
-      <p:sp>
-        <p:nvSpPr>
-          <p:cNvPr id="8" name="Rectangle 7"/>
-          <p:cNvSpPr/>
-          <p:nvPr/>
-        </p:nvSpPr>
-        <p:spPr>
-          <a:xfrm>
-            <a:off x="0" y="6510528"/>
-            <a:ext cx="12188952" cy="347472"/>
-          </a:xfrm>
-          <a:prstGeom prst="rect">
-            <a:avLst/>
-          </a:prstGeom>
-          <a:solidFill>
-            <a:srgbClr val="0A1937"/>
-          </a:solidFill>
-          <a:ln>
-            <a:noFill/>
-          </a:ln>
-        </p:spPr>
-        <p:style>
-          <a:lnRef idx="1">
-            <a:schemeClr val="accent1"/>
-          </a:lnRef>
-          <a:fillRef idx="3">
-            <a:schemeClr val="accent1"/>
-          </a:fillRef>
-          <a:effectRef idx="2">
-            <a:schemeClr val="accent1"/>
-          </a:effectRef>
-          <a:fontRef idx="minor">
-            <a:schemeClr val="lt1"/>
-          </a:fontRef>
-        </p:style>
-        <p:txBody>
-          <a:bodyPr rtlCol="0" anchor="ctr"/>
-          <a:lstStyle/>
-          <a:p>
-            <a:pPr algn="ctr"/>
-          </a:p>
-        </p:txBody>
-      </p:sp>
-      <p:sp>
-        <p:nvSpPr>
-          <p:cNvPr id="9" name="TextBox 8"/>
-          <p:cNvSpPr txBox="1"/>
-          <p:nvPr/>
-        </p:nvSpPr>
-        <p:spPr>
-          <a:xfrm>
-            <a:off x="685800" y="6583680"/>
-            <a:ext cx="6490411" cy="256032"/>
-          </a:xfrm>
-          <a:prstGeom prst="rect">
-            <a:avLst/>
-          </a:prstGeom>
-          <a:noFill/>
-        </p:spPr>
-        <p:txBody>
-          <a:bodyPr wrap="none">
-            <a:spAutoFit/>
-          </a:bodyPr>
-          <a:lstStyle/>
-          <a:p>
-            <a:pPr algn="l"/>
-            <a:r>
-              <a:rPr sz="700">
-                <a:solidFill>
-                  <a:srgbClr val="A0B4D2"/>
-                </a:solidFill>
-                <a:latin typeface="Consolas"/>
-              </a:rPr>
-              <a:t>FKB Campus  ·  M11</a:t>
-            </a:r>
-          </a:p>
-        </p:txBody>
-      </p:sp>
-      <p:sp>
-        <p:nvSpPr>
-          <p:cNvPr id="10" name="TextBox 9"/>
-          <p:cNvSpPr txBox="1"/>
-          <p:nvPr/>
-        </p:nvSpPr>
-        <p:spPr>
-          <a:xfrm>
-            <a:off x="7176211" y="6583680"/>
-            <a:ext cx="4326940" cy="256032"/>
-          </a:xfrm>
-          <a:prstGeom prst="rect">
-            <a:avLst/>
-          </a:prstGeom>
-          <a:noFill/>
-        </p:spPr>
-        <p:txBody>
-          <a:bodyPr wrap="none">
-            <a:spAutoFit/>
-          </a:bodyPr>
-          <a:lstStyle/>
-          <a:p>
-            <a:pPr algn="r"/>
-            <a:r>
-              <a:rPr sz="700">
-                <a:solidFill>
-                  <a:srgbClr val="A0B4D2"/>
-                </a:solidFill>
-                <a:latin typeface="Consolas"/>
-              </a:rPr>
-              <a:t>Übersicht</a:t>
-            </a:r>
-          </a:p>
-        </p:txBody>
-      </p:sp>
-    </p:spTree>
-  </p:cSld>
-  <p:clrMapOvr>
-    <a:masterClrMapping/>
-  </p:clrMapOvr>
-</p:sld>
-</file>
-
-<file path=ppt/slides/slide13.xml><?xml version="1.0" encoding="utf-8"?>
-<p:sld xmlns:a="http://schemas.openxmlformats.org/drawingml/2006/main" xmlns:p="http://schemas.openxmlformats.org/presentationml/2006/main" xmlns:r="http://schemas.openxmlformats.org/officeDocument/2006/relationships">
-  <p:cSld>
-    <p:spTree>
-      <p:nvGrpSpPr>
-        <p:cNvPr id="1" name=""/>
-        <p:cNvGrpSpPr/>
-        <p:nvPr/>
-      </p:nvGrpSpPr>
-      <p:grpSpPr/>
-      <p:sp>
-        <p:nvSpPr>
-          <p:cNvPr id="2" name="Rectangle 1"/>
-          <p:cNvSpPr/>
-          <p:nvPr/>
-        </p:nvSpPr>
-        <p:spPr>
-          <a:xfrm>
-            <a:off x="0" y="0"/>
-            <a:ext cx="12188952" cy="6858000"/>
-          </a:xfrm>
-          <a:prstGeom prst="rect">
-            <a:avLst/>
-          </a:prstGeom>
-          <a:solidFill>
-            <a:srgbClr val="EDEDF3"/>
-          </a:solidFill>
-          <a:ln>
-            <a:noFill/>
-          </a:ln>
-        </p:spPr>
-        <p:style>
-          <a:lnRef idx="1">
-            <a:schemeClr val="accent1"/>
-          </a:lnRef>
-          <a:fillRef idx="3">
-            <a:schemeClr val="accent1"/>
-          </a:fillRef>
-          <a:effectRef idx="2">
-            <a:schemeClr val="accent1"/>
-          </a:effectRef>
-          <a:fontRef idx="minor">
-            <a:schemeClr val="lt1"/>
-          </a:fontRef>
-        </p:style>
-        <p:txBody>
-          <a:bodyPr rtlCol="0" anchor="ctr"/>
-          <a:lstStyle/>
-          <a:p>
-            <a:pPr algn="ctr"/>
-          </a:p>
-        </p:txBody>
-      </p:sp>
-      <p:sp>
-        <p:nvSpPr>
-          <p:cNvPr id="3" name="Rectangle 2"/>
-          <p:cNvSpPr/>
-          <p:nvPr/>
-        </p:nvSpPr>
-        <p:spPr>
-          <a:xfrm>
-            <a:off x="0" y="0"/>
-            <a:ext cx="12188952" cy="50292"/>
-          </a:xfrm>
-          <a:prstGeom prst="rect">
-            <a:avLst/>
-          </a:prstGeom>
-          <a:solidFill>
-            <a:srgbClr val="1F2C56"/>
-          </a:solidFill>
-          <a:ln>
-            <a:noFill/>
-          </a:ln>
-        </p:spPr>
-        <p:style>
-          <a:lnRef idx="1">
-            <a:schemeClr val="accent1"/>
-          </a:lnRef>
-          <a:fillRef idx="3">
-            <a:schemeClr val="accent1"/>
-          </a:fillRef>
-          <a:effectRef idx="2">
-            <a:schemeClr val="accent1"/>
-          </a:effectRef>
-          <a:fontRef idx="minor">
-            <a:schemeClr val="lt1"/>
-          </a:fontRef>
-        </p:style>
-        <p:txBody>
-          <a:bodyPr rtlCol="0" anchor="ctr"/>
-          <a:lstStyle/>
-          <a:p>
-            <a:pPr algn="ctr"/>
-          </a:p>
-        </p:txBody>
-      </p:sp>
-      <p:sp>
-        <p:nvSpPr>
-          <p:cNvPr id="4" name="TextBox 3"/>
-          <p:cNvSpPr txBox="1"/>
-          <p:nvPr/>
-        </p:nvSpPr>
-        <p:spPr>
-          <a:xfrm>
-            <a:off x="685800" y="109728"/>
-            <a:ext cx="10817352" cy="228600"/>
-          </a:xfrm>
-          <a:prstGeom prst="rect">
-            <a:avLst/>
-          </a:prstGeom>
-          <a:noFill/>
-        </p:spPr>
-        <p:txBody>
-          <a:bodyPr wrap="none">
-            <a:spAutoFit/>
-          </a:bodyPr>
-          <a:lstStyle/>
-          <a:p>
-            <a:pPr algn="l"/>
-            <a:r>
-              <a:rPr sz="750">
-                <a:solidFill>
-                  <a:srgbClr val="78808C"/>
-                </a:solidFill>
-                <a:latin typeface="Consolas"/>
-              </a:rPr>
-              <a:t>M11  ·  INHALT</a:t>
-            </a:r>
-          </a:p>
-        </p:txBody>
-      </p:sp>
-      <p:sp>
-        <p:nvSpPr>
-          <p:cNvPr id="5" name="Rectangle 4"/>
-          <p:cNvSpPr/>
-          <p:nvPr/>
-        </p:nvSpPr>
-        <p:spPr>
-          <a:xfrm>
-            <a:off x="0" y="1234440"/>
-            <a:ext cx="12188952" cy="12700"/>
-          </a:xfrm>
-          <a:prstGeom prst="rect">
-            <a:avLst/>
-          </a:prstGeom>
-          <a:solidFill>
-            <a:srgbClr val="D8DFE4"/>
-          </a:solidFill>
-          <a:ln>
-            <a:noFill/>
-          </a:ln>
-        </p:spPr>
-        <p:style>
-          <a:lnRef idx="1">
-            <a:schemeClr val="accent1"/>
-          </a:lnRef>
-          <a:fillRef idx="3">
-            <a:schemeClr val="accent1"/>
-          </a:fillRef>
-          <a:effectRef idx="2">
-            <a:schemeClr val="accent1"/>
-          </a:effectRef>
-          <a:fontRef idx="minor">
-            <a:schemeClr val="lt1"/>
-          </a:fontRef>
-        </p:style>
-        <p:txBody>
-          <a:bodyPr rtlCol="0" anchor="ctr"/>
-          <a:lstStyle/>
-          <a:p>
-            <a:pPr algn="ctr"/>
-          </a:p>
-        </p:txBody>
-      </p:sp>
-      <p:sp>
-        <p:nvSpPr>
-          <p:cNvPr id="6" name="Rectangle 5"/>
-          <p:cNvSpPr/>
-          <p:nvPr/>
-        </p:nvSpPr>
-        <p:spPr>
-          <a:xfrm>
-            <a:off x="685800" y="502920"/>
-            <a:ext cx="36576" cy="658368"/>
-          </a:xfrm>
-          <a:prstGeom prst="rect">
-            <a:avLst/>
-          </a:prstGeom>
-          <a:solidFill>
-            <a:srgbClr val="D9C089"/>
-          </a:solidFill>
-          <a:ln>
-            <a:noFill/>
-          </a:ln>
-        </p:spPr>
-        <p:style>
-          <a:lnRef idx="1">
-            <a:schemeClr val="accent1"/>
-          </a:lnRef>
-          <a:fillRef idx="3">
-            <a:schemeClr val="accent1"/>
-          </a:fillRef>
-          <a:effectRef idx="2">
-            <a:schemeClr val="accent1"/>
-          </a:effectRef>
-          <a:fontRef idx="minor">
-            <a:schemeClr val="lt1"/>
-          </a:fontRef>
-        </p:style>
-        <p:txBody>
-          <a:bodyPr rtlCol="0" anchor="ctr"/>
-          <a:lstStyle/>
-          <a:p>
-            <a:pPr algn="ctr"/>
-          </a:p>
-        </p:txBody>
-      </p:sp>
       <p:sp>
         <p:nvSpPr>
           <p:cNvPr id="7" name="TextBox 6"/>
@@ -6385,7 +5646,7 @@
                 </a:solidFill>
                 <a:latin typeface="Arial"/>
               </a:rPr>
-              <a:t>AB-2: Beobachtungsbogen Rollenspiel</a:t>
+              <a:t>Reflexion und Selbstcheck</a:t>
             </a:r>
           </a:p>
         </p:txBody>
@@ -6427,7 +5688,7 @@
                 </a:solidFill>
                 <a:latin typeface="Arial"/>
               </a:rPr>
-              <a:t>▸  (Wird vom Beobachter ausgefüllt – nicht vom Spielenden)</a:t>
+              <a:t>▸  Welche Kundenanfrage haben Sie zuletzt wörtlich genommen, statt nachzufragen?</a:t>
             </a:r>
           </a:p>
           <a:p>
@@ -6446,7 +5707,7 @@
                 </a:solidFill>
                 <a:latin typeface="Arial"/>
               </a:rPr>
-              <a:t>▸  Stärkster Moment im Gespräch:</a:t>
+              <a:t>▸  Auf welchem der vier Signalkanäle hören Sie am wenigsten genau hin?</a:t>
             </a:r>
           </a:p>
           <a:p>
@@ -6465,7 +5726,7 @@
                 </a:solidFill>
                 <a:latin typeface="Arial"/>
               </a:rPr>
-              <a:t>▸  Eine konkrete Verbesserungsmöglichkeit:</a:t>
+              <a:t>▸  Welche SPIN-Frage nehmen Sie in Ihr nächstes Gespräch mit?</a:t>
             </a:r>
           </a:p>
         </p:txBody>
@@ -6544,1121 +5805,6 @@
                 <a:latin typeface="Consolas"/>
               </a:rPr>
               <a:t>FKB Campus  ·  M11</a:t>
-            </a:r>
-          </a:p>
-        </p:txBody>
-      </p:sp>
-    </p:spTree>
-  </p:cSld>
-  <p:clrMapOvr>
-    <a:masterClrMapping/>
-  </p:clrMapOvr>
-</p:sld>
-</file>
-
-<file path=ppt/slides/slide14.xml><?xml version="1.0" encoding="utf-8"?>
-<p:sld xmlns:a="http://schemas.openxmlformats.org/drawingml/2006/main" xmlns:p="http://schemas.openxmlformats.org/presentationml/2006/main" xmlns:r="http://schemas.openxmlformats.org/officeDocument/2006/relationships">
-  <p:cSld>
-    <p:spTree>
-      <p:nvGrpSpPr>
-        <p:cNvPr id="1" name=""/>
-        <p:cNvGrpSpPr/>
-        <p:nvPr/>
-      </p:nvGrpSpPr>
-      <p:grpSpPr/>
-      <p:sp>
-        <p:nvSpPr>
-          <p:cNvPr id="2" name="Rectangle 1"/>
-          <p:cNvSpPr/>
-          <p:nvPr/>
-        </p:nvSpPr>
-        <p:spPr>
-          <a:xfrm>
-            <a:off x="0" y="0"/>
-            <a:ext cx="12188952" cy="6858000"/>
-          </a:xfrm>
-          <a:prstGeom prst="rect">
-            <a:avLst/>
-          </a:prstGeom>
-          <a:solidFill>
-            <a:srgbClr val="FFFFFF"/>
-          </a:solidFill>
-          <a:ln>
-            <a:noFill/>
-          </a:ln>
-        </p:spPr>
-        <p:style>
-          <a:lnRef idx="1">
-            <a:schemeClr val="accent1"/>
-          </a:lnRef>
-          <a:fillRef idx="3">
-            <a:schemeClr val="accent1"/>
-          </a:fillRef>
-          <a:effectRef idx="2">
-            <a:schemeClr val="accent1"/>
-          </a:effectRef>
-          <a:fontRef idx="minor">
-            <a:schemeClr val="lt1"/>
-          </a:fontRef>
-        </p:style>
-        <p:txBody>
-          <a:bodyPr rtlCol="0" anchor="ctr"/>
-          <a:lstStyle/>
-          <a:p>
-            <a:pPr algn="ctr"/>
-          </a:p>
-        </p:txBody>
-      </p:sp>
-      <p:sp>
-        <p:nvSpPr>
-          <p:cNvPr id="3" name="Rectangle 2"/>
-          <p:cNvSpPr/>
-          <p:nvPr/>
-        </p:nvSpPr>
-        <p:spPr>
-          <a:xfrm>
-            <a:off x="0" y="0"/>
-            <a:ext cx="12188952" cy="50292"/>
-          </a:xfrm>
-          <a:prstGeom prst="rect">
-            <a:avLst/>
-          </a:prstGeom>
-          <a:solidFill>
-            <a:srgbClr val="1F2C56"/>
-          </a:solidFill>
-          <a:ln>
-            <a:noFill/>
-          </a:ln>
-        </p:spPr>
-        <p:style>
-          <a:lnRef idx="1">
-            <a:schemeClr val="accent1"/>
-          </a:lnRef>
-          <a:fillRef idx="3">
-            <a:schemeClr val="accent1"/>
-          </a:fillRef>
-          <a:effectRef idx="2">
-            <a:schemeClr val="accent1"/>
-          </a:effectRef>
-          <a:fontRef idx="minor">
-            <a:schemeClr val="lt1"/>
-          </a:fontRef>
-        </p:style>
-        <p:txBody>
-          <a:bodyPr rtlCol="0" anchor="ctr"/>
-          <a:lstStyle/>
-          <a:p>
-            <a:pPr algn="ctr"/>
-          </a:p>
-        </p:txBody>
-      </p:sp>
-      <p:sp>
-        <p:nvSpPr>
-          <p:cNvPr id="4" name="TextBox 3"/>
-          <p:cNvSpPr txBox="1"/>
-          <p:nvPr/>
-        </p:nvSpPr>
-        <p:spPr>
-          <a:xfrm>
-            <a:off x="685800" y="109728"/>
-            <a:ext cx="10817352" cy="228600"/>
-          </a:xfrm>
-          <a:prstGeom prst="rect">
-            <a:avLst/>
-          </a:prstGeom>
-          <a:noFill/>
-        </p:spPr>
-        <p:txBody>
-          <a:bodyPr wrap="none">
-            <a:spAutoFit/>
-          </a:bodyPr>
-          <a:lstStyle/>
-          <a:p>
-            <a:pPr algn="l"/>
-            <a:r>
-              <a:rPr sz="750">
-                <a:solidFill>
-                  <a:srgbClr val="78808C"/>
-                </a:solidFill>
-                <a:latin typeface="Consolas"/>
-              </a:rPr>
-              <a:t>M11  ·  ÜBERSICHT</a:t>
-            </a:r>
-          </a:p>
-        </p:txBody>
-      </p:sp>
-      <p:sp>
-        <p:nvSpPr>
-          <p:cNvPr id="5" name="TextBox 4"/>
-          <p:cNvSpPr txBox="1"/>
-          <p:nvPr/>
-        </p:nvSpPr>
-        <p:spPr>
-          <a:xfrm>
-            <a:off x="685800" y="502920"/>
-            <a:ext cx="10817352" cy="594360"/>
-          </a:xfrm>
-          <a:prstGeom prst="rect">
-            <a:avLst/>
-          </a:prstGeom>
-          <a:noFill/>
-        </p:spPr>
-        <p:txBody>
-          <a:bodyPr wrap="square">
-            <a:spAutoFit/>
-          </a:bodyPr>
-          <a:lstStyle/>
-          <a:p>
-            <a:pPr algn="l"/>
-            <a:r>
-              <a:rPr sz="2000" b="1" i="0">
-                <a:solidFill>
-                  <a:srgbClr val="1F2C56"/>
-                </a:solidFill>
-                <a:latin typeface="Arial"/>
-              </a:rPr>
-              <a:t>AB-2: Beobachtungsbogen Rollenspiel</a:t>
-            </a:r>
-          </a:p>
-        </p:txBody>
-      </p:sp>
-      <p:sp>
-        <p:nvSpPr>
-          <p:cNvPr id="6" name="Rectangle 5"/>
-          <p:cNvSpPr/>
-          <p:nvPr/>
-        </p:nvSpPr>
-        <p:spPr>
-          <a:xfrm>
-            <a:off x="685800" y="1143000"/>
-            <a:ext cx="10817352" cy="25400"/>
-          </a:xfrm>
-          <a:prstGeom prst="rect">
-            <a:avLst/>
-          </a:prstGeom>
-          <a:solidFill>
-            <a:srgbClr val="D9C089"/>
-          </a:solidFill>
-          <a:ln>
-            <a:noFill/>
-          </a:ln>
-        </p:spPr>
-        <p:style>
-          <a:lnRef idx="1">
-            <a:schemeClr val="accent1"/>
-          </a:lnRef>
-          <a:fillRef idx="3">
-            <a:schemeClr val="accent1"/>
-          </a:fillRef>
-          <a:effectRef idx="2">
-            <a:schemeClr val="accent1"/>
-          </a:effectRef>
-          <a:fontRef idx="minor">
-            <a:schemeClr val="lt1"/>
-          </a:fontRef>
-        </p:style>
-        <p:txBody>
-          <a:bodyPr rtlCol="0" anchor="ctr"/>
-          <a:lstStyle/>
-          <a:p>
-            <a:pPr algn="ctr"/>
-          </a:p>
-        </p:txBody>
-      </p:sp>
-      <p:graphicFrame>
-        <p:nvGraphicFramePr>
-          <p:cNvPr id="7" name="Table 6"/>
-          <p:cNvGraphicFramePr>
-            <a:graphicFrameLocks noGrp="1"/>
-          </p:cNvGraphicFramePr>
-          <p:nvPr/>
-        </p:nvGraphicFramePr>
-        <p:xfrm>
-          <a:off x="685800" y="1417320"/>
-          <a:ext cx="10817352" cy="3072384"/>
-        </p:xfrm>
-        <a:graphic>
-          <a:graphicData uri="http://schemas.openxmlformats.org/drawingml/2006/table">
-            <a:tbl>
-              <a:tblPr firstRow="1" bandRow="1">
-                <a:tableStyleId>{5C22544A-7EE6-4342-B048-85BDC9FD1C3A}</a:tableStyleId>
-              </a:tblPr>
-              <a:tblGrid>
-                <a:gridCol w="2163470"/>
-                <a:gridCol w="2163470"/>
-                <a:gridCol w="2163470"/>
-                <a:gridCol w="2163470"/>
-                <a:gridCol w="2163472"/>
-              </a:tblGrid>
-              <a:tr h="384048">
-                <a:tc>
-                  <a:txBody>
-                    <a:bodyPr/>
-                    <a:lstStyle/>
-                    <a:p>
-                      <a:r>
-                        <a:rPr sz="1100" b="1">
-                          <a:solidFill>
-                            <a:srgbClr val="FFFFFF"/>
-                          </a:solidFill>
-                          <a:latin typeface="Arial"/>
-                        </a:rPr>
-                        <a:t>Beobachtungskriterium</a:t>
-                      </a:r>
-                    </a:p>
-                  </a:txBody>
-                  <a:tcPr>
-                    <a:solidFill>
-                      <a:srgbClr val="1F2C56"/>
-                    </a:solidFill>
-                  </a:tcPr>
-                </a:tc>
-                <a:tc>
-                  <a:txBody>
-                    <a:bodyPr/>
-                    <a:lstStyle/>
-                    <a:p>
-                      <a:r>
-                        <a:rPr sz="1100" b="1">
-                          <a:solidFill>
-                            <a:srgbClr val="FFFFFF"/>
-                          </a:solidFill>
-                          <a:latin typeface="Arial"/>
-                        </a:rPr>
-                        <a:t>Sehr gut (3)</a:t>
-                      </a:r>
-                    </a:p>
-                  </a:txBody>
-                  <a:tcPr>
-                    <a:solidFill>
-                      <a:srgbClr val="1F2C56"/>
-                    </a:solidFill>
-                  </a:tcPr>
-                </a:tc>
-                <a:tc>
-                  <a:txBody>
-                    <a:bodyPr/>
-                    <a:lstStyle/>
-                    <a:p>
-                      <a:r>
-                        <a:rPr sz="1100" b="1">
-                          <a:solidFill>
-                            <a:srgbClr val="FFFFFF"/>
-                          </a:solidFill>
-                          <a:latin typeface="Arial"/>
-                        </a:rPr>
-                        <a:t>Gut (2)</a:t>
-                      </a:r>
-                    </a:p>
-                  </a:txBody>
-                  <a:tcPr>
-                    <a:solidFill>
-                      <a:srgbClr val="1F2C56"/>
-                    </a:solidFill>
-                  </a:tcPr>
-                </a:tc>
-                <a:tc>
-                  <a:txBody>
-                    <a:bodyPr/>
-                    <a:lstStyle/>
-                    <a:p>
-                      <a:r>
-                        <a:rPr sz="1100" b="1">
-                          <a:solidFill>
-                            <a:srgbClr val="FFFFFF"/>
-                          </a:solidFill>
-                          <a:latin typeface="Arial"/>
-                        </a:rPr>
-                        <a:t>Ausbaufähig (1)</a:t>
-                      </a:r>
-                    </a:p>
-                  </a:txBody>
-                  <a:tcPr>
-                    <a:solidFill>
-                      <a:srgbClr val="1F2C56"/>
-                    </a:solidFill>
-                  </a:tcPr>
-                </a:tc>
-                <a:tc>
-                  <a:txBody>
-                    <a:bodyPr/>
-                    <a:lstStyle/>
-                    <a:p>
-                      <a:r>
-                        <a:rPr sz="1100" b="1">
-                          <a:solidFill>
-                            <a:srgbClr val="FFFFFF"/>
-                          </a:solidFill>
-                          <a:latin typeface="Arial"/>
-                        </a:rPr>
-                        <a:t>Nicht beobachtet</a:t>
-                      </a:r>
-                    </a:p>
-                  </a:txBody>
-                  <a:tcPr>
-                    <a:solidFill>
-                      <a:srgbClr val="1F2C56"/>
-                    </a:solidFill>
-                  </a:tcPr>
-                </a:tc>
-              </a:tr>
-              <a:tr h="384048">
-                <a:tc>
-                  <a:txBody>
-                    <a:bodyPr/>
-                    <a:lstStyle/>
-                    <a:p>
-                      <a:r>
-                        <a:rPr sz="1050">
-                          <a:solidFill>
-                            <a:srgbClr val="3D5466"/>
-                          </a:solidFill>
-                          <a:latin typeface="Arial"/>
-                        </a:rPr>
-                        <a:t>Offene Einstiegsfragen gestellt</a:t>
-                      </a:r>
-                    </a:p>
-                  </a:txBody>
-                  <a:tcPr/>
-                </a:tc>
-                <a:tc>
-                  <a:txBody>
-                    <a:bodyPr/>
-                    <a:lstStyle/>
-                    <a:p>
-                      <a:r>
-                        <a:rPr sz="1050">
-                          <a:solidFill>
-                            <a:srgbClr val="3D5466"/>
-                          </a:solidFill>
-                          <a:latin typeface="Arial"/>
-                        </a:rPr>
-                        <a:t>☐</a:t>
-                      </a:r>
-                    </a:p>
-                  </a:txBody>
-                  <a:tcPr/>
-                </a:tc>
-                <a:tc>
-                  <a:txBody>
-                    <a:bodyPr/>
-                    <a:lstStyle/>
-                    <a:p>
-                      <a:r>
-                        <a:rPr sz="1050">
-                          <a:solidFill>
-                            <a:srgbClr val="3D5466"/>
-                          </a:solidFill>
-                          <a:latin typeface="Arial"/>
-                        </a:rPr>
-                        <a:t>☐</a:t>
-                      </a:r>
-                    </a:p>
-                  </a:txBody>
-                  <a:tcPr/>
-                </a:tc>
-                <a:tc>
-                  <a:txBody>
-                    <a:bodyPr/>
-                    <a:lstStyle/>
-                    <a:p>
-                      <a:r>
-                        <a:rPr sz="1050">
-                          <a:solidFill>
-                            <a:srgbClr val="3D5466"/>
-                          </a:solidFill>
-                          <a:latin typeface="Arial"/>
-                        </a:rPr>
-                        <a:t>☐</a:t>
-                      </a:r>
-                    </a:p>
-                  </a:txBody>
-                  <a:tcPr/>
-                </a:tc>
-                <a:tc>
-                  <a:txBody>
-                    <a:bodyPr/>
-                    <a:lstStyle/>
-                    <a:p>
-                      <a:r>
-                        <a:rPr sz="1050">
-                          <a:solidFill>
-                            <a:srgbClr val="3D5466"/>
-                          </a:solidFill>
-                          <a:latin typeface="Arial"/>
-                        </a:rPr>
-                        <a:t>☐</a:t>
-                      </a:r>
-                    </a:p>
-                  </a:txBody>
-                  <a:tcPr/>
-                </a:tc>
-              </a:tr>
-              <a:tr h="384048">
-                <a:tc>
-                  <a:txBody>
-                    <a:bodyPr/>
-                    <a:lstStyle/>
-                    <a:p>
-                      <a:r>
-                        <a:rPr sz="1050">
-                          <a:solidFill>
-                            <a:srgbClr val="3D5466"/>
-                          </a:solidFill>
-                          <a:latin typeface="Arial"/>
-                        </a:rPr>
-                        <a:t>Problemfragen aktiv eingesetzt</a:t>
-                      </a:r>
-                    </a:p>
-                  </a:txBody>
-                  <a:tcPr/>
-                </a:tc>
-                <a:tc>
-                  <a:txBody>
-                    <a:bodyPr/>
-                    <a:lstStyle/>
-                    <a:p>
-                      <a:r>
-                        <a:rPr sz="1050">
-                          <a:solidFill>
-                            <a:srgbClr val="3D5466"/>
-                          </a:solidFill>
-                          <a:latin typeface="Arial"/>
-                        </a:rPr>
-                        <a:t>☐</a:t>
-                      </a:r>
-                    </a:p>
-                  </a:txBody>
-                  <a:tcPr/>
-                </a:tc>
-                <a:tc>
-                  <a:txBody>
-                    <a:bodyPr/>
-                    <a:lstStyle/>
-                    <a:p>
-                      <a:r>
-                        <a:rPr sz="1050">
-                          <a:solidFill>
-                            <a:srgbClr val="3D5466"/>
-                          </a:solidFill>
-                          <a:latin typeface="Arial"/>
-                        </a:rPr>
-                        <a:t>☐</a:t>
-                      </a:r>
-                    </a:p>
-                  </a:txBody>
-                  <a:tcPr/>
-                </a:tc>
-                <a:tc>
-                  <a:txBody>
-                    <a:bodyPr/>
-                    <a:lstStyle/>
-                    <a:p>
-                      <a:r>
-                        <a:rPr sz="1050">
-                          <a:solidFill>
-                            <a:srgbClr val="3D5466"/>
-                          </a:solidFill>
-                          <a:latin typeface="Arial"/>
-                        </a:rPr>
-                        <a:t>☐</a:t>
-                      </a:r>
-                    </a:p>
-                  </a:txBody>
-                  <a:tcPr/>
-                </a:tc>
-                <a:tc>
-                  <a:txBody>
-                    <a:bodyPr/>
-                    <a:lstStyle/>
-                    <a:p>
-                      <a:r>
-                        <a:rPr sz="1050">
-                          <a:solidFill>
-                            <a:srgbClr val="3D5466"/>
-                          </a:solidFill>
-                          <a:latin typeface="Arial"/>
-                        </a:rPr>
-                        <a:t>☐</a:t>
-                      </a:r>
-                    </a:p>
-                  </a:txBody>
-                  <a:tcPr/>
-                </a:tc>
-              </a:tr>
-              <a:tr h="384048">
-                <a:tc>
-                  <a:txBody>
-                    <a:bodyPr/>
-                    <a:lstStyle/>
-                    <a:p>
-                      <a:r>
-                        <a:rPr sz="1050">
-                          <a:solidFill>
-                            <a:srgbClr val="3D5466"/>
-                          </a:solidFill>
-                          <a:latin typeface="Arial"/>
-                        </a:rPr>
-                        <a:t>Implikationsfragen verwendet</a:t>
-                      </a:r>
-                    </a:p>
-                  </a:txBody>
-                  <a:tcPr/>
-                </a:tc>
-                <a:tc>
-                  <a:txBody>
-                    <a:bodyPr/>
-                    <a:lstStyle/>
-                    <a:p>
-                      <a:r>
-                        <a:rPr sz="1050">
-                          <a:solidFill>
-                            <a:srgbClr val="3D5466"/>
-                          </a:solidFill>
-                          <a:latin typeface="Arial"/>
-                        </a:rPr>
-                        <a:t>☐</a:t>
-                      </a:r>
-                    </a:p>
-                  </a:txBody>
-                  <a:tcPr/>
-                </a:tc>
-                <a:tc>
-                  <a:txBody>
-                    <a:bodyPr/>
-                    <a:lstStyle/>
-                    <a:p>
-                      <a:r>
-                        <a:rPr sz="1050">
-                          <a:solidFill>
-                            <a:srgbClr val="3D5466"/>
-                          </a:solidFill>
-                          <a:latin typeface="Arial"/>
-                        </a:rPr>
-                        <a:t>☐</a:t>
-                      </a:r>
-                    </a:p>
-                  </a:txBody>
-                  <a:tcPr/>
-                </a:tc>
-                <a:tc>
-                  <a:txBody>
-                    <a:bodyPr/>
-                    <a:lstStyle/>
-                    <a:p>
-                      <a:r>
-                        <a:rPr sz="1050">
-                          <a:solidFill>
-                            <a:srgbClr val="3D5466"/>
-                          </a:solidFill>
-                          <a:latin typeface="Arial"/>
-                        </a:rPr>
-                        <a:t>☐</a:t>
-                      </a:r>
-                    </a:p>
-                  </a:txBody>
-                  <a:tcPr/>
-                </a:tc>
-                <a:tc>
-                  <a:txBody>
-                    <a:bodyPr/>
-                    <a:lstStyle/>
-                    <a:p>
-                      <a:r>
-                        <a:rPr sz="1050">
-                          <a:solidFill>
-                            <a:srgbClr val="3D5466"/>
-                          </a:solidFill>
-                          <a:latin typeface="Arial"/>
-                        </a:rPr>
-                        <a:t>☐</a:t>
-                      </a:r>
-                    </a:p>
-                  </a:txBody>
-                  <a:tcPr/>
-                </a:tc>
-              </a:tr>
-              <a:tr h="384048">
-                <a:tc>
-                  <a:txBody>
-                    <a:bodyPr/>
-                    <a:lstStyle/>
-                    <a:p>
-                      <a:r>
-                        <a:rPr sz="1050">
-                          <a:solidFill>
-                            <a:srgbClr val="3D5466"/>
-                          </a:solidFill>
-                          <a:latin typeface="Arial"/>
-                        </a:rPr>
-                        <a:t>Latente Signale aufgegriffen</a:t>
-                      </a:r>
-                    </a:p>
-                  </a:txBody>
-                  <a:tcPr/>
-                </a:tc>
-                <a:tc>
-                  <a:txBody>
-                    <a:bodyPr/>
-                    <a:lstStyle/>
-                    <a:p>
-                      <a:r>
-                        <a:rPr sz="1050">
-                          <a:solidFill>
-                            <a:srgbClr val="3D5466"/>
-                          </a:solidFill>
-                          <a:latin typeface="Arial"/>
-                        </a:rPr>
-                        <a:t>☐</a:t>
-                      </a:r>
-                    </a:p>
-                  </a:txBody>
-                  <a:tcPr/>
-                </a:tc>
-                <a:tc>
-                  <a:txBody>
-                    <a:bodyPr/>
-                    <a:lstStyle/>
-                    <a:p>
-                      <a:r>
-                        <a:rPr sz="1050">
-                          <a:solidFill>
-                            <a:srgbClr val="3D5466"/>
-                          </a:solidFill>
-                          <a:latin typeface="Arial"/>
-                        </a:rPr>
-                        <a:t>☐</a:t>
-                      </a:r>
-                    </a:p>
-                  </a:txBody>
-                  <a:tcPr/>
-                </a:tc>
-                <a:tc>
-                  <a:txBody>
-                    <a:bodyPr/>
-                    <a:lstStyle/>
-                    <a:p>
-                      <a:r>
-                        <a:rPr sz="1050">
-                          <a:solidFill>
-                            <a:srgbClr val="3D5466"/>
-                          </a:solidFill>
-                          <a:latin typeface="Arial"/>
-                        </a:rPr>
-                        <a:t>☐</a:t>
-                      </a:r>
-                    </a:p>
-                  </a:txBody>
-                  <a:tcPr/>
-                </a:tc>
-                <a:tc>
-                  <a:txBody>
-                    <a:bodyPr/>
-                    <a:lstStyle/>
-                    <a:p>
-                      <a:r>
-                        <a:rPr sz="1050">
-                          <a:solidFill>
-                            <a:srgbClr val="3D5466"/>
-                          </a:solidFill>
-                          <a:latin typeface="Arial"/>
-                        </a:rPr>
-                        <a:t>☐</a:t>
-                      </a:r>
-                    </a:p>
-                  </a:txBody>
-                  <a:tcPr/>
-                </a:tc>
-              </a:tr>
-              <a:tr h="384048">
-                <a:tc>
-                  <a:txBody>
-                    <a:bodyPr/>
-                    <a:lstStyle/>
-                    <a:p>
-                      <a:r>
-                        <a:rPr sz="1050">
-                          <a:solidFill>
-                            <a:srgbClr val="3D5466"/>
-                          </a:solidFill>
-                          <a:latin typeface="Arial"/>
-                        </a:rPr>
-                        <a:t>Schweigen ausgehalten</a:t>
-                      </a:r>
-                    </a:p>
-                  </a:txBody>
-                  <a:tcPr/>
-                </a:tc>
-                <a:tc>
-                  <a:txBody>
-                    <a:bodyPr/>
-                    <a:lstStyle/>
-                    <a:p>
-                      <a:r>
-                        <a:rPr sz="1050">
-                          <a:solidFill>
-                            <a:srgbClr val="3D5466"/>
-                          </a:solidFill>
-                          <a:latin typeface="Arial"/>
-                        </a:rPr>
-                        <a:t>☐</a:t>
-                      </a:r>
-                    </a:p>
-                  </a:txBody>
-                  <a:tcPr/>
-                </a:tc>
-                <a:tc>
-                  <a:txBody>
-                    <a:bodyPr/>
-                    <a:lstStyle/>
-                    <a:p>
-                      <a:r>
-                        <a:rPr sz="1050">
-                          <a:solidFill>
-                            <a:srgbClr val="3D5466"/>
-                          </a:solidFill>
-                          <a:latin typeface="Arial"/>
-                        </a:rPr>
-                        <a:t>☐</a:t>
-                      </a:r>
-                    </a:p>
-                  </a:txBody>
-                  <a:tcPr/>
-                </a:tc>
-                <a:tc>
-                  <a:txBody>
-                    <a:bodyPr/>
-                    <a:lstStyle/>
-                    <a:p>
-                      <a:r>
-                        <a:rPr sz="1050">
-                          <a:solidFill>
-                            <a:srgbClr val="3D5466"/>
-                          </a:solidFill>
-                          <a:latin typeface="Arial"/>
-                        </a:rPr>
-                        <a:t>☐</a:t>
-                      </a:r>
-                    </a:p>
-                  </a:txBody>
-                  <a:tcPr/>
-                </a:tc>
-                <a:tc>
-                  <a:txBody>
-                    <a:bodyPr/>
-                    <a:lstStyle/>
-                    <a:p>
-                      <a:r>
-                        <a:rPr sz="1050">
-                          <a:solidFill>
-                            <a:srgbClr val="3D5466"/>
-                          </a:solidFill>
-                          <a:latin typeface="Arial"/>
-                        </a:rPr>
-                        <a:t>☐</a:t>
-                      </a:r>
-                    </a:p>
-                  </a:txBody>
-                  <a:tcPr/>
-                </a:tc>
-              </a:tr>
-              <a:tr h="384048">
-                <a:tc>
-                  <a:txBody>
-                    <a:bodyPr/>
-                    <a:lstStyle/>
-                    <a:p>
-                      <a:r>
-                        <a:rPr sz="1050">
-                          <a:solidFill>
-                            <a:srgbClr val="3D5466"/>
-                          </a:solidFill>
-                          <a:latin typeface="Arial"/>
-                        </a:rPr>
-                        <a:t>Paraphrase/Zusammenfassung eingesetzt</a:t>
-                      </a:r>
-                    </a:p>
-                  </a:txBody>
-                  <a:tcPr/>
-                </a:tc>
-                <a:tc>
-                  <a:txBody>
-                    <a:bodyPr/>
-                    <a:lstStyle/>
-                    <a:p>
-                      <a:r>
-                        <a:rPr sz="1050">
-                          <a:solidFill>
-                            <a:srgbClr val="3D5466"/>
-                          </a:solidFill>
-                          <a:latin typeface="Arial"/>
-                        </a:rPr>
-                        <a:t>☐</a:t>
-                      </a:r>
-                    </a:p>
-                  </a:txBody>
-                  <a:tcPr/>
-                </a:tc>
-                <a:tc>
-                  <a:txBody>
-                    <a:bodyPr/>
-                    <a:lstStyle/>
-                    <a:p>
-                      <a:r>
-                        <a:rPr sz="1050">
-                          <a:solidFill>
-                            <a:srgbClr val="3D5466"/>
-                          </a:solidFill>
-                          <a:latin typeface="Arial"/>
-                        </a:rPr>
-                        <a:t>☐</a:t>
-                      </a:r>
-                    </a:p>
-                  </a:txBody>
-                  <a:tcPr/>
-                </a:tc>
-                <a:tc>
-                  <a:txBody>
-                    <a:bodyPr/>
-                    <a:lstStyle/>
-                    <a:p>
-                      <a:r>
-                        <a:rPr sz="1050">
-                          <a:solidFill>
-                            <a:srgbClr val="3D5466"/>
-                          </a:solidFill>
-                          <a:latin typeface="Arial"/>
-                        </a:rPr>
-                        <a:t>☐</a:t>
-                      </a:r>
-                    </a:p>
-                  </a:txBody>
-                  <a:tcPr/>
-                </a:tc>
-                <a:tc>
-                  <a:txBody>
-                    <a:bodyPr/>
-                    <a:lstStyle/>
-                    <a:p>
-                      <a:r>
-                        <a:rPr sz="1050">
-                          <a:solidFill>
-                            <a:srgbClr val="3D5466"/>
-                          </a:solidFill>
-                          <a:latin typeface="Arial"/>
-                        </a:rPr>
-                        <a:t>☐</a:t>
-                      </a:r>
-                    </a:p>
-                  </a:txBody>
-                  <a:tcPr/>
-                </a:tc>
-              </a:tr>
-              <a:tr h="384048">
-                <a:tc>
-                  <a:txBody>
-                    <a:bodyPr/>
-                    <a:lstStyle/>
-                    <a:p>
-                      <a:r>
-                        <a:rPr sz="1050">
-                          <a:solidFill>
-                            <a:srgbClr val="3D5466"/>
-                          </a:solidFill>
-                          <a:latin typeface="Arial"/>
-                        </a:rPr>
-                        <a:t>Zu früh zu Produkten gewechselt (neg.)</a:t>
-                      </a:r>
-                    </a:p>
-                  </a:txBody>
-                  <a:tcPr/>
-                </a:tc>
-                <a:tc>
-                  <a:txBody>
-                    <a:bodyPr/>
-                    <a:lstStyle/>
-                    <a:p>
-                      <a:r>
-                        <a:rPr sz="1050">
-                          <a:solidFill>
-                            <a:srgbClr val="3D5466"/>
-                          </a:solidFill>
-                          <a:latin typeface="Arial"/>
-                        </a:rPr>
-                        <a:t>☐</a:t>
-                      </a:r>
-                    </a:p>
-                  </a:txBody>
-                  <a:tcPr/>
-                </a:tc>
-                <a:tc>
-                  <a:txBody>
-                    <a:bodyPr/>
-                    <a:lstStyle/>
-                    <a:p>
-                      <a:r>
-                        <a:rPr sz="1050">
-                          <a:solidFill>
-                            <a:srgbClr val="3D5466"/>
-                          </a:solidFill>
-                          <a:latin typeface="Arial"/>
-                        </a:rPr>
-                        <a:t>☐</a:t>
-                      </a:r>
-                    </a:p>
-                  </a:txBody>
-                  <a:tcPr/>
-                </a:tc>
-                <a:tc>
-                  <a:txBody>
-                    <a:bodyPr/>
-                    <a:lstStyle/>
-                    <a:p>
-                      <a:r>
-                        <a:rPr sz="1050">
-                          <a:solidFill>
-                            <a:srgbClr val="3D5466"/>
-                          </a:solidFill>
-                          <a:latin typeface="Arial"/>
-                        </a:rPr>
-                        <a:t>☐</a:t>
-                      </a:r>
-                    </a:p>
-                  </a:txBody>
-                  <a:tcPr/>
-                </a:tc>
-                <a:tc>
-                  <a:txBody>
-                    <a:bodyPr/>
-                    <a:lstStyle/>
-                    <a:p>
-                      <a:r>
-                        <a:rPr sz="1050">
-                          <a:solidFill>
-                            <a:srgbClr val="3D5466"/>
-                          </a:solidFill>
-                          <a:latin typeface="Arial"/>
-                        </a:rPr>
-                        <a:t>☐</a:t>
-                      </a:r>
-                    </a:p>
-                  </a:txBody>
-                  <a:tcPr/>
-                </a:tc>
-              </a:tr>
-            </a:tbl>
-          </a:graphicData>
-        </a:graphic>
-      </p:graphicFrame>
-      <p:sp>
-        <p:nvSpPr>
-          <p:cNvPr id="8" name="Rectangle 7"/>
-          <p:cNvSpPr/>
-          <p:nvPr/>
-        </p:nvSpPr>
-        <p:spPr>
-          <a:xfrm>
-            <a:off x="0" y="6510528"/>
-            <a:ext cx="12188952" cy="347472"/>
-          </a:xfrm>
-          <a:prstGeom prst="rect">
-            <a:avLst/>
-          </a:prstGeom>
-          <a:solidFill>
-            <a:srgbClr val="0A1937"/>
-          </a:solidFill>
-          <a:ln>
-            <a:noFill/>
-          </a:ln>
-        </p:spPr>
-        <p:style>
-          <a:lnRef idx="1">
-            <a:schemeClr val="accent1"/>
-          </a:lnRef>
-          <a:fillRef idx="3">
-            <a:schemeClr val="accent1"/>
-          </a:fillRef>
-          <a:effectRef idx="2">
-            <a:schemeClr val="accent1"/>
-          </a:effectRef>
-          <a:fontRef idx="minor">
-            <a:schemeClr val="lt1"/>
-          </a:fontRef>
-        </p:style>
-        <p:txBody>
-          <a:bodyPr rtlCol="0" anchor="ctr"/>
-          <a:lstStyle/>
-          <a:p>
-            <a:pPr algn="ctr"/>
-          </a:p>
-        </p:txBody>
-      </p:sp>
-      <p:sp>
-        <p:nvSpPr>
-          <p:cNvPr id="9" name="TextBox 8"/>
-          <p:cNvSpPr txBox="1"/>
-          <p:nvPr/>
-        </p:nvSpPr>
-        <p:spPr>
-          <a:xfrm>
-            <a:off x="685800" y="6583680"/>
-            <a:ext cx="6490411" cy="256032"/>
-          </a:xfrm>
-          <a:prstGeom prst="rect">
-            <a:avLst/>
-          </a:prstGeom>
-          <a:noFill/>
-        </p:spPr>
-        <p:txBody>
-          <a:bodyPr wrap="none">
-            <a:spAutoFit/>
-          </a:bodyPr>
-          <a:lstStyle/>
-          <a:p>
-            <a:pPr algn="l"/>
-            <a:r>
-              <a:rPr sz="700">
-                <a:solidFill>
-                  <a:srgbClr val="A0B4D2"/>
-                </a:solidFill>
-                <a:latin typeface="Consolas"/>
-              </a:rPr>
-              <a:t>FKB Campus  ·  M11</a:t>
-            </a:r>
-          </a:p>
-        </p:txBody>
-      </p:sp>
-      <p:sp>
-        <p:nvSpPr>
-          <p:cNvPr id="10" name="TextBox 9"/>
-          <p:cNvSpPr txBox="1"/>
-          <p:nvPr/>
-        </p:nvSpPr>
-        <p:spPr>
-          <a:xfrm>
-            <a:off x="7176211" y="6583680"/>
-            <a:ext cx="4326940" cy="256032"/>
-          </a:xfrm>
-          <a:prstGeom prst="rect">
-            <a:avLst/>
-          </a:prstGeom>
-          <a:noFill/>
-        </p:spPr>
-        <p:txBody>
-          <a:bodyPr wrap="none">
-            <a:spAutoFit/>
-          </a:bodyPr>
-          <a:lstStyle/>
-          <a:p>
-            <a:pPr algn="r"/>
-            <a:r>
-              <a:rPr sz="700">
-                <a:solidFill>
-                  <a:srgbClr val="A0B4D2"/>
-                </a:solidFill>
-                <a:latin typeface="Consolas"/>
-              </a:rPr>
-              <a:t>Übersicht</a:t>
             </a:r>
           </a:p>
         </p:txBody>
@@ -9274,7 +7420,7 @@
                 </a:solidFill>
                 <a:latin typeface="Arial"/>
               </a:rPr>
-              <a:t>Das Eisberg-Modell der Kundenbedürfnisse</a:t>
+              <a:t>Der wichtigste Bedarf ist der unausgesprochene</a:t>
             </a:r>
           </a:p>
         </p:txBody>
@@ -9300,6 +7446,25 @@
             <a:spAutoFit/>
           </a:bodyPr>
           <a:lstStyle/>
+          <a:p>
+            <a:pPr marL="177800" indent="-177800">
+              <a:spcBef>
+                <a:spcPts val="600"/>
+              </a:spcBef>
+              <a:spcAft>
+                <a:spcPts val="200"/>
+              </a:spcAft>
+            </a:pPr>
+            <a:r>
+              <a:rPr sz="1200" i="1">
+                <a:solidFill>
+                  <a:srgbClr val="3D5466"/>
+                </a:solidFill>
+                <a:latin typeface="Arial"/>
+              </a:rPr>
+              <a:t>→  Der wichtigste Bedarf ist der, den der Kunde noch nicht ausgesprochen hat.</a:t>
+            </a:r>
+          </a:p>
           <a:p>
             <a:pPr marL="190500" indent="-190500">
               <a:spcBef>
@@ -9316,7 +7481,7 @@
                 </a:solidFill>
                 <a:latin typeface="Arial"/>
               </a:rPr>
-              <a:t>▸  Explizite Bedarfe: Der Kunde benennt klar, was er will. „Ich brauche eine Anschlussfinanzierung für meine Maschine." Explizite Bedarfe entstehen, wenn der Kunde seine Situation analysiert und eine Lösung definiert hat.</a:t>
+              <a:t>▸  Explizite Wünsche bearbeitet jeder Sachbearbeiter.</a:t>
             </a:r>
           </a:p>
           <a:p>
@@ -9335,7 +7500,7 @@
                 </a:solidFill>
                 <a:latin typeface="Arial"/>
               </a:rPr>
-              <a:t>▸  Implizite (latente) Bedarfe: Der Kunde beschreibt ein Problem, einen Schmerz oder eine Unzufriedenheit, ohne eine Lösung zu benennen. „Unsere Abschreibungen sind dieses Jahr sehr hoch." Oder: „Ich mache mir Sorgen wegen der Nachfolge." Latente Bedarfe sind die Grundlage – und oft der eigentliche Grund für das Gespräch.</a:t>
+              <a:t>▸  Latente Bedarfe mit SPIN-Fragen zu heben, unterscheidet den Berater vom Abwickler.</a:t>
             </a:r>
           </a:p>
         </p:txBody>
@@ -9451,7 +7616,7 @@
             <a:avLst/>
           </a:prstGeom>
           <a:solidFill>
-            <a:srgbClr val="FFFFFF"/>
+            <a:srgbClr val="EDEDF3"/>
           </a:solidFill>
           <a:ln>
             <a:noFill/>
@@ -9552,43 +7717,51 @@
                 </a:solidFill>
                 <a:latin typeface="Consolas"/>
               </a:rPr>
-              <a:t>M11  ·  SCHAUBILD</a:t>
-            </a:r>
-          </a:p>
-        </p:txBody>
-      </p:sp>
-      <p:sp>
-        <p:nvSpPr>
-          <p:cNvPr id="5" name="TextBox 4"/>
-          <p:cNvSpPr txBox="1"/>
-          <p:nvPr/>
-        </p:nvSpPr>
-        <p:spPr>
-          <a:xfrm>
-            <a:off x="685800" y="502920"/>
-            <a:ext cx="10817352" cy="594360"/>
-          </a:xfrm>
-          <a:prstGeom prst="rect">
-            <a:avLst/>
-          </a:prstGeom>
-          <a:noFill/>
-        </p:spPr>
-        <p:txBody>
-          <a:bodyPr wrap="square">
-            <a:spAutoFit/>
-          </a:bodyPr>
-          <a:lstStyle/>
-          <a:p>
-            <a:pPr algn="l"/>
-            <a:r>
-              <a:rPr sz="2000" b="1" i="0">
-                <a:solidFill>
-                  <a:srgbClr val="1F2C56"/>
-                </a:solidFill>
-                <a:latin typeface="Arial"/>
-              </a:rPr>
-              <a:t>Eisberg-Modell latente Bedarfe</a:t>
-            </a:r>
+              <a:t>M11  ·  INHALT</a:t>
+            </a:r>
+          </a:p>
+        </p:txBody>
+      </p:sp>
+      <p:sp>
+        <p:nvSpPr>
+          <p:cNvPr id="5" name="Rectangle 4"/>
+          <p:cNvSpPr/>
+          <p:nvPr/>
+        </p:nvSpPr>
+        <p:spPr>
+          <a:xfrm>
+            <a:off x="0" y="1234440"/>
+            <a:ext cx="12188952" cy="12700"/>
+          </a:xfrm>
+          <a:prstGeom prst="rect">
+            <a:avLst/>
+          </a:prstGeom>
+          <a:solidFill>
+            <a:srgbClr val="D8DFE4"/>
+          </a:solidFill>
+          <a:ln>
+            <a:noFill/>
+          </a:ln>
+        </p:spPr>
+        <p:style>
+          <a:lnRef idx="1">
+            <a:schemeClr val="accent1"/>
+          </a:lnRef>
+          <a:fillRef idx="3">
+            <a:schemeClr val="accent1"/>
+          </a:fillRef>
+          <a:effectRef idx="2">
+            <a:schemeClr val="accent1"/>
+          </a:effectRef>
+          <a:fontRef idx="minor">
+            <a:schemeClr val="lt1"/>
+          </a:fontRef>
+        </p:style>
+        <p:txBody>
+          <a:bodyPr rtlCol="0" anchor="ctr"/>
+          <a:lstStyle/>
+          <a:p>
+            <a:pPr algn="ctr"/>
           </a:p>
         </p:txBody>
       </p:sp>
@@ -9600,8 +7773,8 @@
         </p:nvSpPr>
         <p:spPr>
           <a:xfrm>
-            <a:off x="685800" y="1143000"/>
-            <a:ext cx="10817352" cy="25400"/>
+            <a:off x="685800" y="502920"/>
+            <a:ext cx="36576" cy="658368"/>
           </a:xfrm>
           <a:prstGeom prst="rect">
             <a:avLst/>
@@ -9635,33 +7808,124 @@
           </a:p>
         </p:txBody>
       </p:sp>
-      <p:pic>
-        <p:nvPicPr>
-          <p:cNvPr id="7" name="Picture 6" descr="image.png"/>
-          <p:cNvPicPr>
-            <a:picLocks noChangeAspect="1"/>
-          </p:cNvPicPr>
-          <p:nvPr/>
-        </p:nvPicPr>
-        <p:blipFill>
-          <a:blip r:embed="rId2"/>
-          <a:stretch>
-            <a:fillRect/>
-          </a:stretch>
-        </p:blipFill>
-        <p:spPr>
-          <a:xfrm>
-            <a:off x="2554863" y="1325880"/>
-            <a:ext cx="7079225" cy="4937760"/>
-          </a:xfrm>
-          <a:prstGeom prst="rect">
-            <a:avLst/>
-          </a:prstGeom>
-        </p:spPr>
-      </p:pic>
-      <p:sp>
-        <p:nvSpPr>
-          <p:cNvPr id="8" name="Rectangle 7"/>
+      <p:sp>
+        <p:nvSpPr>
+          <p:cNvPr id="7" name="TextBox 6"/>
+          <p:cNvSpPr txBox="1"/>
+          <p:nvPr/>
+        </p:nvSpPr>
+        <p:spPr>
+          <a:xfrm>
+            <a:off x="813816" y="502920"/>
+            <a:ext cx="10634472" cy="685800"/>
+          </a:xfrm>
+          <a:prstGeom prst="rect">
+            <a:avLst/>
+          </a:prstGeom>
+          <a:noFill/>
+        </p:spPr>
+        <p:txBody>
+          <a:bodyPr wrap="square">
+            <a:spAutoFit/>
+          </a:bodyPr>
+          <a:lstStyle/>
+          <a:p>
+            <a:pPr algn="l"/>
+            <a:r>
+              <a:rPr sz="2400" b="1" i="0">
+                <a:solidFill>
+                  <a:srgbClr val="1F2C56"/>
+                </a:solidFill>
+                <a:latin typeface="Arial"/>
+              </a:rPr>
+              <a:t>Das Eisberg-Modell der Kundenbedürfnisse</a:t>
+            </a:r>
+          </a:p>
+        </p:txBody>
+      </p:sp>
+      <p:sp>
+        <p:nvSpPr>
+          <p:cNvPr id="8" name="TextBox 7"/>
+          <p:cNvSpPr txBox="1"/>
+          <p:nvPr/>
+        </p:nvSpPr>
+        <p:spPr>
+          <a:xfrm>
+            <a:off x="685800" y="1417320"/>
+            <a:ext cx="10817352" cy="4892040"/>
+          </a:xfrm>
+          <a:prstGeom prst="rect">
+            <a:avLst/>
+          </a:prstGeom>
+          <a:noFill/>
+        </p:spPr>
+        <p:txBody>
+          <a:bodyPr wrap="square" anchor="ctr">
+            <a:spAutoFit/>
+          </a:bodyPr>
+          <a:lstStyle/>
+          <a:p>
+            <a:pPr marL="177800" indent="-177800">
+              <a:spcBef>
+                <a:spcPts val="600"/>
+              </a:spcBef>
+              <a:spcAft>
+                <a:spcPts val="200"/>
+              </a:spcAft>
+            </a:pPr>
+            <a:r>
+              <a:rPr sz="1200" i="1">
+                <a:solidFill>
+                  <a:srgbClr val="3D5466"/>
+                </a:solidFill>
+                <a:latin typeface="Arial"/>
+              </a:rPr>
+              <a:t>→  Der explizite Wunsch ist die Spitze des Eisbergs – der eigentliche Bedarf liegt darunter.</a:t>
+            </a:r>
+          </a:p>
+          <a:p>
+            <a:pPr marL="190500" indent="-190500">
+              <a:spcBef>
+                <a:spcPts val="400"/>
+              </a:spcBef>
+              <a:spcAft>
+                <a:spcPts val="200"/>
+              </a:spcAft>
+            </a:pPr>
+            <a:r>
+              <a:rPr sz="1300">
+                <a:solidFill>
+                  <a:srgbClr val="3D5466"/>
+                </a:solidFill>
+                <a:latin typeface="Arial"/>
+              </a:rPr>
+              <a:t>▸  Über Wasser: der artikulierte Wunsch (z. B. „ein besserer Zins").</a:t>
+            </a:r>
+          </a:p>
+          <a:p>
+            <a:pPr marL="190500" indent="-190500">
+              <a:spcBef>
+                <a:spcPts val="400"/>
+              </a:spcBef>
+              <a:spcAft>
+                <a:spcPts val="200"/>
+              </a:spcAft>
+            </a:pPr>
+            <a:r>
+              <a:rPr sz="1300">
+                <a:solidFill>
+                  <a:srgbClr val="3D5466"/>
+                </a:solidFill>
+                <a:latin typeface="Arial"/>
+              </a:rPr>
+              <a:t>▸  Unter Wasser: Sorge um Liquidität, Wachstum, Sicherheit, Nachfolge.</a:t>
+            </a:r>
+          </a:p>
+        </p:txBody>
+      </p:sp>
+      <p:sp>
+        <p:nvSpPr>
+          <p:cNvPr id="9" name="Rectangle 8"/>
           <p:cNvSpPr/>
           <p:nvPr/>
         </p:nvSpPr>
@@ -9704,7 +7968,7 @@
       </p:sp>
       <p:sp>
         <p:nvSpPr>
-          <p:cNvPr id="9" name="TextBox 8"/>
+          <p:cNvPr id="10" name="TextBox 9"/>
           <p:cNvSpPr txBox="1"/>
           <p:nvPr/>
         </p:nvSpPr>
@@ -9733,41 +7997,6 @@
                 <a:latin typeface="Consolas"/>
               </a:rPr>
               <a:t>FKB Campus  ·  M11</a:t>
-            </a:r>
-          </a:p>
-        </p:txBody>
-      </p:sp>
-      <p:sp>
-        <p:nvSpPr>
-          <p:cNvPr id="10" name="TextBox 9"/>
-          <p:cNvSpPr txBox="1"/>
-          <p:nvPr/>
-        </p:nvSpPr>
-        <p:spPr>
-          <a:xfrm>
-            <a:off x="7176211" y="6583680"/>
-            <a:ext cx="4326940" cy="256032"/>
-          </a:xfrm>
-          <a:prstGeom prst="rect">
-            <a:avLst/>
-          </a:prstGeom>
-          <a:noFill/>
-        </p:spPr>
-        <p:txBody>
-          <a:bodyPr wrap="none">
-            <a:spAutoFit/>
-          </a:bodyPr>
-          <a:lstStyle/>
-          <a:p>
-            <a:pPr algn="r"/>
-            <a:r>
-              <a:rPr sz="700">
-                <a:solidFill>
-                  <a:srgbClr val="A0B4D2"/>
-                </a:solidFill>
-                <a:latin typeface="Consolas"/>
-              </a:rPr>
-              <a:t>Schaubild</a:t>
             </a:r>
           </a:p>
         </p:txBody>
@@ -9805,7 +8034,7 @@
             <a:avLst/>
           </a:prstGeom>
           <a:solidFill>
-            <a:srgbClr val="EDEDF3"/>
+            <a:srgbClr val="FFFFFF"/>
           </a:solidFill>
           <a:ln>
             <a:noFill/>
@@ -9906,51 +8135,43 @@
                 </a:solidFill>
                 <a:latin typeface="Consolas"/>
               </a:rPr>
-              <a:t>M11  ·  INHALT</a:t>
-            </a:r>
-          </a:p>
-        </p:txBody>
-      </p:sp>
-      <p:sp>
-        <p:nvSpPr>
-          <p:cNvPr id="5" name="Rectangle 4"/>
-          <p:cNvSpPr/>
-          <p:nvPr/>
-        </p:nvSpPr>
-        <p:spPr>
-          <a:xfrm>
-            <a:off x="0" y="1234440"/>
-            <a:ext cx="12188952" cy="12700"/>
-          </a:xfrm>
-          <a:prstGeom prst="rect">
-            <a:avLst/>
-          </a:prstGeom>
-          <a:solidFill>
-            <a:srgbClr val="D8DFE4"/>
-          </a:solidFill>
-          <a:ln>
-            <a:noFill/>
-          </a:ln>
-        </p:spPr>
-        <p:style>
-          <a:lnRef idx="1">
-            <a:schemeClr val="accent1"/>
-          </a:lnRef>
-          <a:fillRef idx="3">
-            <a:schemeClr val="accent1"/>
-          </a:fillRef>
-          <a:effectRef idx="2">
-            <a:schemeClr val="accent1"/>
-          </a:effectRef>
-          <a:fontRef idx="minor">
-            <a:schemeClr val="lt1"/>
-          </a:fontRef>
-        </p:style>
-        <p:txBody>
-          <a:bodyPr rtlCol="0" anchor="ctr"/>
-          <a:lstStyle/>
-          <a:p>
-            <a:pPr algn="ctr"/>
+              <a:t>M11  ·  SCHAUBILD</a:t>
+            </a:r>
+          </a:p>
+        </p:txBody>
+      </p:sp>
+      <p:sp>
+        <p:nvSpPr>
+          <p:cNvPr id="5" name="TextBox 4"/>
+          <p:cNvSpPr txBox="1"/>
+          <p:nvPr/>
+        </p:nvSpPr>
+        <p:spPr>
+          <a:xfrm>
+            <a:off x="685800" y="502920"/>
+            <a:ext cx="10817352" cy="594360"/>
+          </a:xfrm>
+          <a:prstGeom prst="rect">
+            <a:avLst/>
+          </a:prstGeom>
+          <a:noFill/>
+        </p:spPr>
+        <p:txBody>
+          <a:bodyPr wrap="square">
+            <a:spAutoFit/>
+          </a:bodyPr>
+          <a:lstStyle/>
+          <a:p>
+            <a:pPr algn="l"/>
+            <a:r>
+              <a:rPr sz="2000" b="1" i="0">
+                <a:solidFill>
+                  <a:srgbClr val="1F2C56"/>
+                </a:solidFill>
+                <a:latin typeface="Arial"/>
+              </a:rPr>
+              <a:t>Das Eisberg-Modell latenter Bedarfe</a:t>
+            </a:r>
           </a:p>
         </p:txBody>
       </p:sp>
@@ -9962,8 +8183,8 @@
         </p:nvSpPr>
         <p:spPr>
           <a:xfrm>
-            <a:off x="685800" y="502920"/>
-            <a:ext cx="36576" cy="658368"/>
+            <a:off x="685800" y="1143000"/>
+            <a:ext cx="10817352" cy="25400"/>
           </a:xfrm>
           <a:prstGeom prst="rect">
             <a:avLst/>
@@ -9997,181 +8218,33 @@
           </a:p>
         </p:txBody>
       </p:sp>
-      <p:sp>
-        <p:nvSpPr>
-          <p:cNvPr id="7" name="TextBox 6"/>
-          <p:cNvSpPr txBox="1"/>
-          <p:nvPr/>
-        </p:nvSpPr>
-        <p:spPr>
-          <a:xfrm>
-            <a:off x="813816" y="502920"/>
-            <a:ext cx="10634472" cy="685800"/>
-          </a:xfrm>
-          <a:prstGeom prst="rect">
-            <a:avLst/>
-          </a:prstGeom>
-          <a:noFill/>
-        </p:spPr>
-        <p:txBody>
-          <a:bodyPr wrap="square">
-            <a:spAutoFit/>
-          </a:bodyPr>
-          <a:lstStyle/>
-          <a:p>
-            <a:pPr algn="l"/>
-            <a:r>
-              <a:rPr sz="2400" b="1" i="0">
-                <a:solidFill>
-                  <a:srgbClr val="1F2C56"/>
-                </a:solidFill>
-                <a:latin typeface="Arial"/>
-              </a:rPr>
-              <a:t>Warum Kunden latente Bedarfe nicht artikulieren</a:t>
-            </a:r>
-          </a:p>
-        </p:txBody>
-      </p:sp>
-      <p:sp>
-        <p:nvSpPr>
-          <p:cNvPr id="8" name="TextBox 7"/>
-          <p:cNvSpPr txBox="1"/>
-          <p:nvPr/>
-        </p:nvSpPr>
-        <p:spPr>
-          <a:xfrm>
-            <a:off x="685800" y="1417320"/>
-            <a:ext cx="10817352" cy="4892040"/>
-          </a:xfrm>
-          <a:prstGeom prst="rect">
-            <a:avLst/>
-          </a:prstGeom>
-          <a:noFill/>
-        </p:spPr>
-        <p:txBody>
-          <a:bodyPr wrap="square">
-            <a:spAutoFit/>
-          </a:bodyPr>
-          <a:lstStyle/>
-          <a:p>
-            <a:pPr marL="190500" indent="-190500">
-              <a:spcBef>
-                <a:spcPts val="400"/>
-              </a:spcBef>
-              <a:spcAft>
-                <a:spcPts val="200"/>
-              </a:spcAft>
-            </a:pPr>
-            <a:r>
-              <a:rPr sz="1300">
-                <a:solidFill>
-                  <a:srgbClr val="3D5466"/>
-                </a:solidFill>
-                <a:latin typeface="Arial"/>
-              </a:rPr>
-              <a:t>▸  Es gibt vier Hauptgründe, warum Kunden ihre eigentlichen Bedarfe nicht spontan nennen (praxisbasiert; vgl. Rackham, 1988 , S. 57–62):</a:t>
-            </a:r>
-          </a:p>
-          <a:p>
-            <a:pPr marL="190500" indent="-190500">
-              <a:spcBef>
-                <a:spcPts val="400"/>
-              </a:spcBef>
-              <a:spcAft>
-                <a:spcPts val="200"/>
-              </a:spcAft>
-            </a:pPr>
-            <a:r>
-              <a:rPr sz="1300">
-                <a:solidFill>
-                  <a:srgbClr val="3D5466"/>
-                </a:solidFill>
-                <a:latin typeface="Arial"/>
-              </a:rPr>
-              <a:t>▸  Unbewusstheit: Der Bedarf ist noch nicht als solcher erkannt. Der Kunde spürt das Problem, hat es aber nicht als lösungswürdig eingeordnet.</a:t>
-            </a:r>
-          </a:p>
-          <a:p>
-            <a:pPr marL="190500" indent="-190500">
-              <a:spcBef>
-                <a:spcPts val="400"/>
-              </a:spcBef>
-              <a:spcAft>
-                <a:spcPts val="200"/>
-              </a:spcAft>
-            </a:pPr>
-            <a:r>
-              <a:rPr sz="1300">
-                <a:solidFill>
-                  <a:srgbClr val="3D5466"/>
-                </a:solidFill>
-                <a:latin typeface="Arial"/>
-              </a:rPr>
-              <a:t>▸  Schambarriere: Sensitive Themen wie Nachfolge, Unternehmenskrise oder Privatsphäre werden nicht freiwillig angesprochen.</a:t>
-            </a:r>
-          </a:p>
-          <a:p>
-            <a:pPr marL="190500" indent="-190500">
-              <a:spcBef>
-                <a:spcPts val="400"/>
-              </a:spcBef>
-              <a:spcAft>
-                <a:spcPts val="200"/>
-              </a:spcAft>
-            </a:pPr>
-            <a:r>
-              <a:rPr sz="1300">
-                <a:solidFill>
-                  <a:srgbClr val="3D5466"/>
-                </a:solidFill>
-                <a:latin typeface="Arial"/>
-              </a:rPr>
-              <a:t>▸  Fehlende Sicherheit: Der Kunde weiß nicht, ob der Berater kompetent genug ist für das eigentliche Thema. Im Volksbankenalltag kommt ein verstärkender Faktor hinzu: Häufige Beraterwechsel. Wer innerhalb von sechs Jahren den vierten Berater bekommt, hat gelernt, sensible Themen wie Nachfolge oder Unternehmenskrise nicht mehr anzusprechen – das Vertrauen für diese Ebene muss jedes Mal neu aufgebaut werden. Praxistipp: Eigene Erfahrungen kurz einbringen öffnet schneller als jede Frage – „Ich habe das bei einem anderen Kunden ähnlich erlebt, wie er das gelöst hat, war interessant…" signalisiert Kompetenz und schafft Vertrautheit.</a:t>
-            </a:r>
-          </a:p>
-          <a:p>
-            <a:pPr marL="190500" indent="-190500">
-              <a:spcBef>
-                <a:spcPts val="400"/>
-              </a:spcBef>
-              <a:spcAft>
-                <a:spcPts val="200"/>
-              </a:spcAft>
-            </a:pPr>
-            <a:r>
-              <a:rPr sz="1300">
-                <a:solidFill>
-                  <a:srgbClr val="3D5466"/>
-                </a:solidFill>
-                <a:latin typeface="Arial"/>
-              </a:rPr>
-              <a:t>▸  Gewohnheit: Der Kunde ist es gewohnt, dass Bankgespräche Produktgespräche sind – er stellt sich selbst anders ein.</a:t>
-            </a:r>
-          </a:p>
-          <a:p>
-            <a:pPr marL="190500" indent="-190500">
-              <a:spcBef>
-                <a:spcPts val="400"/>
-              </a:spcBef>
-              <a:spcAft>
-                <a:spcPts val="200"/>
-              </a:spcAft>
-            </a:pPr>
-            <a:r>
-              <a:rPr sz="1300">
-                <a:solidFill>
-                  <a:srgbClr val="3D5466"/>
-                </a:solidFill>
-                <a:latin typeface="Arial"/>
-              </a:rPr>
-              <a:t>▸  Der Berater, der latente Bedarfe erkennen will, muss aktiv dazu einladen: durch offene Haltung, gezielte Fragen und echtes Zuhören.</a:t>
-            </a:r>
-          </a:p>
-        </p:txBody>
-      </p:sp>
-      <p:sp>
-        <p:nvSpPr>
-          <p:cNvPr id="9" name="Rectangle 8"/>
+      <p:pic>
+        <p:nvPicPr>
+          <p:cNvPr id="7" name="Picture 6" descr="image.png"/>
+          <p:cNvPicPr>
+            <a:picLocks noChangeAspect="1"/>
+          </p:cNvPicPr>
+          <p:nvPr/>
+        </p:nvPicPr>
+        <p:blipFill>
+          <a:blip r:embed="rId2"/>
+          <a:stretch>
+            <a:fillRect/>
+          </a:stretch>
+        </p:blipFill>
+        <p:spPr>
+          <a:xfrm>
+            <a:off x="2554863" y="1325880"/>
+            <a:ext cx="7079225" cy="4937760"/>
+          </a:xfrm>
+          <a:prstGeom prst="rect">
+            <a:avLst/>
+          </a:prstGeom>
+        </p:spPr>
+      </p:pic>
+      <p:sp>
+        <p:nvSpPr>
+          <p:cNvPr id="8" name="Rectangle 7"/>
           <p:cNvSpPr/>
           <p:nvPr/>
         </p:nvSpPr>
@@ -10214,7 +8287,7 @@
       </p:sp>
       <p:sp>
         <p:nvSpPr>
-          <p:cNvPr id="10" name="TextBox 9"/>
+          <p:cNvPr id="9" name="TextBox 8"/>
           <p:cNvSpPr txBox="1"/>
           <p:nvPr/>
         </p:nvSpPr>
@@ -10243,6 +8316,41 @@
                 <a:latin typeface="Consolas"/>
               </a:rPr>
               <a:t>FKB Campus  ·  M11</a:t>
+            </a:r>
+          </a:p>
+        </p:txBody>
+      </p:sp>
+      <p:sp>
+        <p:nvSpPr>
+          <p:cNvPr id="10" name="TextBox 9"/>
+          <p:cNvSpPr txBox="1"/>
+          <p:nvPr/>
+        </p:nvSpPr>
+        <p:spPr>
+          <a:xfrm>
+            <a:off x="7176211" y="6583680"/>
+            <a:ext cx="4326940" cy="256032"/>
+          </a:xfrm>
+          <a:prstGeom prst="rect">
+            <a:avLst/>
+          </a:prstGeom>
+          <a:noFill/>
+        </p:spPr>
+        <p:txBody>
+          <a:bodyPr wrap="none">
+            <a:spAutoFit/>
+          </a:bodyPr>
+          <a:lstStyle/>
+          <a:p>
+            <a:pPr algn="r"/>
+            <a:r>
+              <a:rPr sz="700">
+                <a:solidFill>
+                  <a:srgbClr val="A0B4D2"/>
+                </a:solidFill>
+                <a:latin typeface="Consolas"/>
+              </a:rPr>
+              <a:t>Schaubild</a:t>
             </a:r>
           </a:p>
         </p:txBody>
@@ -10502,7 +8610,7 @@
                 </a:solidFill>
                 <a:latin typeface="Arial"/>
               </a:rPr>
-              <a:t>Typische latente Bedarfsfelder im Firmenkunden-Alltag</a:t>
+              <a:t>SPIN: mit Fragen in die Tiefe</a:t>
             </a:r>
           </a:p>
         </p:txBody>
@@ -10528,6 +8636,25 @@
             <a:spAutoFit/>
           </a:bodyPr>
           <a:lstStyle/>
+          <a:p>
+            <a:pPr marL="177800" indent="-177800">
+              <a:spcBef>
+                <a:spcPts val="600"/>
+              </a:spcBef>
+              <a:spcAft>
+                <a:spcPts val="200"/>
+              </a:spcAft>
+            </a:pPr>
+            <a:r>
+              <a:rPr sz="1200" i="1">
+                <a:solidFill>
+                  <a:srgbClr val="3D5466"/>
+                </a:solidFill>
+                <a:latin typeface="Arial"/>
+              </a:rPr>
+              <a:t>→  SPIN führt in drei Tiefen-Ebenen vom expliziten Wunsch zum latenten Bedarf.</a:t>
+            </a:r>
+          </a:p>
           <a:p>
             <a:pPr marL="190500" indent="-190500">
               <a:spcBef>
@@ -10544,7 +8671,7 @@
                 </a:solidFill>
                 <a:latin typeface="Arial"/>
               </a:rPr>
-              <a:t>▸  Ein Berater braucht ein inneres Radar: Worauf soll ich achten? Die folgende Übersicht zeigt die vier häufigsten Felder – mit typischen Kundensignalen und passendem Gesprächseinstieg:</a:t>
+              <a:t>▸  Situation und Problem klären, Implikation aufzeigen, Nutzen herausarbeiten.</a:t>
             </a:r>
           </a:p>
           <a:p>
@@ -10563,26 +8690,7 @@
                 </a:solidFill>
                 <a:latin typeface="Arial"/>
               </a:rPr>
-              <a:t>▸  ## 4.2 SPIN – Das Fragetechnik-System für tiefe Bedarfe</a:t>
-            </a:r>
-          </a:p>
-          <a:p>
-            <a:pPr marL="190500" indent="-190500">
-              <a:spcBef>
-                <a:spcPts val="400"/>
-              </a:spcBef>
-              <a:spcAft>
-                <a:spcPts val="200"/>
-              </a:spcAft>
-            </a:pPr>
-            <a:r>
-              <a:rPr sz="1300">
-                <a:solidFill>
-                  <a:srgbClr val="3D5466"/>
-                </a:solidFill>
-                <a:latin typeface="Arial"/>
-              </a:rPr>
-              <a:t>▸  Rackham (1988) entwickelte das SPIN-Modell auf Basis empirischer Gesprächsanalysen. Die vier Fragetypen führen den Kunden von der Oberfläche in die Tiefe:</a:t>
+              <a:t>▸  Die vier Signalkanäle (Wortwahl, Betonung, Körpersprache, Auslassung) lesen.</a:t>
             </a:r>
           </a:p>
         </p:txBody>
@@ -10698,7 +8806,7 @@
             <a:avLst/>
           </a:prstGeom>
           <a:solidFill>
-            <a:srgbClr val="EDEDF3"/>
+            <a:srgbClr val="1F2C56"/>
           </a:solidFill>
           <a:ln>
             <a:noFill/>
@@ -10728,57 +8836,14 @@
       </p:sp>
       <p:sp>
         <p:nvSpPr>
-          <p:cNvPr id="3" name="Rectangle 2"/>
-          <p:cNvSpPr/>
-          <p:nvPr/>
-        </p:nvSpPr>
-        <p:spPr>
-          <a:xfrm>
-            <a:off x="0" y="0"/>
-            <a:ext cx="12188952" cy="50292"/>
-          </a:xfrm>
-          <a:prstGeom prst="rect">
-            <a:avLst/>
-          </a:prstGeom>
-          <a:solidFill>
-            <a:srgbClr val="1F2C56"/>
-          </a:solidFill>
-          <a:ln>
-            <a:noFill/>
-          </a:ln>
-        </p:spPr>
-        <p:style>
-          <a:lnRef idx="1">
-            <a:schemeClr val="accent1"/>
-          </a:lnRef>
-          <a:fillRef idx="3">
-            <a:schemeClr val="accent1"/>
-          </a:fillRef>
-          <a:effectRef idx="2">
-            <a:schemeClr val="accent1"/>
-          </a:effectRef>
-          <a:fontRef idx="minor">
-            <a:schemeClr val="lt1"/>
-          </a:fontRef>
-        </p:style>
-        <p:txBody>
-          <a:bodyPr rtlCol="0" anchor="ctr"/>
-          <a:lstStyle/>
-          <a:p>
-            <a:pPr algn="ctr"/>
-          </a:p>
-        </p:txBody>
-      </p:sp>
-      <p:sp>
-        <p:nvSpPr>
-          <p:cNvPr id="4" name="TextBox 3"/>
+          <p:cNvPr id="3" name="TextBox 2"/>
           <p:cNvSpPr txBox="1"/>
           <p:nvPr/>
         </p:nvSpPr>
         <p:spPr>
           <a:xfrm>
-            <a:off x="685800" y="109728"/>
-            <a:ext cx="10817352" cy="228600"/>
+            <a:off x="685800" y="2377440"/>
+            <a:ext cx="10817352" cy="365760"/>
           </a:xfrm>
           <a:prstGeom prst="rect">
             <a:avLst/>
@@ -10793,70 +8858,27 @@
           <a:p>
             <a:pPr algn="l"/>
             <a:r>
-              <a:rPr sz="750">
-                <a:solidFill>
-                  <a:srgbClr val="78808C"/>
+              <a:rPr sz="1200">
+                <a:solidFill>
+                  <a:srgbClr val="D9C089"/>
                 </a:solidFill>
                 <a:latin typeface="Consolas"/>
               </a:rPr>
-              <a:t>M11  ·  INHALT</a:t>
-            </a:r>
-          </a:p>
-        </p:txBody>
-      </p:sp>
-      <p:sp>
-        <p:nvSpPr>
-          <p:cNvPr id="5" name="Rectangle 4"/>
+              <a:t>FALLARBEIT</a:t>
+            </a:r>
+          </a:p>
+        </p:txBody>
+      </p:sp>
+      <p:sp>
+        <p:nvSpPr>
+          <p:cNvPr id="4" name="Rectangle 3"/>
           <p:cNvSpPr/>
           <p:nvPr/>
         </p:nvSpPr>
         <p:spPr>
           <a:xfrm>
-            <a:off x="0" y="1234440"/>
-            <a:ext cx="12188952" cy="12700"/>
-          </a:xfrm>
-          <a:prstGeom prst="rect">
-            <a:avLst/>
-          </a:prstGeom>
-          <a:solidFill>
-            <a:srgbClr val="D8DFE4"/>
-          </a:solidFill>
-          <a:ln>
-            <a:noFill/>
-          </a:ln>
-        </p:spPr>
-        <p:style>
-          <a:lnRef idx="1">
-            <a:schemeClr val="accent1"/>
-          </a:lnRef>
-          <a:fillRef idx="3">
-            <a:schemeClr val="accent1"/>
-          </a:fillRef>
-          <a:effectRef idx="2">
-            <a:schemeClr val="accent1"/>
-          </a:effectRef>
-          <a:fontRef idx="minor">
-            <a:schemeClr val="lt1"/>
-          </a:fontRef>
-        </p:style>
-        <p:txBody>
-          <a:bodyPr rtlCol="0" anchor="ctr"/>
-          <a:lstStyle/>
-          <a:p>
-            <a:pPr algn="ctr"/>
-          </a:p>
-        </p:txBody>
-      </p:sp>
-      <p:sp>
-        <p:nvSpPr>
-          <p:cNvPr id="6" name="Rectangle 5"/>
-          <p:cNvSpPr/>
-          <p:nvPr/>
-        </p:nvSpPr>
-        <p:spPr>
-          <a:xfrm>
-            <a:off x="685800" y="502920"/>
-            <a:ext cx="36576" cy="658368"/>
+            <a:off x="685800" y="2788920"/>
+            <a:ext cx="548640" cy="38100"/>
           </a:xfrm>
           <a:prstGeom prst="rect">
             <a:avLst/>
@@ -10892,14 +8914,14 @@
       </p:sp>
       <p:sp>
         <p:nvSpPr>
-          <p:cNvPr id="7" name="TextBox 6"/>
+          <p:cNvPr id="5" name="TextBox 4"/>
           <p:cNvSpPr txBox="1"/>
           <p:nvPr/>
         </p:nvSpPr>
         <p:spPr>
           <a:xfrm>
-            <a:off x="813816" y="502920"/>
-            <a:ext cx="10634472" cy="685800"/>
+            <a:off x="685800" y="3017520"/>
+            <a:ext cx="10817352" cy="1463040"/>
           </a:xfrm>
           <a:prstGeom prst="rect">
             <a:avLst/>
@@ -10914,27 +8936,27 @@
           <a:p>
             <a:pPr algn="l"/>
             <a:r>
-              <a:rPr sz="2400" b="1" i="0">
-                <a:solidFill>
-                  <a:srgbClr val="1F2C56"/>
+              <a:rPr sz="4000" b="1" i="0">
+                <a:solidFill>
+                  <a:srgbClr val="FFFFFF"/>
                 </a:solidFill>
                 <a:latin typeface="Arial"/>
               </a:rPr>
-              <a:t>Fragetechnik in der Praxis: Drei Tiefen-Ebenen</a:t>
-            </a:r>
-          </a:p>
-        </p:txBody>
-      </p:sp>
-      <p:sp>
-        <p:nvSpPr>
-          <p:cNvPr id="8" name="TextBox 7"/>
+              <a:t>Praxiscase &amp; Rollenspiel</a:t>
+            </a:r>
+          </a:p>
+        </p:txBody>
+      </p:sp>
+      <p:sp>
+        <p:nvSpPr>
+          <p:cNvPr id="6" name="TextBox 5"/>
           <p:cNvSpPr txBox="1"/>
           <p:nvPr/>
         </p:nvSpPr>
         <p:spPr>
           <a:xfrm>
-            <a:off x="685800" y="1417320"/>
-            <a:ext cx="10817352" cy="4892040"/>
+            <a:off x="685800" y="4480560"/>
+            <a:ext cx="8653881" cy="1280160"/>
           </a:xfrm>
           <a:prstGeom prst="rect">
             <a:avLst/>
@@ -10947,288 +8969,29 @@
           </a:bodyPr>
           <a:lstStyle/>
           <a:p>
-            <a:pPr marL="190500" indent="-190500">
-              <a:spcBef>
-                <a:spcPts val="400"/>
-              </a:spcBef>
-              <a:spcAft>
-                <a:spcPts val="200"/>
-              </a:spcAft>
-            </a:pPr>
-            <a:r>
-              <a:rPr sz="1300">
-                <a:solidFill>
-                  <a:srgbClr val="3D5466"/>
+            <a:pPr algn="l"/>
+            <a:r>
+              <a:rPr sz="1600" b="0" i="0">
+                <a:solidFill>
+                  <a:srgbClr val="C8D2E6"/>
                 </a:solidFill>
                 <a:latin typeface="Arial"/>
               </a:rPr>
-              <a:t>▸  Latente Bedarfe liegen oft unter zwei oder drei Gesprächsschichten. Eine einfache Orientierung:</a:t>
-            </a:r>
-          </a:p>
-          <a:p>
-            <a:pPr marL="190500" indent="-190500">
-              <a:spcBef>
-                <a:spcPts val="400"/>
-              </a:spcBef>
-              <a:spcAft>
-                <a:spcPts val="200"/>
-              </a:spcAft>
-            </a:pPr>
-            <a:r>
-              <a:rPr sz="1300">
-                <a:solidFill>
-                  <a:srgbClr val="3D5466"/>
-                </a:solidFill>
-                <a:latin typeface="Arial"/>
-              </a:rPr>
-              <a:t>▸  Ebene 1 – Thema (Was ist das Gesprächsthema?)</a:t>
-            </a:r>
-          </a:p>
-          <a:p>
-            <a:pPr marL="177800" indent="-177800">
-              <a:spcBef>
-                <a:spcPts val="600"/>
-              </a:spcBef>
-              <a:spcAft>
-                <a:spcPts val="200"/>
-              </a:spcAft>
-            </a:pPr>
-            <a:r>
-              <a:rPr sz="1200" i="1">
-                <a:solidFill>
-                  <a:srgbClr val="3D5466"/>
-                </a:solidFill>
-                <a:latin typeface="Arial"/>
-              </a:rPr>
-              <a:t>→  „Wie läuft das Geschäft aktuell?"</a:t>
-            </a:r>
-          </a:p>
-          <a:p>
-            <a:pPr marL="190500" indent="-190500">
-              <a:spcBef>
-                <a:spcPts val="400"/>
-              </a:spcBef>
-              <a:spcAft>
-                <a:spcPts val="200"/>
-              </a:spcAft>
-            </a:pPr>
-            <a:r>
-              <a:rPr sz="1300">
-                <a:solidFill>
-                  <a:srgbClr val="3D5466"/>
-                </a:solidFill>
-                <a:latin typeface="Arial"/>
-              </a:rPr>
-              <a:t>▸  Ebene 2 – Problem (Wo drückt der Schuh?)</a:t>
-            </a:r>
-          </a:p>
-          <a:p>
-            <a:pPr marL="177800" indent="-177800">
-              <a:spcBef>
-                <a:spcPts val="600"/>
-              </a:spcBef>
-              <a:spcAft>
-                <a:spcPts val="200"/>
-              </a:spcAft>
-            </a:pPr>
-            <a:r>
-              <a:rPr sz="1200" i="1">
-                <a:solidFill>
-                  <a:srgbClr val="3D5466"/>
-                </a:solidFill>
-                <a:latin typeface="Arial"/>
-              </a:rPr>
-              <a:t>→  „Sie sagten, die Personalkosten steigen. Was steckt dahinter?"</a:t>
-            </a:r>
-          </a:p>
-          <a:p>
-            <a:pPr marL="190500" indent="-190500">
-              <a:spcBef>
-                <a:spcPts val="400"/>
-              </a:spcBef>
-              <a:spcAft>
-                <a:spcPts val="200"/>
-              </a:spcAft>
-            </a:pPr>
-            <a:r>
-              <a:rPr sz="1300">
-                <a:solidFill>
-                  <a:srgbClr val="3D5466"/>
-                </a:solidFill>
-                <a:latin typeface="Arial"/>
-              </a:rPr>
-              <a:t>▸  Ebene 3 – Bedeutung (Was steht auf dem Spiel?)</a:t>
-            </a:r>
-          </a:p>
-          <a:p>
-            <a:pPr marL="177800" indent="-177800">
-              <a:spcBef>
-                <a:spcPts val="600"/>
-              </a:spcBef>
-              <a:spcAft>
-                <a:spcPts val="200"/>
-              </a:spcAft>
-            </a:pPr>
-            <a:r>
-              <a:rPr sz="1200" i="1">
-                <a:solidFill>
-                  <a:srgbClr val="3D5466"/>
-                </a:solidFill>
-                <a:latin typeface="Arial"/>
-              </a:rPr>
-              <a:t>→  „Wenn sich das fortsetzt: Was bedeutet das für Ihre Pläne für die nächsten fünf Jahre?"</a:t>
-            </a:r>
-          </a:p>
-          <a:p>
-            <a:pPr marL="190500" indent="-190500">
-              <a:spcBef>
-                <a:spcPts val="400"/>
-              </a:spcBef>
-              <a:spcAft>
-                <a:spcPts val="200"/>
-              </a:spcAft>
-            </a:pPr>
-            <a:r>
-              <a:rPr sz="1300">
-                <a:solidFill>
-                  <a:srgbClr val="3D5466"/>
-                </a:solidFill>
-                <a:latin typeface="Arial"/>
-              </a:rPr>
-              <a:t>▸  Erst auf Ebene 3 wird der latente Bedarf sichtbar – und damit auch, welches Produkt oder welche Lösung wirklich passt.</a:t>
-            </a:r>
-          </a:p>
-          <a:p>
-            <a:pPr marL="190500" indent="-190500">
-              <a:spcBef>
-                <a:spcPts val="400"/>
-              </a:spcBef>
-              <a:spcAft>
-                <a:spcPts val="200"/>
-              </a:spcAft>
-            </a:pPr>
-            <a:r>
-              <a:rPr sz="1300">
-                <a:solidFill>
-                  <a:srgbClr val="3D5466"/>
-                </a:solidFill>
-                <a:latin typeface="Arial"/>
-              </a:rPr>
-              <a:t>▸  ## 4.3 Signale erkennen: Die vier Kanäle</a:t>
-            </a:r>
-          </a:p>
-          <a:p>
-            <a:pPr marL="190500" indent="-190500">
-              <a:spcBef>
-                <a:spcPts val="400"/>
-              </a:spcBef>
-              <a:spcAft>
-                <a:spcPts val="200"/>
-              </a:spcAft>
-            </a:pPr>
-            <a:r>
-              <a:rPr sz="1300">
-                <a:solidFill>
-                  <a:srgbClr val="3D5466"/>
-                </a:solidFill>
-                <a:latin typeface="Arial"/>
-              </a:rPr>
-              <a:t>▸  Kunden kommunizieren latente Bedarfe auf vier Kanälen gleichzeitig (Watzlawick et al., 1967; Schulz von Thun, 1981). Wer nur den Sachkanal hört, verpasst 75 % der Information.</a:t>
-            </a:r>
-          </a:p>
-          <a:p>
-            <a:pPr marL="190500" indent="-190500">
-              <a:spcBef>
-                <a:spcPts val="400"/>
-              </a:spcBef>
-              <a:spcAft>
-                <a:spcPts val="200"/>
-              </a:spcAft>
-            </a:pPr>
-            <a:r>
-              <a:rPr sz="1300">
-                <a:solidFill>
-                  <a:srgbClr val="3D5466"/>
-                </a:solidFill>
-                <a:latin typeface="Arial"/>
-              </a:rPr>
-              <a:t>▸  Paraverbale Signale: Pausen, Zögern, plötzlich leiser werden, Themenwechsel nach Nachfrage.</a:t>
-            </a:r>
-          </a:p>
-          <a:p>
-            <a:pPr marL="190500" indent="-190500">
-              <a:spcBef>
-                <a:spcPts val="400"/>
-              </a:spcBef>
-              <a:spcAft>
-                <a:spcPts val="200"/>
-              </a:spcAft>
-            </a:pPr>
-            <a:r>
-              <a:rPr sz="1300">
-                <a:solidFill>
-                  <a:srgbClr val="3D5466"/>
-                </a:solidFill>
-                <a:latin typeface="Arial"/>
-              </a:rPr>
-              <a:t>▸  Nonverbale Signale: Abwenden, kurzes Lächeln das nicht bis zu den Augen geht, angespannte Körperhaltung beim bestimmten Thema.</a:t>
-            </a:r>
-          </a:p>
-        </p:txBody>
-      </p:sp>
-      <p:sp>
-        <p:nvSpPr>
-          <p:cNvPr id="9" name="Rectangle 8"/>
-          <p:cNvSpPr/>
-          <p:nvPr/>
-        </p:nvSpPr>
-        <p:spPr>
-          <a:xfrm>
-            <a:off x="0" y="6510528"/>
-            <a:ext cx="12188952" cy="347472"/>
-          </a:xfrm>
-          <a:prstGeom prst="rect">
-            <a:avLst/>
-          </a:prstGeom>
-          <a:solidFill>
-            <a:srgbClr val="0A1937"/>
-          </a:solidFill>
-          <a:ln>
-            <a:noFill/>
-          </a:ln>
-        </p:spPr>
-        <p:style>
-          <a:lnRef idx="1">
-            <a:schemeClr val="accent1"/>
-          </a:lnRef>
-          <a:fillRef idx="3">
-            <a:schemeClr val="accent1"/>
-          </a:fillRef>
-          <a:effectRef idx="2">
-            <a:schemeClr val="accent1"/>
-          </a:effectRef>
-          <a:fontRef idx="minor">
-            <a:schemeClr val="lt1"/>
-          </a:fontRef>
-        </p:style>
-        <p:txBody>
-          <a:bodyPr rtlCol="0" anchor="ctr"/>
-          <a:lstStyle/>
-          <a:p>
-            <a:pPr algn="ctr"/>
-          </a:p>
-        </p:txBody>
-      </p:sp>
-      <p:sp>
-        <p:nvSpPr>
-          <p:cNvPr id="10" name="TextBox 9"/>
+              <a:t>Hinter dem Zinsgespräch den eigentlichen Bedarf finden.</a:t>
+            </a:r>
+          </a:p>
+        </p:txBody>
+      </p:sp>
+      <p:sp>
+        <p:nvSpPr>
+          <p:cNvPr id="7" name="TextBox 6"/>
           <p:cNvSpPr txBox="1"/>
           <p:nvPr/>
         </p:nvSpPr>
         <p:spPr>
           <a:xfrm>
-            <a:off x="685800" y="6583680"/>
-            <a:ext cx="6490411" cy="256032"/>
+            <a:off x="685800" y="6355080"/>
+            <a:ext cx="10817352" cy="274320"/>
           </a:xfrm>
           <a:prstGeom prst="rect">
             <a:avLst/>
@@ -11245,7 +9008,7 @@
             <a:r>
               <a:rPr sz="700">
                 <a:solidFill>
-                  <a:srgbClr val="A0B4D2"/>
+                  <a:srgbClr val="8CA0C3"/>
                 </a:solidFill>
                 <a:latin typeface="Consolas"/>
               </a:rPr>
